--- a/PrezentacjaAndrzejParuch.pptx
+++ b/PrezentacjaAndrzejParuch.pptx
@@ -7,6 +7,7 @@
   <p:sldIdLst>
     <p:sldId id="256" r:id="rId2"/>
     <p:sldId id="257" r:id="rId3"/>
+    <p:sldId id="258" r:id="rId4"/>
   </p:sldIdLst>
   <p:sldSz cx="12192000" cy="6858000"/>
   <p:notesSz cx="6858000" cy="9144000"/>
@@ -105,6 +106,11 @@
       </a:defRPr>
     </a:lvl9pPr>
   </p:defaultTextStyle>
+  <p:extLst>
+    <p:ext uri="{EFAFB233-063F-42B5-8137-9DF3F51BA10A}">
+      <p15:sldGuideLst xmlns:p15="http://schemas.microsoft.com/office/powerpoint/2012/main"/>
+    </p:ext>
+  </p:extLst>
 </p:presentation>
 </file>
 
@@ -5920,21 +5926,1167 @@
               <a:buNone/>
             </a:pPr>
             <a:r>
-              <a:rPr lang="pl-PL" dirty="0"/>
-              <a:t>Program do projektowania wnętrz to narzędzie do wizualizacji i aranżacji pomieszczeń w 3D i 2D. Za pomocą takich aplikacji można zaplanować układ pomieszczenia, mebli, </a:t>
-            </a:r>
-            <a:r>
-              <a:rPr lang="pl-PL"/>
-              <a:t>czy ścian.</a:t>
-            </a:r>
+              <a:rPr lang="pl-PL" sz="1400" dirty="0"/>
+              <a:t>Program do projektowania wnętrz to narzędzie do wizualizacji i aranżacji pomieszczeń w 3D i 2D. Za pomocą takich aplikacji można zaplanować układ pomieszczenia, mebli, czy ścian. Są bardzo pomocne przy planowaniu remontów, czy budowy domu. Ich wielką zaletą jest dokładność i precyzja wizualizacji, która pozwala na dokładne odwzorowanie rzeczywistości. Oferują dużą funkcjonalność i sporą bazę gotowych rozwiązań, aczkolwiek przez to ich obsługa jest skomplikowana i wymagająca wielogodzinnej nauki.</a:t>
+            </a:r>
+          </a:p>
+          <a:p>
+            <a:pPr marL="0" indent="0">
+              <a:buNone/>
+            </a:pPr>
+            <a:r>
+              <a:rPr lang="pl-PL" sz="1400" dirty="0"/>
+              <a:t>Porównania podobnych rozwiązań:</a:t>
+            </a:r>
+          </a:p>
+          <a:p>
+            <a:pPr marL="0" indent="0">
+              <a:buNone/>
+            </a:pPr>
             <a:endParaRPr lang="pl-PL" dirty="0"/>
           </a:p>
-        </p:txBody>
-      </p:sp>
+          <a:p>
+            <a:pPr marL="0" indent="0">
+              <a:buNone/>
+            </a:pPr>
+            <a:endParaRPr lang="pl-PL" dirty="0"/>
+          </a:p>
+          <a:p>
+            <a:pPr marL="0" indent="0">
+              <a:buNone/>
+            </a:pPr>
+            <a:endParaRPr lang="pl-PL" dirty="0"/>
+          </a:p>
+          <a:p>
+            <a:pPr marL="0" indent="0">
+              <a:buNone/>
+            </a:pPr>
+            <a:endParaRPr lang="pl-PL" dirty="0"/>
+          </a:p>
+          <a:p>
+            <a:pPr marL="0" indent="0">
+              <a:buNone/>
+            </a:pPr>
+            <a:endParaRPr lang="pl-PL" dirty="0"/>
+          </a:p>
+          <a:p>
+            <a:pPr marL="0" indent="0">
+              <a:buNone/>
+            </a:pPr>
+            <a:endParaRPr lang="pl-PL" dirty="0"/>
+          </a:p>
+          <a:p>
+            <a:pPr marL="0" indent="0">
+              <a:buNone/>
+            </a:pPr>
+            <a:endParaRPr lang="pl-PL" dirty="0"/>
+          </a:p>
+          <a:p>
+            <a:pPr marL="0" indent="0">
+              <a:buNone/>
+            </a:pPr>
+            <a:endParaRPr lang="pl-PL" dirty="0"/>
+          </a:p>
+          <a:p>
+            <a:pPr marL="0" indent="0">
+              <a:buNone/>
+            </a:pPr>
+            <a:endParaRPr lang="pl-PL" dirty="0"/>
+          </a:p>
+        </p:txBody>
+      </p:sp>
+      <p:graphicFrame>
+        <p:nvGraphicFramePr>
+          <p:cNvPr id="4" name="Tabela 3">
+            <a:extLst>
+              <a:ext uri="{FF2B5EF4-FFF2-40B4-BE49-F238E27FC236}">
+                <a16:creationId xmlns:a16="http://schemas.microsoft.com/office/drawing/2014/main" id="{95B1D090-ACAB-9825-85C3-B534E9DAFD9B}"/>
+              </a:ext>
+            </a:extLst>
+          </p:cNvPr>
+          <p:cNvGraphicFramePr>
+            <a:graphicFrameLocks noGrp="1"/>
+          </p:cNvGraphicFramePr>
+          <p:nvPr>
+            <p:extLst>
+              <p:ext uri="{D42A27DB-BD31-4B8C-83A1-F6EECF244321}">
+                <p14:modId xmlns:p14="http://schemas.microsoft.com/office/powerpoint/2010/main" val="2746157294"/>
+              </p:ext>
+            </p:extLst>
+          </p:nvPr>
+        </p:nvGraphicFramePr>
+        <p:xfrm>
+          <a:off x="251012" y="2680447"/>
+          <a:ext cx="11591362" cy="3999095"/>
+        </p:xfrm>
+        <a:graphic>
+          <a:graphicData uri="http://schemas.openxmlformats.org/drawingml/2006/table">
+            <a:tbl>
+              <a:tblPr firstRow="1" firstCol="1" bandRow="1">
+                <a:tableStyleId>{5C22544A-7EE6-4342-B048-85BDC9FD1C3A}</a:tableStyleId>
+              </a:tblPr>
+              <a:tblGrid>
+                <a:gridCol w="2317238">
+                  <a:extLst>
+                    <a:ext uri="{9D8B030D-6E8A-4147-A177-3AD203B41FA5}">
+                      <a16:colId xmlns:a16="http://schemas.microsoft.com/office/drawing/2014/main" val="121564756"/>
+                    </a:ext>
+                  </a:extLst>
+                </a:gridCol>
+                <a:gridCol w="2318531">
+                  <a:extLst>
+                    <a:ext uri="{9D8B030D-6E8A-4147-A177-3AD203B41FA5}">
+                      <a16:colId xmlns:a16="http://schemas.microsoft.com/office/drawing/2014/main" val="1898770979"/>
+                    </a:ext>
+                  </a:extLst>
+                </a:gridCol>
+                <a:gridCol w="2318531">
+                  <a:extLst>
+                    <a:ext uri="{9D8B030D-6E8A-4147-A177-3AD203B41FA5}">
+                      <a16:colId xmlns:a16="http://schemas.microsoft.com/office/drawing/2014/main" val="467455197"/>
+                    </a:ext>
+                  </a:extLst>
+                </a:gridCol>
+                <a:gridCol w="2318531">
+                  <a:extLst>
+                    <a:ext uri="{9D8B030D-6E8A-4147-A177-3AD203B41FA5}">
+                      <a16:colId xmlns:a16="http://schemas.microsoft.com/office/drawing/2014/main" val="2165750682"/>
+                    </a:ext>
+                  </a:extLst>
+                </a:gridCol>
+                <a:gridCol w="2318531">
+                  <a:extLst>
+                    <a:ext uri="{9D8B030D-6E8A-4147-A177-3AD203B41FA5}">
+                      <a16:colId xmlns:a16="http://schemas.microsoft.com/office/drawing/2014/main" val="4036706159"/>
+                    </a:ext>
+                  </a:extLst>
+                </a:gridCol>
+              </a:tblGrid>
+              <a:tr h="229505">
+                <a:tc>
+                  <a:txBody>
+                    <a:bodyPr/>
+                    <a:lstStyle/>
+                    <a:p>
+                      <a:pPr algn="l">
+                        <a:lnSpc>
+                          <a:spcPct val="150000"/>
+                        </a:lnSpc>
+                        <a:buNone/>
+                      </a:pPr>
+                      <a:r>
+                        <a:rPr lang="pl-PL" sz="1100">
+                          <a:effectLst/>
+                        </a:rPr>
+                        <a:t>Nazwa</a:t>
+                      </a:r>
+                      <a:endParaRPr lang="pl-PL" sz="1100">
+                        <a:effectLst/>
+                        <a:latin typeface="Arial" panose="020B0604020202020204" pitchFamily="34" charset="0"/>
+                        <a:ea typeface="Calibri" panose="020F0502020204030204" pitchFamily="34" charset="0"/>
+                        <a:cs typeface="Times New Roman" panose="02020603050405020304" pitchFamily="18" charset="0"/>
+                      </a:endParaRPr>
+                    </a:p>
+                  </a:txBody>
+                  <a:tcPr marL="25291" marR="25291" marT="0" marB="0"/>
+                </a:tc>
+                <a:tc>
+                  <a:txBody>
+                    <a:bodyPr/>
+                    <a:lstStyle/>
+                    <a:p>
+                      <a:pPr algn="l">
+                        <a:lnSpc>
+                          <a:spcPct val="150000"/>
+                        </a:lnSpc>
+                        <a:buNone/>
+                      </a:pPr>
+                      <a:r>
+                        <a:rPr lang="pl-PL" sz="1100">
+                          <a:effectLst/>
+                        </a:rPr>
+                        <a:t>Forma płatności</a:t>
+                      </a:r>
+                      <a:endParaRPr lang="pl-PL" sz="1100">
+                        <a:effectLst/>
+                        <a:latin typeface="Arial" panose="020B0604020202020204" pitchFamily="34" charset="0"/>
+                        <a:ea typeface="Calibri" panose="020F0502020204030204" pitchFamily="34" charset="0"/>
+                        <a:cs typeface="Times New Roman" panose="02020603050405020304" pitchFamily="18" charset="0"/>
+                      </a:endParaRPr>
+                    </a:p>
+                  </a:txBody>
+                  <a:tcPr marL="25291" marR="25291" marT="0" marB="0"/>
+                </a:tc>
+                <a:tc>
+                  <a:txBody>
+                    <a:bodyPr/>
+                    <a:lstStyle/>
+                    <a:p>
+                      <a:pPr algn="l">
+                        <a:lnSpc>
+                          <a:spcPct val="150000"/>
+                        </a:lnSpc>
+                        <a:buNone/>
+                      </a:pPr>
+                      <a:r>
+                        <a:rPr lang="pl-PL" sz="1100" dirty="0">
+                          <a:effectLst/>
+                        </a:rPr>
+                        <a:t>Cena</a:t>
+                      </a:r>
+                      <a:endParaRPr lang="pl-PL" sz="1100" dirty="0">
+                        <a:effectLst/>
+                        <a:latin typeface="Arial" panose="020B0604020202020204" pitchFamily="34" charset="0"/>
+                        <a:ea typeface="Calibri" panose="020F0502020204030204" pitchFamily="34" charset="0"/>
+                        <a:cs typeface="Times New Roman" panose="02020603050405020304" pitchFamily="18" charset="0"/>
+                      </a:endParaRPr>
+                    </a:p>
+                  </a:txBody>
+                  <a:tcPr marL="25291" marR="25291" marT="0" marB="0"/>
+                </a:tc>
+                <a:tc>
+                  <a:txBody>
+                    <a:bodyPr/>
+                    <a:lstStyle/>
+                    <a:p>
+                      <a:pPr algn="l">
+                        <a:lnSpc>
+                          <a:spcPct val="150000"/>
+                        </a:lnSpc>
+                        <a:buNone/>
+                      </a:pPr>
+                      <a:r>
+                        <a:rPr lang="pl-PL" sz="1100">
+                          <a:effectLst/>
+                        </a:rPr>
+                        <a:t>Forma Wizualizacji</a:t>
+                      </a:r>
+                      <a:endParaRPr lang="pl-PL" sz="1100">
+                        <a:effectLst/>
+                        <a:latin typeface="Arial" panose="020B0604020202020204" pitchFamily="34" charset="0"/>
+                        <a:ea typeface="Calibri" panose="020F0502020204030204" pitchFamily="34" charset="0"/>
+                        <a:cs typeface="Times New Roman" panose="02020603050405020304" pitchFamily="18" charset="0"/>
+                      </a:endParaRPr>
+                    </a:p>
+                  </a:txBody>
+                  <a:tcPr marL="25291" marR="25291" marT="0" marB="0"/>
+                </a:tc>
+                <a:tc>
+                  <a:txBody>
+                    <a:bodyPr/>
+                    <a:lstStyle/>
+                    <a:p>
+                      <a:pPr algn="l">
+                        <a:lnSpc>
+                          <a:spcPct val="150000"/>
+                        </a:lnSpc>
+                        <a:buNone/>
+                      </a:pPr>
+                      <a:r>
+                        <a:rPr lang="pl-PL" sz="1100">
+                          <a:effectLst/>
+                        </a:rPr>
+                        <a:t>Oferowane Usługi</a:t>
+                      </a:r>
+                      <a:endParaRPr lang="pl-PL" sz="1100">
+                        <a:effectLst/>
+                        <a:latin typeface="Arial" panose="020B0604020202020204" pitchFamily="34" charset="0"/>
+                        <a:ea typeface="Calibri" panose="020F0502020204030204" pitchFamily="34" charset="0"/>
+                        <a:cs typeface="Times New Roman" panose="02020603050405020304" pitchFamily="18" charset="0"/>
+                      </a:endParaRPr>
+                    </a:p>
+                  </a:txBody>
+                  <a:tcPr marL="25291" marR="25291" marT="0" marB="0"/>
+                </a:tc>
+                <a:extLst>
+                  <a:ext uri="{0D108BD9-81ED-4DB2-BD59-A6C34878D82A}">
+                    <a16:rowId xmlns:a16="http://schemas.microsoft.com/office/drawing/2014/main" val="3723430035"/>
+                  </a:ext>
+                </a:extLst>
+              </a:tr>
+              <a:tr h="753918">
+                <a:tc>
+                  <a:txBody>
+                    <a:bodyPr/>
+                    <a:lstStyle/>
+                    <a:p>
+                      <a:pPr algn="l">
+                        <a:lnSpc>
+                          <a:spcPct val="150000"/>
+                        </a:lnSpc>
+                        <a:buNone/>
+                      </a:pPr>
+                      <a:r>
+                        <a:rPr lang="pl-PL" sz="1100">
+                          <a:effectLst/>
+                        </a:rPr>
+                        <a:t>Homestyler</a:t>
+                      </a:r>
+                      <a:endParaRPr lang="pl-PL" sz="1100">
+                        <a:effectLst/>
+                        <a:latin typeface="Arial" panose="020B0604020202020204" pitchFamily="34" charset="0"/>
+                        <a:ea typeface="Calibri" panose="020F0502020204030204" pitchFamily="34" charset="0"/>
+                        <a:cs typeface="Times New Roman" panose="02020603050405020304" pitchFamily="18" charset="0"/>
+                      </a:endParaRPr>
+                    </a:p>
+                  </a:txBody>
+                  <a:tcPr marL="25291" marR="25291" marT="0" marB="0"/>
+                </a:tc>
+                <a:tc>
+                  <a:txBody>
+                    <a:bodyPr/>
+                    <a:lstStyle/>
+                    <a:p>
+                      <a:pPr algn="l">
+                        <a:lnSpc>
+                          <a:spcPct val="150000"/>
+                        </a:lnSpc>
+                        <a:buNone/>
+                      </a:pPr>
+                      <a:r>
+                        <a:rPr lang="pl-PL" sz="1100">
+                          <a:effectLst/>
+                        </a:rPr>
+                        <a:t>Abonament</a:t>
+                      </a:r>
+                      <a:endParaRPr lang="pl-PL" sz="1100">
+                        <a:effectLst/>
+                        <a:latin typeface="Arial" panose="020B0604020202020204" pitchFamily="34" charset="0"/>
+                        <a:ea typeface="Calibri" panose="020F0502020204030204" pitchFamily="34" charset="0"/>
+                        <a:cs typeface="Times New Roman" panose="02020603050405020304" pitchFamily="18" charset="0"/>
+                      </a:endParaRPr>
+                    </a:p>
+                  </a:txBody>
+                  <a:tcPr marL="25291" marR="25291" marT="0" marB="0"/>
+                </a:tc>
+                <a:tc>
+                  <a:txBody>
+                    <a:bodyPr/>
+                    <a:lstStyle/>
+                    <a:p>
+                      <a:pPr algn="l">
+                        <a:lnSpc>
+                          <a:spcPct val="150000"/>
+                        </a:lnSpc>
+                        <a:buNone/>
+                      </a:pPr>
+                      <a:r>
+                        <a:rPr lang="pl-PL" sz="1100">
+                          <a:effectLst/>
+                        </a:rPr>
+                        <a:t>Darmowy/$19.6</a:t>
+                      </a:r>
+                      <a:endParaRPr lang="pl-PL" sz="1100">
+                        <a:effectLst/>
+                        <a:latin typeface="Arial" panose="020B0604020202020204" pitchFamily="34" charset="0"/>
+                        <a:ea typeface="Calibri" panose="020F0502020204030204" pitchFamily="34" charset="0"/>
+                        <a:cs typeface="Times New Roman" panose="02020603050405020304" pitchFamily="18" charset="0"/>
+                      </a:endParaRPr>
+                    </a:p>
+                  </a:txBody>
+                  <a:tcPr marL="25291" marR="25291" marT="0" marB="0"/>
+                </a:tc>
+                <a:tc>
+                  <a:txBody>
+                    <a:bodyPr/>
+                    <a:lstStyle/>
+                    <a:p>
+                      <a:pPr algn="l">
+                        <a:lnSpc>
+                          <a:spcPct val="150000"/>
+                        </a:lnSpc>
+                        <a:buNone/>
+                      </a:pPr>
+                      <a:r>
+                        <a:rPr lang="pl-PL" sz="1100" dirty="0">
+                          <a:effectLst/>
+                        </a:rPr>
+                        <a:t>2D/3D/VR</a:t>
+                      </a:r>
+                      <a:endParaRPr lang="pl-PL" sz="1100" dirty="0">
+                        <a:effectLst/>
+                        <a:latin typeface="Arial" panose="020B0604020202020204" pitchFamily="34" charset="0"/>
+                        <a:ea typeface="Calibri" panose="020F0502020204030204" pitchFamily="34" charset="0"/>
+                        <a:cs typeface="Times New Roman" panose="02020603050405020304" pitchFamily="18" charset="0"/>
+                      </a:endParaRPr>
+                    </a:p>
+                  </a:txBody>
+                  <a:tcPr marL="25291" marR="25291" marT="0" marB="0"/>
+                </a:tc>
+                <a:tc>
+                  <a:txBody>
+                    <a:bodyPr/>
+                    <a:lstStyle/>
+                    <a:p>
+                      <a:pPr algn="l">
+                        <a:lnSpc>
+                          <a:spcPct val="150000"/>
+                        </a:lnSpc>
+                        <a:buNone/>
+                      </a:pPr>
+                      <a:r>
+                        <a:rPr lang="pl-PL" sz="1100">
+                          <a:effectLst/>
+                        </a:rPr>
+                        <a:t>Duża baza mebli, Konwertowanie planow 2D na 3D, Prezentacja VR, Moduł AI</a:t>
+                      </a:r>
+                      <a:endParaRPr lang="pl-PL" sz="1100">
+                        <a:effectLst/>
+                        <a:latin typeface="Arial" panose="020B0604020202020204" pitchFamily="34" charset="0"/>
+                        <a:ea typeface="Calibri" panose="020F0502020204030204" pitchFamily="34" charset="0"/>
+                        <a:cs typeface="Times New Roman" panose="02020603050405020304" pitchFamily="18" charset="0"/>
+                      </a:endParaRPr>
+                    </a:p>
+                  </a:txBody>
+                  <a:tcPr marL="25291" marR="25291" marT="0" marB="0"/>
+                </a:tc>
+                <a:extLst>
+                  <a:ext uri="{0D108BD9-81ED-4DB2-BD59-A6C34878D82A}">
+                    <a16:rowId xmlns:a16="http://schemas.microsoft.com/office/drawing/2014/main" val="2098198958"/>
+                  </a:ext>
+                </a:extLst>
+              </a:tr>
+              <a:tr h="753918">
+                <a:tc>
+                  <a:txBody>
+                    <a:bodyPr/>
+                    <a:lstStyle/>
+                    <a:p>
+                      <a:pPr algn="l">
+                        <a:lnSpc>
+                          <a:spcPct val="150000"/>
+                        </a:lnSpc>
+                        <a:buNone/>
+                      </a:pPr>
+                      <a:r>
+                        <a:rPr lang="pl-PL" sz="1100">
+                          <a:effectLst/>
+                        </a:rPr>
+                        <a:t>Sweet Home 3D</a:t>
+                      </a:r>
+                      <a:endParaRPr lang="pl-PL" sz="1100">
+                        <a:effectLst/>
+                        <a:latin typeface="Arial" panose="020B0604020202020204" pitchFamily="34" charset="0"/>
+                        <a:ea typeface="Calibri" panose="020F0502020204030204" pitchFamily="34" charset="0"/>
+                        <a:cs typeface="Times New Roman" panose="02020603050405020304" pitchFamily="18" charset="0"/>
+                      </a:endParaRPr>
+                    </a:p>
+                  </a:txBody>
+                  <a:tcPr marL="25291" marR="25291" marT="0" marB="0"/>
+                </a:tc>
+                <a:tc>
+                  <a:txBody>
+                    <a:bodyPr/>
+                    <a:lstStyle/>
+                    <a:p>
+                      <a:pPr algn="l">
+                        <a:lnSpc>
+                          <a:spcPct val="150000"/>
+                        </a:lnSpc>
+                        <a:buNone/>
+                      </a:pPr>
+                      <a:r>
+                        <a:rPr lang="pl-PL" sz="1100" dirty="0">
+                          <a:effectLst/>
+                        </a:rPr>
+                        <a:t>-</a:t>
+                      </a:r>
+                      <a:endParaRPr lang="pl-PL" sz="1100" dirty="0">
+                        <a:effectLst/>
+                        <a:latin typeface="Arial" panose="020B0604020202020204" pitchFamily="34" charset="0"/>
+                        <a:ea typeface="Calibri" panose="020F0502020204030204" pitchFamily="34" charset="0"/>
+                        <a:cs typeface="Times New Roman" panose="02020603050405020304" pitchFamily="18" charset="0"/>
+                      </a:endParaRPr>
+                    </a:p>
+                  </a:txBody>
+                  <a:tcPr marL="25291" marR="25291" marT="0" marB="0"/>
+                </a:tc>
+                <a:tc>
+                  <a:txBody>
+                    <a:bodyPr/>
+                    <a:lstStyle/>
+                    <a:p>
+                      <a:pPr algn="l">
+                        <a:lnSpc>
+                          <a:spcPct val="150000"/>
+                        </a:lnSpc>
+                        <a:buNone/>
+                      </a:pPr>
+                      <a:r>
+                        <a:rPr lang="pl-PL" sz="1100" dirty="0">
+                          <a:effectLst/>
+                        </a:rPr>
+                        <a:t>Darmowy</a:t>
+                      </a:r>
+                      <a:endParaRPr lang="pl-PL" sz="1100" dirty="0">
+                        <a:effectLst/>
+                        <a:latin typeface="Arial" panose="020B0604020202020204" pitchFamily="34" charset="0"/>
+                        <a:ea typeface="Calibri" panose="020F0502020204030204" pitchFamily="34" charset="0"/>
+                        <a:cs typeface="Times New Roman" panose="02020603050405020304" pitchFamily="18" charset="0"/>
+                      </a:endParaRPr>
+                    </a:p>
+                  </a:txBody>
+                  <a:tcPr marL="25291" marR="25291" marT="0" marB="0"/>
+                </a:tc>
+                <a:tc>
+                  <a:txBody>
+                    <a:bodyPr/>
+                    <a:lstStyle/>
+                    <a:p>
+                      <a:pPr algn="l">
+                        <a:lnSpc>
+                          <a:spcPct val="150000"/>
+                        </a:lnSpc>
+                        <a:buNone/>
+                      </a:pPr>
+                      <a:r>
+                        <a:rPr lang="pl-PL" sz="1100" dirty="0">
+                          <a:effectLst/>
+                        </a:rPr>
+                        <a:t>2D/3D</a:t>
+                      </a:r>
+                      <a:endParaRPr lang="pl-PL" sz="1100" dirty="0">
+                        <a:effectLst/>
+                        <a:latin typeface="Arial" panose="020B0604020202020204" pitchFamily="34" charset="0"/>
+                        <a:ea typeface="Calibri" panose="020F0502020204030204" pitchFamily="34" charset="0"/>
+                        <a:cs typeface="Times New Roman" panose="02020603050405020304" pitchFamily="18" charset="0"/>
+                      </a:endParaRPr>
+                    </a:p>
+                  </a:txBody>
+                  <a:tcPr marL="25291" marR="25291" marT="0" marB="0"/>
+                </a:tc>
+                <a:tc>
+                  <a:txBody>
+                    <a:bodyPr/>
+                    <a:lstStyle/>
+                    <a:p>
+                      <a:pPr algn="l">
+                        <a:lnSpc>
+                          <a:spcPct val="150000"/>
+                        </a:lnSpc>
+                        <a:buNone/>
+                      </a:pPr>
+                      <a:r>
+                        <a:rPr lang="pl-PL" sz="1100">
+                          <a:effectLst/>
+                        </a:rPr>
+                        <a:t>Spora biblioteka mebli, możliwość tworzenia własnych wtyczek</a:t>
+                      </a:r>
+                      <a:endParaRPr lang="pl-PL" sz="1100">
+                        <a:effectLst/>
+                        <a:latin typeface="Arial" panose="020B0604020202020204" pitchFamily="34" charset="0"/>
+                        <a:ea typeface="Calibri" panose="020F0502020204030204" pitchFamily="34" charset="0"/>
+                        <a:cs typeface="Times New Roman" panose="02020603050405020304" pitchFamily="18" charset="0"/>
+                      </a:endParaRPr>
+                    </a:p>
+                  </a:txBody>
+                  <a:tcPr marL="25291" marR="25291" marT="0" marB="0"/>
+                </a:tc>
+                <a:extLst>
+                  <a:ext uri="{0D108BD9-81ED-4DB2-BD59-A6C34878D82A}">
+                    <a16:rowId xmlns:a16="http://schemas.microsoft.com/office/drawing/2014/main" val="1369130517"/>
+                  </a:ext>
+                </a:extLst>
+              </a:tr>
+              <a:tr h="1016058">
+                <a:tc>
+                  <a:txBody>
+                    <a:bodyPr/>
+                    <a:lstStyle/>
+                    <a:p>
+                      <a:pPr algn="l">
+                        <a:lnSpc>
+                          <a:spcPct val="150000"/>
+                        </a:lnSpc>
+                        <a:buNone/>
+                      </a:pPr>
+                      <a:r>
+                        <a:rPr lang="pl-PL" sz="1100">
+                          <a:effectLst/>
+                        </a:rPr>
+                        <a:t>Sketch Up</a:t>
+                      </a:r>
+                      <a:endParaRPr lang="pl-PL" sz="1100">
+                        <a:effectLst/>
+                        <a:latin typeface="Arial" panose="020B0604020202020204" pitchFamily="34" charset="0"/>
+                        <a:ea typeface="Calibri" panose="020F0502020204030204" pitchFamily="34" charset="0"/>
+                        <a:cs typeface="Times New Roman" panose="02020603050405020304" pitchFamily="18" charset="0"/>
+                      </a:endParaRPr>
+                    </a:p>
+                  </a:txBody>
+                  <a:tcPr marL="25291" marR="25291" marT="0" marB="0"/>
+                </a:tc>
+                <a:tc>
+                  <a:txBody>
+                    <a:bodyPr/>
+                    <a:lstStyle/>
+                    <a:p>
+                      <a:pPr algn="l">
+                        <a:lnSpc>
+                          <a:spcPct val="150000"/>
+                        </a:lnSpc>
+                        <a:buNone/>
+                      </a:pPr>
+                      <a:r>
+                        <a:rPr lang="pl-PL" sz="1100" dirty="0">
+                          <a:effectLst/>
+                        </a:rPr>
+                        <a:t>Zakup licencji na rok</a:t>
+                      </a:r>
+                      <a:endParaRPr lang="pl-PL" sz="1100" dirty="0">
+                        <a:effectLst/>
+                        <a:latin typeface="Arial" panose="020B0604020202020204" pitchFamily="34" charset="0"/>
+                        <a:ea typeface="Calibri" panose="020F0502020204030204" pitchFamily="34" charset="0"/>
+                        <a:cs typeface="Times New Roman" panose="02020603050405020304" pitchFamily="18" charset="0"/>
+                      </a:endParaRPr>
+                    </a:p>
+                  </a:txBody>
+                  <a:tcPr marL="25291" marR="25291" marT="0" marB="0"/>
+                </a:tc>
+                <a:tc>
+                  <a:txBody>
+                    <a:bodyPr/>
+                    <a:lstStyle/>
+                    <a:p>
+                      <a:pPr algn="l">
+                        <a:lnSpc>
+                          <a:spcPct val="150000"/>
+                        </a:lnSpc>
+                        <a:buNone/>
+                      </a:pPr>
+                      <a:r>
+                        <a:rPr lang="pl-PL" sz="1100" dirty="0">
+                          <a:effectLst/>
+                        </a:rPr>
+                        <a:t>1 786,73 zł-5 136 zł</a:t>
+                      </a:r>
+                      <a:endParaRPr lang="pl-PL" sz="1100" dirty="0">
+                        <a:effectLst/>
+                        <a:latin typeface="Arial" panose="020B0604020202020204" pitchFamily="34" charset="0"/>
+                        <a:ea typeface="Calibri" panose="020F0502020204030204" pitchFamily="34" charset="0"/>
+                        <a:cs typeface="Times New Roman" panose="02020603050405020304" pitchFamily="18" charset="0"/>
+                      </a:endParaRPr>
+                    </a:p>
+                  </a:txBody>
+                  <a:tcPr marL="25291" marR="25291" marT="0" marB="0"/>
+                </a:tc>
+                <a:tc>
+                  <a:txBody>
+                    <a:bodyPr/>
+                    <a:lstStyle/>
+                    <a:p>
+                      <a:pPr algn="l">
+                        <a:lnSpc>
+                          <a:spcPct val="150000"/>
+                        </a:lnSpc>
+                        <a:buNone/>
+                      </a:pPr>
+                      <a:r>
+                        <a:rPr lang="pl-PL" sz="1100" dirty="0">
+                          <a:effectLst/>
+                        </a:rPr>
+                        <a:t>2D/3D</a:t>
+                      </a:r>
+                      <a:endParaRPr lang="pl-PL" sz="1100" dirty="0">
+                        <a:effectLst/>
+                        <a:latin typeface="Arial" panose="020B0604020202020204" pitchFamily="34" charset="0"/>
+                        <a:ea typeface="Calibri" panose="020F0502020204030204" pitchFamily="34" charset="0"/>
+                        <a:cs typeface="Times New Roman" panose="02020603050405020304" pitchFamily="18" charset="0"/>
+                      </a:endParaRPr>
+                    </a:p>
+                  </a:txBody>
+                  <a:tcPr marL="25291" marR="25291" marT="0" marB="0"/>
+                </a:tc>
+                <a:tc>
+                  <a:txBody>
+                    <a:bodyPr/>
+                    <a:lstStyle/>
+                    <a:p>
+                      <a:pPr algn="l">
+                        <a:lnSpc>
+                          <a:spcPct val="150000"/>
+                        </a:lnSpc>
+                        <a:buNone/>
+                      </a:pPr>
+                      <a:r>
+                        <a:rPr lang="pl-PL" sz="1100">
+                          <a:effectLst/>
+                        </a:rPr>
+                        <a:t>Baza gotowych modeli, Tworzenie modeli w oparciu o zdjęcia, Baza wtyczek do programu</a:t>
+                      </a:r>
+                      <a:endParaRPr lang="pl-PL" sz="1100">
+                        <a:effectLst/>
+                        <a:latin typeface="Arial" panose="020B0604020202020204" pitchFamily="34" charset="0"/>
+                        <a:ea typeface="Calibri" panose="020F0502020204030204" pitchFamily="34" charset="0"/>
+                        <a:cs typeface="Times New Roman" panose="02020603050405020304" pitchFamily="18" charset="0"/>
+                      </a:endParaRPr>
+                    </a:p>
+                  </a:txBody>
+                  <a:tcPr marL="25291" marR="25291" marT="0" marB="0"/>
+                </a:tc>
+                <a:extLst>
+                  <a:ext uri="{0D108BD9-81ED-4DB2-BD59-A6C34878D82A}">
+                    <a16:rowId xmlns:a16="http://schemas.microsoft.com/office/drawing/2014/main" val="3768092719"/>
+                  </a:ext>
+                </a:extLst>
+              </a:tr>
+              <a:tr h="753918">
+                <a:tc>
+                  <a:txBody>
+                    <a:bodyPr/>
+                    <a:lstStyle/>
+                    <a:p>
+                      <a:pPr algn="l">
+                        <a:lnSpc>
+                          <a:spcPct val="150000"/>
+                        </a:lnSpc>
+                        <a:buNone/>
+                      </a:pPr>
+                      <a:r>
+                        <a:rPr lang="pl-PL" sz="1100">
+                          <a:effectLst/>
+                        </a:rPr>
+                        <a:t>Live Home 3D</a:t>
+                      </a:r>
+                      <a:endParaRPr lang="pl-PL" sz="1100">
+                        <a:effectLst/>
+                        <a:latin typeface="Arial" panose="020B0604020202020204" pitchFamily="34" charset="0"/>
+                        <a:ea typeface="Calibri" panose="020F0502020204030204" pitchFamily="34" charset="0"/>
+                        <a:cs typeface="Times New Roman" panose="02020603050405020304" pitchFamily="18" charset="0"/>
+                      </a:endParaRPr>
+                    </a:p>
+                  </a:txBody>
+                  <a:tcPr marL="25291" marR="25291" marT="0" marB="0"/>
+                </a:tc>
+                <a:tc>
+                  <a:txBody>
+                    <a:bodyPr/>
+                    <a:lstStyle/>
+                    <a:p>
+                      <a:pPr algn="l">
+                        <a:lnSpc>
+                          <a:spcPct val="150000"/>
+                        </a:lnSpc>
+                        <a:buNone/>
+                      </a:pPr>
+                      <a:r>
+                        <a:rPr lang="pl-PL" sz="1100">
+                          <a:effectLst/>
+                        </a:rPr>
+                        <a:t>Zakup Jednorazowy</a:t>
+                      </a:r>
+                      <a:endParaRPr lang="pl-PL" sz="1100">
+                        <a:effectLst/>
+                        <a:latin typeface="Arial" panose="020B0604020202020204" pitchFamily="34" charset="0"/>
+                        <a:ea typeface="Calibri" panose="020F0502020204030204" pitchFamily="34" charset="0"/>
+                        <a:cs typeface="Times New Roman" panose="02020603050405020304" pitchFamily="18" charset="0"/>
+                      </a:endParaRPr>
+                    </a:p>
+                  </a:txBody>
+                  <a:tcPr marL="25291" marR="25291" marT="0" marB="0"/>
+                </a:tc>
+                <a:tc>
+                  <a:txBody>
+                    <a:bodyPr/>
+                    <a:lstStyle/>
+                    <a:p>
+                      <a:pPr algn="l">
+                        <a:lnSpc>
+                          <a:spcPct val="150000"/>
+                        </a:lnSpc>
+                        <a:buNone/>
+                      </a:pPr>
+                      <a:r>
+                        <a:rPr lang="pl-PL" sz="1100" dirty="0">
+                          <a:effectLst/>
+                        </a:rPr>
+                        <a:t>Darmowy/$99.99</a:t>
+                      </a:r>
+                      <a:endParaRPr lang="pl-PL" sz="1100" dirty="0">
+                        <a:effectLst/>
+                        <a:latin typeface="Arial" panose="020B0604020202020204" pitchFamily="34" charset="0"/>
+                        <a:ea typeface="Calibri" panose="020F0502020204030204" pitchFamily="34" charset="0"/>
+                        <a:cs typeface="Times New Roman" panose="02020603050405020304" pitchFamily="18" charset="0"/>
+                      </a:endParaRPr>
+                    </a:p>
+                  </a:txBody>
+                  <a:tcPr marL="25291" marR="25291" marT="0" marB="0"/>
+                </a:tc>
+                <a:tc>
+                  <a:txBody>
+                    <a:bodyPr/>
+                    <a:lstStyle/>
+                    <a:p>
+                      <a:pPr algn="l">
+                        <a:lnSpc>
+                          <a:spcPct val="150000"/>
+                        </a:lnSpc>
+                        <a:buNone/>
+                      </a:pPr>
+                      <a:r>
+                        <a:rPr lang="pl-PL" sz="1100" dirty="0">
+                          <a:effectLst/>
+                          <a:latin typeface="Arial" panose="020B0604020202020204" pitchFamily="34" charset="0"/>
+                          <a:ea typeface="Calibri" panose="020F0502020204030204" pitchFamily="34" charset="0"/>
+                          <a:cs typeface="Times New Roman" panose="02020603050405020304" pitchFamily="18" charset="0"/>
+                        </a:rPr>
+                        <a:t>2D/3D</a:t>
+                      </a:r>
+                    </a:p>
+                  </a:txBody>
+                  <a:tcPr marL="25291" marR="25291" marT="0" marB="0"/>
+                </a:tc>
+                <a:tc>
+                  <a:txBody>
+                    <a:bodyPr/>
+                    <a:lstStyle/>
+                    <a:p>
+                      <a:pPr algn="l">
+                        <a:lnSpc>
+                          <a:spcPct val="150000"/>
+                        </a:lnSpc>
+                        <a:buNone/>
+                      </a:pPr>
+                      <a:r>
+                        <a:rPr lang="pl-PL" sz="1100">
+                          <a:effectLst/>
+                        </a:rPr>
+                        <a:t>Baza gotowych modeli, importowanie własnych modeli, Dostępne na urządzenia mobilne</a:t>
+                      </a:r>
+                      <a:endParaRPr lang="pl-PL" sz="1100">
+                        <a:effectLst/>
+                        <a:latin typeface="Arial" panose="020B0604020202020204" pitchFamily="34" charset="0"/>
+                        <a:ea typeface="Calibri" panose="020F0502020204030204" pitchFamily="34" charset="0"/>
+                        <a:cs typeface="Times New Roman" panose="02020603050405020304" pitchFamily="18" charset="0"/>
+                      </a:endParaRPr>
+                    </a:p>
+                  </a:txBody>
+                  <a:tcPr marL="25291" marR="25291" marT="0" marB="0"/>
+                </a:tc>
+                <a:extLst>
+                  <a:ext uri="{0D108BD9-81ED-4DB2-BD59-A6C34878D82A}">
+                    <a16:rowId xmlns:a16="http://schemas.microsoft.com/office/drawing/2014/main" val="2407908265"/>
+                  </a:ext>
+                </a:extLst>
+              </a:tr>
+              <a:tr h="491778">
+                <a:tc>
+                  <a:txBody>
+                    <a:bodyPr/>
+                    <a:lstStyle/>
+                    <a:p>
+                      <a:pPr algn="l">
+                        <a:lnSpc>
+                          <a:spcPct val="150000"/>
+                        </a:lnSpc>
+                        <a:buNone/>
+                      </a:pPr>
+                      <a:r>
+                        <a:rPr lang="pl-PL" sz="1100">
+                          <a:effectLst/>
+                        </a:rPr>
+                        <a:t>p.Con planner</a:t>
+                      </a:r>
+                      <a:endParaRPr lang="pl-PL" sz="1100">
+                        <a:effectLst/>
+                        <a:latin typeface="Arial" panose="020B0604020202020204" pitchFamily="34" charset="0"/>
+                        <a:ea typeface="Calibri" panose="020F0502020204030204" pitchFamily="34" charset="0"/>
+                        <a:cs typeface="Times New Roman" panose="02020603050405020304" pitchFamily="18" charset="0"/>
+                      </a:endParaRPr>
+                    </a:p>
+                  </a:txBody>
+                  <a:tcPr marL="25291" marR="25291" marT="0" marB="0"/>
+                </a:tc>
+                <a:tc>
+                  <a:txBody>
+                    <a:bodyPr/>
+                    <a:lstStyle/>
+                    <a:p>
+                      <a:pPr algn="l">
+                        <a:lnSpc>
+                          <a:spcPct val="150000"/>
+                        </a:lnSpc>
+                        <a:buNone/>
+                      </a:pPr>
+                      <a:r>
+                        <a:rPr lang="pl-PL" sz="1100">
+                          <a:effectLst/>
+                        </a:rPr>
+                        <a:t>Zakup Jednorazowy</a:t>
+                      </a:r>
+                      <a:endParaRPr lang="pl-PL" sz="1100">
+                        <a:effectLst/>
+                        <a:latin typeface="Arial" panose="020B0604020202020204" pitchFamily="34" charset="0"/>
+                        <a:ea typeface="Calibri" panose="020F0502020204030204" pitchFamily="34" charset="0"/>
+                        <a:cs typeface="Times New Roman" panose="02020603050405020304" pitchFamily="18" charset="0"/>
+                      </a:endParaRPr>
+                    </a:p>
+                  </a:txBody>
+                  <a:tcPr marL="25291" marR="25291" marT="0" marB="0"/>
+                </a:tc>
+                <a:tc>
+                  <a:txBody>
+                    <a:bodyPr/>
+                    <a:lstStyle/>
+                    <a:p>
+                      <a:pPr algn="l">
+                        <a:lnSpc>
+                          <a:spcPct val="150000"/>
+                        </a:lnSpc>
+                        <a:buNone/>
+                      </a:pPr>
+                      <a:r>
+                        <a:rPr lang="pl-PL" sz="1100">
+                          <a:effectLst/>
+                        </a:rPr>
+                        <a:t>Darmowy/19 999 zl</a:t>
+                      </a:r>
+                      <a:endParaRPr lang="pl-PL" sz="1100">
+                        <a:effectLst/>
+                        <a:latin typeface="Arial" panose="020B0604020202020204" pitchFamily="34" charset="0"/>
+                        <a:ea typeface="Calibri" panose="020F0502020204030204" pitchFamily="34" charset="0"/>
+                        <a:cs typeface="Times New Roman" panose="02020603050405020304" pitchFamily="18" charset="0"/>
+                      </a:endParaRPr>
+                    </a:p>
+                  </a:txBody>
+                  <a:tcPr marL="25291" marR="25291" marT="0" marB="0"/>
+                </a:tc>
+                <a:tc>
+                  <a:txBody>
+                    <a:bodyPr/>
+                    <a:lstStyle/>
+                    <a:p>
+                      <a:pPr algn="l">
+                        <a:lnSpc>
+                          <a:spcPct val="150000"/>
+                        </a:lnSpc>
+                        <a:buNone/>
+                      </a:pPr>
+                      <a:r>
+                        <a:rPr lang="pl-PL" sz="1100" dirty="0">
+                          <a:effectLst/>
+                        </a:rPr>
+                        <a:t>2D/3D/VR</a:t>
+                      </a:r>
+                      <a:endParaRPr lang="pl-PL" sz="1100" dirty="0">
+                        <a:effectLst/>
+                        <a:latin typeface="Arial" panose="020B0604020202020204" pitchFamily="34" charset="0"/>
+                        <a:ea typeface="Calibri" panose="020F0502020204030204" pitchFamily="34" charset="0"/>
+                        <a:cs typeface="Times New Roman" panose="02020603050405020304" pitchFamily="18" charset="0"/>
+                      </a:endParaRPr>
+                    </a:p>
+                  </a:txBody>
+                  <a:tcPr marL="25291" marR="25291" marT="0" marB="0"/>
+                </a:tc>
+                <a:tc>
+                  <a:txBody>
+                    <a:bodyPr/>
+                    <a:lstStyle/>
+                    <a:p>
+                      <a:pPr algn="l">
+                        <a:lnSpc>
+                          <a:spcPct val="150000"/>
+                        </a:lnSpc>
+                        <a:buNone/>
+                      </a:pPr>
+                      <a:r>
+                        <a:rPr lang="pl-PL" sz="1100" dirty="0">
+                          <a:effectLst/>
+                        </a:rPr>
+                        <a:t>Baza gotowych modeli, Wtyczka VR</a:t>
+                      </a:r>
+                      <a:endParaRPr lang="pl-PL" sz="1100" dirty="0">
+                        <a:effectLst/>
+                        <a:latin typeface="Arial" panose="020B0604020202020204" pitchFamily="34" charset="0"/>
+                        <a:ea typeface="Calibri" panose="020F0502020204030204" pitchFamily="34" charset="0"/>
+                        <a:cs typeface="Times New Roman" panose="02020603050405020304" pitchFamily="18" charset="0"/>
+                      </a:endParaRPr>
+                    </a:p>
+                  </a:txBody>
+                  <a:tcPr marL="25291" marR="25291" marT="0" marB="0"/>
+                </a:tc>
+                <a:extLst>
+                  <a:ext uri="{0D108BD9-81ED-4DB2-BD59-A6C34878D82A}">
+                    <a16:rowId xmlns:a16="http://schemas.microsoft.com/office/drawing/2014/main" val="3872065160"/>
+                  </a:ext>
+                </a:extLst>
+              </a:tr>
+            </a:tbl>
+          </a:graphicData>
+        </a:graphic>
+      </p:graphicFrame>
     </p:spTree>
     <p:extLst>
       <p:ext uri="{BB962C8B-B14F-4D97-AF65-F5344CB8AC3E}">
         <p14:creationId xmlns:p14="http://schemas.microsoft.com/office/powerpoint/2010/main" val="1534340081"/>
+      </p:ext>
+    </p:extLst>
+  </p:cSld>
+  <p:clrMapOvr>
+    <a:masterClrMapping/>
+  </p:clrMapOvr>
+</p:sld>
+</file>
+
+<file path=ppt/slides/slide3.xml><?xml version="1.0" encoding="utf-8"?>
+<p:sld xmlns:a="http://schemas.openxmlformats.org/drawingml/2006/main" xmlns:r="http://schemas.openxmlformats.org/officeDocument/2006/relationships" xmlns:p="http://schemas.openxmlformats.org/presentationml/2006/main">
+  <p:cSld>
+    <p:spTree>
+      <p:nvGrpSpPr>
+        <p:cNvPr id="1" name="">
+          <a:extLst>
+            <a:ext uri="{FF2B5EF4-FFF2-40B4-BE49-F238E27FC236}">
+              <a16:creationId xmlns:a16="http://schemas.microsoft.com/office/drawing/2014/main" id="{55D95AA1-20F1-C00D-89C8-8B03690B0DA3}"/>
+            </a:ext>
+          </a:extLst>
+        </p:cNvPr>
+        <p:cNvGrpSpPr/>
+        <p:nvPr/>
+      </p:nvGrpSpPr>
+      <p:grpSpPr>
+        <a:xfrm>
+          <a:off x="0" y="0"/>
+          <a:ext cx="0" cy="0"/>
+          <a:chOff x="0" y="0"/>
+          <a:chExt cx="0" cy="0"/>
+        </a:xfrm>
+      </p:grpSpPr>
+      <p:sp>
+        <p:nvSpPr>
+          <p:cNvPr id="2" name="Tytuł 1">
+            <a:extLst>
+              <a:ext uri="{FF2B5EF4-FFF2-40B4-BE49-F238E27FC236}">
+                <a16:creationId xmlns:a16="http://schemas.microsoft.com/office/drawing/2014/main" id="{B864EDC4-F17F-2865-AC10-6C1BA8006CC4}"/>
+              </a:ext>
+            </a:extLst>
+          </p:cNvPr>
+          <p:cNvSpPr>
+            <a:spLocks noGrp="1"/>
+          </p:cNvSpPr>
+          <p:nvPr>
+            <p:ph type="title"/>
+          </p:nvPr>
+        </p:nvSpPr>
+        <p:spPr>
+          <a:xfrm>
+            <a:off x="143435" y="367554"/>
+            <a:ext cx="11905130" cy="995082"/>
+          </a:xfrm>
+        </p:spPr>
+        <p:txBody>
+          <a:bodyPr/>
+          <a:lstStyle/>
+          <a:p>
+            <a:r>
+              <a:rPr lang="pl-PL" dirty="0"/>
+              <a:t>Wstęp – Wirtualna rzeczywistość</a:t>
+            </a:r>
+          </a:p>
+        </p:txBody>
+      </p:sp>
+      <p:sp>
+        <p:nvSpPr>
+          <p:cNvPr id="3" name="Symbol zastępczy zawartości 2">
+            <a:extLst>
+              <a:ext uri="{FF2B5EF4-FFF2-40B4-BE49-F238E27FC236}">
+                <a16:creationId xmlns:a16="http://schemas.microsoft.com/office/drawing/2014/main" id="{AD179727-D455-3887-E97B-7DCE0D82CB70}"/>
+              </a:ext>
+            </a:extLst>
+          </p:cNvPr>
+          <p:cNvSpPr>
+            <a:spLocks noGrp="1"/>
+          </p:cNvSpPr>
+          <p:nvPr>
+            <p:ph idx="1"/>
+          </p:nvPr>
+        </p:nvSpPr>
+        <p:spPr>
+          <a:xfrm>
+            <a:off x="143434" y="1362637"/>
+            <a:ext cx="11905129" cy="5307104"/>
+          </a:xfrm>
+        </p:spPr>
+        <p:txBody>
+          <a:bodyPr/>
+          <a:lstStyle/>
+          <a:p>
+            <a:pPr marL="0" indent="0">
+              <a:buNone/>
+            </a:pPr>
+            <a:r>
+              <a:rPr lang="pl-PL" sz="1400" dirty="0"/>
+              <a:t>Program do projektowania wnętrz to narzędzie do wizualizacji i aranżacji pomieszczeń w 3D i 2D. Za pomocą takich aplikacji można zaplanować układ pomieszczenia, mebli, czy ścian. Są bardzo pomocne przy planowaniu remontów, czy budowy domu. Ich wielką zaletą jest dokładność i precyzja wizualizacji, która pozwala na dokładne odwzorowanie rzeczywistości. Oferują dużą funkcjonalność i sporą bazę gotowych rozwiązań, aczkolwiek przez to ich obsługa jest skomplikowana i wymagająca wielogodzinnej nauki.</a:t>
+            </a:r>
+          </a:p>
+          <a:p>
+            <a:pPr marL="0" indent="0">
+              <a:buNone/>
+            </a:pPr>
+            <a:r>
+              <a:rPr lang="pl-PL" sz="1400" dirty="0"/>
+              <a:t>Porównania podobnych rozwiązań:</a:t>
+            </a:r>
+          </a:p>
+          <a:p>
+            <a:pPr marL="0" indent="0">
+              <a:buNone/>
+            </a:pPr>
+            <a:endParaRPr lang="pl-PL" dirty="0"/>
+          </a:p>
+          <a:p>
+            <a:pPr marL="0" indent="0">
+              <a:buNone/>
+            </a:pPr>
+            <a:endParaRPr lang="pl-PL" dirty="0"/>
+          </a:p>
+          <a:p>
+            <a:pPr marL="0" indent="0">
+              <a:buNone/>
+            </a:pPr>
+            <a:endParaRPr lang="pl-PL" dirty="0"/>
+          </a:p>
+          <a:p>
+            <a:pPr marL="0" indent="0">
+              <a:buNone/>
+            </a:pPr>
+            <a:endParaRPr lang="pl-PL" dirty="0"/>
+          </a:p>
+          <a:p>
+            <a:pPr marL="0" indent="0">
+              <a:buNone/>
+            </a:pPr>
+            <a:endParaRPr lang="pl-PL" dirty="0"/>
+          </a:p>
+          <a:p>
+            <a:pPr marL="0" indent="0">
+              <a:buNone/>
+            </a:pPr>
+            <a:endParaRPr lang="pl-PL" dirty="0"/>
+          </a:p>
+          <a:p>
+            <a:pPr marL="0" indent="0">
+              <a:buNone/>
+            </a:pPr>
+            <a:endParaRPr lang="pl-PL" dirty="0"/>
+          </a:p>
+          <a:p>
+            <a:pPr marL="0" indent="0">
+              <a:buNone/>
+            </a:pPr>
+            <a:endParaRPr lang="pl-PL" dirty="0"/>
+          </a:p>
+          <a:p>
+            <a:pPr marL="0" indent="0">
+              <a:buNone/>
+            </a:pPr>
+            <a:endParaRPr lang="pl-PL" dirty="0"/>
+          </a:p>
+        </p:txBody>
+      </p:sp>
+    </p:spTree>
+    <p:extLst>
+      <p:ext uri="{BB962C8B-B14F-4D97-AF65-F5344CB8AC3E}">
+        <p14:creationId xmlns:p14="http://schemas.microsoft.com/office/powerpoint/2010/main" val="1016537804"/>
       </p:ext>
     </p:extLst>
   </p:cSld>

--- a/PrezentacjaAndrzejParuch.pptx
+++ b/PrezentacjaAndrzejParuch.pptx
@@ -5777,7 +5777,12 @@
             <p:ph type="subTitle" idx="1"/>
           </p:nvPr>
         </p:nvSpPr>
-        <p:spPr/>
+        <p:spPr>
+          <a:xfrm>
+            <a:off x="1751011" y="3886200"/>
+            <a:ext cx="10207905" cy="1905000"/>
+          </a:xfrm>
+        </p:spPr>
         <p:txBody>
           <a:bodyPr/>
           <a:lstStyle/>
@@ -6010,14 +6015,14 @@
           <p:nvPr>
             <p:extLst>
               <p:ext uri="{D42A27DB-BD31-4B8C-83A1-F6EECF244321}">
-                <p14:modId xmlns:p14="http://schemas.microsoft.com/office/powerpoint/2010/main" val="2746157294"/>
+                <p14:modId xmlns:p14="http://schemas.microsoft.com/office/powerpoint/2010/main" val="3490620787"/>
               </p:ext>
             </p:extLst>
           </p:nvPr>
         </p:nvGraphicFramePr>
         <p:xfrm>
-          <a:off x="251012" y="2680447"/>
-          <a:ext cx="11591362" cy="3999095"/>
+          <a:off x="143432" y="2680447"/>
+          <a:ext cx="11905127" cy="3999095"/>
         </p:xfrm>
         <a:graphic>
           <a:graphicData uri="http://schemas.openxmlformats.org/drawingml/2006/table">
@@ -6026,35 +6031,35 @@
                 <a:tableStyleId>{5C22544A-7EE6-4342-B048-85BDC9FD1C3A}</a:tableStyleId>
               </a:tblPr>
               <a:tblGrid>
-                <a:gridCol w="2317238">
+                <a:gridCol w="2379963">
                   <a:extLst>
                     <a:ext uri="{9D8B030D-6E8A-4147-A177-3AD203B41FA5}">
                       <a16:colId xmlns:a16="http://schemas.microsoft.com/office/drawing/2014/main" val="121564756"/>
                     </a:ext>
                   </a:extLst>
                 </a:gridCol>
-                <a:gridCol w="2318531">
+                <a:gridCol w="2381291">
                   <a:extLst>
                     <a:ext uri="{9D8B030D-6E8A-4147-A177-3AD203B41FA5}">
                       <a16:colId xmlns:a16="http://schemas.microsoft.com/office/drawing/2014/main" val="1898770979"/>
                     </a:ext>
                   </a:extLst>
                 </a:gridCol>
-                <a:gridCol w="2318531">
+                <a:gridCol w="2381291">
                   <a:extLst>
                     <a:ext uri="{9D8B030D-6E8A-4147-A177-3AD203B41FA5}">
                       <a16:colId xmlns:a16="http://schemas.microsoft.com/office/drawing/2014/main" val="467455197"/>
                     </a:ext>
                   </a:extLst>
                 </a:gridCol>
-                <a:gridCol w="2318531">
+                <a:gridCol w="2381291">
                   <a:extLst>
                     <a:ext uri="{9D8B030D-6E8A-4147-A177-3AD203B41FA5}">
                       <a16:colId xmlns:a16="http://schemas.microsoft.com/office/drawing/2014/main" val="2165750682"/>
                     </a:ext>
                   </a:extLst>
                 </a:gridCol>
-                <a:gridCol w="2318531">
+                <a:gridCol w="2381291">
                   <a:extLst>
                     <a:ext uri="{9D8B030D-6E8A-4147-A177-3AD203B41FA5}">
                       <a16:colId xmlns:a16="http://schemas.microsoft.com/office/drawing/2014/main" val="4036706159"/>
@@ -6359,12 +6364,18 @@
                         <a:buNone/>
                       </a:pPr>
                       <a:r>
-                        <a:rPr lang="pl-PL" sz="1100">
+                        <a:rPr lang="pl-PL" sz="1100" dirty="0" err="1">
                           <a:effectLst/>
                         </a:rPr>
-                        <a:t>Sweet Home 3D</a:t>
+                        <a:t>Sweet</a:t>
                       </a:r>
-                      <a:endParaRPr lang="pl-PL" sz="1100">
+                      <a:r>
+                        <a:rPr lang="pl-PL" sz="1100" dirty="0">
+                          <a:effectLst/>
+                        </a:rPr>
+                        <a:t> Home 3D</a:t>
+                      </a:r>
+                      <a:endParaRPr lang="pl-PL" sz="1100" dirty="0">
                         <a:effectLst/>
                         <a:latin typeface="Arial" panose="020B0604020202020204" pitchFamily="34" charset="0"/>
                         <a:ea typeface="Calibri" panose="020F0502020204030204" pitchFamily="34" charset="0"/>
@@ -7015,8 +7026,13 @@
             </a:pPr>
             <a:r>
               <a:rPr lang="pl-PL" sz="1400" dirty="0"/>
-              <a:t>Program do projektowania wnętrz to narzędzie do wizualizacji i aranżacji pomieszczeń w 3D i 2D. Za pomocą takich aplikacji można zaplanować układ pomieszczenia, mebli, czy ścian. Są bardzo pomocne przy planowaniu remontów, czy budowy domu. Ich wielką zaletą jest dokładność i precyzja wizualizacji, która pozwala na dokładne odwzorowanie rzeczywistości. Oferują dużą funkcjonalność i sporą bazę gotowych rozwiązań, aczkolwiek przez to ich obsługa jest skomplikowana i wymagająca wielogodzinnej nauki.</a:t>
-            </a:r>
+              <a:t>Rzeczywistość wirtualna to obraz sztucznej rzeczywistości stworzony przy wykorzystaniu technologii informatycznej. Polega na multimedialnym kreowaniu komputerowej wizji przedmiotów, przestrzeni i zdarzeń. Może on reprezentować zarówno elementy świata realnego, jak i zupełnie fikcyjnego. Najważniejszym elementem tej technologii jest interakcja z wirtualnym środowiskiem oparta o ruch użytkownika. Jest ona używana do wizualizacji, gdzie użytkownik w pierwszej osobie może </a:t>
+            </a:r>
+            <a:r>
+              <a:rPr lang="pl-PL" sz="1400"/>
+              <a:t>obejrzeć projekt. </a:t>
+            </a:r>
+            <a:endParaRPr lang="pl-PL" sz="1400" dirty="0"/>
           </a:p>
           <a:p>
             <a:pPr marL="0" indent="0">
@@ -7024,7 +7040,7 @@
             </a:pPr>
             <a:r>
               <a:rPr lang="pl-PL" sz="1400" dirty="0"/>
-              <a:t>Porównania podobnych rozwiązań:</a:t>
+              <a:t>Spis zestawów VR:</a:t>
             </a:r>
           </a:p>
           <a:p>
@@ -7083,6 +7099,1472 @@
           </a:p>
         </p:txBody>
       </p:sp>
+      <p:graphicFrame>
+        <p:nvGraphicFramePr>
+          <p:cNvPr id="4" name="Tabela 3">
+            <a:extLst>
+              <a:ext uri="{FF2B5EF4-FFF2-40B4-BE49-F238E27FC236}">
+                <a16:creationId xmlns:a16="http://schemas.microsoft.com/office/drawing/2014/main" id="{290F22CC-A695-CAE5-D03C-7BC5B13E9C34}"/>
+              </a:ext>
+            </a:extLst>
+          </p:cNvPr>
+          <p:cNvGraphicFramePr>
+            <a:graphicFrameLocks noGrp="1"/>
+          </p:cNvGraphicFramePr>
+          <p:nvPr>
+            <p:extLst>
+              <p:ext uri="{D42A27DB-BD31-4B8C-83A1-F6EECF244321}">
+                <p14:modId xmlns:p14="http://schemas.microsoft.com/office/powerpoint/2010/main" val="262764257"/>
+              </p:ext>
+            </p:extLst>
+          </p:nvPr>
+        </p:nvGraphicFramePr>
+        <p:xfrm>
+          <a:off x="143431" y="2698376"/>
+          <a:ext cx="11905129" cy="3971365"/>
+        </p:xfrm>
+        <a:graphic>
+          <a:graphicData uri="http://schemas.openxmlformats.org/drawingml/2006/table">
+            <a:tbl>
+              <a:tblPr firstRow="1" firstCol="1" bandRow="1">
+                <a:tableStyleId>{5C22544A-7EE6-4342-B048-85BDC9FD1C3A}</a:tableStyleId>
+              </a:tblPr>
+              <a:tblGrid>
+                <a:gridCol w="1297412">
+                  <a:extLst>
+                    <a:ext uri="{9D8B030D-6E8A-4147-A177-3AD203B41FA5}">
+                      <a16:colId xmlns:a16="http://schemas.microsoft.com/office/drawing/2014/main" val="3667982810"/>
+                    </a:ext>
+                  </a:extLst>
+                </a:gridCol>
+                <a:gridCol w="1804692">
+                  <a:extLst>
+                    <a:ext uri="{9D8B030D-6E8A-4147-A177-3AD203B41FA5}">
+                      <a16:colId xmlns:a16="http://schemas.microsoft.com/office/drawing/2014/main" val="8836512"/>
+                    </a:ext>
+                  </a:extLst>
+                </a:gridCol>
+                <a:gridCol w="953474">
+                  <a:extLst>
+                    <a:ext uri="{9D8B030D-6E8A-4147-A177-3AD203B41FA5}">
+                      <a16:colId xmlns:a16="http://schemas.microsoft.com/office/drawing/2014/main" val="2925828577"/>
+                    </a:ext>
+                  </a:extLst>
+                </a:gridCol>
+                <a:gridCol w="1815315">
+                  <a:extLst>
+                    <a:ext uri="{9D8B030D-6E8A-4147-A177-3AD203B41FA5}">
+                      <a16:colId xmlns:a16="http://schemas.microsoft.com/office/drawing/2014/main" val="3971175562"/>
+                    </a:ext>
+                  </a:extLst>
+                </a:gridCol>
+                <a:gridCol w="1735637">
+                  <a:extLst>
+                    <a:ext uri="{9D8B030D-6E8A-4147-A177-3AD203B41FA5}">
+                      <a16:colId xmlns:a16="http://schemas.microsoft.com/office/drawing/2014/main" val="3421818127"/>
+                    </a:ext>
+                  </a:extLst>
+                </a:gridCol>
+                <a:gridCol w="1331942">
+                  <a:extLst>
+                    <a:ext uri="{9D8B030D-6E8A-4147-A177-3AD203B41FA5}">
+                      <a16:colId xmlns:a16="http://schemas.microsoft.com/office/drawing/2014/main" val="1681559505"/>
+                    </a:ext>
+                  </a:extLst>
+                </a:gridCol>
+                <a:gridCol w="2072940">
+                  <a:extLst>
+                    <a:ext uri="{9D8B030D-6E8A-4147-A177-3AD203B41FA5}">
+                      <a16:colId xmlns:a16="http://schemas.microsoft.com/office/drawing/2014/main" val="239348676"/>
+                    </a:ext>
+                  </a:extLst>
+                </a:gridCol>
+                <a:gridCol w="893717">
+                  <a:extLst>
+                    <a:ext uri="{9D8B030D-6E8A-4147-A177-3AD203B41FA5}">
+                      <a16:colId xmlns:a16="http://schemas.microsoft.com/office/drawing/2014/main" val="4161427337"/>
+                    </a:ext>
+                  </a:extLst>
+                </a:gridCol>
+              </a:tblGrid>
+              <a:tr h="308983">
+                <a:tc>
+                  <a:txBody>
+                    <a:bodyPr/>
+                    <a:lstStyle/>
+                    <a:p>
+                      <a:pPr algn="just">
+                        <a:lnSpc>
+                          <a:spcPct val="150000"/>
+                        </a:lnSpc>
+                        <a:buNone/>
+                      </a:pPr>
+                      <a:r>
+                        <a:rPr lang="pl-PL" sz="1200" dirty="0">
+                          <a:effectLst/>
+                        </a:rPr>
+                        <a:t>Nazwa</a:t>
+                      </a:r>
+                      <a:endParaRPr lang="pl-PL" sz="1200" dirty="0">
+                        <a:effectLst/>
+                        <a:latin typeface="Arial" panose="020B0604020202020204" pitchFamily="34" charset="0"/>
+                        <a:ea typeface="Calibri" panose="020F0502020204030204" pitchFamily="34" charset="0"/>
+                        <a:cs typeface="Times New Roman" panose="02020603050405020304" pitchFamily="18" charset="0"/>
+                      </a:endParaRPr>
+                    </a:p>
+                  </a:txBody>
+                  <a:tcPr marL="27488" marR="27488" marT="0" marB="0"/>
+                </a:tc>
+                <a:tc>
+                  <a:txBody>
+                    <a:bodyPr/>
+                    <a:lstStyle/>
+                    <a:p>
+                      <a:pPr algn="just">
+                        <a:lnSpc>
+                          <a:spcPct val="150000"/>
+                        </a:lnSpc>
+                        <a:buNone/>
+                      </a:pPr>
+                      <a:r>
+                        <a:rPr lang="pl-PL" sz="1200">
+                          <a:effectLst/>
+                        </a:rPr>
+                        <a:t>Typ</a:t>
+                      </a:r>
+                      <a:endParaRPr lang="pl-PL" sz="1200">
+                        <a:effectLst/>
+                        <a:latin typeface="Arial" panose="020B0604020202020204" pitchFamily="34" charset="0"/>
+                        <a:ea typeface="Calibri" panose="020F0502020204030204" pitchFamily="34" charset="0"/>
+                        <a:cs typeface="Times New Roman" panose="02020603050405020304" pitchFamily="18" charset="0"/>
+                      </a:endParaRPr>
+                    </a:p>
+                  </a:txBody>
+                  <a:tcPr marL="27488" marR="27488" marT="0" marB="0"/>
+                </a:tc>
+                <a:tc>
+                  <a:txBody>
+                    <a:bodyPr/>
+                    <a:lstStyle/>
+                    <a:p>
+                      <a:pPr algn="just">
+                        <a:lnSpc>
+                          <a:spcPct val="150000"/>
+                        </a:lnSpc>
+                        <a:buNone/>
+                      </a:pPr>
+                      <a:r>
+                        <a:rPr lang="pl-PL" sz="1200">
+                          <a:effectLst/>
+                        </a:rPr>
+                        <a:t>Cena</a:t>
+                      </a:r>
+                      <a:endParaRPr lang="pl-PL" sz="1200">
+                        <a:effectLst/>
+                        <a:latin typeface="Arial" panose="020B0604020202020204" pitchFamily="34" charset="0"/>
+                        <a:ea typeface="Calibri" panose="020F0502020204030204" pitchFamily="34" charset="0"/>
+                        <a:cs typeface="Times New Roman" panose="02020603050405020304" pitchFamily="18" charset="0"/>
+                      </a:endParaRPr>
+                    </a:p>
+                  </a:txBody>
+                  <a:tcPr marL="27488" marR="27488" marT="0" marB="0"/>
+                </a:tc>
+                <a:tc>
+                  <a:txBody>
+                    <a:bodyPr/>
+                    <a:lstStyle/>
+                    <a:p>
+                      <a:pPr algn="just">
+                        <a:lnSpc>
+                          <a:spcPct val="150000"/>
+                        </a:lnSpc>
+                        <a:buNone/>
+                      </a:pPr>
+                      <a:r>
+                        <a:rPr lang="pl-PL" sz="1200">
+                          <a:effectLst/>
+                        </a:rPr>
+                        <a:t>Rozdzielczość na oko</a:t>
+                      </a:r>
+                      <a:endParaRPr lang="pl-PL" sz="1200">
+                        <a:effectLst/>
+                        <a:latin typeface="Arial" panose="020B0604020202020204" pitchFamily="34" charset="0"/>
+                        <a:ea typeface="Calibri" panose="020F0502020204030204" pitchFamily="34" charset="0"/>
+                        <a:cs typeface="Times New Roman" panose="02020603050405020304" pitchFamily="18" charset="0"/>
+                      </a:endParaRPr>
+                    </a:p>
+                  </a:txBody>
+                  <a:tcPr marL="27488" marR="27488" marT="0" marB="0"/>
+                </a:tc>
+                <a:tc>
+                  <a:txBody>
+                    <a:bodyPr/>
+                    <a:lstStyle/>
+                    <a:p>
+                      <a:pPr algn="just">
+                        <a:lnSpc>
+                          <a:spcPct val="150000"/>
+                        </a:lnSpc>
+                        <a:buNone/>
+                      </a:pPr>
+                      <a:r>
+                        <a:rPr lang="pl-PL" sz="1200">
+                          <a:effectLst/>
+                        </a:rPr>
+                        <a:t>Odświerzanie</a:t>
+                      </a:r>
+                      <a:endParaRPr lang="pl-PL" sz="1200">
+                        <a:effectLst/>
+                        <a:latin typeface="Arial" panose="020B0604020202020204" pitchFamily="34" charset="0"/>
+                        <a:ea typeface="Calibri" panose="020F0502020204030204" pitchFamily="34" charset="0"/>
+                        <a:cs typeface="Times New Roman" panose="02020603050405020304" pitchFamily="18" charset="0"/>
+                      </a:endParaRPr>
+                    </a:p>
+                  </a:txBody>
+                  <a:tcPr marL="27488" marR="27488" marT="0" marB="0"/>
+                </a:tc>
+                <a:tc>
+                  <a:txBody>
+                    <a:bodyPr/>
+                    <a:lstStyle/>
+                    <a:p>
+                      <a:pPr algn="just">
+                        <a:lnSpc>
+                          <a:spcPct val="150000"/>
+                        </a:lnSpc>
+                        <a:buNone/>
+                      </a:pPr>
+                      <a:r>
+                        <a:rPr lang="pl-PL" sz="1200">
+                          <a:effectLst/>
+                        </a:rPr>
+                        <a:t>CPU</a:t>
+                      </a:r>
+                      <a:endParaRPr lang="pl-PL" sz="1200">
+                        <a:effectLst/>
+                        <a:latin typeface="Arial" panose="020B0604020202020204" pitchFamily="34" charset="0"/>
+                        <a:ea typeface="Calibri" panose="020F0502020204030204" pitchFamily="34" charset="0"/>
+                        <a:cs typeface="Times New Roman" panose="02020603050405020304" pitchFamily="18" charset="0"/>
+                      </a:endParaRPr>
+                    </a:p>
+                  </a:txBody>
+                  <a:tcPr marL="27488" marR="27488" marT="0" marB="0"/>
+                </a:tc>
+                <a:tc>
+                  <a:txBody>
+                    <a:bodyPr/>
+                    <a:lstStyle/>
+                    <a:p>
+                      <a:pPr algn="just">
+                        <a:lnSpc>
+                          <a:spcPct val="150000"/>
+                        </a:lnSpc>
+                        <a:buNone/>
+                      </a:pPr>
+                      <a:r>
+                        <a:rPr lang="pl-PL" sz="1200">
+                          <a:effectLst/>
+                        </a:rPr>
+                        <a:t>Kontrolery</a:t>
+                      </a:r>
+                      <a:endParaRPr lang="pl-PL" sz="1200">
+                        <a:effectLst/>
+                        <a:latin typeface="Arial" panose="020B0604020202020204" pitchFamily="34" charset="0"/>
+                        <a:ea typeface="Calibri" panose="020F0502020204030204" pitchFamily="34" charset="0"/>
+                        <a:cs typeface="Times New Roman" panose="02020603050405020304" pitchFamily="18" charset="0"/>
+                      </a:endParaRPr>
+                    </a:p>
+                  </a:txBody>
+                  <a:tcPr marL="27488" marR="27488" marT="0" marB="0"/>
+                </a:tc>
+                <a:tc>
+                  <a:txBody>
+                    <a:bodyPr/>
+                    <a:lstStyle/>
+                    <a:p>
+                      <a:pPr algn="just">
+                        <a:lnSpc>
+                          <a:spcPct val="150000"/>
+                        </a:lnSpc>
+                        <a:buNone/>
+                      </a:pPr>
+                      <a:r>
+                        <a:rPr lang="pl-PL" sz="1200">
+                          <a:effectLst/>
+                        </a:rPr>
+                        <a:t>Bateria</a:t>
+                      </a:r>
+                      <a:endParaRPr lang="pl-PL" sz="1200">
+                        <a:effectLst/>
+                        <a:latin typeface="Arial" panose="020B0604020202020204" pitchFamily="34" charset="0"/>
+                        <a:ea typeface="Calibri" panose="020F0502020204030204" pitchFamily="34" charset="0"/>
+                        <a:cs typeface="Times New Roman" panose="02020603050405020304" pitchFamily="18" charset="0"/>
+                      </a:endParaRPr>
+                    </a:p>
+                  </a:txBody>
+                  <a:tcPr marL="27488" marR="27488" marT="0" marB="0"/>
+                </a:tc>
+                <a:extLst>
+                  <a:ext uri="{0D108BD9-81ED-4DB2-BD59-A6C34878D82A}">
+                    <a16:rowId xmlns:a16="http://schemas.microsoft.com/office/drawing/2014/main" val="168281251"/>
+                  </a:ext>
+                </a:extLst>
+              </a:tr>
+              <a:tr h="1367594">
+                <a:tc>
+                  <a:txBody>
+                    <a:bodyPr/>
+                    <a:lstStyle/>
+                    <a:p>
+                      <a:pPr algn="just">
+                        <a:lnSpc>
+                          <a:spcPct val="150000"/>
+                        </a:lnSpc>
+                        <a:buNone/>
+                      </a:pPr>
+                      <a:r>
+                        <a:rPr lang="pl-PL" sz="1200" dirty="0">
+                          <a:effectLst/>
+                        </a:rPr>
+                        <a:t>Meta Quest 3</a:t>
+                      </a:r>
+                      <a:endParaRPr lang="pl-PL" sz="1200" dirty="0">
+                        <a:effectLst/>
+                        <a:latin typeface="Arial" panose="020B0604020202020204" pitchFamily="34" charset="0"/>
+                        <a:ea typeface="Calibri" panose="020F0502020204030204" pitchFamily="34" charset="0"/>
+                        <a:cs typeface="Times New Roman" panose="02020603050405020304" pitchFamily="18" charset="0"/>
+                      </a:endParaRPr>
+                    </a:p>
+                  </a:txBody>
+                  <a:tcPr marL="27488" marR="27488" marT="0" marB="0"/>
+                </a:tc>
+                <a:tc>
+                  <a:txBody>
+                    <a:bodyPr/>
+                    <a:lstStyle/>
+                    <a:p>
+                      <a:pPr algn="just">
+                        <a:lnSpc>
+                          <a:spcPct val="150000"/>
+                        </a:lnSpc>
+                        <a:buNone/>
+                      </a:pPr>
+                      <a:r>
+                        <a:rPr lang="pl-PL" sz="1200" dirty="0">
+                          <a:effectLst/>
+                        </a:rPr>
+                        <a:t>Autonomiczne</a:t>
+                      </a:r>
+                      <a:endParaRPr lang="pl-PL" sz="1200" dirty="0">
+                        <a:effectLst/>
+                        <a:latin typeface="Arial" panose="020B0604020202020204" pitchFamily="34" charset="0"/>
+                        <a:ea typeface="Calibri" panose="020F0502020204030204" pitchFamily="34" charset="0"/>
+                        <a:cs typeface="Times New Roman" panose="02020603050405020304" pitchFamily="18" charset="0"/>
+                      </a:endParaRPr>
+                    </a:p>
+                  </a:txBody>
+                  <a:tcPr marL="27488" marR="27488" marT="0" marB="0"/>
+                </a:tc>
+                <a:tc>
+                  <a:txBody>
+                    <a:bodyPr/>
+                    <a:lstStyle/>
+                    <a:p>
+                      <a:pPr algn="just">
+                        <a:lnSpc>
+                          <a:spcPct val="150000"/>
+                        </a:lnSpc>
+                        <a:buNone/>
+                      </a:pPr>
+                      <a:r>
+                        <a:rPr lang="pl-PL" sz="1200" dirty="0">
+                          <a:effectLst/>
+                        </a:rPr>
+                        <a:t>$499</a:t>
+                      </a:r>
+                      <a:endParaRPr lang="pl-PL" sz="1200" dirty="0">
+                        <a:effectLst/>
+                        <a:latin typeface="Arial" panose="020B0604020202020204" pitchFamily="34" charset="0"/>
+                        <a:ea typeface="Calibri" panose="020F0502020204030204" pitchFamily="34" charset="0"/>
+                        <a:cs typeface="Times New Roman" panose="02020603050405020304" pitchFamily="18" charset="0"/>
+                      </a:endParaRPr>
+                    </a:p>
+                  </a:txBody>
+                  <a:tcPr marL="27488" marR="27488" marT="0" marB="0"/>
+                </a:tc>
+                <a:tc>
+                  <a:txBody>
+                    <a:bodyPr/>
+                    <a:lstStyle/>
+                    <a:p>
+                      <a:pPr algn="just">
+                        <a:lnSpc>
+                          <a:spcPct val="150000"/>
+                        </a:lnSpc>
+                        <a:buNone/>
+                      </a:pPr>
+                      <a:r>
+                        <a:rPr lang="pl-PL" sz="1200">
+                          <a:effectLst/>
+                        </a:rPr>
+                        <a:t>2064x2208</a:t>
+                      </a:r>
+                      <a:endParaRPr lang="pl-PL" sz="1200">
+                        <a:effectLst/>
+                        <a:latin typeface="Arial" panose="020B0604020202020204" pitchFamily="34" charset="0"/>
+                        <a:ea typeface="Calibri" panose="020F0502020204030204" pitchFamily="34" charset="0"/>
+                        <a:cs typeface="Times New Roman" panose="02020603050405020304" pitchFamily="18" charset="0"/>
+                      </a:endParaRPr>
+                    </a:p>
+                  </a:txBody>
+                  <a:tcPr marL="27488" marR="27488" marT="0" marB="0"/>
+                </a:tc>
+                <a:tc>
+                  <a:txBody>
+                    <a:bodyPr/>
+                    <a:lstStyle/>
+                    <a:p>
+                      <a:pPr algn="just">
+                        <a:lnSpc>
+                          <a:spcPct val="150000"/>
+                        </a:lnSpc>
+                        <a:buNone/>
+                      </a:pPr>
+                      <a:r>
+                        <a:rPr lang="pl-PL" sz="1200">
+                          <a:effectLst/>
+                        </a:rPr>
+                        <a:t>120 Hz</a:t>
+                      </a:r>
+                      <a:endParaRPr lang="pl-PL" sz="1200">
+                        <a:effectLst/>
+                        <a:latin typeface="Arial" panose="020B0604020202020204" pitchFamily="34" charset="0"/>
+                        <a:ea typeface="Calibri" panose="020F0502020204030204" pitchFamily="34" charset="0"/>
+                        <a:cs typeface="Times New Roman" panose="02020603050405020304" pitchFamily="18" charset="0"/>
+                      </a:endParaRPr>
+                    </a:p>
+                  </a:txBody>
+                  <a:tcPr marL="27488" marR="27488" marT="0" marB="0"/>
+                </a:tc>
+                <a:tc>
+                  <a:txBody>
+                    <a:bodyPr/>
+                    <a:lstStyle/>
+                    <a:p>
+                      <a:pPr algn="just">
+                        <a:lnSpc>
+                          <a:spcPct val="150000"/>
+                        </a:lnSpc>
+                        <a:buNone/>
+                      </a:pPr>
+                      <a:r>
+                        <a:rPr lang="pl-PL" sz="1200">
+                          <a:effectLst/>
+                        </a:rPr>
+                        <a:t>Octa-core Kryo (1 x 3.19 GHz, 4 x 2.8 GHz, 3 x 2.0 GHz)</a:t>
+                      </a:r>
+                      <a:endParaRPr lang="pl-PL" sz="1200">
+                        <a:effectLst/>
+                        <a:latin typeface="Arial" panose="020B0604020202020204" pitchFamily="34" charset="0"/>
+                        <a:ea typeface="Calibri" panose="020F0502020204030204" pitchFamily="34" charset="0"/>
+                        <a:cs typeface="Times New Roman" panose="02020603050405020304" pitchFamily="18" charset="0"/>
+                      </a:endParaRPr>
+                    </a:p>
+                  </a:txBody>
+                  <a:tcPr marL="27488" marR="27488" marT="0" marB="0"/>
+                </a:tc>
+                <a:tc>
+                  <a:txBody>
+                    <a:bodyPr/>
+                    <a:lstStyle/>
+                    <a:p>
+                      <a:pPr algn="just">
+                        <a:lnSpc>
+                          <a:spcPct val="150000"/>
+                        </a:lnSpc>
+                        <a:buNone/>
+                      </a:pPr>
+                      <a:r>
+                        <a:rPr lang="pl-PL" sz="1200">
+                          <a:effectLst/>
+                        </a:rPr>
+                        <a:t>2 x Meta Quest Touch Plus Controllers</a:t>
+                      </a:r>
+                      <a:endParaRPr lang="pl-PL" sz="1200">
+                        <a:effectLst/>
+                        <a:latin typeface="Arial" panose="020B0604020202020204" pitchFamily="34" charset="0"/>
+                        <a:ea typeface="Calibri" panose="020F0502020204030204" pitchFamily="34" charset="0"/>
+                        <a:cs typeface="Times New Roman" panose="02020603050405020304" pitchFamily="18" charset="0"/>
+                      </a:endParaRPr>
+                    </a:p>
+                  </a:txBody>
+                  <a:tcPr marL="27488" marR="27488" marT="0" marB="0"/>
+                </a:tc>
+                <a:tc>
+                  <a:txBody>
+                    <a:bodyPr/>
+                    <a:lstStyle/>
+                    <a:p>
+                      <a:pPr algn="just">
+                        <a:lnSpc>
+                          <a:spcPct val="150000"/>
+                        </a:lnSpc>
+                        <a:buNone/>
+                      </a:pPr>
+                      <a:r>
+                        <a:rPr lang="pl-PL" sz="1200">
+                          <a:effectLst/>
+                        </a:rPr>
+                        <a:t>2.2 h</a:t>
+                      </a:r>
+                      <a:endParaRPr lang="pl-PL" sz="1200">
+                        <a:effectLst/>
+                        <a:latin typeface="Arial" panose="020B0604020202020204" pitchFamily="34" charset="0"/>
+                        <a:ea typeface="Calibri" panose="020F0502020204030204" pitchFamily="34" charset="0"/>
+                        <a:cs typeface="Times New Roman" panose="02020603050405020304" pitchFamily="18" charset="0"/>
+                      </a:endParaRPr>
+                    </a:p>
+                  </a:txBody>
+                  <a:tcPr marL="27488" marR="27488" marT="0" marB="0"/>
+                </a:tc>
+                <a:extLst>
+                  <a:ext uri="{0D108BD9-81ED-4DB2-BD59-A6C34878D82A}">
+                    <a16:rowId xmlns:a16="http://schemas.microsoft.com/office/drawing/2014/main" val="2995885317"/>
+                  </a:ext>
+                </a:extLst>
+              </a:tr>
+              <a:tr h="661908">
+                <a:tc>
+                  <a:txBody>
+                    <a:bodyPr/>
+                    <a:lstStyle/>
+                    <a:p>
+                      <a:pPr algn="just">
+                        <a:lnSpc>
+                          <a:spcPct val="150000"/>
+                        </a:lnSpc>
+                        <a:buNone/>
+                      </a:pPr>
+                      <a:r>
+                        <a:rPr lang="pl-PL" sz="1200" dirty="0">
+                          <a:effectLst/>
+                        </a:rPr>
+                        <a:t>Samsung Galaxy XR</a:t>
+                      </a:r>
+                      <a:endParaRPr lang="pl-PL" sz="1200" dirty="0">
+                        <a:effectLst/>
+                        <a:latin typeface="Arial" panose="020B0604020202020204" pitchFamily="34" charset="0"/>
+                        <a:ea typeface="Calibri" panose="020F0502020204030204" pitchFamily="34" charset="0"/>
+                        <a:cs typeface="Times New Roman" panose="02020603050405020304" pitchFamily="18" charset="0"/>
+                      </a:endParaRPr>
+                    </a:p>
+                  </a:txBody>
+                  <a:tcPr marL="27488" marR="27488" marT="0" marB="0"/>
+                </a:tc>
+                <a:tc>
+                  <a:txBody>
+                    <a:bodyPr/>
+                    <a:lstStyle/>
+                    <a:p>
+                      <a:pPr algn="just">
+                        <a:lnSpc>
+                          <a:spcPct val="150000"/>
+                        </a:lnSpc>
+                        <a:buNone/>
+                      </a:pPr>
+                      <a:r>
+                        <a:rPr lang="pl-PL" sz="1200">
+                          <a:effectLst/>
+                        </a:rPr>
+                        <a:t>Autonomiczne</a:t>
+                      </a:r>
+                      <a:endParaRPr lang="pl-PL" sz="1200">
+                        <a:effectLst/>
+                        <a:latin typeface="Arial" panose="020B0604020202020204" pitchFamily="34" charset="0"/>
+                        <a:ea typeface="Calibri" panose="020F0502020204030204" pitchFamily="34" charset="0"/>
+                        <a:cs typeface="Times New Roman" panose="02020603050405020304" pitchFamily="18" charset="0"/>
+                      </a:endParaRPr>
+                    </a:p>
+                  </a:txBody>
+                  <a:tcPr marL="27488" marR="27488" marT="0" marB="0"/>
+                </a:tc>
+                <a:tc>
+                  <a:txBody>
+                    <a:bodyPr/>
+                    <a:lstStyle/>
+                    <a:p>
+                      <a:pPr algn="just">
+                        <a:lnSpc>
+                          <a:spcPct val="150000"/>
+                        </a:lnSpc>
+                        <a:buNone/>
+                      </a:pPr>
+                      <a:r>
+                        <a:rPr lang="pl-PL" sz="1200">
+                          <a:effectLst/>
+                        </a:rPr>
+                        <a:t>$2048</a:t>
+                      </a:r>
+                      <a:endParaRPr lang="pl-PL" sz="1200">
+                        <a:effectLst/>
+                        <a:latin typeface="Arial" panose="020B0604020202020204" pitchFamily="34" charset="0"/>
+                        <a:ea typeface="Calibri" panose="020F0502020204030204" pitchFamily="34" charset="0"/>
+                        <a:cs typeface="Times New Roman" panose="02020603050405020304" pitchFamily="18" charset="0"/>
+                      </a:endParaRPr>
+                    </a:p>
+                  </a:txBody>
+                  <a:tcPr marL="27488" marR="27488" marT="0" marB="0"/>
+                </a:tc>
+                <a:tc>
+                  <a:txBody>
+                    <a:bodyPr/>
+                    <a:lstStyle/>
+                    <a:p>
+                      <a:pPr algn="just">
+                        <a:lnSpc>
+                          <a:spcPct val="150000"/>
+                        </a:lnSpc>
+                        <a:buNone/>
+                      </a:pPr>
+                      <a:r>
+                        <a:rPr lang="pl-PL" sz="1200" dirty="0">
+                          <a:effectLst/>
+                        </a:rPr>
+                        <a:t>3552x3840</a:t>
+                      </a:r>
+                      <a:endParaRPr lang="pl-PL" sz="1200" dirty="0">
+                        <a:effectLst/>
+                        <a:latin typeface="Arial" panose="020B0604020202020204" pitchFamily="34" charset="0"/>
+                        <a:ea typeface="Calibri" panose="020F0502020204030204" pitchFamily="34" charset="0"/>
+                        <a:cs typeface="Times New Roman" panose="02020603050405020304" pitchFamily="18" charset="0"/>
+                      </a:endParaRPr>
+                    </a:p>
+                  </a:txBody>
+                  <a:tcPr marL="27488" marR="27488" marT="0" marB="0"/>
+                </a:tc>
+                <a:tc>
+                  <a:txBody>
+                    <a:bodyPr/>
+                    <a:lstStyle/>
+                    <a:p>
+                      <a:pPr algn="just">
+                        <a:lnSpc>
+                          <a:spcPct val="150000"/>
+                        </a:lnSpc>
+                        <a:buNone/>
+                      </a:pPr>
+                      <a:r>
+                        <a:rPr lang="pl-PL" sz="1200">
+                          <a:effectLst/>
+                        </a:rPr>
+                        <a:t>90 Hz</a:t>
+                      </a:r>
+                      <a:endParaRPr lang="pl-PL" sz="1200">
+                        <a:effectLst/>
+                        <a:latin typeface="Arial" panose="020B0604020202020204" pitchFamily="34" charset="0"/>
+                        <a:ea typeface="Calibri" panose="020F0502020204030204" pitchFamily="34" charset="0"/>
+                        <a:cs typeface="Times New Roman" panose="02020603050405020304" pitchFamily="18" charset="0"/>
+                      </a:endParaRPr>
+                    </a:p>
+                  </a:txBody>
+                  <a:tcPr marL="27488" marR="27488" marT="0" marB="0"/>
+                </a:tc>
+                <a:tc>
+                  <a:txBody>
+                    <a:bodyPr/>
+                    <a:lstStyle/>
+                    <a:p>
+                      <a:pPr algn="just">
+                        <a:lnSpc>
+                          <a:spcPct val="150000"/>
+                        </a:lnSpc>
+                        <a:buNone/>
+                      </a:pPr>
+                      <a:r>
+                        <a:rPr lang="pl-PL" sz="1200">
+                          <a:effectLst/>
+                        </a:rPr>
+                        <a:t>Snapdragon XR2+ Gen 2</a:t>
+                      </a:r>
+                      <a:endParaRPr lang="pl-PL" sz="1200">
+                        <a:effectLst/>
+                        <a:latin typeface="Arial" panose="020B0604020202020204" pitchFamily="34" charset="0"/>
+                        <a:ea typeface="Calibri" panose="020F0502020204030204" pitchFamily="34" charset="0"/>
+                        <a:cs typeface="Times New Roman" panose="02020603050405020304" pitchFamily="18" charset="0"/>
+                      </a:endParaRPr>
+                    </a:p>
+                  </a:txBody>
+                  <a:tcPr marL="27488" marR="27488" marT="0" marB="0"/>
+                </a:tc>
+                <a:tc>
+                  <a:txBody>
+                    <a:bodyPr/>
+                    <a:lstStyle/>
+                    <a:p>
+                      <a:pPr algn="just">
+                        <a:lnSpc>
+                          <a:spcPct val="150000"/>
+                        </a:lnSpc>
+                        <a:buNone/>
+                      </a:pPr>
+                      <a:r>
+                        <a:rPr lang="pl-PL" sz="1200">
+                          <a:effectLst/>
+                        </a:rPr>
+                        <a:t>2 x Samsung Galaxy XR Controller</a:t>
+                      </a:r>
+                      <a:endParaRPr lang="pl-PL" sz="1200">
+                        <a:effectLst/>
+                        <a:latin typeface="Arial" panose="020B0604020202020204" pitchFamily="34" charset="0"/>
+                        <a:ea typeface="Calibri" panose="020F0502020204030204" pitchFamily="34" charset="0"/>
+                        <a:cs typeface="Times New Roman" panose="02020603050405020304" pitchFamily="18" charset="0"/>
+                      </a:endParaRPr>
+                    </a:p>
+                  </a:txBody>
+                  <a:tcPr marL="27488" marR="27488" marT="0" marB="0"/>
+                </a:tc>
+                <a:tc>
+                  <a:txBody>
+                    <a:bodyPr/>
+                    <a:lstStyle/>
+                    <a:p>
+                      <a:pPr algn="just">
+                        <a:lnSpc>
+                          <a:spcPct val="150000"/>
+                        </a:lnSpc>
+                        <a:buNone/>
+                      </a:pPr>
+                      <a:r>
+                        <a:rPr lang="pl-PL" sz="1200" dirty="0">
+                          <a:effectLst/>
+                        </a:rPr>
+                        <a:t>2 h</a:t>
+                      </a:r>
+                      <a:endParaRPr lang="pl-PL" sz="1200" dirty="0">
+                        <a:effectLst/>
+                        <a:latin typeface="Arial" panose="020B0604020202020204" pitchFamily="34" charset="0"/>
+                        <a:ea typeface="Calibri" panose="020F0502020204030204" pitchFamily="34" charset="0"/>
+                        <a:cs typeface="Times New Roman" panose="02020603050405020304" pitchFamily="18" charset="0"/>
+                      </a:endParaRPr>
+                    </a:p>
+                  </a:txBody>
+                  <a:tcPr marL="27488" marR="27488" marT="0" marB="0"/>
+                </a:tc>
+                <a:extLst>
+                  <a:ext uri="{0D108BD9-81ED-4DB2-BD59-A6C34878D82A}">
+                    <a16:rowId xmlns:a16="http://schemas.microsoft.com/office/drawing/2014/main" val="1280808134"/>
+                  </a:ext>
+                </a:extLst>
+              </a:tr>
+              <a:tr h="309064">
+                <a:tc>
+                  <a:txBody>
+                    <a:bodyPr/>
+                    <a:lstStyle/>
+                    <a:p>
+                      <a:pPr algn="just">
+                        <a:lnSpc>
+                          <a:spcPct val="150000"/>
+                        </a:lnSpc>
+                        <a:buNone/>
+                      </a:pPr>
+                      <a:r>
+                        <a:rPr lang="pl-PL" sz="1200">
+                          <a:effectLst/>
+                        </a:rPr>
+                        <a:t>Valve Index</a:t>
+                      </a:r>
+                      <a:endParaRPr lang="pl-PL" sz="1200">
+                        <a:effectLst/>
+                        <a:latin typeface="Arial" panose="020B0604020202020204" pitchFamily="34" charset="0"/>
+                        <a:ea typeface="Calibri" panose="020F0502020204030204" pitchFamily="34" charset="0"/>
+                        <a:cs typeface="Times New Roman" panose="02020603050405020304" pitchFamily="18" charset="0"/>
+                      </a:endParaRPr>
+                    </a:p>
+                  </a:txBody>
+                  <a:tcPr marL="27488" marR="27488" marT="0" marB="0"/>
+                </a:tc>
+                <a:tc>
+                  <a:txBody>
+                    <a:bodyPr/>
+                    <a:lstStyle/>
+                    <a:p>
+                      <a:pPr algn="just">
+                        <a:lnSpc>
+                          <a:spcPct val="150000"/>
+                        </a:lnSpc>
+                        <a:buNone/>
+                      </a:pPr>
+                      <a:r>
+                        <a:rPr lang="pl-PL" sz="1200">
+                          <a:effectLst/>
+                        </a:rPr>
+                        <a:t>Wymagają PC</a:t>
+                      </a:r>
+                      <a:endParaRPr lang="pl-PL" sz="1200">
+                        <a:effectLst/>
+                        <a:latin typeface="Arial" panose="020B0604020202020204" pitchFamily="34" charset="0"/>
+                        <a:ea typeface="Calibri" panose="020F0502020204030204" pitchFamily="34" charset="0"/>
+                        <a:cs typeface="Times New Roman" panose="02020603050405020304" pitchFamily="18" charset="0"/>
+                      </a:endParaRPr>
+                    </a:p>
+                  </a:txBody>
+                  <a:tcPr marL="27488" marR="27488" marT="0" marB="0"/>
+                </a:tc>
+                <a:tc>
+                  <a:txBody>
+                    <a:bodyPr/>
+                    <a:lstStyle/>
+                    <a:p>
+                      <a:pPr algn="just">
+                        <a:lnSpc>
+                          <a:spcPct val="150000"/>
+                        </a:lnSpc>
+                        <a:buNone/>
+                      </a:pPr>
+                      <a:r>
+                        <a:rPr lang="pl-PL" sz="1200">
+                          <a:effectLst/>
+                        </a:rPr>
+                        <a:t>$999</a:t>
+                      </a:r>
+                      <a:endParaRPr lang="pl-PL" sz="1200">
+                        <a:effectLst/>
+                        <a:latin typeface="Arial" panose="020B0604020202020204" pitchFamily="34" charset="0"/>
+                        <a:ea typeface="Calibri" panose="020F0502020204030204" pitchFamily="34" charset="0"/>
+                        <a:cs typeface="Times New Roman" panose="02020603050405020304" pitchFamily="18" charset="0"/>
+                      </a:endParaRPr>
+                    </a:p>
+                  </a:txBody>
+                  <a:tcPr marL="27488" marR="27488" marT="0" marB="0"/>
+                </a:tc>
+                <a:tc>
+                  <a:txBody>
+                    <a:bodyPr/>
+                    <a:lstStyle/>
+                    <a:p>
+                      <a:pPr algn="just">
+                        <a:lnSpc>
+                          <a:spcPct val="150000"/>
+                        </a:lnSpc>
+                        <a:buNone/>
+                      </a:pPr>
+                      <a:r>
+                        <a:rPr lang="pl-PL" sz="1200" dirty="0">
+                          <a:effectLst/>
+                        </a:rPr>
+                        <a:t>1440x1600</a:t>
+                      </a:r>
+                      <a:endParaRPr lang="pl-PL" sz="1200" dirty="0">
+                        <a:effectLst/>
+                        <a:latin typeface="Arial" panose="020B0604020202020204" pitchFamily="34" charset="0"/>
+                        <a:ea typeface="Calibri" panose="020F0502020204030204" pitchFamily="34" charset="0"/>
+                        <a:cs typeface="Times New Roman" panose="02020603050405020304" pitchFamily="18" charset="0"/>
+                      </a:endParaRPr>
+                    </a:p>
+                  </a:txBody>
+                  <a:tcPr marL="27488" marR="27488" marT="0" marB="0"/>
+                </a:tc>
+                <a:tc>
+                  <a:txBody>
+                    <a:bodyPr/>
+                    <a:lstStyle/>
+                    <a:p>
+                      <a:pPr algn="just">
+                        <a:lnSpc>
+                          <a:spcPct val="150000"/>
+                        </a:lnSpc>
+                        <a:buNone/>
+                      </a:pPr>
+                      <a:r>
+                        <a:rPr lang="pl-PL" sz="1200">
+                          <a:effectLst/>
+                        </a:rPr>
+                        <a:t>144 Hz</a:t>
+                      </a:r>
+                      <a:endParaRPr lang="pl-PL" sz="1200">
+                        <a:effectLst/>
+                        <a:latin typeface="Arial" panose="020B0604020202020204" pitchFamily="34" charset="0"/>
+                        <a:ea typeface="Calibri" panose="020F0502020204030204" pitchFamily="34" charset="0"/>
+                        <a:cs typeface="Times New Roman" panose="02020603050405020304" pitchFamily="18" charset="0"/>
+                      </a:endParaRPr>
+                    </a:p>
+                  </a:txBody>
+                  <a:tcPr marL="27488" marR="27488" marT="0" marB="0"/>
+                </a:tc>
+                <a:tc>
+                  <a:txBody>
+                    <a:bodyPr/>
+                    <a:lstStyle/>
+                    <a:p>
+                      <a:pPr algn="just">
+                        <a:lnSpc>
+                          <a:spcPct val="150000"/>
+                        </a:lnSpc>
+                        <a:buNone/>
+                      </a:pPr>
+                      <a:r>
+                        <a:rPr lang="pl-PL" sz="1200">
+                          <a:effectLst/>
+                        </a:rPr>
+                        <a:t> </a:t>
+                      </a:r>
+                      <a:endParaRPr lang="pl-PL" sz="1200">
+                        <a:effectLst/>
+                        <a:latin typeface="Arial" panose="020B0604020202020204" pitchFamily="34" charset="0"/>
+                        <a:ea typeface="Calibri" panose="020F0502020204030204" pitchFamily="34" charset="0"/>
+                        <a:cs typeface="Times New Roman" panose="02020603050405020304" pitchFamily="18" charset="0"/>
+                      </a:endParaRPr>
+                    </a:p>
+                  </a:txBody>
+                  <a:tcPr marL="27488" marR="27488" marT="0" marB="0"/>
+                </a:tc>
+                <a:tc>
+                  <a:txBody>
+                    <a:bodyPr/>
+                    <a:lstStyle/>
+                    <a:p>
+                      <a:pPr algn="just">
+                        <a:lnSpc>
+                          <a:spcPct val="150000"/>
+                        </a:lnSpc>
+                        <a:buNone/>
+                      </a:pPr>
+                      <a:r>
+                        <a:rPr lang="pl-PL" sz="1200">
+                          <a:effectLst/>
+                        </a:rPr>
+                        <a:t>2 x Index Controller</a:t>
+                      </a:r>
+                      <a:endParaRPr lang="pl-PL" sz="1200">
+                        <a:effectLst/>
+                        <a:latin typeface="Arial" panose="020B0604020202020204" pitchFamily="34" charset="0"/>
+                        <a:ea typeface="Calibri" panose="020F0502020204030204" pitchFamily="34" charset="0"/>
+                        <a:cs typeface="Times New Roman" panose="02020603050405020304" pitchFamily="18" charset="0"/>
+                      </a:endParaRPr>
+                    </a:p>
+                  </a:txBody>
+                  <a:tcPr marL="27488" marR="27488" marT="0" marB="0"/>
+                </a:tc>
+                <a:tc>
+                  <a:txBody>
+                    <a:bodyPr/>
+                    <a:lstStyle/>
+                    <a:p>
+                      <a:pPr algn="just">
+                        <a:lnSpc>
+                          <a:spcPct val="150000"/>
+                        </a:lnSpc>
+                        <a:buNone/>
+                      </a:pPr>
+                      <a:r>
+                        <a:rPr lang="pl-PL" sz="1200">
+                          <a:effectLst/>
+                        </a:rPr>
+                        <a:t> </a:t>
+                      </a:r>
+                      <a:endParaRPr lang="pl-PL" sz="1200">
+                        <a:effectLst/>
+                        <a:latin typeface="Arial" panose="020B0604020202020204" pitchFamily="34" charset="0"/>
+                        <a:ea typeface="Calibri" panose="020F0502020204030204" pitchFamily="34" charset="0"/>
+                        <a:cs typeface="Times New Roman" panose="02020603050405020304" pitchFamily="18" charset="0"/>
+                      </a:endParaRPr>
+                    </a:p>
+                  </a:txBody>
+                  <a:tcPr marL="27488" marR="27488" marT="0" marB="0"/>
+                </a:tc>
+                <a:extLst>
+                  <a:ext uri="{0D108BD9-81ED-4DB2-BD59-A6C34878D82A}">
+                    <a16:rowId xmlns:a16="http://schemas.microsoft.com/office/drawing/2014/main" val="4172636155"/>
+                  </a:ext>
+                </a:extLst>
+              </a:tr>
+              <a:tr h="661908">
+                <a:tc>
+                  <a:txBody>
+                    <a:bodyPr/>
+                    <a:lstStyle/>
+                    <a:p>
+                      <a:pPr algn="just">
+                        <a:lnSpc>
+                          <a:spcPct val="150000"/>
+                        </a:lnSpc>
+                        <a:buNone/>
+                      </a:pPr>
+                      <a:r>
+                        <a:rPr lang="pl-PL" sz="1200">
+                          <a:effectLst/>
+                        </a:rPr>
+                        <a:t>Apple Vision Pro M5</a:t>
+                      </a:r>
+                      <a:endParaRPr lang="pl-PL" sz="1200">
+                        <a:effectLst/>
+                        <a:latin typeface="Arial" panose="020B0604020202020204" pitchFamily="34" charset="0"/>
+                        <a:ea typeface="Calibri" panose="020F0502020204030204" pitchFamily="34" charset="0"/>
+                        <a:cs typeface="Times New Roman" panose="02020603050405020304" pitchFamily="18" charset="0"/>
+                      </a:endParaRPr>
+                    </a:p>
+                  </a:txBody>
+                  <a:tcPr marL="27488" marR="27488" marT="0" marB="0"/>
+                </a:tc>
+                <a:tc>
+                  <a:txBody>
+                    <a:bodyPr/>
+                    <a:lstStyle/>
+                    <a:p>
+                      <a:pPr algn="just">
+                        <a:lnSpc>
+                          <a:spcPct val="150000"/>
+                        </a:lnSpc>
+                        <a:buNone/>
+                      </a:pPr>
+                      <a:r>
+                        <a:rPr lang="pl-PL" sz="1200" dirty="0">
+                          <a:effectLst/>
+                        </a:rPr>
+                        <a:t>Autonomiczne</a:t>
+                      </a:r>
+                      <a:endParaRPr lang="pl-PL" sz="1200" dirty="0">
+                        <a:effectLst/>
+                        <a:latin typeface="Arial" panose="020B0604020202020204" pitchFamily="34" charset="0"/>
+                        <a:ea typeface="Calibri" panose="020F0502020204030204" pitchFamily="34" charset="0"/>
+                        <a:cs typeface="Times New Roman" panose="02020603050405020304" pitchFamily="18" charset="0"/>
+                      </a:endParaRPr>
+                    </a:p>
+                  </a:txBody>
+                  <a:tcPr marL="27488" marR="27488" marT="0" marB="0"/>
+                </a:tc>
+                <a:tc>
+                  <a:txBody>
+                    <a:bodyPr/>
+                    <a:lstStyle/>
+                    <a:p>
+                      <a:pPr algn="just">
+                        <a:lnSpc>
+                          <a:spcPct val="150000"/>
+                        </a:lnSpc>
+                        <a:buNone/>
+                      </a:pPr>
+                      <a:r>
+                        <a:rPr lang="pl-PL" sz="1200">
+                          <a:effectLst/>
+                        </a:rPr>
+                        <a:t>$3499</a:t>
+                      </a:r>
+                      <a:endParaRPr lang="pl-PL" sz="1200">
+                        <a:effectLst/>
+                        <a:latin typeface="Arial" panose="020B0604020202020204" pitchFamily="34" charset="0"/>
+                        <a:ea typeface="Calibri" panose="020F0502020204030204" pitchFamily="34" charset="0"/>
+                        <a:cs typeface="Times New Roman" panose="02020603050405020304" pitchFamily="18" charset="0"/>
+                      </a:endParaRPr>
+                    </a:p>
+                  </a:txBody>
+                  <a:tcPr marL="27488" marR="27488" marT="0" marB="0"/>
+                </a:tc>
+                <a:tc>
+                  <a:txBody>
+                    <a:bodyPr/>
+                    <a:lstStyle/>
+                    <a:p>
+                      <a:pPr algn="just">
+                        <a:lnSpc>
+                          <a:spcPct val="150000"/>
+                        </a:lnSpc>
+                        <a:buNone/>
+                      </a:pPr>
+                      <a:r>
+                        <a:rPr lang="pl-PL" sz="1200" dirty="0">
+                          <a:effectLst/>
+                        </a:rPr>
+                        <a:t>3660x3200</a:t>
+                      </a:r>
+                      <a:endParaRPr lang="pl-PL" sz="1200" dirty="0">
+                        <a:effectLst/>
+                        <a:latin typeface="Arial" panose="020B0604020202020204" pitchFamily="34" charset="0"/>
+                        <a:ea typeface="Calibri" panose="020F0502020204030204" pitchFamily="34" charset="0"/>
+                        <a:cs typeface="Times New Roman" panose="02020603050405020304" pitchFamily="18" charset="0"/>
+                      </a:endParaRPr>
+                    </a:p>
+                  </a:txBody>
+                  <a:tcPr marL="27488" marR="27488" marT="0" marB="0"/>
+                </a:tc>
+                <a:tc>
+                  <a:txBody>
+                    <a:bodyPr/>
+                    <a:lstStyle/>
+                    <a:p>
+                      <a:pPr algn="just">
+                        <a:lnSpc>
+                          <a:spcPct val="150000"/>
+                        </a:lnSpc>
+                        <a:buNone/>
+                      </a:pPr>
+                      <a:r>
+                        <a:rPr lang="pl-PL" sz="1200" dirty="0">
+                          <a:effectLst/>
+                        </a:rPr>
+                        <a:t>120 </a:t>
+                      </a:r>
+                      <a:r>
+                        <a:rPr lang="pl-PL" sz="1200" dirty="0" err="1">
+                          <a:effectLst/>
+                        </a:rPr>
+                        <a:t>Hz</a:t>
+                      </a:r>
+                      <a:endParaRPr lang="pl-PL" sz="1200" dirty="0">
+                        <a:effectLst/>
+                        <a:latin typeface="Arial" panose="020B0604020202020204" pitchFamily="34" charset="0"/>
+                        <a:ea typeface="Calibri" panose="020F0502020204030204" pitchFamily="34" charset="0"/>
+                        <a:cs typeface="Times New Roman" panose="02020603050405020304" pitchFamily="18" charset="0"/>
+                      </a:endParaRPr>
+                    </a:p>
+                  </a:txBody>
+                  <a:tcPr marL="27488" marR="27488" marT="0" marB="0"/>
+                </a:tc>
+                <a:tc>
+                  <a:txBody>
+                    <a:bodyPr/>
+                    <a:lstStyle/>
+                    <a:p>
+                      <a:pPr algn="just">
+                        <a:lnSpc>
+                          <a:spcPct val="150000"/>
+                        </a:lnSpc>
+                        <a:buNone/>
+                      </a:pPr>
+                      <a:r>
+                        <a:rPr lang="pl-PL" sz="1200" dirty="0">
+                          <a:effectLst/>
+                        </a:rPr>
+                        <a:t>10-core (4 x 4.6 GHz, 6 x 3.0 GHz)</a:t>
+                      </a:r>
+                      <a:endParaRPr lang="pl-PL" sz="1200" dirty="0">
+                        <a:effectLst/>
+                        <a:latin typeface="Arial" panose="020B0604020202020204" pitchFamily="34" charset="0"/>
+                        <a:ea typeface="Calibri" panose="020F0502020204030204" pitchFamily="34" charset="0"/>
+                        <a:cs typeface="Times New Roman" panose="02020603050405020304" pitchFamily="18" charset="0"/>
+                      </a:endParaRPr>
+                    </a:p>
+                  </a:txBody>
+                  <a:tcPr marL="27488" marR="27488" marT="0" marB="0"/>
+                </a:tc>
+                <a:tc>
+                  <a:txBody>
+                    <a:bodyPr/>
+                    <a:lstStyle/>
+                    <a:p>
+                      <a:pPr algn="just">
+                        <a:lnSpc>
+                          <a:spcPct val="150000"/>
+                        </a:lnSpc>
+                        <a:buNone/>
+                      </a:pPr>
+                      <a:r>
+                        <a:rPr lang="pl-PL" sz="1200">
+                          <a:effectLst/>
+                        </a:rPr>
+                        <a:t> </a:t>
+                      </a:r>
+                      <a:endParaRPr lang="pl-PL" sz="1200">
+                        <a:effectLst/>
+                        <a:latin typeface="Arial" panose="020B0604020202020204" pitchFamily="34" charset="0"/>
+                        <a:ea typeface="Calibri" panose="020F0502020204030204" pitchFamily="34" charset="0"/>
+                        <a:cs typeface="Times New Roman" panose="02020603050405020304" pitchFamily="18" charset="0"/>
+                      </a:endParaRPr>
+                    </a:p>
+                  </a:txBody>
+                  <a:tcPr marL="27488" marR="27488" marT="0" marB="0"/>
+                </a:tc>
+                <a:tc>
+                  <a:txBody>
+                    <a:bodyPr/>
+                    <a:lstStyle/>
+                    <a:p>
+                      <a:pPr algn="just">
+                        <a:lnSpc>
+                          <a:spcPct val="150000"/>
+                        </a:lnSpc>
+                        <a:buNone/>
+                      </a:pPr>
+                      <a:r>
+                        <a:rPr lang="pl-PL" sz="1200">
+                          <a:effectLst/>
+                        </a:rPr>
+                        <a:t>2.5 h</a:t>
+                      </a:r>
+                      <a:endParaRPr lang="pl-PL" sz="1200">
+                        <a:effectLst/>
+                        <a:latin typeface="Arial" panose="020B0604020202020204" pitchFamily="34" charset="0"/>
+                        <a:ea typeface="Calibri" panose="020F0502020204030204" pitchFamily="34" charset="0"/>
+                        <a:cs typeface="Times New Roman" panose="02020603050405020304" pitchFamily="18" charset="0"/>
+                      </a:endParaRPr>
+                    </a:p>
+                  </a:txBody>
+                  <a:tcPr marL="27488" marR="27488" marT="0" marB="0"/>
+                </a:tc>
+                <a:extLst>
+                  <a:ext uri="{0D108BD9-81ED-4DB2-BD59-A6C34878D82A}">
+                    <a16:rowId xmlns:a16="http://schemas.microsoft.com/office/drawing/2014/main" val="840387838"/>
+                  </a:ext>
+                </a:extLst>
+              </a:tr>
+              <a:tr h="661908">
+                <a:tc>
+                  <a:txBody>
+                    <a:bodyPr/>
+                    <a:lstStyle/>
+                    <a:p>
+                      <a:pPr algn="just">
+                        <a:lnSpc>
+                          <a:spcPct val="150000"/>
+                        </a:lnSpc>
+                        <a:buNone/>
+                      </a:pPr>
+                      <a:r>
+                        <a:rPr lang="pl-PL" sz="1200">
+                          <a:effectLst/>
+                        </a:rPr>
+                        <a:t>Playstation VR 2</a:t>
+                      </a:r>
+                      <a:endParaRPr lang="pl-PL" sz="1200">
+                        <a:effectLst/>
+                        <a:latin typeface="Arial" panose="020B0604020202020204" pitchFamily="34" charset="0"/>
+                        <a:ea typeface="Calibri" panose="020F0502020204030204" pitchFamily="34" charset="0"/>
+                        <a:cs typeface="Times New Roman" panose="02020603050405020304" pitchFamily="18" charset="0"/>
+                      </a:endParaRPr>
+                    </a:p>
+                  </a:txBody>
+                  <a:tcPr marL="27488" marR="27488" marT="0" marB="0"/>
+                </a:tc>
+                <a:tc>
+                  <a:txBody>
+                    <a:bodyPr/>
+                    <a:lstStyle/>
+                    <a:p>
+                      <a:pPr algn="just">
+                        <a:lnSpc>
+                          <a:spcPct val="150000"/>
+                        </a:lnSpc>
+                        <a:buNone/>
+                      </a:pPr>
+                      <a:r>
+                        <a:rPr lang="pl-PL" sz="1200">
+                          <a:effectLst/>
+                        </a:rPr>
+                        <a:t>Wymagany PC</a:t>
+                      </a:r>
+                      <a:endParaRPr lang="pl-PL" sz="1200">
+                        <a:effectLst/>
+                        <a:latin typeface="Arial" panose="020B0604020202020204" pitchFamily="34" charset="0"/>
+                        <a:ea typeface="Calibri" panose="020F0502020204030204" pitchFamily="34" charset="0"/>
+                        <a:cs typeface="Times New Roman" panose="02020603050405020304" pitchFamily="18" charset="0"/>
+                      </a:endParaRPr>
+                    </a:p>
+                  </a:txBody>
+                  <a:tcPr marL="27488" marR="27488" marT="0" marB="0"/>
+                </a:tc>
+                <a:tc>
+                  <a:txBody>
+                    <a:bodyPr/>
+                    <a:lstStyle/>
+                    <a:p>
+                      <a:pPr algn="just">
+                        <a:lnSpc>
+                          <a:spcPct val="150000"/>
+                        </a:lnSpc>
+                        <a:buNone/>
+                      </a:pPr>
+                      <a:r>
+                        <a:rPr lang="pl-PL" sz="1200">
+                          <a:effectLst/>
+                        </a:rPr>
+                        <a:t>$399</a:t>
+                      </a:r>
+                      <a:endParaRPr lang="pl-PL" sz="1200">
+                        <a:effectLst/>
+                        <a:latin typeface="Arial" panose="020B0604020202020204" pitchFamily="34" charset="0"/>
+                        <a:ea typeface="Calibri" panose="020F0502020204030204" pitchFamily="34" charset="0"/>
+                        <a:cs typeface="Times New Roman" panose="02020603050405020304" pitchFamily="18" charset="0"/>
+                      </a:endParaRPr>
+                    </a:p>
+                  </a:txBody>
+                  <a:tcPr marL="27488" marR="27488" marT="0" marB="0"/>
+                </a:tc>
+                <a:tc>
+                  <a:txBody>
+                    <a:bodyPr/>
+                    <a:lstStyle/>
+                    <a:p>
+                      <a:pPr algn="just">
+                        <a:lnSpc>
+                          <a:spcPct val="150000"/>
+                        </a:lnSpc>
+                        <a:buNone/>
+                      </a:pPr>
+                      <a:r>
+                        <a:rPr lang="pl-PL" sz="1200">
+                          <a:effectLst/>
+                        </a:rPr>
+                        <a:t>2000X2040</a:t>
+                      </a:r>
+                      <a:endParaRPr lang="pl-PL" sz="1200">
+                        <a:effectLst/>
+                        <a:latin typeface="Arial" panose="020B0604020202020204" pitchFamily="34" charset="0"/>
+                        <a:ea typeface="Calibri" panose="020F0502020204030204" pitchFamily="34" charset="0"/>
+                        <a:cs typeface="Times New Roman" panose="02020603050405020304" pitchFamily="18" charset="0"/>
+                      </a:endParaRPr>
+                    </a:p>
+                  </a:txBody>
+                  <a:tcPr marL="27488" marR="27488" marT="0" marB="0"/>
+                </a:tc>
+                <a:tc>
+                  <a:txBody>
+                    <a:bodyPr/>
+                    <a:lstStyle/>
+                    <a:p>
+                      <a:pPr algn="just">
+                        <a:lnSpc>
+                          <a:spcPct val="150000"/>
+                        </a:lnSpc>
+                        <a:buNone/>
+                      </a:pPr>
+                      <a:r>
+                        <a:rPr lang="pl-PL" sz="1200">
+                          <a:effectLst/>
+                        </a:rPr>
+                        <a:t>120 Hz</a:t>
+                      </a:r>
+                      <a:endParaRPr lang="pl-PL" sz="1200">
+                        <a:effectLst/>
+                        <a:latin typeface="Arial" panose="020B0604020202020204" pitchFamily="34" charset="0"/>
+                        <a:ea typeface="Calibri" panose="020F0502020204030204" pitchFamily="34" charset="0"/>
+                        <a:cs typeface="Times New Roman" panose="02020603050405020304" pitchFamily="18" charset="0"/>
+                      </a:endParaRPr>
+                    </a:p>
+                  </a:txBody>
+                  <a:tcPr marL="27488" marR="27488" marT="0" marB="0"/>
+                </a:tc>
+                <a:tc>
+                  <a:txBody>
+                    <a:bodyPr/>
+                    <a:lstStyle/>
+                    <a:p>
+                      <a:pPr algn="just">
+                        <a:lnSpc>
+                          <a:spcPct val="150000"/>
+                        </a:lnSpc>
+                        <a:buNone/>
+                      </a:pPr>
+                      <a:r>
+                        <a:rPr lang="pl-PL" sz="1200" dirty="0">
+                          <a:effectLst/>
+                        </a:rPr>
+                        <a:t> </a:t>
+                      </a:r>
+                      <a:endParaRPr lang="pl-PL" sz="1200" dirty="0">
+                        <a:effectLst/>
+                        <a:latin typeface="Arial" panose="020B0604020202020204" pitchFamily="34" charset="0"/>
+                        <a:ea typeface="Calibri" panose="020F0502020204030204" pitchFamily="34" charset="0"/>
+                        <a:cs typeface="Times New Roman" panose="02020603050405020304" pitchFamily="18" charset="0"/>
+                      </a:endParaRPr>
+                    </a:p>
+                  </a:txBody>
+                  <a:tcPr marL="27488" marR="27488" marT="0" marB="0"/>
+                </a:tc>
+                <a:tc>
+                  <a:txBody>
+                    <a:bodyPr/>
+                    <a:lstStyle/>
+                    <a:p>
+                      <a:pPr algn="ctr">
+                        <a:lnSpc>
+                          <a:spcPct val="150000"/>
+                        </a:lnSpc>
+                        <a:buNone/>
+                      </a:pPr>
+                      <a:r>
+                        <a:rPr lang="pl-PL" sz="1200" dirty="0">
+                          <a:effectLst/>
+                        </a:rPr>
+                        <a:t>2 x </a:t>
+                      </a:r>
+                      <a:r>
+                        <a:rPr lang="pl-PL" sz="1200" dirty="0" err="1">
+                          <a:effectLst/>
+                        </a:rPr>
+                        <a:t>Playstation</a:t>
+                      </a:r>
+                      <a:r>
+                        <a:rPr lang="pl-PL" sz="1200" dirty="0">
+                          <a:effectLst/>
+                        </a:rPr>
+                        <a:t> VR2 </a:t>
+                      </a:r>
+                      <a:r>
+                        <a:rPr lang="pl-PL" sz="1200" dirty="0" err="1">
+                          <a:effectLst/>
+                        </a:rPr>
+                        <a:t>Sense</a:t>
+                      </a:r>
+                      <a:r>
+                        <a:rPr lang="pl-PL" sz="1200" dirty="0">
+                          <a:effectLst/>
+                        </a:rPr>
+                        <a:t> </a:t>
+                      </a:r>
+                      <a:r>
+                        <a:rPr lang="pl-PL" sz="1200" dirty="0" err="1">
+                          <a:effectLst/>
+                        </a:rPr>
+                        <a:t>Controlle</a:t>
+                      </a:r>
+                      <a:endParaRPr lang="pl-PL" sz="1200" dirty="0">
+                        <a:effectLst/>
+                        <a:latin typeface="Arial" panose="020B0604020202020204" pitchFamily="34" charset="0"/>
+                        <a:ea typeface="Calibri" panose="020F0502020204030204" pitchFamily="34" charset="0"/>
+                        <a:cs typeface="Times New Roman" panose="02020603050405020304" pitchFamily="18" charset="0"/>
+                      </a:endParaRPr>
+                    </a:p>
+                  </a:txBody>
+                  <a:tcPr marL="27488" marR="27488" marT="0" marB="0"/>
+                </a:tc>
+                <a:tc>
+                  <a:txBody>
+                    <a:bodyPr/>
+                    <a:lstStyle/>
+                    <a:p>
+                      <a:pPr algn="just">
+                        <a:lnSpc>
+                          <a:spcPct val="150000"/>
+                        </a:lnSpc>
+                        <a:buNone/>
+                      </a:pPr>
+                      <a:r>
+                        <a:rPr lang="pl-PL" sz="1200" dirty="0">
+                          <a:effectLst/>
+                        </a:rPr>
+                        <a:t> </a:t>
+                      </a:r>
+                      <a:endParaRPr lang="pl-PL" sz="1200" dirty="0">
+                        <a:effectLst/>
+                        <a:latin typeface="Arial" panose="020B0604020202020204" pitchFamily="34" charset="0"/>
+                        <a:ea typeface="Calibri" panose="020F0502020204030204" pitchFamily="34" charset="0"/>
+                        <a:cs typeface="Times New Roman" panose="02020603050405020304" pitchFamily="18" charset="0"/>
+                      </a:endParaRPr>
+                    </a:p>
+                  </a:txBody>
+                  <a:tcPr marL="27488" marR="27488" marT="0" marB="0"/>
+                </a:tc>
+                <a:extLst>
+                  <a:ext uri="{0D108BD9-81ED-4DB2-BD59-A6C34878D82A}">
+                    <a16:rowId xmlns:a16="http://schemas.microsoft.com/office/drawing/2014/main" val="1881099365"/>
+                  </a:ext>
+                </a:extLst>
+              </a:tr>
+            </a:tbl>
+          </a:graphicData>
+        </a:graphic>
+      </p:graphicFrame>
     </p:spTree>
     <p:extLst>
       <p:ext uri="{BB962C8B-B14F-4D97-AF65-F5344CB8AC3E}">

--- a/PrezentacjaAndrzejParuch.pptx
+++ b/PrezentacjaAndrzejParuch.pptx
@@ -8,6 +8,16 @@
     <p:sldId id="256" r:id="rId2"/>
     <p:sldId id="257" r:id="rId3"/>
     <p:sldId id="258" r:id="rId4"/>
+    <p:sldId id="259" r:id="rId5"/>
+    <p:sldId id="260" r:id="rId6"/>
+    <p:sldId id="263" r:id="rId7"/>
+    <p:sldId id="261" r:id="rId8"/>
+    <p:sldId id="262" r:id="rId9"/>
+    <p:sldId id="264" r:id="rId10"/>
+    <p:sldId id="265" r:id="rId11"/>
+    <p:sldId id="266" r:id="rId12"/>
+    <p:sldId id="267" r:id="rId13"/>
+    <p:sldId id="268" r:id="rId14"/>
   </p:sldIdLst>
   <p:sldSz cx="12192000" cy="6858000"/>
   <p:notesSz cx="6858000" cy="9144000"/>
@@ -327,7 +337,7 @@
           <a:p>
             <a:fld id="{CBBFB598-B412-4BAA-8D00-58612E105D61}" type="datetimeFigureOut">
               <a:rPr lang="pl-PL" smtClean="0"/>
-              <a:t>25.11.2025</a:t>
+              <a:t>26.11.2025</a:t>
             </a:fld>
             <a:endParaRPr lang="pl-PL"/>
           </a:p>
@@ -618,7 +628,7 @@
           <a:p>
             <a:fld id="{CBBFB598-B412-4BAA-8D00-58612E105D61}" type="datetimeFigureOut">
               <a:rPr lang="pl-PL" smtClean="0"/>
-              <a:t>25.11.2025</a:t>
+              <a:t>26.11.2025</a:t>
             </a:fld>
             <a:endParaRPr lang="pl-PL"/>
           </a:p>
@@ -877,7 +887,7 @@
           <a:p>
             <a:fld id="{CBBFB598-B412-4BAA-8D00-58612E105D61}" type="datetimeFigureOut">
               <a:rPr lang="pl-PL" smtClean="0"/>
-              <a:t>25.11.2025</a:t>
+              <a:t>26.11.2025</a:t>
             </a:fld>
             <a:endParaRPr lang="pl-PL"/>
           </a:p>
@@ -1346,7 +1356,7 @@
           <a:p>
             <a:fld id="{CBBFB598-B412-4BAA-8D00-58612E105D61}" type="datetimeFigureOut">
               <a:rPr lang="pl-PL" smtClean="0"/>
-              <a:t>25.11.2025</a:t>
+              <a:t>26.11.2025</a:t>
             </a:fld>
             <a:endParaRPr lang="pl-PL"/>
           </a:p>
@@ -1526,7 +1536,7 @@
           <a:p>
             <a:fld id="{CBBFB598-B412-4BAA-8D00-58612E105D61}" type="datetimeFigureOut">
               <a:rPr lang="pl-PL" smtClean="0"/>
-              <a:t>25.11.2025</a:t>
+              <a:t>26.11.2025</a:t>
             </a:fld>
             <a:endParaRPr lang="pl-PL"/>
           </a:p>
@@ -2102,7 +2112,7 @@
           <a:p>
             <a:fld id="{CBBFB598-B412-4BAA-8D00-58612E105D61}" type="datetimeFigureOut">
               <a:rPr lang="pl-PL" smtClean="0"/>
-              <a:t>25.11.2025</a:t>
+              <a:t>26.11.2025</a:t>
             </a:fld>
             <a:endParaRPr lang="pl-PL"/>
           </a:p>
@@ -2434,7 +2444,7 @@
           <a:p>
             <a:fld id="{CBBFB598-B412-4BAA-8D00-58612E105D61}" type="datetimeFigureOut">
               <a:rPr lang="pl-PL" smtClean="0"/>
-              <a:t>25.11.2025</a:t>
+              <a:t>26.11.2025</a:t>
             </a:fld>
             <a:endParaRPr lang="pl-PL"/>
           </a:p>
@@ -2609,7 +2619,7 @@
           <a:p>
             <a:fld id="{CBBFB598-B412-4BAA-8D00-58612E105D61}" type="datetimeFigureOut">
               <a:rPr lang="pl-PL" smtClean="0"/>
-              <a:t>25.11.2025</a:t>
+              <a:t>26.11.2025</a:t>
             </a:fld>
             <a:endParaRPr lang="pl-PL"/>
           </a:p>
@@ -2789,7 +2799,7 @@
           <a:p>
             <a:fld id="{CBBFB598-B412-4BAA-8D00-58612E105D61}" type="datetimeFigureOut">
               <a:rPr lang="pl-PL" smtClean="0"/>
-              <a:t>25.11.2025</a:t>
+              <a:t>26.11.2025</a:t>
             </a:fld>
             <a:endParaRPr lang="pl-PL"/>
           </a:p>
@@ -2959,7 +2969,7 @@
           <a:p>
             <a:fld id="{CBBFB598-B412-4BAA-8D00-58612E105D61}" type="datetimeFigureOut">
               <a:rPr lang="pl-PL" smtClean="0"/>
-              <a:t>25.11.2025</a:t>
+              <a:t>26.11.2025</a:t>
             </a:fld>
             <a:endParaRPr lang="pl-PL"/>
           </a:p>
@@ -3216,7 +3226,7 @@
           <a:p>
             <a:fld id="{CBBFB598-B412-4BAA-8D00-58612E105D61}" type="datetimeFigureOut">
               <a:rPr lang="pl-PL" smtClean="0"/>
-              <a:t>25.11.2025</a:t>
+              <a:t>26.11.2025</a:t>
             </a:fld>
             <a:endParaRPr lang="pl-PL"/>
           </a:p>
@@ -3508,7 +3518,7 @@
           <a:p>
             <a:fld id="{CBBFB598-B412-4BAA-8D00-58612E105D61}" type="datetimeFigureOut">
               <a:rPr lang="pl-PL" smtClean="0"/>
-              <a:t>25.11.2025</a:t>
+              <a:t>26.11.2025</a:t>
             </a:fld>
             <a:endParaRPr lang="pl-PL"/>
           </a:p>
@@ -3938,7 +3948,7 @@
           <a:p>
             <a:fld id="{CBBFB598-B412-4BAA-8D00-58612E105D61}" type="datetimeFigureOut">
               <a:rPr lang="pl-PL" smtClean="0"/>
-              <a:t>25.11.2025</a:t>
+              <a:t>26.11.2025</a:t>
             </a:fld>
             <a:endParaRPr lang="pl-PL"/>
           </a:p>
@@ -4056,7 +4066,7 @@
           <a:p>
             <a:fld id="{CBBFB598-B412-4BAA-8D00-58612E105D61}" type="datetimeFigureOut">
               <a:rPr lang="pl-PL" smtClean="0"/>
-              <a:t>25.11.2025</a:t>
+              <a:t>26.11.2025</a:t>
             </a:fld>
             <a:endParaRPr lang="pl-PL"/>
           </a:p>
@@ -4151,7 +4161,7 @@
           <a:p>
             <a:fld id="{CBBFB598-B412-4BAA-8D00-58612E105D61}" type="datetimeFigureOut">
               <a:rPr lang="pl-PL" smtClean="0"/>
-              <a:t>25.11.2025</a:t>
+              <a:t>26.11.2025</a:t>
             </a:fld>
             <a:endParaRPr lang="pl-PL"/>
           </a:p>
@@ -4434,7 +4444,7 @@
           <a:p>
             <a:fld id="{CBBFB598-B412-4BAA-8D00-58612E105D61}" type="datetimeFigureOut">
               <a:rPr lang="pl-PL" smtClean="0"/>
-              <a:t>25.11.2025</a:t>
+              <a:t>26.11.2025</a:t>
             </a:fld>
             <a:endParaRPr lang="pl-PL"/>
           </a:p>
@@ -4725,7 +4735,7 @@
           <a:p>
             <a:fld id="{CBBFB598-B412-4BAA-8D00-58612E105D61}" type="datetimeFigureOut">
               <a:rPr lang="pl-PL" smtClean="0"/>
-              <a:t>25.11.2025</a:t>
+              <a:t>26.11.2025</a:t>
             </a:fld>
             <a:endParaRPr lang="pl-PL"/>
           </a:p>
@@ -4956,7 +4966,7 @@
           <a:p>
             <a:fld id="{CBBFB598-B412-4BAA-8D00-58612E105D61}" type="datetimeFigureOut">
               <a:rPr lang="pl-PL" smtClean="0"/>
-              <a:t>25.11.2025</a:t>
+              <a:t>26.11.2025</a:t>
             </a:fld>
             <a:endParaRPr lang="pl-PL"/>
           </a:p>
@@ -5842,6 +5852,614 @@
     <p:extLst>
       <p:ext uri="{BB962C8B-B14F-4D97-AF65-F5344CB8AC3E}">
         <p14:creationId xmlns:p14="http://schemas.microsoft.com/office/powerpoint/2010/main" val="1734390224"/>
+      </p:ext>
+    </p:extLst>
+  </p:cSld>
+  <p:clrMapOvr>
+    <a:masterClrMapping/>
+  </p:clrMapOvr>
+</p:sld>
+</file>
+
+<file path=ppt/slides/slide10.xml><?xml version="1.0" encoding="utf-8"?>
+<p:sld xmlns:a="http://schemas.openxmlformats.org/drawingml/2006/main" xmlns:r="http://schemas.openxmlformats.org/officeDocument/2006/relationships" xmlns:p="http://schemas.openxmlformats.org/presentationml/2006/main">
+  <p:cSld>
+    <p:spTree>
+      <p:nvGrpSpPr>
+        <p:cNvPr id="1" name="">
+          <a:extLst>
+            <a:ext uri="{FF2B5EF4-FFF2-40B4-BE49-F238E27FC236}">
+              <a16:creationId xmlns:a16="http://schemas.microsoft.com/office/drawing/2014/main" id="{4766F590-C65D-C1CF-1DD6-56EF3BE64AC5}"/>
+            </a:ext>
+          </a:extLst>
+        </p:cNvPr>
+        <p:cNvGrpSpPr/>
+        <p:nvPr/>
+      </p:nvGrpSpPr>
+      <p:grpSpPr>
+        <a:xfrm>
+          <a:off x="0" y="0"/>
+          <a:ext cx="0" cy="0"/>
+          <a:chOff x="0" y="0"/>
+          <a:chExt cx="0" cy="0"/>
+        </a:xfrm>
+      </p:grpSpPr>
+      <p:sp>
+        <p:nvSpPr>
+          <p:cNvPr id="2" name="Tytuł 1">
+            <a:extLst>
+              <a:ext uri="{FF2B5EF4-FFF2-40B4-BE49-F238E27FC236}">
+                <a16:creationId xmlns:a16="http://schemas.microsoft.com/office/drawing/2014/main" id="{5FBB3207-A47E-9EE6-D2AA-6A55D22BDE97}"/>
+              </a:ext>
+            </a:extLst>
+          </p:cNvPr>
+          <p:cNvSpPr>
+            <a:spLocks noGrp="1"/>
+          </p:cNvSpPr>
+          <p:nvPr>
+            <p:ph type="title"/>
+          </p:nvPr>
+        </p:nvSpPr>
+        <p:spPr>
+          <a:xfrm>
+            <a:off x="143435" y="367554"/>
+            <a:ext cx="11905130" cy="995082"/>
+          </a:xfrm>
+        </p:spPr>
+        <p:txBody>
+          <a:bodyPr>
+            <a:normAutofit/>
+          </a:bodyPr>
+          <a:lstStyle/>
+          <a:p>
+            <a:r>
+              <a:rPr lang="pl-PL" dirty="0"/>
+              <a:t>Zmiana wyglądu i koloru ścian</a:t>
+            </a:r>
+          </a:p>
+        </p:txBody>
+      </p:sp>
+      <p:sp>
+        <p:nvSpPr>
+          <p:cNvPr id="3" name="Symbol zastępczy zawartości 2">
+            <a:extLst>
+              <a:ext uri="{FF2B5EF4-FFF2-40B4-BE49-F238E27FC236}">
+                <a16:creationId xmlns:a16="http://schemas.microsoft.com/office/drawing/2014/main" id="{1BD73DA4-AF9A-9B28-B2A4-C3B900191593}"/>
+              </a:ext>
+            </a:extLst>
+          </p:cNvPr>
+          <p:cNvSpPr>
+            <a:spLocks noGrp="1"/>
+          </p:cNvSpPr>
+          <p:nvPr>
+            <p:ph idx="1"/>
+          </p:nvPr>
+        </p:nvSpPr>
+        <p:spPr>
+          <a:xfrm>
+            <a:off x="143434" y="1362637"/>
+            <a:ext cx="11905129" cy="5307104"/>
+          </a:xfrm>
+        </p:spPr>
+        <p:txBody>
+          <a:bodyPr/>
+          <a:lstStyle/>
+          <a:p>
+            <a:pPr marL="0" indent="0">
+              <a:buNone/>
+            </a:pPr>
+            <a:endParaRPr lang="pl-PL" dirty="0"/>
+          </a:p>
+          <a:p>
+            <a:pPr marL="0" indent="0">
+              <a:buNone/>
+            </a:pPr>
+            <a:endParaRPr lang="pl-PL" dirty="0"/>
+          </a:p>
+          <a:p>
+            <a:pPr marL="0" indent="0">
+              <a:buNone/>
+            </a:pPr>
+            <a:endParaRPr lang="pl-PL" dirty="0"/>
+          </a:p>
+          <a:p>
+            <a:pPr marL="0" indent="0">
+              <a:buNone/>
+            </a:pPr>
+            <a:endParaRPr lang="pl-PL" dirty="0"/>
+          </a:p>
+          <a:p>
+            <a:pPr marL="0" indent="0">
+              <a:buNone/>
+            </a:pPr>
+            <a:endParaRPr lang="pl-PL" dirty="0"/>
+          </a:p>
+          <a:p>
+            <a:pPr marL="0" indent="0">
+              <a:buNone/>
+            </a:pPr>
+            <a:endParaRPr lang="pl-PL" dirty="0"/>
+          </a:p>
+          <a:p>
+            <a:pPr marL="0" indent="0">
+              <a:buNone/>
+            </a:pPr>
+            <a:endParaRPr lang="pl-PL" dirty="0"/>
+          </a:p>
+          <a:p>
+            <a:pPr marL="0" indent="0">
+              <a:buNone/>
+            </a:pPr>
+            <a:endParaRPr lang="pl-PL" dirty="0"/>
+          </a:p>
+          <a:p>
+            <a:pPr marL="0" indent="0">
+              <a:buNone/>
+            </a:pPr>
+            <a:endParaRPr lang="pl-PL" dirty="0"/>
+          </a:p>
+        </p:txBody>
+      </p:sp>
+    </p:spTree>
+    <p:extLst>
+      <p:ext uri="{BB962C8B-B14F-4D97-AF65-F5344CB8AC3E}">
+        <p14:creationId xmlns:p14="http://schemas.microsoft.com/office/powerpoint/2010/main" val="842650080"/>
+      </p:ext>
+    </p:extLst>
+  </p:cSld>
+  <p:clrMapOvr>
+    <a:masterClrMapping/>
+  </p:clrMapOvr>
+</p:sld>
+</file>
+
+<file path=ppt/slides/slide11.xml><?xml version="1.0" encoding="utf-8"?>
+<p:sld xmlns:a="http://schemas.openxmlformats.org/drawingml/2006/main" xmlns:r="http://schemas.openxmlformats.org/officeDocument/2006/relationships" xmlns:p="http://schemas.openxmlformats.org/presentationml/2006/main">
+  <p:cSld>
+    <p:spTree>
+      <p:nvGrpSpPr>
+        <p:cNvPr id="1" name="">
+          <a:extLst>
+            <a:ext uri="{FF2B5EF4-FFF2-40B4-BE49-F238E27FC236}">
+              <a16:creationId xmlns:a16="http://schemas.microsoft.com/office/drawing/2014/main" id="{04B51DDD-1597-6C38-166B-09205BA567F4}"/>
+            </a:ext>
+          </a:extLst>
+        </p:cNvPr>
+        <p:cNvGrpSpPr/>
+        <p:nvPr/>
+      </p:nvGrpSpPr>
+      <p:grpSpPr>
+        <a:xfrm>
+          <a:off x="0" y="0"/>
+          <a:ext cx="0" cy="0"/>
+          <a:chOff x="0" y="0"/>
+          <a:chExt cx="0" cy="0"/>
+        </a:xfrm>
+      </p:grpSpPr>
+      <p:sp>
+        <p:nvSpPr>
+          <p:cNvPr id="2" name="Tytuł 1">
+            <a:extLst>
+              <a:ext uri="{FF2B5EF4-FFF2-40B4-BE49-F238E27FC236}">
+                <a16:creationId xmlns:a16="http://schemas.microsoft.com/office/drawing/2014/main" id="{8591E687-2FF5-8160-92DA-2E0D6FC27383}"/>
+              </a:ext>
+            </a:extLst>
+          </p:cNvPr>
+          <p:cNvSpPr>
+            <a:spLocks noGrp="1"/>
+          </p:cNvSpPr>
+          <p:nvPr>
+            <p:ph type="title"/>
+          </p:nvPr>
+        </p:nvSpPr>
+        <p:spPr>
+          <a:xfrm>
+            <a:off x="143435" y="367554"/>
+            <a:ext cx="11905130" cy="995082"/>
+          </a:xfrm>
+        </p:spPr>
+        <p:txBody>
+          <a:bodyPr>
+            <a:normAutofit/>
+          </a:bodyPr>
+          <a:lstStyle/>
+          <a:p>
+            <a:r>
+              <a:rPr lang="pl-PL" dirty="0"/>
+              <a:t>Obiekty stałe</a:t>
+            </a:r>
+          </a:p>
+        </p:txBody>
+      </p:sp>
+      <p:sp>
+        <p:nvSpPr>
+          <p:cNvPr id="3" name="Symbol zastępczy zawartości 2">
+            <a:extLst>
+              <a:ext uri="{FF2B5EF4-FFF2-40B4-BE49-F238E27FC236}">
+                <a16:creationId xmlns:a16="http://schemas.microsoft.com/office/drawing/2014/main" id="{003976B0-51BE-1750-6FF0-FA734ABD1AEB}"/>
+              </a:ext>
+            </a:extLst>
+          </p:cNvPr>
+          <p:cNvSpPr>
+            <a:spLocks noGrp="1"/>
+          </p:cNvSpPr>
+          <p:nvPr>
+            <p:ph idx="1"/>
+          </p:nvPr>
+        </p:nvSpPr>
+        <p:spPr>
+          <a:xfrm>
+            <a:off x="143434" y="1362637"/>
+            <a:ext cx="11905129" cy="5307104"/>
+          </a:xfrm>
+        </p:spPr>
+        <p:txBody>
+          <a:bodyPr/>
+          <a:lstStyle/>
+          <a:p>
+            <a:pPr marL="0" indent="0">
+              <a:buNone/>
+            </a:pPr>
+            <a:endParaRPr lang="pl-PL" dirty="0"/>
+          </a:p>
+          <a:p>
+            <a:pPr marL="0" indent="0">
+              <a:buNone/>
+            </a:pPr>
+            <a:endParaRPr lang="pl-PL" dirty="0"/>
+          </a:p>
+          <a:p>
+            <a:pPr marL="0" indent="0">
+              <a:buNone/>
+            </a:pPr>
+            <a:endParaRPr lang="pl-PL" dirty="0"/>
+          </a:p>
+          <a:p>
+            <a:pPr marL="0" indent="0">
+              <a:buNone/>
+            </a:pPr>
+            <a:endParaRPr lang="pl-PL" dirty="0"/>
+          </a:p>
+          <a:p>
+            <a:pPr marL="0" indent="0">
+              <a:buNone/>
+            </a:pPr>
+            <a:endParaRPr lang="pl-PL" dirty="0"/>
+          </a:p>
+          <a:p>
+            <a:pPr marL="0" indent="0">
+              <a:buNone/>
+            </a:pPr>
+            <a:endParaRPr lang="pl-PL" dirty="0"/>
+          </a:p>
+          <a:p>
+            <a:pPr marL="0" indent="0">
+              <a:buNone/>
+            </a:pPr>
+            <a:endParaRPr lang="pl-PL" dirty="0"/>
+          </a:p>
+          <a:p>
+            <a:pPr marL="0" indent="0">
+              <a:buNone/>
+            </a:pPr>
+            <a:endParaRPr lang="pl-PL" dirty="0"/>
+          </a:p>
+          <a:p>
+            <a:pPr marL="0" indent="0">
+              <a:buNone/>
+            </a:pPr>
+            <a:endParaRPr lang="pl-PL" dirty="0"/>
+          </a:p>
+        </p:txBody>
+      </p:sp>
+    </p:spTree>
+    <p:extLst>
+      <p:ext uri="{BB962C8B-B14F-4D97-AF65-F5344CB8AC3E}">
+        <p14:creationId xmlns:p14="http://schemas.microsoft.com/office/powerpoint/2010/main" val="758894962"/>
+      </p:ext>
+    </p:extLst>
+  </p:cSld>
+  <p:clrMapOvr>
+    <a:masterClrMapping/>
+  </p:clrMapOvr>
+</p:sld>
+</file>
+
+<file path=ppt/slides/slide12.xml><?xml version="1.0" encoding="utf-8"?>
+<p:sld xmlns:a="http://schemas.openxmlformats.org/drawingml/2006/main" xmlns:r="http://schemas.openxmlformats.org/officeDocument/2006/relationships" xmlns:p="http://schemas.openxmlformats.org/presentationml/2006/main">
+  <p:cSld>
+    <p:spTree>
+      <p:nvGrpSpPr>
+        <p:cNvPr id="1" name="">
+          <a:extLst>
+            <a:ext uri="{FF2B5EF4-FFF2-40B4-BE49-F238E27FC236}">
+              <a16:creationId xmlns:a16="http://schemas.microsoft.com/office/drawing/2014/main" id="{1A356926-C810-97BF-C306-FEF832B9A8BB}"/>
+            </a:ext>
+          </a:extLst>
+        </p:cNvPr>
+        <p:cNvGrpSpPr/>
+        <p:nvPr/>
+      </p:nvGrpSpPr>
+      <p:grpSpPr>
+        <a:xfrm>
+          <a:off x="0" y="0"/>
+          <a:ext cx="0" cy="0"/>
+          <a:chOff x="0" y="0"/>
+          <a:chExt cx="0" cy="0"/>
+        </a:xfrm>
+      </p:grpSpPr>
+      <p:sp>
+        <p:nvSpPr>
+          <p:cNvPr id="2" name="Tytuł 1">
+            <a:extLst>
+              <a:ext uri="{FF2B5EF4-FFF2-40B4-BE49-F238E27FC236}">
+                <a16:creationId xmlns:a16="http://schemas.microsoft.com/office/drawing/2014/main" id="{6B8483EB-9952-4746-CF66-BBD21DEE1ED9}"/>
+              </a:ext>
+            </a:extLst>
+          </p:cNvPr>
+          <p:cNvSpPr>
+            <a:spLocks noGrp="1"/>
+          </p:cNvSpPr>
+          <p:nvPr>
+            <p:ph type="title"/>
+          </p:nvPr>
+        </p:nvSpPr>
+        <p:spPr>
+          <a:xfrm>
+            <a:off x="143435" y="367554"/>
+            <a:ext cx="11905130" cy="995082"/>
+          </a:xfrm>
+        </p:spPr>
+        <p:txBody>
+          <a:bodyPr>
+            <a:normAutofit/>
+          </a:bodyPr>
+          <a:lstStyle/>
+          <a:p>
+            <a:r>
+              <a:rPr lang="pl-PL" dirty="0"/>
+              <a:t>Dodatkowe ściany</a:t>
+            </a:r>
+          </a:p>
+        </p:txBody>
+      </p:sp>
+      <p:sp>
+        <p:nvSpPr>
+          <p:cNvPr id="3" name="Symbol zastępczy zawartości 2">
+            <a:extLst>
+              <a:ext uri="{FF2B5EF4-FFF2-40B4-BE49-F238E27FC236}">
+                <a16:creationId xmlns:a16="http://schemas.microsoft.com/office/drawing/2014/main" id="{C392D018-B3F3-5BE0-495B-BF23D4EE7459}"/>
+              </a:ext>
+            </a:extLst>
+          </p:cNvPr>
+          <p:cNvSpPr>
+            <a:spLocks noGrp="1"/>
+          </p:cNvSpPr>
+          <p:nvPr>
+            <p:ph idx="1"/>
+          </p:nvPr>
+        </p:nvSpPr>
+        <p:spPr>
+          <a:xfrm>
+            <a:off x="143434" y="1362637"/>
+            <a:ext cx="11905129" cy="5307104"/>
+          </a:xfrm>
+        </p:spPr>
+        <p:txBody>
+          <a:bodyPr/>
+          <a:lstStyle/>
+          <a:p>
+            <a:pPr marL="0" indent="0">
+              <a:buNone/>
+            </a:pPr>
+            <a:endParaRPr lang="pl-PL" dirty="0"/>
+          </a:p>
+          <a:p>
+            <a:pPr marL="0" indent="0">
+              <a:buNone/>
+            </a:pPr>
+            <a:endParaRPr lang="pl-PL" dirty="0"/>
+          </a:p>
+          <a:p>
+            <a:pPr marL="0" indent="0">
+              <a:buNone/>
+            </a:pPr>
+            <a:endParaRPr lang="pl-PL" dirty="0"/>
+          </a:p>
+          <a:p>
+            <a:pPr marL="0" indent="0">
+              <a:buNone/>
+            </a:pPr>
+            <a:endParaRPr lang="pl-PL" dirty="0"/>
+          </a:p>
+          <a:p>
+            <a:pPr marL="0" indent="0">
+              <a:buNone/>
+            </a:pPr>
+            <a:endParaRPr lang="pl-PL" dirty="0"/>
+          </a:p>
+          <a:p>
+            <a:pPr marL="0" indent="0">
+              <a:buNone/>
+            </a:pPr>
+            <a:endParaRPr lang="pl-PL" dirty="0"/>
+          </a:p>
+          <a:p>
+            <a:pPr marL="0" indent="0">
+              <a:buNone/>
+            </a:pPr>
+            <a:endParaRPr lang="pl-PL" dirty="0"/>
+          </a:p>
+          <a:p>
+            <a:pPr marL="0" indent="0">
+              <a:buNone/>
+            </a:pPr>
+            <a:endParaRPr lang="pl-PL" dirty="0"/>
+          </a:p>
+          <a:p>
+            <a:pPr marL="0" indent="0">
+              <a:buNone/>
+            </a:pPr>
+            <a:endParaRPr lang="pl-PL" dirty="0"/>
+          </a:p>
+        </p:txBody>
+      </p:sp>
+    </p:spTree>
+    <p:extLst>
+      <p:ext uri="{BB962C8B-B14F-4D97-AF65-F5344CB8AC3E}">
+        <p14:creationId xmlns:p14="http://schemas.microsoft.com/office/powerpoint/2010/main" val="2277225094"/>
+      </p:ext>
+    </p:extLst>
+  </p:cSld>
+  <p:clrMapOvr>
+    <a:masterClrMapping/>
+  </p:clrMapOvr>
+</p:sld>
+</file>
+
+<file path=ppt/slides/slide13.xml><?xml version="1.0" encoding="utf-8"?>
+<p:sld xmlns:a="http://schemas.openxmlformats.org/drawingml/2006/main" xmlns:r="http://schemas.openxmlformats.org/officeDocument/2006/relationships" xmlns:p="http://schemas.openxmlformats.org/presentationml/2006/main">
+  <p:cSld>
+    <p:spTree>
+      <p:nvGrpSpPr>
+        <p:cNvPr id="1" name="">
+          <a:extLst>
+            <a:ext uri="{FF2B5EF4-FFF2-40B4-BE49-F238E27FC236}">
+              <a16:creationId xmlns:a16="http://schemas.microsoft.com/office/drawing/2014/main" id="{44D0AB7F-0069-FDB5-26E7-693E13ACD3CF}"/>
+            </a:ext>
+          </a:extLst>
+        </p:cNvPr>
+        <p:cNvGrpSpPr/>
+        <p:nvPr/>
+      </p:nvGrpSpPr>
+      <p:grpSpPr>
+        <a:xfrm>
+          <a:off x="0" y="0"/>
+          <a:ext cx="0" cy="0"/>
+          <a:chOff x="0" y="0"/>
+          <a:chExt cx="0" cy="0"/>
+        </a:xfrm>
+      </p:grpSpPr>
+      <p:sp>
+        <p:nvSpPr>
+          <p:cNvPr id="2" name="Tytuł 1">
+            <a:extLst>
+              <a:ext uri="{FF2B5EF4-FFF2-40B4-BE49-F238E27FC236}">
+                <a16:creationId xmlns:a16="http://schemas.microsoft.com/office/drawing/2014/main" id="{F16E610F-F4B0-9977-B875-B9F774F7C793}"/>
+              </a:ext>
+            </a:extLst>
+          </p:cNvPr>
+          <p:cNvSpPr>
+            <a:spLocks noGrp="1"/>
+          </p:cNvSpPr>
+          <p:nvPr>
+            <p:ph type="title"/>
+          </p:nvPr>
+        </p:nvSpPr>
+        <p:spPr>
+          <a:xfrm>
+            <a:off x="143435" y="367554"/>
+            <a:ext cx="11905130" cy="995082"/>
+          </a:xfrm>
+        </p:spPr>
+        <p:txBody>
+          <a:bodyPr>
+            <a:normAutofit/>
+          </a:bodyPr>
+          <a:lstStyle/>
+          <a:p>
+            <a:r>
+              <a:rPr lang="pl-PL" dirty="0"/>
+              <a:t>Wykorzystane technologie</a:t>
+            </a:r>
+          </a:p>
+        </p:txBody>
+      </p:sp>
+      <p:sp>
+        <p:nvSpPr>
+          <p:cNvPr id="3" name="Symbol zastępczy zawartości 2">
+            <a:extLst>
+              <a:ext uri="{FF2B5EF4-FFF2-40B4-BE49-F238E27FC236}">
+                <a16:creationId xmlns:a16="http://schemas.microsoft.com/office/drawing/2014/main" id="{409C9A07-7A8F-825F-8CFB-ABEB9FDD0A67}"/>
+              </a:ext>
+            </a:extLst>
+          </p:cNvPr>
+          <p:cNvSpPr>
+            <a:spLocks noGrp="1"/>
+          </p:cNvSpPr>
+          <p:nvPr>
+            <p:ph idx="1"/>
+          </p:nvPr>
+        </p:nvSpPr>
+        <p:spPr>
+          <a:xfrm>
+            <a:off x="143434" y="1362637"/>
+            <a:ext cx="11905129" cy="5307104"/>
+          </a:xfrm>
+        </p:spPr>
+        <p:txBody>
+          <a:bodyPr/>
+          <a:lstStyle/>
+          <a:p>
+            <a:pPr marL="0" indent="0">
+              <a:buNone/>
+            </a:pPr>
+            <a:endParaRPr lang="pl-PL" dirty="0"/>
+          </a:p>
+          <a:p>
+            <a:pPr marL="0" indent="0">
+              <a:buNone/>
+            </a:pPr>
+            <a:endParaRPr lang="pl-PL" dirty="0"/>
+          </a:p>
+          <a:p>
+            <a:pPr marL="0" indent="0">
+              <a:buNone/>
+            </a:pPr>
+            <a:endParaRPr lang="pl-PL" dirty="0"/>
+          </a:p>
+          <a:p>
+            <a:pPr marL="0" indent="0">
+              <a:buNone/>
+            </a:pPr>
+            <a:endParaRPr lang="pl-PL" dirty="0"/>
+          </a:p>
+          <a:p>
+            <a:pPr marL="0" indent="0">
+              <a:buNone/>
+            </a:pPr>
+            <a:endParaRPr lang="pl-PL" dirty="0"/>
+          </a:p>
+          <a:p>
+            <a:pPr marL="0" indent="0">
+              <a:buNone/>
+            </a:pPr>
+            <a:endParaRPr lang="pl-PL" dirty="0"/>
+          </a:p>
+          <a:p>
+            <a:pPr marL="0" indent="0">
+              <a:buNone/>
+            </a:pPr>
+            <a:endParaRPr lang="pl-PL" dirty="0"/>
+          </a:p>
+          <a:p>
+            <a:pPr marL="0" indent="0">
+              <a:buNone/>
+            </a:pPr>
+            <a:endParaRPr lang="pl-PL" dirty="0"/>
+          </a:p>
+          <a:p>
+            <a:pPr marL="0" indent="0">
+              <a:buNone/>
+            </a:pPr>
+            <a:endParaRPr lang="pl-PL" dirty="0"/>
+          </a:p>
+        </p:txBody>
+      </p:sp>
+    </p:spTree>
+    <p:extLst>
+      <p:ext uri="{BB962C8B-B14F-4D97-AF65-F5344CB8AC3E}">
+        <p14:creationId xmlns:p14="http://schemas.microsoft.com/office/powerpoint/2010/main" val="1634903737"/>
       </p:ext>
     </p:extLst>
   </p:cSld>
@@ -8578,6 +9196,1014 @@
 </p:sld>
 </file>
 
+<file path=ppt/slides/slide4.xml><?xml version="1.0" encoding="utf-8"?>
+<p:sld xmlns:a="http://schemas.openxmlformats.org/drawingml/2006/main" xmlns:r="http://schemas.openxmlformats.org/officeDocument/2006/relationships" xmlns:p="http://schemas.openxmlformats.org/presentationml/2006/main">
+  <p:cSld>
+    <p:spTree>
+      <p:nvGrpSpPr>
+        <p:cNvPr id="1" name="">
+          <a:extLst>
+            <a:ext uri="{FF2B5EF4-FFF2-40B4-BE49-F238E27FC236}">
+              <a16:creationId xmlns:a16="http://schemas.microsoft.com/office/drawing/2014/main" id="{52E1B0B1-64E3-AE43-9E4E-484168DA1514}"/>
+            </a:ext>
+          </a:extLst>
+        </p:cNvPr>
+        <p:cNvGrpSpPr/>
+        <p:nvPr/>
+      </p:nvGrpSpPr>
+      <p:grpSpPr>
+        <a:xfrm>
+          <a:off x="0" y="0"/>
+          <a:ext cx="0" cy="0"/>
+          <a:chOff x="0" y="0"/>
+          <a:chExt cx="0" cy="0"/>
+        </a:xfrm>
+      </p:grpSpPr>
+      <p:sp>
+        <p:nvSpPr>
+          <p:cNvPr id="2" name="Tytuł 1">
+            <a:extLst>
+              <a:ext uri="{FF2B5EF4-FFF2-40B4-BE49-F238E27FC236}">
+                <a16:creationId xmlns:a16="http://schemas.microsoft.com/office/drawing/2014/main" id="{5D20FD28-C824-6802-44C4-61ADCC31F770}"/>
+              </a:ext>
+            </a:extLst>
+          </p:cNvPr>
+          <p:cNvSpPr>
+            <a:spLocks noGrp="1"/>
+          </p:cNvSpPr>
+          <p:nvPr>
+            <p:ph type="title"/>
+          </p:nvPr>
+        </p:nvSpPr>
+        <p:spPr>
+          <a:xfrm>
+            <a:off x="143435" y="367554"/>
+            <a:ext cx="11905130" cy="995082"/>
+          </a:xfrm>
+        </p:spPr>
+        <p:txBody>
+          <a:bodyPr/>
+          <a:lstStyle/>
+          <a:p>
+            <a:r>
+              <a:rPr lang="pl-PL" dirty="0"/>
+              <a:t>Cel pracy</a:t>
+            </a:r>
+          </a:p>
+        </p:txBody>
+      </p:sp>
+      <p:sp>
+        <p:nvSpPr>
+          <p:cNvPr id="3" name="Symbol zastępczy zawartości 2">
+            <a:extLst>
+              <a:ext uri="{FF2B5EF4-FFF2-40B4-BE49-F238E27FC236}">
+                <a16:creationId xmlns:a16="http://schemas.microsoft.com/office/drawing/2014/main" id="{B0B5AD0F-5625-E6AE-87EA-335E4C52A4CD}"/>
+              </a:ext>
+            </a:extLst>
+          </p:cNvPr>
+          <p:cNvSpPr>
+            <a:spLocks noGrp="1"/>
+          </p:cNvSpPr>
+          <p:nvPr>
+            <p:ph idx="1"/>
+          </p:nvPr>
+        </p:nvSpPr>
+        <p:spPr>
+          <a:xfrm>
+            <a:off x="143434" y="1362637"/>
+            <a:ext cx="11905129" cy="5307104"/>
+          </a:xfrm>
+        </p:spPr>
+        <p:txBody>
+          <a:bodyPr>
+            <a:normAutofit fontScale="40000" lnSpcReduction="20000"/>
+          </a:bodyPr>
+          <a:lstStyle/>
+          <a:p>
+            <a:pPr marL="0" indent="0" algn="just">
+              <a:buNone/>
+            </a:pPr>
+            <a:endParaRPr lang="pl-PL" dirty="0"/>
+          </a:p>
+          <a:p>
+            <a:pPr marL="0" indent="0" algn="just">
+              <a:buNone/>
+            </a:pPr>
+            <a:endParaRPr lang="pl-PL" dirty="0"/>
+          </a:p>
+          <a:p>
+            <a:pPr marL="0" indent="0" algn="just">
+              <a:buNone/>
+            </a:pPr>
+            <a:endParaRPr lang="pl-PL" dirty="0"/>
+          </a:p>
+          <a:p>
+            <a:pPr marL="0" indent="0" algn="just">
+              <a:buNone/>
+            </a:pPr>
+            <a:endParaRPr lang="pl-PL" dirty="0"/>
+          </a:p>
+          <a:p>
+            <a:pPr marL="0" indent="0" algn="just">
+              <a:buNone/>
+            </a:pPr>
+            <a:r>
+              <a:rPr lang="pl-PL" sz="4400" dirty="0"/>
+              <a:t>Celem pracy jest opracowanie systemu do projektowania wnętrz, który wykorzysta technologię wirtualnej rzeczywistości. Obsługa całego programu ma być oparta o fizyczną interakcje za pośrednictwem kontrolerów śledzących ruch dłoni. Proces projektowania wnętrza będzie całkowicie wewnątrz wirtualnej rzeczywistości.</a:t>
+            </a:r>
+          </a:p>
+          <a:p>
+            <a:pPr marL="0" indent="0" algn="just">
+              <a:buNone/>
+            </a:pPr>
+            <a:endParaRPr lang="pl-PL" sz="4400" dirty="0"/>
+          </a:p>
+          <a:p>
+            <a:pPr marL="0" indent="0" algn="just">
+              <a:buNone/>
+            </a:pPr>
+            <a:endParaRPr lang="pl-PL" sz="4400" dirty="0"/>
+          </a:p>
+          <a:p>
+            <a:pPr marL="0" indent="0" algn="just">
+              <a:buNone/>
+            </a:pPr>
+            <a:endParaRPr lang="pl-PL" sz="4400" dirty="0"/>
+          </a:p>
+          <a:p>
+            <a:pPr marL="0" indent="0" algn="just">
+              <a:buNone/>
+            </a:pPr>
+            <a:r>
+              <a:rPr lang="pl-PL" sz="4400" dirty="0"/>
+              <a:t>Podstawowe funkcjonalności</a:t>
+            </a:r>
+          </a:p>
+          <a:p>
+            <a:pPr algn="just"/>
+            <a:r>
+              <a:rPr lang="pl-PL" sz="4400" dirty="0"/>
+              <a:t>Generacja pomieszczeń na podstawie wymagań użytkownika</a:t>
+            </a:r>
+          </a:p>
+          <a:p>
+            <a:pPr algn="just"/>
+            <a:r>
+              <a:rPr lang="pl-PL" sz="4400" dirty="0"/>
+              <a:t>Tworzenie i interakcja z przedmiotami</a:t>
+            </a:r>
+          </a:p>
+          <a:p>
+            <a:pPr algn="just"/>
+            <a:r>
+              <a:rPr lang="pl-PL" sz="4400" dirty="0"/>
+              <a:t>Zmiana wyglądu i koloru ścian</a:t>
+            </a:r>
+          </a:p>
+          <a:p>
+            <a:pPr algn="just"/>
+            <a:r>
+              <a:rPr lang="pl-PL" sz="4400" dirty="0"/>
+              <a:t>Tworzenie dodatkowych ścian</a:t>
+            </a:r>
+          </a:p>
+          <a:p>
+            <a:pPr algn="just"/>
+            <a:r>
+              <a:rPr lang="pl-PL" sz="4400" dirty="0"/>
+              <a:t>Tworzenie stałych obiektów</a:t>
+            </a:r>
+          </a:p>
+          <a:p>
+            <a:pPr algn="just"/>
+            <a:r>
+              <a:rPr lang="pl-PL" sz="4400" dirty="0"/>
+              <a:t>Podgląd z lotu ptaka</a:t>
+            </a:r>
+          </a:p>
+          <a:p>
+            <a:pPr marL="0" indent="0" algn="just">
+              <a:buNone/>
+            </a:pPr>
+            <a:endParaRPr lang="pl-PL" dirty="0"/>
+          </a:p>
+          <a:p>
+            <a:pPr marL="0" indent="0">
+              <a:buNone/>
+            </a:pPr>
+            <a:endParaRPr lang="pl-PL" dirty="0"/>
+          </a:p>
+          <a:p>
+            <a:pPr marL="0" indent="0">
+              <a:buNone/>
+            </a:pPr>
+            <a:endParaRPr lang="pl-PL" dirty="0"/>
+          </a:p>
+          <a:p>
+            <a:pPr marL="0" indent="0">
+              <a:buNone/>
+            </a:pPr>
+            <a:endParaRPr lang="pl-PL" dirty="0"/>
+          </a:p>
+          <a:p>
+            <a:pPr marL="0" indent="0">
+              <a:buNone/>
+            </a:pPr>
+            <a:endParaRPr lang="pl-PL" dirty="0"/>
+          </a:p>
+          <a:p>
+            <a:pPr marL="0" indent="0">
+              <a:buNone/>
+            </a:pPr>
+            <a:endParaRPr lang="pl-PL" dirty="0"/>
+          </a:p>
+          <a:p>
+            <a:pPr marL="0" indent="0">
+              <a:buNone/>
+            </a:pPr>
+            <a:endParaRPr lang="pl-PL" dirty="0"/>
+          </a:p>
+          <a:p>
+            <a:pPr marL="0" indent="0">
+              <a:buNone/>
+            </a:pPr>
+            <a:endParaRPr lang="pl-PL" dirty="0"/>
+          </a:p>
+        </p:txBody>
+      </p:sp>
+    </p:spTree>
+    <p:extLst>
+      <p:ext uri="{BB962C8B-B14F-4D97-AF65-F5344CB8AC3E}">
+        <p14:creationId xmlns:p14="http://schemas.microsoft.com/office/powerpoint/2010/main" val="2347897267"/>
+      </p:ext>
+    </p:extLst>
+  </p:cSld>
+  <p:clrMapOvr>
+    <a:masterClrMapping/>
+  </p:clrMapOvr>
+</p:sld>
+</file>
+
+<file path=ppt/slides/slide5.xml><?xml version="1.0" encoding="utf-8"?>
+<p:sld xmlns:a="http://schemas.openxmlformats.org/drawingml/2006/main" xmlns:r="http://schemas.openxmlformats.org/officeDocument/2006/relationships" xmlns:p="http://schemas.openxmlformats.org/presentationml/2006/main">
+  <p:cSld>
+    <p:spTree>
+      <p:nvGrpSpPr>
+        <p:cNvPr id="1" name="">
+          <a:extLst>
+            <a:ext uri="{FF2B5EF4-FFF2-40B4-BE49-F238E27FC236}">
+              <a16:creationId xmlns:a16="http://schemas.microsoft.com/office/drawing/2014/main" id="{B86A3518-21B2-8591-7AC6-F00911F52BC7}"/>
+            </a:ext>
+          </a:extLst>
+        </p:cNvPr>
+        <p:cNvGrpSpPr/>
+        <p:nvPr/>
+      </p:nvGrpSpPr>
+      <p:grpSpPr>
+        <a:xfrm>
+          <a:off x="0" y="0"/>
+          <a:ext cx="0" cy="0"/>
+          <a:chOff x="0" y="0"/>
+          <a:chExt cx="0" cy="0"/>
+        </a:xfrm>
+      </p:grpSpPr>
+      <p:sp>
+        <p:nvSpPr>
+          <p:cNvPr id="2" name="Tytuł 1">
+            <a:extLst>
+              <a:ext uri="{FF2B5EF4-FFF2-40B4-BE49-F238E27FC236}">
+                <a16:creationId xmlns:a16="http://schemas.microsoft.com/office/drawing/2014/main" id="{CF366E2D-3434-BC7B-D652-A7186A18FD7F}"/>
+              </a:ext>
+            </a:extLst>
+          </p:cNvPr>
+          <p:cNvSpPr>
+            <a:spLocks noGrp="1"/>
+          </p:cNvSpPr>
+          <p:nvPr>
+            <p:ph type="title"/>
+          </p:nvPr>
+        </p:nvSpPr>
+        <p:spPr>
+          <a:xfrm>
+            <a:off x="143435" y="367554"/>
+            <a:ext cx="11905130" cy="995082"/>
+          </a:xfrm>
+        </p:spPr>
+        <p:txBody>
+          <a:bodyPr>
+            <a:normAutofit/>
+          </a:bodyPr>
+          <a:lstStyle/>
+          <a:p>
+            <a:r>
+              <a:rPr lang="pl-PL" dirty="0"/>
+              <a:t>Generacja Pomieszczenia</a:t>
+            </a:r>
+          </a:p>
+        </p:txBody>
+      </p:sp>
+      <p:sp>
+        <p:nvSpPr>
+          <p:cNvPr id="3" name="Symbol zastępczy zawartości 2">
+            <a:extLst>
+              <a:ext uri="{FF2B5EF4-FFF2-40B4-BE49-F238E27FC236}">
+                <a16:creationId xmlns:a16="http://schemas.microsoft.com/office/drawing/2014/main" id="{7305A406-9550-27C8-41B7-2FCD30F1BA56}"/>
+              </a:ext>
+            </a:extLst>
+          </p:cNvPr>
+          <p:cNvSpPr>
+            <a:spLocks noGrp="1"/>
+          </p:cNvSpPr>
+          <p:nvPr>
+            <p:ph idx="1"/>
+          </p:nvPr>
+        </p:nvSpPr>
+        <p:spPr>
+          <a:xfrm>
+            <a:off x="143434" y="1362637"/>
+            <a:ext cx="11905129" cy="5307104"/>
+          </a:xfrm>
+        </p:spPr>
+        <p:txBody>
+          <a:bodyPr/>
+          <a:lstStyle/>
+          <a:p>
+            <a:pPr marL="0" indent="0">
+              <a:buNone/>
+            </a:pPr>
+            <a:endParaRPr lang="pl-PL" dirty="0"/>
+          </a:p>
+          <a:p>
+            <a:pPr marL="0" indent="0">
+              <a:buNone/>
+            </a:pPr>
+            <a:endParaRPr lang="pl-PL" dirty="0"/>
+          </a:p>
+          <a:p>
+            <a:pPr marL="0" indent="0">
+              <a:buNone/>
+            </a:pPr>
+            <a:endParaRPr lang="pl-PL" dirty="0"/>
+          </a:p>
+          <a:p>
+            <a:pPr marL="0" indent="0">
+              <a:buNone/>
+            </a:pPr>
+            <a:endParaRPr lang="pl-PL" dirty="0"/>
+          </a:p>
+          <a:p>
+            <a:pPr marL="0" indent="0">
+              <a:buNone/>
+            </a:pPr>
+            <a:endParaRPr lang="pl-PL" dirty="0"/>
+          </a:p>
+          <a:p>
+            <a:pPr marL="0" indent="0">
+              <a:buNone/>
+            </a:pPr>
+            <a:endParaRPr lang="pl-PL" dirty="0"/>
+          </a:p>
+          <a:p>
+            <a:pPr marL="0" indent="0">
+              <a:buNone/>
+            </a:pPr>
+            <a:endParaRPr lang="pl-PL" dirty="0"/>
+          </a:p>
+          <a:p>
+            <a:pPr marL="0" indent="0">
+              <a:buNone/>
+            </a:pPr>
+            <a:endParaRPr lang="pl-PL" dirty="0"/>
+          </a:p>
+          <a:p>
+            <a:pPr marL="0" indent="0">
+              <a:buNone/>
+            </a:pPr>
+            <a:endParaRPr lang="pl-PL" dirty="0"/>
+          </a:p>
+        </p:txBody>
+      </p:sp>
+    </p:spTree>
+    <p:extLst>
+      <p:ext uri="{BB962C8B-B14F-4D97-AF65-F5344CB8AC3E}">
+        <p14:creationId xmlns:p14="http://schemas.microsoft.com/office/powerpoint/2010/main" val="1424420572"/>
+      </p:ext>
+    </p:extLst>
+  </p:cSld>
+  <p:clrMapOvr>
+    <a:masterClrMapping/>
+  </p:clrMapOvr>
+</p:sld>
+</file>
+
+<file path=ppt/slides/slide6.xml><?xml version="1.0" encoding="utf-8"?>
+<p:sld xmlns:a="http://schemas.openxmlformats.org/drawingml/2006/main" xmlns:r="http://schemas.openxmlformats.org/officeDocument/2006/relationships" xmlns:p="http://schemas.openxmlformats.org/presentationml/2006/main">
+  <p:cSld>
+    <p:spTree>
+      <p:nvGrpSpPr>
+        <p:cNvPr id="1" name="">
+          <a:extLst>
+            <a:ext uri="{FF2B5EF4-FFF2-40B4-BE49-F238E27FC236}">
+              <a16:creationId xmlns:a16="http://schemas.microsoft.com/office/drawing/2014/main" id="{9950911E-E0E7-EF43-E309-ACDF7D7FD92D}"/>
+            </a:ext>
+          </a:extLst>
+        </p:cNvPr>
+        <p:cNvGrpSpPr/>
+        <p:nvPr/>
+      </p:nvGrpSpPr>
+      <p:grpSpPr>
+        <a:xfrm>
+          <a:off x="0" y="0"/>
+          <a:ext cx="0" cy="0"/>
+          <a:chOff x="0" y="0"/>
+          <a:chExt cx="0" cy="0"/>
+        </a:xfrm>
+      </p:grpSpPr>
+      <p:sp>
+        <p:nvSpPr>
+          <p:cNvPr id="2" name="Tytuł 1">
+            <a:extLst>
+              <a:ext uri="{FF2B5EF4-FFF2-40B4-BE49-F238E27FC236}">
+                <a16:creationId xmlns:a16="http://schemas.microsoft.com/office/drawing/2014/main" id="{E8ED127B-AD6D-C9C6-F7F0-4A76E95155A0}"/>
+              </a:ext>
+            </a:extLst>
+          </p:cNvPr>
+          <p:cNvSpPr>
+            <a:spLocks noGrp="1"/>
+          </p:cNvSpPr>
+          <p:nvPr>
+            <p:ph type="title"/>
+          </p:nvPr>
+        </p:nvSpPr>
+        <p:spPr>
+          <a:xfrm>
+            <a:off x="143435" y="367554"/>
+            <a:ext cx="11905130" cy="995082"/>
+          </a:xfrm>
+        </p:spPr>
+        <p:txBody>
+          <a:bodyPr>
+            <a:normAutofit/>
+          </a:bodyPr>
+          <a:lstStyle/>
+          <a:p>
+            <a:r>
+              <a:rPr lang="pl-PL" dirty="0"/>
+              <a:t>Tablet</a:t>
+            </a:r>
+          </a:p>
+        </p:txBody>
+      </p:sp>
+      <p:sp>
+        <p:nvSpPr>
+          <p:cNvPr id="3" name="Symbol zastępczy zawartości 2">
+            <a:extLst>
+              <a:ext uri="{FF2B5EF4-FFF2-40B4-BE49-F238E27FC236}">
+                <a16:creationId xmlns:a16="http://schemas.microsoft.com/office/drawing/2014/main" id="{C5BB6030-4126-2214-1019-37021E5A65AF}"/>
+              </a:ext>
+            </a:extLst>
+          </p:cNvPr>
+          <p:cNvSpPr>
+            <a:spLocks noGrp="1"/>
+          </p:cNvSpPr>
+          <p:nvPr>
+            <p:ph idx="1"/>
+          </p:nvPr>
+        </p:nvSpPr>
+        <p:spPr>
+          <a:xfrm>
+            <a:off x="143434" y="1362637"/>
+            <a:ext cx="11905129" cy="5307104"/>
+          </a:xfrm>
+        </p:spPr>
+        <p:txBody>
+          <a:bodyPr/>
+          <a:lstStyle/>
+          <a:p>
+            <a:pPr marL="0" indent="0">
+              <a:buNone/>
+            </a:pPr>
+            <a:endParaRPr lang="pl-PL" dirty="0"/>
+          </a:p>
+          <a:p>
+            <a:pPr marL="0" indent="0">
+              <a:buNone/>
+            </a:pPr>
+            <a:endParaRPr lang="pl-PL" dirty="0"/>
+          </a:p>
+          <a:p>
+            <a:pPr marL="0" indent="0">
+              <a:buNone/>
+            </a:pPr>
+            <a:endParaRPr lang="pl-PL" dirty="0"/>
+          </a:p>
+          <a:p>
+            <a:pPr marL="0" indent="0">
+              <a:buNone/>
+            </a:pPr>
+            <a:endParaRPr lang="pl-PL" dirty="0"/>
+          </a:p>
+          <a:p>
+            <a:pPr marL="0" indent="0">
+              <a:buNone/>
+            </a:pPr>
+            <a:endParaRPr lang="pl-PL" dirty="0"/>
+          </a:p>
+          <a:p>
+            <a:pPr marL="0" indent="0">
+              <a:buNone/>
+            </a:pPr>
+            <a:endParaRPr lang="pl-PL" dirty="0"/>
+          </a:p>
+          <a:p>
+            <a:pPr marL="0" indent="0">
+              <a:buNone/>
+            </a:pPr>
+            <a:endParaRPr lang="pl-PL" dirty="0"/>
+          </a:p>
+          <a:p>
+            <a:pPr marL="0" indent="0">
+              <a:buNone/>
+            </a:pPr>
+            <a:endParaRPr lang="pl-PL" dirty="0"/>
+          </a:p>
+          <a:p>
+            <a:pPr marL="0" indent="0">
+              <a:buNone/>
+            </a:pPr>
+            <a:endParaRPr lang="pl-PL" dirty="0"/>
+          </a:p>
+        </p:txBody>
+      </p:sp>
+    </p:spTree>
+    <p:extLst>
+      <p:ext uri="{BB962C8B-B14F-4D97-AF65-F5344CB8AC3E}">
+        <p14:creationId xmlns:p14="http://schemas.microsoft.com/office/powerpoint/2010/main" val="3751241253"/>
+      </p:ext>
+    </p:extLst>
+  </p:cSld>
+  <p:clrMapOvr>
+    <a:masterClrMapping/>
+  </p:clrMapOvr>
+</p:sld>
+</file>
+
+<file path=ppt/slides/slide7.xml><?xml version="1.0" encoding="utf-8"?>
+<p:sld xmlns:a="http://schemas.openxmlformats.org/drawingml/2006/main" xmlns:r="http://schemas.openxmlformats.org/officeDocument/2006/relationships" xmlns:p="http://schemas.openxmlformats.org/presentationml/2006/main">
+  <p:cSld>
+    <p:spTree>
+      <p:nvGrpSpPr>
+        <p:cNvPr id="1" name="">
+          <a:extLst>
+            <a:ext uri="{FF2B5EF4-FFF2-40B4-BE49-F238E27FC236}">
+              <a16:creationId xmlns:a16="http://schemas.microsoft.com/office/drawing/2014/main" id="{90DFB05C-8B88-A0E8-5A83-083B979E1EB7}"/>
+            </a:ext>
+          </a:extLst>
+        </p:cNvPr>
+        <p:cNvGrpSpPr/>
+        <p:nvPr/>
+      </p:nvGrpSpPr>
+      <p:grpSpPr>
+        <a:xfrm>
+          <a:off x="0" y="0"/>
+          <a:ext cx="0" cy="0"/>
+          <a:chOff x="0" y="0"/>
+          <a:chExt cx="0" cy="0"/>
+        </a:xfrm>
+      </p:grpSpPr>
+      <p:sp>
+        <p:nvSpPr>
+          <p:cNvPr id="2" name="Tytuł 1">
+            <a:extLst>
+              <a:ext uri="{FF2B5EF4-FFF2-40B4-BE49-F238E27FC236}">
+                <a16:creationId xmlns:a16="http://schemas.microsoft.com/office/drawing/2014/main" id="{81960820-2062-6601-9318-8725A7015756}"/>
+              </a:ext>
+            </a:extLst>
+          </p:cNvPr>
+          <p:cNvSpPr>
+            <a:spLocks noGrp="1"/>
+          </p:cNvSpPr>
+          <p:nvPr>
+            <p:ph type="title"/>
+          </p:nvPr>
+        </p:nvSpPr>
+        <p:spPr>
+          <a:xfrm>
+            <a:off x="143435" y="367554"/>
+            <a:ext cx="11905130" cy="995082"/>
+          </a:xfrm>
+        </p:spPr>
+        <p:txBody>
+          <a:bodyPr>
+            <a:normAutofit/>
+          </a:bodyPr>
+          <a:lstStyle/>
+          <a:p>
+            <a:r>
+              <a:rPr lang="pl-PL" dirty="0"/>
+              <a:t>Tworzenie przedmiotów</a:t>
+            </a:r>
+          </a:p>
+        </p:txBody>
+      </p:sp>
+      <p:sp>
+        <p:nvSpPr>
+          <p:cNvPr id="3" name="Symbol zastępczy zawartości 2">
+            <a:extLst>
+              <a:ext uri="{FF2B5EF4-FFF2-40B4-BE49-F238E27FC236}">
+                <a16:creationId xmlns:a16="http://schemas.microsoft.com/office/drawing/2014/main" id="{456EBFDA-A13A-B307-3AA6-DD00420FFE77}"/>
+              </a:ext>
+            </a:extLst>
+          </p:cNvPr>
+          <p:cNvSpPr>
+            <a:spLocks noGrp="1"/>
+          </p:cNvSpPr>
+          <p:nvPr>
+            <p:ph idx="1"/>
+          </p:nvPr>
+        </p:nvSpPr>
+        <p:spPr>
+          <a:xfrm>
+            <a:off x="143434" y="1362637"/>
+            <a:ext cx="11905129" cy="5307104"/>
+          </a:xfrm>
+        </p:spPr>
+        <p:txBody>
+          <a:bodyPr/>
+          <a:lstStyle/>
+          <a:p>
+            <a:pPr marL="0" indent="0">
+              <a:buNone/>
+            </a:pPr>
+            <a:endParaRPr lang="pl-PL" dirty="0"/>
+          </a:p>
+          <a:p>
+            <a:pPr marL="0" indent="0">
+              <a:buNone/>
+            </a:pPr>
+            <a:endParaRPr lang="pl-PL" dirty="0"/>
+          </a:p>
+          <a:p>
+            <a:pPr marL="0" indent="0">
+              <a:buNone/>
+            </a:pPr>
+            <a:endParaRPr lang="pl-PL" dirty="0"/>
+          </a:p>
+          <a:p>
+            <a:pPr marL="0" indent="0">
+              <a:buNone/>
+            </a:pPr>
+            <a:endParaRPr lang="pl-PL" dirty="0"/>
+          </a:p>
+          <a:p>
+            <a:pPr marL="0" indent="0">
+              <a:buNone/>
+            </a:pPr>
+            <a:endParaRPr lang="pl-PL" dirty="0"/>
+          </a:p>
+          <a:p>
+            <a:pPr marL="0" indent="0">
+              <a:buNone/>
+            </a:pPr>
+            <a:endParaRPr lang="pl-PL" dirty="0"/>
+          </a:p>
+          <a:p>
+            <a:pPr marL="0" indent="0">
+              <a:buNone/>
+            </a:pPr>
+            <a:endParaRPr lang="pl-PL" dirty="0"/>
+          </a:p>
+          <a:p>
+            <a:pPr marL="0" indent="0">
+              <a:buNone/>
+            </a:pPr>
+            <a:endParaRPr lang="pl-PL" dirty="0"/>
+          </a:p>
+          <a:p>
+            <a:pPr marL="0" indent="0">
+              <a:buNone/>
+            </a:pPr>
+            <a:endParaRPr lang="pl-PL" dirty="0"/>
+          </a:p>
+        </p:txBody>
+      </p:sp>
+    </p:spTree>
+    <p:extLst>
+      <p:ext uri="{BB962C8B-B14F-4D97-AF65-F5344CB8AC3E}">
+        <p14:creationId xmlns:p14="http://schemas.microsoft.com/office/powerpoint/2010/main" val="3865485290"/>
+      </p:ext>
+    </p:extLst>
+  </p:cSld>
+  <p:clrMapOvr>
+    <a:masterClrMapping/>
+  </p:clrMapOvr>
+</p:sld>
+</file>
+
+<file path=ppt/slides/slide8.xml><?xml version="1.0" encoding="utf-8"?>
+<p:sld xmlns:a="http://schemas.openxmlformats.org/drawingml/2006/main" xmlns:r="http://schemas.openxmlformats.org/officeDocument/2006/relationships" xmlns:p="http://schemas.openxmlformats.org/presentationml/2006/main">
+  <p:cSld>
+    <p:spTree>
+      <p:nvGrpSpPr>
+        <p:cNvPr id="1" name="">
+          <a:extLst>
+            <a:ext uri="{FF2B5EF4-FFF2-40B4-BE49-F238E27FC236}">
+              <a16:creationId xmlns:a16="http://schemas.microsoft.com/office/drawing/2014/main" id="{22432F2A-4009-B66D-7FB5-31559E0AE0F7}"/>
+            </a:ext>
+          </a:extLst>
+        </p:cNvPr>
+        <p:cNvGrpSpPr/>
+        <p:nvPr/>
+      </p:nvGrpSpPr>
+      <p:grpSpPr>
+        <a:xfrm>
+          <a:off x="0" y="0"/>
+          <a:ext cx="0" cy="0"/>
+          <a:chOff x="0" y="0"/>
+          <a:chExt cx="0" cy="0"/>
+        </a:xfrm>
+      </p:grpSpPr>
+      <p:sp>
+        <p:nvSpPr>
+          <p:cNvPr id="2" name="Tytuł 1">
+            <a:extLst>
+              <a:ext uri="{FF2B5EF4-FFF2-40B4-BE49-F238E27FC236}">
+                <a16:creationId xmlns:a16="http://schemas.microsoft.com/office/drawing/2014/main" id="{A8E4E4B9-5E68-8EE5-1DF8-9E82B8527AEF}"/>
+              </a:ext>
+            </a:extLst>
+          </p:cNvPr>
+          <p:cNvSpPr>
+            <a:spLocks noGrp="1"/>
+          </p:cNvSpPr>
+          <p:nvPr>
+            <p:ph type="title"/>
+          </p:nvPr>
+        </p:nvSpPr>
+        <p:spPr>
+          <a:xfrm>
+            <a:off x="143435" y="367554"/>
+            <a:ext cx="11905130" cy="995082"/>
+          </a:xfrm>
+        </p:spPr>
+        <p:txBody>
+          <a:bodyPr>
+            <a:normAutofit/>
+          </a:bodyPr>
+          <a:lstStyle/>
+          <a:p>
+            <a:r>
+              <a:rPr lang="pl-PL" dirty="0"/>
+              <a:t>Interakcja z przedmiotami</a:t>
+            </a:r>
+          </a:p>
+        </p:txBody>
+      </p:sp>
+      <p:sp>
+        <p:nvSpPr>
+          <p:cNvPr id="3" name="Symbol zastępczy zawartości 2">
+            <a:extLst>
+              <a:ext uri="{FF2B5EF4-FFF2-40B4-BE49-F238E27FC236}">
+                <a16:creationId xmlns:a16="http://schemas.microsoft.com/office/drawing/2014/main" id="{0C81E2E9-A1E2-3787-B88D-4E0A6192A2C7}"/>
+              </a:ext>
+            </a:extLst>
+          </p:cNvPr>
+          <p:cNvSpPr>
+            <a:spLocks noGrp="1"/>
+          </p:cNvSpPr>
+          <p:nvPr>
+            <p:ph idx="1"/>
+          </p:nvPr>
+        </p:nvSpPr>
+        <p:spPr>
+          <a:xfrm>
+            <a:off x="143434" y="1362637"/>
+            <a:ext cx="11905129" cy="5307104"/>
+          </a:xfrm>
+        </p:spPr>
+        <p:txBody>
+          <a:bodyPr/>
+          <a:lstStyle/>
+          <a:p>
+            <a:pPr marL="0" indent="0">
+              <a:buNone/>
+            </a:pPr>
+            <a:endParaRPr lang="pl-PL" dirty="0"/>
+          </a:p>
+          <a:p>
+            <a:pPr marL="0" indent="0">
+              <a:buNone/>
+            </a:pPr>
+            <a:endParaRPr lang="pl-PL" dirty="0"/>
+          </a:p>
+          <a:p>
+            <a:pPr marL="0" indent="0">
+              <a:buNone/>
+            </a:pPr>
+            <a:endParaRPr lang="pl-PL" dirty="0"/>
+          </a:p>
+          <a:p>
+            <a:pPr marL="0" indent="0">
+              <a:buNone/>
+            </a:pPr>
+            <a:endParaRPr lang="pl-PL" dirty="0"/>
+          </a:p>
+          <a:p>
+            <a:pPr marL="0" indent="0">
+              <a:buNone/>
+            </a:pPr>
+            <a:endParaRPr lang="pl-PL" dirty="0"/>
+          </a:p>
+          <a:p>
+            <a:pPr marL="0" indent="0">
+              <a:buNone/>
+            </a:pPr>
+            <a:endParaRPr lang="pl-PL" dirty="0"/>
+          </a:p>
+          <a:p>
+            <a:pPr marL="0" indent="0">
+              <a:buNone/>
+            </a:pPr>
+            <a:endParaRPr lang="pl-PL" dirty="0"/>
+          </a:p>
+          <a:p>
+            <a:pPr marL="0" indent="0">
+              <a:buNone/>
+            </a:pPr>
+            <a:endParaRPr lang="pl-PL" dirty="0"/>
+          </a:p>
+          <a:p>
+            <a:pPr marL="0" indent="0">
+              <a:buNone/>
+            </a:pPr>
+            <a:endParaRPr lang="pl-PL" dirty="0"/>
+          </a:p>
+        </p:txBody>
+      </p:sp>
+    </p:spTree>
+    <p:extLst>
+      <p:ext uri="{BB962C8B-B14F-4D97-AF65-F5344CB8AC3E}">
+        <p14:creationId xmlns:p14="http://schemas.microsoft.com/office/powerpoint/2010/main" val="4140615616"/>
+      </p:ext>
+    </p:extLst>
+  </p:cSld>
+  <p:clrMapOvr>
+    <a:masterClrMapping/>
+  </p:clrMapOvr>
+</p:sld>
+</file>
+
+<file path=ppt/slides/slide9.xml><?xml version="1.0" encoding="utf-8"?>
+<p:sld xmlns:a="http://schemas.openxmlformats.org/drawingml/2006/main" xmlns:r="http://schemas.openxmlformats.org/officeDocument/2006/relationships" xmlns:p="http://schemas.openxmlformats.org/presentationml/2006/main">
+  <p:cSld>
+    <p:spTree>
+      <p:nvGrpSpPr>
+        <p:cNvPr id="1" name="">
+          <a:extLst>
+            <a:ext uri="{FF2B5EF4-FFF2-40B4-BE49-F238E27FC236}">
+              <a16:creationId xmlns:a16="http://schemas.microsoft.com/office/drawing/2014/main" id="{D334B670-7A59-F936-F5D4-75ACA00BF4A7}"/>
+            </a:ext>
+          </a:extLst>
+        </p:cNvPr>
+        <p:cNvGrpSpPr/>
+        <p:nvPr/>
+      </p:nvGrpSpPr>
+      <p:grpSpPr>
+        <a:xfrm>
+          <a:off x="0" y="0"/>
+          <a:ext cx="0" cy="0"/>
+          <a:chOff x="0" y="0"/>
+          <a:chExt cx="0" cy="0"/>
+        </a:xfrm>
+      </p:grpSpPr>
+      <p:sp>
+        <p:nvSpPr>
+          <p:cNvPr id="2" name="Tytuł 1">
+            <a:extLst>
+              <a:ext uri="{FF2B5EF4-FFF2-40B4-BE49-F238E27FC236}">
+                <a16:creationId xmlns:a16="http://schemas.microsoft.com/office/drawing/2014/main" id="{A4E040E7-EA21-DC9F-064F-AE717ABEA25E}"/>
+              </a:ext>
+            </a:extLst>
+          </p:cNvPr>
+          <p:cNvSpPr>
+            <a:spLocks noGrp="1"/>
+          </p:cNvSpPr>
+          <p:nvPr>
+            <p:ph type="title"/>
+          </p:nvPr>
+        </p:nvSpPr>
+        <p:spPr>
+          <a:xfrm>
+            <a:off x="143435" y="367554"/>
+            <a:ext cx="11905130" cy="995082"/>
+          </a:xfrm>
+        </p:spPr>
+        <p:txBody>
+          <a:bodyPr>
+            <a:normAutofit/>
+          </a:bodyPr>
+          <a:lstStyle/>
+          <a:p>
+            <a:r>
+              <a:rPr lang="pl-PL" dirty="0"/>
+              <a:t>Zmiana wyglądu i koloru ścian</a:t>
+            </a:r>
+          </a:p>
+        </p:txBody>
+      </p:sp>
+      <p:sp>
+        <p:nvSpPr>
+          <p:cNvPr id="3" name="Symbol zastępczy zawartości 2">
+            <a:extLst>
+              <a:ext uri="{FF2B5EF4-FFF2-40B4-BE49-F238E27FC236}">
+                <a16:creationId xmlns:a16="http://schemas.microsoft.com/office/drawing/2014/main" id="{866EB9B4-4311-AB1E-3C3B-0A125625876C}"/>
+              </a:ext>
+            </a:extLst>
+          </p:cNvPr>
+          <p:cNvSpPr>
+            <a:spLocks noGrp="1"/>
+          </p:cNvSpPr>
+          <p:nvPr>
+            <p:ph idx="1"/>
+          </p:nvPr>
+        </p:nvSpPr>
+        <p:spPr>
+          <a:xfrm>
+            <a:off x="143434" y="1362637"/>
+            <a:ext cx="11905129" cy="5307104"/>
+          </a:xfrm>
+        </p:spPr>
+        <p:txBody>
+          <a:bodyPr/>
+          <a:lstStyle/>
+          <a:p>
+            <a:pPr marL="0" indent="0">
+              <a:buNone/>
+            </a:pPr>
+            <a:endParaRPr lang="pl-PL" dirty="0"/>
+          </a:p>
+          <a:p>
+            <a:pPr marL="0" indent="0">
+              <a:buNone/>
+            </a:pPr>
+            <a:endParaRPr lang="pl-PL" dirty="0"/>
+          </a:p>
+          <a:p>
+            <a:pPr marL="0" indent="0">
+              <a:buNone/>
+            </a:pPr>
+            <a:endParaRPr lang="pl-PL" dirty="0"/>
+          </a:p>
+          <a:p>
+            <a:pPr marL="0" indent="0">
+              <a:buNone/>
+            </a:pPr>
+            <a:endParaRPr lang="pl-PL" dirty="0"/>
+          </a:p>
+          <a:p>
+            <a:pPr marL="0" indent="0">
+              <a:buNone/>
+            </a:pPr>
+            <a:endParaRPr lang="pl-PL" dirty="0"/>
+          </a:p>
+          <a:p>
+            <a:pPr marL="0" indent="0">
+              <a:buNone/>
+            </a:pPr>
+            <a:endParaRPr lang="pl-PL" dirty="0"/>
+          </a:p>
+          <a:p>
+            <a:pPr marL="0" indent="0">
+              <a:buNone/>
+            </a:pPr>
+            <a:endParaRPr lang="pl-PL" dirty="0"/>
+          </a:p>
+          <a:p>
+            <a:pPr marL="0" indent="0">
+              <a:buNone/>
+            </a:pPr>
+            <a:endParaRPr lang="pl-PL" dirty="0"/>
+          </a:p>
+          <a:p>
+            <a:pPr marL="0" indent="0">
+              <a:buNone/>
+            </a:pPr>
+            <a:endParaRPr lang="pl-PL" dirty="0"/>
+          </a:p>
+        </p:txBody>
+      </p:sp>
+    </p:spTree>
+    <p:extLst>
+      <p:ext uri="{BB962C8B-B14F-4D97-AF65-F5344CB8AC3E}">
+        <p14:creationId xmlns:p14="http://schemas.microsoft.com/office/powerpoint/2010/main" val="1400430010"/>
+      </p:ext>
+    </p:extLst>
+  </p:cSld>
+  <p:clrMapOvr>
+    <a:masterClrMapping/>
+  </p:clrMapOvr>
+</p:sld>
+</file>
+
 <file path=ppt/theme/theme1.xml><?xml version="1.0" encoding="utf-8"?>
 <a:theme xmlns:a="http://schemas.openxmlformats.org/drawingml/2006/main" name="Siatka">
   <a:themeElements>

--- a/PrezentacjaAndrzejParuch.pptx
+++ b/PrezentacjaAndrzejParuch.pptx
@@ -2,7 +2,7 @@
 <file path=ppt/presentation.xml><?xml version="1.0" encoding="utf-8"?>
 <p:presentation xmlns:a="http://schemas.openxmlformats.org/drawingml/2006/main" xmlns:r="http://schemas.openxmlformats.org/officeDocument/2006/relationships" xmlns:p="http://schemas.openxmlformats.org/presentationml/2006/main" saveSubsetFonts="1">
   <p:sldMasterIdLst>
-    <p:sldMasterId id="2147483660" r:id="rId1"/>
+    <p:sldMasterId id="2147483797" r:id="rId1"/>
   </p:sldMasterIdLst>
   <p:sldIdLst>
     <p:sldId id="256" r:id="rId2"/>
@@ -125,8 +125,18 @@
 </file>
 
 <file path=ppt/slideLayouts/slideLayout1.xml><?xml version="1.0" encoding="utf-8"?>
-<p:sldLayout xmlns:a="http://schemas.openxmlformats.org/drawingml/2006/main" xmlns:r="http://schemas.openxmlformats.org/officeDocument/2006/relationships" xmlns:p="http://schemas.openxmlformats.org/presentationml/2006/main" type="title" preserve="1">
+<p:sldLayout xmlns:a="http://schemas.openxmlformats.org/drawingml/2006/main" xmlns:r="http://schemas.openxmlformats.org/officeDocument/2006/relationships" xmlns:p="http://schemas.openxmlformats.org/presentationml/2006/main" showMasterSp="0" type="title" preserve="1">
   <p:cSld name="Slajd tytułowy">
+    <p:bg>
+      <p:bgPr>
+        <a:solidFill>
+          <a:schemeClr val="bg2">
+            <a:lumMod val="75000"/>
+          </a:schemeClr>
+        </a:solidFill>
+        <a:effectLst/>
+      </p:bgPr>
+    </p:bg>
     <p:spTree>
       <p:nvGrpSpPr>
         <p:cNvPr id="1" name=""/>
@@ -153,282 +163,8 @@
         </p:nvSpPr>
         <p:spPr>
           <a:xfrm>
-            <a:off x="1751012" y="609601"/>
-            <a:ext cx="8676222" cy="3200400"/>
-          </a:xfrm>
-        </p:spPr>
-        <p:txBody>
-          <a:bodyPr anchor="b">
-            <a:normAutofit/>
-          </a:bodyPr>
-          <a:lstStyle>
-            <a:lvl1pPr algn="ctr">
-              <a:defRPr sz="4800">
-                <a:effectLst>
-                  <a:glow rad="38100">
-                    <a:schemeClr val="bg1">
-                      <a:lumMod val="65000"/>
-                      <a:lumOff val="35000"/>
-                      <a:alpha val="50000"/>
-                    </a:schemeClr>
-                  </a:glow>
-                  <a:outerShdw blurRad="28575" dist="31750" dir="13200000" algn="tl" rotWithShape="0">
-                    <a:srgbClr val="000000">
-                      <a:alpha val="25000"/>
-                    </a:srgbClr>
-                  </a:outerShdw>
-                </a:effectLst>
-              </a:defRPr>
-            </a:lvl1pPr>
-          </a:lstStyle>
-          <a:p>
-            <a:r>
-              <a:rPr lang="pl-PL"/>
-              <a:t>Kliknij, aby edytować styl</a:t>
-            </a:r>
-            <a:endParaRPr lang="en-US" dirty="0"/>
-          </a:p>
-        </p:txBody>
-      </p:sp>
-      <p:sp>
-        <p:nvSpPr>
-          <p:cNvPr id="3" name="Subtitle 2"/>
-          <p:cNvSpPr>
-            <a:spLocks noGrp="1"/>
-          </p:cNvSpPr>
-          <p:nvPr>
-            <p:ph type="subTitle" idx="1"/>
-          </p:nvPr>
-        </p:nvSpPr>
-        <p:spPr>
-          <a:xfrm>
-            <a:off x="1751012" y="3886200"/>
-            <a:ext cx="8676222" cy="1905000"/>
-          </a:xfrm>
-        </p:spPr>
-        <p:txBody>
-          <a:bodyPr anchor="t">
-            <a:normAutofit/>
-          </a:bodyPr>
-          <a:lstStyle>
-            <a:lvl1pPr marL="0" indent="0" algn="ctr">
-              <a:buNone/>
-              <a:defRPr sz="2100">
-                <a:gradFill flip="none" rotWithShape="1">
-                  <a:gsLst>
-                    <a:gs pos="0">
-                      <a:schemeClr val="tx1"/>
-                    </a:gs>
-                    <a:gs pos="100000">
-                      <a:schemeClr val="tx1">
-                        <a:lumMod val="75000"/>
-                      </a:schemeClr>
-                    </a:gs>
-                  </a:gsLst>
-                  <a:lin ang="5400000" scaled="0"/>
-                  <a:tileRect/>
-                </a:gradFill>
-              </a:defRPr>
-            </a:lvl1pPr>
-            <a:lvl2pPr marL="457200" indent="0" algn="ctr">
-              <a:buNone/>
-              <a:defRPr>
-                <a:solidFill>
-                  <a:schemeClr val="tx1">
-                    <a:tint val="75000"/>
-                  </a:schemeClr>
-                </a:solidFill>
-              </a:defRPr>
-            </a:lvl2pPr>
-            <a:lvl3pPr marL="914400" indent="0" algn="ctr">
-              <a:buNone/>
-              <a:defRPr>
-                <a:solidFill>
-                  <a:schemeClr val="tx1">
-                    <a:tint val="75000"/>
-                  </a:schemeClr>
-                </a:solidFill>
-              </a:defRPr>
-            </a:lvl3pPr>
-            <a:lvl4pPr marL="1371600" indent="0" algn="ctr">
-              <a:buNone/>
-              <a:defRPr>
-                <a:solidFill>
-                  <a:schemeClr val="tx1">
-                    <a:tint val="75000"/>
-                  </a:schemeClr>
-                </a:solidFill>
-              </a:defRPr>
-            </a:lvl4pPr>
-            <a:lvl5pPr marL="1828800" indent="0" algn="ctr">
-              <a:buNone/>
-              <a:defRPr>
-                <a:solidFill>
-                  <a:schemeClr val="tx1">
-                    <a:tint val="75000"/>
-                  </a:schemeClr>
-                </a:solidFill>
-              </a:defRPr>
-            </a:lvl5pPr>
-            <a:lvl6pPr marL="2286000" indent="0" algn="ctr">
-              <a:buNone/>
-              <a:defRPr>
-                <a:solidFill>
-                  <a:schemeClr val="tx1">
-                    <a:tint val="75000"/>
-                  </a:schemeClr>
-                </a:solidFill>
-              </a:defRPr>
-            </a:lvl6pPr>
-            <a:lvl7pPr marL="2743200" indent="0" algn="ctr">
-              <a:buNone/>
-              <a:defRPr>
-                <a:solidFill>
-                  <a:schemeClr val="tx1">
-                    <a:tint val="75000"/>
-                  </a:schemeClr>
-                </a:solidFill>
-              </a:defRPr>
-            </a:lvl7pPr>
-            <a:lvl8pPr marL="3200400" indent="0" algn="ctr">
-              <a:buNone/>
-              <a:defRPr>
-                <a:solidFill>
-                  <a:schemeClr val="tx1">
-                    <a:tint val="75000"/>
-                  </a:schemeClr>
-                </a:solidFill>
-              </a:defRPr>
-            </a:lvl8pPr>
-            <a:lvl9pPr marL="3657600" indent="0" algn="ctr">
-              <a:buNone/>
-              <a:defRPr>
-                <a:solidFill>
-                  <a:schemeClr val="tx1">
-                    <a:tint val="75000"/>
-                  </a:schemeClr>
-                </a:solidFill>
-              </a:defRPr>
-            </a:lvl9pPr>
-          </a:lstStyle>
-          <a:p>
-            <a:r>
-              <a:rPr lang="pl-PL"/>
-              <a:t>Kliknij, aby edytować styl wzorca podtytułu</a:t>
-            </a:r>
-            <a:endParaRPr lang="en-US" dirty="0"/>
-          </a:p>
-        </p:txBody>
-      </p:sp>
-      <p:sp>
-        <p:nvSpPr>
-          <p:cNvPr id="4" name="Date Placeholder 3"/>
-          <p:cNvSpPr>
-            <a:spLocks noGrp="1"/>
-          </p:cNvSpPr>
-          <p:nvPr>
-            <p:ph type="dt" sz="half" idx="10"/>
-          </p:nvPr>
-        </p:nvSpPr>
-        <p:spPr/>
-        <p:txBody>
-          <a:bodyPr/>
-          <a:lstStyle/>
-          <a:p>
-            <a:fld id="{CBBFB598-B412-4BAA-8D00-58612E105D61}" type="datetimeFigureOut">
-              <a:rPr lang="pl-PL" smtClean="0"/>
-              <a:t>26.11.2025</a:t>
-            </a:fld>
-            <a:endParaRPr lang="pl-PL"/>
-          </a:p>
-        </p:txBody>
-      </p:sp>
-      <p:sp>
-        <p:nvSpPr>
-          <p:cNvPr id="5" name="Footer Placeholder 4"/>
-          <p:cNvSpPr>
-            <a:spLocks noGrp="1"/>
-          </p:cNvSpPr>
-          <p:nvPr>
-            <p:ph type="ftr" sz="quarter" idx="11"/>
-          </p:nvPr>
-        </p:nvSpPr>
-        <p:spPr/>
-        <p:txBody>
-          <a:bodyPr/>
-          <a:lstStyle/>
-          <a:p>
-            <a:endParaRPr lang="pl-PL"/>
-          </a:p>
-        </p:txBody>
-      </p:sp>
-      <p:sp>
-        <p:nvSpPr>
-          <p:cNvPr id="6" name="Slide Number Placeholder 5"/>
-          <p:cNvSpPr>
-            <a:spLocks noGrp="1"/>
-          </p:cNvSpPr>
-          <p:nvPr>
-            <p:ph type="sldNum" sz="quarter" idx="12"/>
-          </p:nvPr>
-        </p:nvSpPr>
-        <p:spPr/>
-        <p:txBody>
-          <a:bodyPr/>
-          <a:lstStyle/>
-          <a:p>
-            <a:fld id="{5533C443-48B8-4D1F-B151-33629DF77D65}" type="slidenum">
-              <a:rPr lang="pl-PL" smtClean="0"/>
-              <a:t>‹#›</a:t>
-            </a:fld>
-            <a:endParaRPr lang="pl-PL"/>
-          </a:p>
-        </p:txBody>
-      </p:sp>
-    </p:spTree>
-    <p:extLst>
-      <p:ext uri="{BB962C8B-B14F-4D97-AF65-F5344CB8AC3E}">
-        <p14:creationId xmlns:p14="http://schemas.microsoft.com/office/powerpoint/2010/main" val="1048904997"/>
-      </p:ext>
-    </p:extLst>
-  </p:cSld>
-  <p:clrMapOvr>
-    <a:masterClrMapping/>
-  </p:clrMapOvr>
-</p:sldLayout>
-</file>
-
-<file path=ppt/slideLayouts/slideLayout10.xml><?xml version="1.0" encoding="utf-8"?>
-<p:sldLayout xmlns:a="http://schemas.openxmlformats.org/drawingml/2006/main" xmlns:r="http://schemas.openxmlformats.org/officeDocument/2006/relationships" xmlns:p="http://schemas.openxmlformats.org/presentationml/2006/main" preserve="1">
-  <p:cSld name="Obraz panoramiczny z podpisem">
-    <p:spTree>
-      <p:nvGrpSpPr>
-        <p:cNvPr id="1" name=""/>
-        <p:cNvGrpSpPr/>
-        <p:nvPr/>
-      </p:nvGrpSpPr>
-      <p:grpSpPr>
-        <a:xfrm>
-          <a:off x="0" y="0"/>
-          <a:ext cx="0" cy="0"/>
-          <a:chOff x="0" y="0"/>
-          <a:chExt cx="0" cy="0"/>
-        </a:xfrm>
-      </p:grpSpPr>
-      <p:sp>
-        <p:nvSpPr>
-          <p:cNvPr id="2" name="Title 1"/>
-          <p:cNvSpPr>
-            <a:spLocks noGrp="1"/>
-          </p:cNvSpPr>
-          <p:nvPr>
-            <p:ph type="title"/>
-          </p:nvPr>
-        </p:nvSpPr>
-        <p:spPr>
-          <a:xfrm>
-            <a:off x="1141413" y="4732865"/>
-            <a:ext cx="9906000" cy="566738"/>
+            <a:off x="1261872" y="758952"/>
+            <a:ext cx="9418320" cy="4041648"/>
           </a:xfrm>
         </p:spPr>
         <p:txBody>
@@ -437,787 +173,10 @@
           </a:bodyPr>
           <a:lstStyle>
             <a:lvl1pPr algn="l">
-              <a:defRPr sz="2400" b="0"/>
-            </a:lvl1pPr>
-          </a:lstStyle>
-          <a:p>
-            <a:r>
-              <a:rPr lang="pl-PL"/>
-              <a:t>Kliknij, aby edytować styl</a:t>
-            </a:r>
-            <a:endParaRPr lang="en-US" dirty="0"/>
-          </a:p>
-        </p:txBody>
-      </p:sp>
-      <p:sp>
-        <p:nvSpPr>
-          <p:cNvPr id="3" name="Picture Placeholder 2"/>
-          <p:cNvSpPr>
-            <a:spLocks noGrp="1" noChangeAspect="1"/>
-          </p:cNvSpPr>
-          <p:nvPr>
-            <p:ph type="pic" idx="1"/>
-          </p:nvPr>
-        </p:nvSpPr>
-        <p:spPr>
-          <a:xfrm>
-            <a:off x="1979612" y="932112"/>
-            <a:ext cx="8225944" cy="3164976"/>
-          </a:xfrm>
-          <a:prstGeom prst="roundRect">
-            <a:avLst>
-              <a:gd name="adj" fmla="val 4380"/>
-            </a:avLst>
-          </a:prstGeom>
-          <a:ln w="38100">
-            <a:gradFill flip="none" rotWithShape="1">
-              <a:gsLst>
-                <a:gs pos="0">
-                  <a:schemeClr val="bg2"/>
-                </a:gs>
-                <a:gs pos="100000">
-                  <a:schemeClr val="bg2">
-                    <a:lumMod val="75000"/>
-                  </a:schemeClr>
-                </a:gs>
-              </a:gsLst>
-              <a:lin ang="5400000" scaled="0"/>
-              <a:tileRect/>
-            </a:gradFill>
-          </a:ln>
-          <a:effectLst>
-            <a:innerShdw blurRad="57150" dist="38100" dir="14460000">
-              <a:srgbClr val="000000">
-                <a:alpha val="70000"/>
-              </a:srgbClr>
-            </a:innerShdw>
-          </a:effectLst>
-        </p:spPr>
-        <p:txBody>
-          <a:bodyPr anchor="t">
-            <a:normAutofit/>
-          </a:bodyPr>
-          <a:lstStyle>
-            <a:lvl1pPr marL="0" indent="0" algn="ctr">
-              <a:buNone/>
-              <a:defRPr sz="1600"/>
-            </a:lvl1pPr>
-            <a:lvl2pPr marL="457200" indent="0">
-              <a:buNone/>
-              <a:defRPr sz="1600"/>
-            </a:lvl2pPr>
-            <a:lvl3pPr marL="914400" indent="0">
-              <a:buNone/>
-              <a:defRPr sz="1600"/>
-            </a:lvl3pPr>
-            <a:lvl4pPr marL="1371600" indent="0">
-              <a:buNone/>
-              <a:defRPr sz="1600"/>
-            </a:lvl4pPr>
-            <a:lvl5pPr marL="1828800" indent="0">
-              <a:buNone/>
-              <a:defRPr sz="1600"/>
-            </a:lvl5pPr>
-            <a:lvl6pPr marL="2286000" indent="0">
-              <a:buNone/>
-              <a:defRPr sz="1600"/>
-            </a:lvl6pPr>
-            <a:lvl7pPr marL="2743200" indent="0">
-              <a:buNone/>
-              <a:defRPr sz="1600"/>
-            </a:lvl7pPr>
-            <a:lvl8pPr marL="3200400" indent="0">
-              <a:buNone/>
-              <a:defRPr sz="1600"/>
-            </a:lvl8pPr>
-            <a:lvl9pPr marL="3657600" indent="0">
-              <a:buNone/>
-              <a:defRPr sz="1600"/>
-            </a:lvl9pPr>
-          </a:lstStyle>
-          <a:p>
-            <a:r>
-              <a:rPr lang="pl-PL"/>
-              <a:t>Kliknij ikonę, aby dodać obraz</a:t>
-            </a:r>
-            <a:endParaRPr lang="en-US" dirty="0"/>
-          </a:p>
-        </p:txBody>
-      </p:sp>
-      <p:sp>
-        <p:nvSpPr>
-          <p:cNvPr id="4" name="Text Placeholder 3"/>
-          <p:cNvSpPr>
-            <a:spLocks noGrp="1"/>
-          </p:cNvSpPr>
-          <p:nvPr>
-            <p:ph type="body" sz="half" idx="2"/>
-          </p:nvPr>
-        </p:nvSpPr>
-        <p:spPr>
-          <a:xfrm>
-            <a:off x="1141413" y="5299603"/>
-            <a:ext cx="9906000" cy="493712"/>
-          </a:xfrm>
-        </p:spPr>
-        <p:txBody>
-          <a:bodyPr>
-            <a:normAutofit/>
-          </a:bodyPr>
-          <a:lstStyle>
-            <a:lvl1pPr marL="0" indent="0">
-              <a:buNone/>
-              <a:defRPr sz="1400"/>
-            </a:lvl1pPr>
-            <a:lvl2pPr marL="457200" indent="0">
-              <a:buNone/>
-              <a:defRPr sz="1200"/>
-            </a:lvl2pPr>
-            <a:lvl3pPr marL="914400" indent="0">
-              <a:buNone/>
-              <a:defRPr sz="1000"/>
-            </a:lvl3pPr>
-            <a:lvl4pPr marL="1371600" indent="0">
-              <a:buNone/>
-              <a:defRPr sz="900"/>
-            </a:lvl4pPr>
-            <a:lvl5pPr marL="1828800" indent="0">
-              <a:buNone/>
-              <a:defRPr sz="900"/>
-            </a:lvl5pPr>
-            <a:lvl6pPr marL="2286000" indent="0">
-              <a:buNone/>
-              <a:defRPr sz="900"/>
-            </a:lvl6pPr>
-            <a:lvl7pPr marL="2743200" indent="0">
-              <a:buNone/>
-              <a:defRPr sz="900"/>
-            </a:lvl7pPr>
-            <a:lvl8pPr marL="3200400" indent="0">
-              <a:buNone/>
-              <a:defRPr sz="900"/>
-            </a:lvl8pPr>
-            <a:lvl9pPr marL="3657600" indent="0">
-              <a:buNone/>
-              <a:defRPr sz="900"/>
-            </a:lvl9pPr>
-          </a:lstStyle>
-          <a:p>
-            <a:pPr lvl="0"/>
-            <a:r>
-              <a:rPr lang="pl-PL"/>
-              <a:t>Kliknij, aby edytować style wzorca tekstu</a:t>
-            </a:r>
-          </a:p>
-        </p:txBody>
-      </p:sp>
-      <p:sp>
-        <p:nvSpPr>
-          <p:cNvPr id="5" name="Date Placeholder 4"/>
-          <p:cNvSpPr>
-            <a:spLocks noGrp="1"/>
-          </p:cNvSpPr>
-          <p:nvPr>
-            <p:ph type="dt" sz="half" idx="10"/>
-          </p:nvPr>
-        </p:nvSpPr>
-        <p:spPr/>
-        <p:txBody>
-          <a:bodyPr/>
-          <a:lstStyle/>
-          <a:p>
-            <a:fld id="{CBBFB598-B412-4BAA-8D00-58612E105D61}" type="datetimeFigureOut">
-              <a:rPr lang="pl-PL" smtClean="0"/>
-              <a:t>26.11.2025</a:t>
-            </a:fld>
-            <a:endParaRPr lang="pl-PL"/>
-          </a:p>
-        </p:txBody>
-      </p:sp>
-      <p:sp>
-        <p:nvSpPr>
-          <p:cNvPr id="6" name="Footer Placeholder 5"/>
-          <p:cNvSpPr>
-            <a:spLocks noGrp="1"/>
-          </p:cNvSpPr>
-          <p:nvPr>
-            <p:ph type="ftr" sz="quarter" idx="11"/>
-          </p:nvPr>
-        </p:nvSpPr>
-        <p:spPr/>
-        <p:txBody>
-          <a:bodyPr/>
-          <a:lstStyle/>
-          <a:p>
-            <a:endParaRPr lang="pl-PL"/>
-          </a:p>
-        </p:txBody>
-      </p:sp>
-      <p:sp>
-        <p:nvSpPr>
-          <p:cNvPr id="7" name="Slide Number Placeholder 6"/>
-          <p:cNvSpPr>
-            <a:spLocks noGrp="1"/>
-          </p:cNvSpPr>
-          <p:nvPr>
-            <p:ph type="sldNum" sz="quarter" idx="12"/>
-          </p:nvPr>
-        </p:nvSpPr>
-        <p:spPr/>
-        <p:txBody>
-          <a:bodyPr/>
-          <a:lstStyle/>
-          <a:p>
-            <a:fld id="{5533C443-48B8-4D1F-B151-33629DF77D65}" type="slidenum">
-              <a:rPr lang="pl-PL" smtClean="0"/>
-              <a:t>‹#›</a:t>
-            </a:fld>
-            <a:endParaRPr lang="pl-PL"/>
-          </a:p>
-        </p:txBody>
-      </p:sp>
-    </p:spTree>
-    <p:extLst>
-      <p:ext uri="{BB962C8B-B14F-4D97-AF65-F5344CB8AC3E}">
-        <p14:creationId xmlns:p14="http://schemas.microsoft.com/office/powerpoint/2010/main" val="740357652"/>
-      </p:ext>
-    </p:extLst>
-  </p:cSld>
-  <p:clrMapOvr>
-    <a:masterClrMapping/>
-  </p:clrMapOvr>
-</p:sldLayout>
-</file>
-
-<file path=ppt/slideLayouts/slideLayout11.xml><?xml version="1.0" encoding="utf-8"?>
-<p:sldLayout xmlns:a="http://schemas.openxmlformats.org/drawingml/2006/main" xmlns:r="http://schemas.openxmlformats.org/officeDocument/2006/relationships" xmlns:p="http://schemas.openxmlformats.org/presentationml/2006/main" preserve="1">
-  <p:cSld name="Tytuł i podpis">
-    <p:spTree>
-      <p:nvGrpSpPr>
-        <p:cNvPr id="1" name=""/>
-        <p:cNvGrpSpPr/>
-        <p:nvPr/>
-      </p:nvGrpSpPr>
-      <p:grpSpPr>
-        <a:xfrm>
-          <a:off x="0" y="0"/>
-          <a:ext cx="0" cy="0"/>
-          <a:chOff x="0" y="0"/>
-          <a:chExt cx="0" cy="0"/>
-        </a:xfrm>
-      </p:grpSpPr>
-      <p:sp>
-        <p:nvSpPr>
-          <p:cNvPr id="2" name="Title 1"/>
-          <p:cNvSpPr>
-            <a:spLocks noGrp="1"/>
-          </p:cNvSpPr>
-          <p:nvPr>
-            <p:ph type="title"/>
-          </p:nvPr>
-        </p:nvSpPr>
-        <p:spPr>
-          <a:xfrm>
-            <a:off x="1141412" y="609601"/>
-            <a:ext cx="9905999" cy="3124199"/>
-          </a:xfrm>
-        </p:spPr>
-        <p:txBody>
-          <a:bodyPr anchor="ctr">
-            <a:normAutofit/>
-          </a:bodyPr>
-          <a:lstStyle>
-            <a:lvl1pPr algn="l">
-              <a:defRPr sz="3200" b="0" cap="all"/>
-            </a:lvl1pPr>
-          </a:lstStyle>
-          <a:p>
-            <a:r>
-              <a:rPr lang="pl-PL"/>
-              <a:t>Kliknij, aby edytować styl</a:t>
-            </a:r>
-            <a:endParaRPr lang="en-US" dirty="0"/>
-          </a:p>
-        </p:txBody>
-      </p:sp>
-      <p:sp>
-        <p:nvSpPr>
-          <p:cNvPr id="3" name="Text Placeholder 2"/>
-          <p:cNvSpPr>
-            <a:spLocks noGrp="1"/>
-          </p:cNvSpPr>
-          <p:nvPr>
-            <p:ph type="body" idx="1"/>
-          </p:nvPr>
-        </p:nvSpPr>
-        <p:spPr>
-          <a:xfrm>
-            <a:off x="1141411" y="4343400"/>
-            <a:ext cx="9906000" cy="1447800"/>
-          </a:xfrm>
-        </p:spPr>
-        <p:txBody>
-          <a:bodyPr anchor="ctr">
-            <a:normAutofit/>
-          </a:bodyPr>
-          <a:lstStyle>
-            <a:lvl1pPr marL="0" indent="0" algn="l">
-              <a:buNone/>
-              <a:defRPr sz="2000">
-                <a:gradFill flip="none" rotWithShape="1">
-                  <a:gsLst>
-                    <a:gs pos="0">
-                      <a:schemeClr val="tx1"/>
-                    </a:gs>
-                    <a:gs pos="100000">
-                      <a:schemeClr val="tx1">
-                        <a:lumMod val="75000"/>
-                      </a:schemeClr>
-                    </a:gs>
-                  </a:gsLst>
-                  <a:lin ang="5400000" scaled="0"/>
-                  <a:tileRect/>
-                </a:gradFill>
-              </a:defRPr>
-            </a:lvl1pPr>
-            <a:lvl2pPr marL="457200" indent="0">
-              <a:buNone/>
-              <a:defRPr sz="1800">
-                <a:solidFill>
-                  <a:schemeClr val="tx1">
-                    <a:tint val="75000"/>
-                  </a:schemeClr>
-                </a:solidFill>
-              </a:defRPr>
-            </a:lvl2pPr>
-            <a:lvl3pPr marL="914400" indent="0">
-              <a:buNone/>
-              <a:defRPr sz="1600">
-                <a:solidFill>
-                  <a:schemeClr val="tx1">
-                    <a:tint val="75000"/>
-                  </a:schemeClr>
-                </a:solidFill>
-              </a:defRPr>
-            </a:lvl3pPr>
-            <a:lvl4pPr marL="1371600" indent="0">
-              <a:buNone/>
-              <a:defRPr sz="1400">
-                <a:solidFill>
-                  <a:schemeClr val="tx1">
-                    <a:tint val="75000"/>
-                  </a:schemeClr>
-                </a:solidFill>
-              </a:defRPr>
-            </a:lvl4pPr>
-            <a:lvl5pPr marL="1828800" indent="0">
-              <a:buNone/>
-              <a:defRPr sz="1400">
-                <a:solidFill>
-                  <a:schemeClr val="tx1">
-                    <a:tint val="75000"/>
-                  </a:schemeClr>
-                </a:solidFill>
-              </a:defRPr>
-            </a:lvl5pPr>
-            <a:lvl6pPr marL="2286000" indent="0">
-              <a:buNone/>
-              <a:defRPr sz="1400">
-                <a:solidFill>
-                  <a:schemeClr val="tx1">
-                    <a:tint val="75000"/>
-                  </a:schemeClr>
-                </a:solidFill>
-              </a:defRPr>
-            </a:lvl6pPr>
-            <a:lvl7pPr marL="2743200" indent="0">
-              <a:buNone/>
-              <a:defRPr sz="1400">
-                <a:solidFill>
-                  <a:schemeClr val="tx1">
-                    <a:tint val="75000"/>
-                  </a:schemeClr>
-                </a:solidFill>
-              </a:defRPr>
-            </a:lvl7pPr>
-            <a:lvl8pPr marL="3200400" indent="0">
-              <a:buNone/>
-              <a:defRPr sz="1400">
-                <a:solidFill>
-                  <a:schemeClr val="tx1">
-                    <a:tint val="75000"/>
-                  </a:schemeClr>
-                </a:solidFill>
-              </a:defRPr>
-            </a:lvl8pPr>
-            <a:lvl9pPr marL="3657600" indent="0">
-              <a:buNone/>
-              <a:defRPr sz="1400">
-                <a:solidFill>
-                  <a:schemeClr val="tx1">
-                    <a:tint val="75000"/>
-                  </a:schemeClr>
-                </a:solidFill>
-              </a:defRPr>
-            </a:lvl9pPr>
-          </a:lstStyle>
-          <a:p>
-            <a:pPr lvl="0"/>
-            <a:r>
-              <a:rPr lang="pl-PL"/>
-              <a:t>Kliknij, aby edytować style wzorca tekstu</a:t>
-            </a:r>
-          </a:p>
-        </p:txBody>
-      </p:sp>
-      <p:sp>
-        <p:nvSpPr>
-          <p:cNvPr id="4" name="Date Placeholder 3"/>
-          <p:cNvSpPr>
-            <a:spLocks noGrp="1"/>
-          </p:cNvSpPr>
-          <p:nvPr>
-            <p:ph type="dt" sz="half" idx="10"/>
-          </p:nvPr>
-        </p:nvSpPr>
-        <p:spPr/>
-        <p:txBody>
-          <a:bodyPr/>
-          <a:lstStyle/>
-          <a:p>
-            <a:fld id="{CBBFB598-B412-4BAA-8D00-58612E105D61}" type="datetimeFigureOut">
-              <a:rPr lang="pl-PL" smtClean="0"/>
-              <a:t>26.11.2025</a:t>
-            </a:fld>
-            <a:endParaRPr lang="pl-PL"/>
-          </a:p>
-        </p:txBody>
-      </p:sp>
-      <p:sp>
-        <p:nvSpPr>
-          <p:cNvPr id="5" name="Footer Placeholder 4"/>
-          <p:cNvSpPr>
-            <a:spLocks noGrp="1"/>
-          </p:cNvSpPr>
-          <p:nvPr>
-            <p:ph type="ftr" sz="quarter" idx="11"/>
-          </p:nvPr>
-        </p:nvSpPr>
-        <p:spPr/>
-        <p:txBody>
-          <a:bodyPr/>
-          <a:lstStyle/>
-          <a:p>
-            <a:endParaRPr lang="pl-PL"/>
-          </a:p>
-        </p:txBody>
-      </p:sp>
-      <p:sp>
-        <p:nvSpPr>
-          <p:cNvPr id="6" name="Slide Number Placeholder 5"/>
-          <p:cNvSpPr>
-            <a:spLocks noGrp="1"/>
-          </p:cNvSpPr>
-          <p:nvPr>
-            <p:ph type="sldNum" sz="quarter" idx="12"/>
-          </p:nvPr>
-        </p:nvSpPr>
-        <p:spPr/>
-        <p:txBody>
-          <a:bodyPr/>
-          <a:lstStyle/>
-          <a:p>
-            <a:fld id="{5533C443-48B8-4D1F-B151-33629DF77D65}" type="slidenum">
-              <a:rPr lang="pl-PL" smtClean="0"/>
-              <a:t>‹#›</a:t>
-            </a:fld>
-            <a:endParaRPr lang="pl-PL"/>
-          </a:p>
-        </p:txBody>
-      </p:sp>
-    </p:spTree>
-    <p:extLst>
-      <p:ext uri="{BB962C8B-B14F-4D97-AF65-F5344CB8AC3E}">
-        <p14:creationId xmlns:p14="http://schemas.microsoft.com/office/powerpoint/2010/main" val="3246450887"/>
-      </p:ext>
-    </p:extLst>
-  </p:cSld>
-  <p:clrMapOvr>
-    <a:masterClrMapping/>
-  </p:clrMapOvr>
-</p:sldLayout>
-</file>
-
-<file path=ppt/slideLayouts/slideLayout12.xml><?xml version="1.0" encoding="utf-8"?>
-<p:sldLayout xmlns:a="http://schemas.openxmlformats.org/drawingml/2006/main" xmlns:r="http://schemas.openxmlformats.org/officeDocument/2006/relationships" xmlns:p="http://schemas.openxmlformats.org/presentationml/2006/main" preserve="1">
-  <p:cSld name="Oferta z podpisem">
-    <p:spTree>
-      <p:nvGrpSpPr>
-        <p:cNvPr id="1" name=""/>
-        <p:cNvGrpSpPr/>
-        <p:nvPr/>
-      </p:nvGrpSpPr>
-      <p:grpSpPr>
-        <a:xfrm>
-          <a:off x="0" y="0"/>
-          <a:ext cx="0" cy="0"/>
-          <a:chOff x="0" y="0"/>
-          <a:chExt cx="0" cy="0"/>
-        </a:xfrm>
-      </p:grpSpPr>
-      <p:sp>
-        <p:nvSpPr>
-          <p:cNvPr id="14" name="TextBox 13"/>
-          <p:cNvSpPr txBox="1"/>
-          <p:nvPr/>
-        </p:nvSpPr>
-        <p:spPr>
-          <a:xfrm>
-            <a:off x="836612" y="786824"/>
-            <a:ext cx="609600" cy="584776"/>
-          </a:xfrm>
-          <a:prstGeom prst="rect">
-            <a:avLst/>
-          </a:prstGeom>
-        </p:spPr>
-        <p:txBody>
-          <a:bodyPr vert="horz" lIns="91440" tIns="45720" rIns="91440" bIns="45720" rtlCol="0" anchor="ctr">
-            <a:noAutofit/>
-          </a:bodyPr>
-          <a:lstStyle>
-            <a:lvl1pPr>
-              <a:spcBef>
-                <a:spcPct val="0"/>
-              </a:spcBef>
-              <a:buNone/>
-              <a:defRPr sz="3200" b="0" cap="all">
-                <a:ln w="3175" cmpd="sng">
-                  <a:noFill/>
-                </a:ln>
-                <a:effectLst>
-                  <a:glow rad="38100">
-                    <a:schemeClr val="bg1">
-                      <a:lumMod val="65000"/>
-                      <a:lumOff val="35000"/>
-                      <a:alpha val="40000"/>
-                    </a:schemeClr>
-                  </a:glow>
-                  <a:outerShdw blurRad="28575" dist="38100" dir="14040000" algn="tl" rotWithShape="0">
-                    <a:srgbClr val="000000">
-                      <a:alpha val="25000"/>
-                    </a:srgbClr>
-                  </a:outerShdw>
-                </a:effectLst>
-              </a:defRPr>
-            </a:lvl1pPr>
-            <a:lvl2pPr>
-              <a:defRPr>
-                <a:solidFill>
-                  <a:schemeClr val="tx2"/>
-                </a:solidFill>
-              </a:defRPr>
-            </a:lvl2pPr>
-            <a:lvl3pPr>
-              <a:defRPr>
-                <a:solidFill>
-                  <a:schemeClr val="tx2"/>
-                </a:solidFill>
-              </a:defRPr>
-            </a:lvl3pPr>
-            <a:lvl4pPr>
-              <a:defRPr>
-                <a:solidFill>
-                  <a:schemeClr val="tx2"/>
-                </a:solidFill>
-              </a:defRPr>
-            </a:lvl4pPr>
-            <a:lvl5pPr>
-              <a:defRPr>
-                <a:solidFill>
-                  <a:schemeClr val="tx2"/>
-                </a:solidFill>
-              </a:defRPr>
-            </a:lvl5pPr>
-            <a:lvl6pPr>
-              <a:defRPr>
-                <a:solidFill>
-                  <a:schemeClr val="tx2"/>
-                </a:solidFill>
-              </a:defRPr>
-            </a:lvl6pPr>
-            <a:lvl7pPr>
-              <a:defRPr>
-                <a:solidFill>
-                  <a:schemeClr val="tx2"/>
-                </a:solidFill>
-              </a:defRPr>
-            </a:lvl7pPr>
-            <a:lvl8pPr>
-              <a:defRPr>
-                <a:solidFill>
-                  <a:schemeClr val="tx2"/>
-                </a:solidFill>
-              </a:defRPr>
-            </a:lvl8pPr>
-            <a:lvl9pPr>
-              <a:defRPr>
-                <a:solidFill>
-                  <a:schemeClr val="tx2"/>
-                </a:solidFill>
-              </a:defRPr>
-            </a:lvl9pPr>
-          </a:lstStyle>
-          <a:p>
-            <a:pPr lvl="0"/>
-            <a:r>
-              <a:rPr lang="en-US" sz="8000" dirty="0">
-                <a:solidFill>
-                  <a:schemeClr val="accent1"/>
-                </a:solidFill>
-              </a:rPr>
-              <a:t>“</a:t>
-            </a:r>
-          </a:p>
-        </p:txBody>
-      </p:sp>
-      <p:sp>
-        <p:nvSpPr>
-          <p:cNvPr id="15" name="TextBox 14"/>
-          <p:cNvSpPr txBox="1"/>
-          <p:nvPr/>
-        </p:nvSpPr>
-        <p:spPr>
-          <a:xfrm>
-            <a:off x="10437812" y="2743200"/>
-            <a:ext cx="609600" cy="584776"/>
-          </a:xfrm>
-          <a:prstGeom prst="rect">
-            <a:avLst/>
-          </a:prstGeom>
-        </p:spPr>
-        <p:txBody>
-          <a:bodyPr vert="horz" lIns="91440" tIns="45720" rIns="91440" bIns="45720" rtlCol="0" anchor="ctr">
-            <a:noAutofit/>
-          </a:bodyPr>
-          <a:lstStyle>
-            <a:lvl1pPr>
-              <a:spcBef>
-                <a:spcPct val="0"/>
-              </a:spcBef>
-              <a:buNone/>
-              <a:defRPr sz="3200" b="0" cap="all">
-                <a:ln w="3175" cmpd="sng">
-                  <a:noFill/>
-                </a:ln>
-                <a:effectLst>
-                  <a:glow rad="38100">
-                    <a:schemeClr val="bg1">
-                      <a:lumMod val="65000"/>
-                      <a:lumOff val="35000"/>
-                      <a:alpha val="40000"/>
-                    </a:schemeClr>
-                  </a:glow>
-                  <a:outerShdw blurRad="28575" dist="38100" dir="14040000" algn="tl" rotWithShape="0">
-                    <a:srgbClr val="000000">
-                      <a:alpha val="25000"/>
-                    </a:srgbClr>
-                  </a:outerShdw>
-                </a:effectLst>
-              </a:defRPr>
-            </a:lvl1pPr>
-            <a:lvl2pPr>
-              <a:defRPr>
-                <a:solidFill>
-                  <a:schemeClr val="tx2"/>
-                </a:solidFill>
-              </a:defRPr>
-            </a:lvl2pPr>
-            <a:lvl3pPr>
-              <a:defRPr>
-                <a:solidFill>
-                  <a:schemeClr val="tx2"/>
-                </a:solidFill>
-              </a:defRPr>
-            </a:lvl3pPr>
-            <a:lvl4pPr>
-              <a:defRPr>
-                <a:solidFill>
-                  <a:schemeClr val="tx2"/>
-                </a:solidFill>
-              </a:defRPr>
-            </a:lvl4pPr>
-            <a:lvl5pPr>
-              <a:defRPr>
-                <a:solidFill>
-                  <a:schemeClr val="tx2"/>
-                </a:solidFill>
-              </a:defRPr>
-            </a:lvl5pPr>
-            <a:lvl6pPr>
-              <a:defRPr>
-                <a:solidFill>
-                  <a:schemeClr val="tx2"/>
-                </a:solidFill>
-              </a:defRPr>
-            </a:lvl6pPr>
-            <a:lvl7pPr>
-              <a:defRPr>
-                <a:solidFill>
-                  <a:schemeClr val="tx2"/>
-                </a:solidFill>
-              </a:defRPr>
-            </a:lvl7pPr>
-            <a:lvl8pPr>
-              <a:defRPr>
-                <a:solidFill>
-                  <a:schemeClr val="tx2"/>
-                </a:solidFill>
-              </a:defRPr>
-            </a:lvl8pPr>
-            <a:lvl9pPr>
-              <a:defRPr>
-                <a:solidFill>
-                  <a:schemeClr val="tx2"/>
-                </a:solidFill>
-              </a:defRPr>
-            </a:lvl9pPr>
-          </a:lstStyle>
-          <a:p>
-            <a:pPr lvl="0" algn="r"/>
-            <a:r>
-              <a:rPr lang="en-US" sz="8000" dirty="0">
-                <a:solidFill>
-                  <a:schemeClr val="accent1"/>
-                </a:solidFill>
-              </a:rPr>
-              <a:t>”</a:t>
-            </a:r>
-          </a:p>
-        </p:txBody>
-      </p:sp>
-      <p:sp>
-        <p:nvSpPr>
-          <p:cNvPr id="2" name="Title 1"/>
-          <p:cNvSpPr>
-            <a:spLocks noGrp="1"/>
-          </p:cNvSpPr>
-          <p:nvPr>
-            <p:ph type="title"/>
-          </p:nvPr>
-        </p:nvSpPr>
-        <p:spPr>
-          <a:xfrm>
-            <a:off x="1446213" y="609601"/>
-            <a:ext cx="9296398" cy="2743199"/>
-          </a:xfrm>
-        </p:spPr>
-        <p:txBody>
-          <a:bodyPr anchor="ctr">
-            <a:normAutofit/>
-          </a:bodyPr>
-          <a:lstStyle>
-            <a:lvl1pPr algn="l">
-              <a:defRPr sz="3200" b="0" cap="all">
+              <a:lnSpc>
+                <a:spcPct val="85000"/>
+              </a:lnSpc>
+              <a:defRPr sz="7200" baseline="0">
                 <a:solidFill>
                   <a:schemeClr val="tx1"/>
                 </a:solidFill>
@@ -1235,128 +194,105 @@
       </p:sp>
       <p:sp>
         <p:nvSpPr>
-          <p:cNvPr id="10" name="Text Placeholder 9"/>
-          <p:cNvSpPr>
-            <a:spLocks noGrp="1"/>
-          </p:cNvSpPr>
-          <p:nvPr>
-            <p:ph type="body" sz="quarter" idx="13"/>
+          <p:cNvPr id="3" name="Subtitle 2"/>
+          <p:cNvSpPr>
+            <a:spLocks noGrp="1"/>
+          </p:cNvSpPr>
+          <p:nvPr>
+            <p:ph type="subTitle" idx="1"/>
           </p:nvPr>
         </p:nvSpPr>
         <p:spPr>
           <a:xfrm>
-            <a:off x="1674812" y="3352800"/>
-            <a:ext cx="8839202" cy="381000"/>
+            <a:off x="1261872" y="4800600"/>
+            <a:ext cx="9418320" cy="1691640"/>
           </a:xfrm>
         </p:spPr>
         <p:txBody>
-          <a:bodyPr anchor="ctr"/>
-          <a:lstStyle>
-            <a:lvl1pPr marL="0" indent="0">
-              <a:buFontTx/>
-              <a:buNone/>
-              <a:defRPr/>
-            </a:lvl1pPr>
-            <a:lvl2pPr marL="457200" indent="0">
-              <a:buFontTx/>
-              <a:buNone/>
-              <a:defRPr/>
-            </a:lvl2pPr>
-            <a:lvl3pPr marL="914400" indent="0">
-              <a:buFontTx/>
-              <a:buNone/>
-              <a:defRPr/>
-            </a:lvl3pPr>
-            <a:lvl4pPr marL="1371600" indent="0">
-              <a:buFontTx/>
-              <a:buNone/>
-              <a:defRPr/>
-            </a:lvl4pPr>
-            <a:lvl5pPr marL="1828800" indent="0">
-              <a:buFontTx/>
-              <a:buNone/>
-              <a:defRPr/>
-            </a:lvl5pPr>
-          </a:lstStyle>
-          <a:p>
-            <a:pPr lvl="0"/>
-            <a:r>
-              <a:rPr lang="pl-PL"/>
-              <a:t>Kliknij, aby edytować style wzorca tekstu</a:t>
-            </a:r>
-          </a:p>
-        </p:txBody>
-      </p:sp>
-      <p:sp>
-        <p:nvSpPr>
-          <p:cNvPr id="3" name="Text Placeholder 2"/>
-          <p:cNvSpPr>
-            <a:spLocks noGrp="1"/>
-          </p:cNvSpPr>
-          <p:nvPr>
-            <p:ph type="body" idx="1"/>
-          </p:nvPr>
-        </p:nvSpPr>
-        <p:spPr>
-          <a:xfrm>
-            <a:off x="1141411" y="4343400"/>
-            <a:ext cx="9906000" cy="1447800"/>
-          </a:xfrm>
-        </p:spPr>
-        <p:txBody>
-          <a:bodyPr vert="horz" lIns="91440" tIns="45720" rIns="91440" bIns="45720" rtlCol="0" anchor="ctr">
+          <a:bodyPr>
             <a:normAutofit/>
           </a:bodyPr>
           <a:lstStyle>
+            <a:lvl1pPr marL="0" indent="0" algn="l">
+              <a:buNone/>
+              <a:defRPr sz="2200" baseline="0">
+                <a:solidFill>
+                  <a:schemeClr val="tx1">
+                    <a:lumMod val="75000"/>
+                  </a:schemeClr>
+                </a:solidFill>
+              </a:defRPr>
+            </a:lvl1pPr>
+            <a:lvl2pPr marL="457200" indent="0" algn="ctr">
+              <a:buNone/>
+              <a:defRPr sz="2200"/>
+            </a:lvl2pPr>
+            <a:lvl3pPr marL="914400" indent="0" algn="ctr">
+              <a:buNone/>
+              <a:defRPr sz="2200"/>
+            </a:lvl3pPr>
+            <a:lvl4pPr marL="1371600" indent="0" algn="ctr">
+              <a:buNone/>
+              <a:defRPr sz="2000"/>
+            </a:lvl4pPr>
+            <a:lvl5pPr marL="1828800" indent="0" algn="ctr">
+              <a:buNone/>
+              <a:defRPr sz="2000"/>
+            </a:lvl5pPr>
+            <a:lvl6pPr marL="2286000" indent="0" algn="ctr">
+              <a:buNone/>
+              <a:defRPr sz="2000"/>
+            </a:lvl6pPr>
+            <a:lvl7pPr marL="2743200" indent="0" algn="ctr">
+              <a:buNone/>
+              <a:defRPr sz="2000"/>
+            </a:lvl7pPr>
+            <a:lvl8pPr marL="3200400" indent="0" algn="ctr">
+              <a:buNone/>
+              <a:defRPr sz="2000"/>
+            </a:lvl8pPr>
+            <a:lvl9pPr marL="3657600" indent="0" algn="ctr">
+              <a:buNone/>
+              <a:defRPr sz="2000"/>
+            </a:lvl9pPr>
+          </a:lstStyle>
+          <a:p>
+            <a:r>
+              <a:rPr lang="pl-PL"/>
+              <a:t>Kliknij, aby edytować styl wzorca podtytułu</a:t>
+            </a:r>
+            <a:endParaRPr lang="en-US" dirty="0"/>
+          </a:p>
+        </p:txBody>
+      </p:sp>
+      <p:sp>
+        <p:nvSpPr>
+          <p:cNvPr id="4" name="Date Placeholder 3"/>
+          <p:cNvSpPr>
+            <a:spLocks noGrp="1"/>
+          </p:cNvSpPr>
+          <p:nvPr>
+            <p:ph type="dt" sz="half" idx="10"/>
+          </p:nvPr>
+        </p:nvSpPr>
+        <p:spPr/>
+        <p:txBody>
+          <a:bodyPr/>
+          <a:lstStyle>
             <a:lvl1pPr>
-              <a:buNone/>
-              <a:defRPr lang="en-US" sz="2000">
-                <a:gradFill flip="none" rotWithShape="1">
-                  <a:gsLst>
-                    <a:gs pos="0">
-                      <a:schemeClr val="tx1"/>
-                    </a:gs>
-                    <a:gs pos="100000">
-                      <a:schemeClr val="tx1">
-                        <a:lumMod val="75000"/>
-                      </a:schemeClr>
-                    </a:gs>
-                  </a:gsLst>
-                  <a:lin ang="5400000" scaled="0"/>
-                  <a:tileRect/>
-                </a:gradFill>
+              <a:defRPr>
+                <a:solidFill>
+                  <a:schemeClr val="tx1">
+                    <a:lumMod val="50000"/>
+                  </a:schemeClr>
+                </a:solidFill>
               </a:defRPr>
             </a:lvl1pPr>
           </a:lstStyle>
           <a:p>
-            <a:pPr marL="0" lvl="0" indent="0">
-              <a:buNone/>
-            </a:pPr>
-            <a:r>
-              <a:rPr lang="pl-PL"/>
-              <a:t>Kliknij, aby edytować style wzorca tekstu</a:t>
-            </a:r>
-          </a:p>
-        </p:txBody>
-      </p:sp>
-      <p:sp>
-        <p:nvSpPr>
-          <p:cNvPr id="4" name="Date Placeholder 3"/>
-          <p:cNvSpPr>
-            <a:spLocks noGrp="1"/>
-          </p:cNvSpPr>
-          <p:nvPr>
-            <p:ph type="dt" sz="half" idx="10"/>
-          </p:nvPr>
-        </p:nvSpPr>
-        <p:spPr/>
-        <p:txBody>
-          <a:bodyPr/>
-          <a:lstStyle/>
-          <a:p>
             <a:fld id="{CBBFB598-B412-4BAA-8D00-58612E105D61}" type="datetimeFigureOut">
               <a:rPr lang="pl-PL" smtClean="0"/>
-              <a:t>26.11.2025</a:t>
+              <a:t>29.11.2025</a:t>
             </a:fld>
             <a:endParaRPr lang="pl-PL"/>
           </a:p>
@@ -1375,7 +311,17 @@
         <p:spPr/>
         <p:txBody>
           <a:bodyPr/>
-          <a:lstStyle/>
+          <a:lstStyle>
+            <a:lvl1pPr>
+              <a:defRPr>
+                <a:solidFill>
+                  <a:schemeClr val="tx1">
+                    <a:lumMod val="65000"/>
+                  </a:schemeClr>
+                </a:solidFill>
+              </a:defRPr>
+            </a:lvl1pPr>
+          </a:lstStyle>
           <a:p>
             <a:endParaRPr lang="pl-PL"/>
           </a:p>
@@ -1394,7 +340,17 @@
         <p:spPr/>
         <p:txBody>
           <a:bodyPr/>
-          <a:lstStyle/>
+          <a:lstStyle>
+            <a:lvl1pPr>
+              <a:defRPr>
+                <a:solidFill>
+                  <a:schemeClr val="tx1">
+                    <a:lumMod val="65000"/>
+                  </a:schemeClr>
+                </a:solidFill>
+              </a:defRPr>
+            </a:lvl1pPr>
+          </a:lstStyle>
           <a:p>
             <a:fld id="{5533C443-48B8-4D1F-B151-33629DF77D65}" type="slidenum">
               <a:rPr lang="pl-PL" smtClean="0"/>
@@ -1404,1108 +360,58 @@
           </a:p>
         </p:txBody>
       </p:sp>
+      <p:sp>
+        <p:nvSpPr>
+          <p:cNvPr id="7" name="Rectangle 6"/>
+          <p:cNvSpPr/>
+          <p:nvPr/>
+        </p:nvSpPr>
+        <p:spPr>
+          <a:xfrm>
+            <a:off x="0" y="0"/>
+            <a:ext cx="457200" cy="6858000"/>
+          </a:xfrm>
+          <a:prstGeom prst="rect">
+            <a:avLst/>
+          </a:prstGeom>
+          <a:solidFill>
+            <a:schemeClr val="accent1"/>
+          </a:solidFill>
+          <a:ln>
+            <a:noFill/>
+          </a:ln>
+        </p:spPr>
+        <p:style>
+          <a:lnRef idx="2">
+            <a:schemeClr val="accent1">
+              <a:shade val="50000"/>
+            </a:schemeClr>
+          </a:lnRef>
+          <a:fillRef idx="1">
+            <a:schemeClr val="accent1"/>
+          </a:fillRef>
+          <a:effectRef idx="0">
+            <a:schemeClr val="accent1"/>
+          </a:effectRef>
+          <a:fontRef idx="minor">
+            <a:schemeClr val="lt1"/>
+          </a:fontRef>
+        </p:style>
+      </p:sp>
     </p:spTree>
     <p:extLst>
       <p:ext uri="{BB962C8B-B14F-4D97-AF65-F5344CB8AC3E}">
-        <p14:creationId xmlns:p14="http://schemas.microsoft.com/office/powerpoint/2010/main" val="1977525775"/>
+        <p14:creationId xmlns:p14="http://schemas.microsoft.com/office/powerpoint/2010/main" val="2307896775"/>
       </p:ext>
     </p:extLst>
   </p:cSld>
   <p:clrMapOvr>
-    <a:masterClrMapping/>
+    <a:overrideClrMapping bg1="dk1" tx1="lt1" bg2="dk2" tx2="lt2" accent1="accent1" accent2="accent2" accent3="accent3" accent4="accent4" accent5="accent5" accent6="accent6" hlink="hlink" folHlink="folHlink"/>
   </p:clrMapOvr>
 </p:sldLayout>
 </file>
 
-<file path=ppt/slideLayouts/slideLayout13.xml><?xml version="1.0" encoding="utf-8"?>
-<p:sldLayout xmlns:a="http://schemas.openxmlformats.org/drawingml/2006/main" xmlns:r="http://schemas.openxmlformats.org/officeDocument/2006/relationships" xmlns:p="http://schemas.openxmlformats.org/presentationml/2006/main" preserve="1">
-  <p:cSld name="Karta nazwy">
-    <p:spTree>
-      <p:nvGrpSpPr>
-        <p:cNvPr id="1" name=""/>
-        <p:cNvGrpSpPr/>
-        <p:nvPr/>
-      </p:nvGrpSpPr>
-      <p:grpSpPr>
-        <a:xfrm>
-          <a:off x="0" y="0"/>
-          <a:ext cx="0" cy="0"/>
-          <a:chOff x="0" y="0"/>
-          <a:chExt cx="0" cy="0"/>
-        </a:xfrm>
-      </p:grpSpPr>
-      <p:sp>
-        <p:nvSpPr>
-          <p:cNvPr id="2" name="Title 1"/>
-          <p:cNvSpPr>
-            <a:spLocks noGrp="1"/>
-          </p:cNvSpPr>
-          <p:nvPr>
-            <p:ph type="title"/>
-          </p:nvPr>
-        </p:nvSpPr>
-        <p:spPr>
-          <a:xfrm>
-            <a:off x="1141412" y="3308581"/>
-            <a:ext cx="9906000" cy="1468800"/>
-          </a:xfrm>
-        </p:spPr>
-        <p:txBody>
-          <a:bodyPr anchor="b">
-            <a:normAutofit/>
-          </a:bodyPr>
-          <a:lstStyle>
-            <a:lvl1pPr algn="l">
-              <a:defRPr sz="3200" b="0" cap="all"/>
-            </a:lvl1pPr>
-          </a:lstStyle>
-          <a:p>
-            <a:r>
-              <a:rPr lang="pl-PL"/>
-              <a:t>Kliknij, aby edytować styl</a:t>
-            </a:r>
-            <a:endParaRPr lang="en-US" dirty="0"/>
-          </a:p>
-        </p:txBody>
-      </p:sp>
-      <p:sp>
-        <p:nvSpPr>
-          <p:cNvPr id="3" name="Text Placeholder 2"/>
-          <p:cNvSpPr>
-            <a:spLocks noGrp="1"/>
-          </p:cNvSpPr>
-          <p:nvPr>
-            <p:ph type="body" idx="1"/>
-          </p:nvPr>
-        </p:nvSpPr>
-        <p:spPr>
-          <a:xfrm>
-            <a:off x="1141410" y="4777381"/>
-            <a:ext cx="9906001" cy="860400"/>
-          </a:xfrm>
-        </p:spPr>
-        <p:txBody>
-          <a:bodyPr vert="horz" lIns="91440" tIns="45720" rIns="91440" bIns="45720" rtlCol="0" anchor="t">
-            <a:normAutofit/>
-          </a:bodyPr>
-          <a:lstStyle>
-            <a:lvl1pPr>
-              <a:defRPr lang="en-US" sz="2000">
-                <a:gradFill flip="none" rotWithShape="1">
-                  <a:gsLst>
-                    <a:gs pos="0">
-                      <a:schemeClr val="tx1"/>
-                    </a:gs>
-                    <a:gs pos="100000">
-                      <a:schemeClr val="tx1">
-                        <a:lumMod val="75000"/>
-                      </a:schemeClr>
-                    </a:gs>
-                  </a:gsLst>
-                  <a:lin ang="5400000" scaled="0"/>
-                  <a:tileRect/>
-                </a:gradFill>
-              </a:defRPr>
-            </a:lvl1pPr>
-          </a:lstStyle>
-          <a:p>
-            <a:pPr marL="0" lvl="0" indent="0">
-              <a:buNone/>
-            </a:pPr>
-            <a:r>
-              <a:rPr lang="pl-PL"/>
-              <a:t>Kliknij, aby edytować style wzorca tekstu</a:t>
-            </a:r>
-          </a:p>
-        </p:txBody>
-      </p:sp>
-      <p:sp>
-        <p:nvSpPr>
-          <p:cNvPr id="4" name="Date Placeholder 3"/>
-          <p:cNvSpPr>
-            <a:spLocks noGrp="1"/>
-          </p:cNvSpPr>
-          <p:nvPr>
-            <p:ph type="dt" sz="half" idx="10"/>
-          </p:nvPr>
-        </p:nvSpPr>
-        <p:spPr/>
-        <p:txBody>
-          <a:bodyPr/>
-          <a:lstStyle/>
-          <a:p>
-            <a:fld id="{CBBFB598-B412-4BAA-8D00-58612E105D61}" type="datetimeFigureOut">
-              <a:rPr lang="pl-PL" smtClean="0"/>
-              <a:t>26.11.2025</a:t>
-            </a:fld>
-            <a:endParaRPr lang="pl-PL"/>
-          </a:p>
-        </p:txBody>
-      </p:sp>
-      <p:sp>
-        <p:nvSpPr>
-          <p:cNvPr id="5" name="Footer Placeholder 4"/>
-          <p:cNvSpPr>
-            <a:spLocks noGrp="1"/>
-          </p:cNvSpPr>
-          <p:nvPr>
-            <p:ph type="ftr" sz="quarter" idx="11"/>
-          </p:nvPr>
-        </p:nvSpPr>
-        <p:spPr/>
-        <p:txBody>
-          <a:bodyPr/>
-          <a:lstStyle/>
-          <a:p>
-            <a:endParaRPr lang="pl-PL"/>
-          </a:p>
-        </p:txBody>
-      </p:sp>
-      <p:sp>
-        <p:nvSpPr>
-          <p:cNvPr id="6" name="Slide Number Placeholder 5"/>
-          <p:cNvSpPr>
-            <a:spLocks noGrp="1"/>
-          </p:cNvSpPr>
-          <p:nvPr>
-            <p:ph type="sldNum" sz="quarter" idx="12"/>
-          </p:nvPr>
-        </p:nvSpPr>
-        <p:spPr/>
-        <p:txBody>
-          <a:bodyPr/>
-          <a:lstStyle/>
-          <a:p>
-            <a:fld id="{5533C443-48B8-4D1F-B151-33629DF77D65}" type="slidenum">
-              <a:rPr lang="pl-PL" smtClean="0"/>
-              <a:t>‹#›</a:t>
-            </a:fld>
-            <a:endParaRPr lang="pl-PL"/>
-          </a:p>
-        </p:txBody>
-      </p:sp>
-    </p:spTree>
-    <p:extLst>
-      <p:ext uri="{BB962C8B-B14F-4D97-AF65-F5344CB8AC3E}">
-        <p14:creationId xmlns:p14="http://schemas.microsoft.com/office/powerpoint/2010/main" val="1019715453"/>
-      </p:ext>
-    </p:extLst>
-  </p:cSld>
-  <p:clrMapOvr>
-    <a:masterClrMapping/>
-  </p:clrMapOvr>
-</p:sldLayout>
-</file>
-
-<file path=ppt/slideLayouts/slideLayout14.xml><?xml version="1.0" encoding="utf-8"?>
-<p:sldLayout xmlns:a="http://schemas.openxmlformats.org/drawingml/2006/main" xmlns:r="http://schemas.openxmlformats.org/officeDocument/2006/relationships" xmlns:p="http://schemas.openxmlformats.org/presentationml/2006/main" preserve="1">
-  <p:cSld name="Karta nazwy cytatu">
-    <p:spTree>
-      <p:nvGrpSpPr>
-        <p:cNvPr id="1" name=""/>
-        <p:cNvGrpSpPr/>
-        <p:nvPr/>
-      </p:nvGrpSpPr>
-      <p:grpSpPr>
-        <a:xfrm>
-          <a:off x="0" y="0"/>
-          <a:ext cx="0" cy="0"/>
-          <a:chOff x="0" y="0"/>
-          <a:chExt cx="0" cy="0"/>
-        </a:xfrm>
-      </p:grpSpPr>
-      <p:sp>
-        <p:nvSpPr>
-          <p:cNvPr id="14" name="TextBox 13"/>
-          <p:cNvSpPr txBox="1"/>
-          <p:nvPr/>
-        </p:nvSpPr>
-        <p:spPr>
-          <a:xfrm>
-            <a:off x="836612" y="786824"/>
-            <a:ext cx="609600" cy="584776"/>
-          </a:xfrm>
-          <a:prstGeom prst="rect">
-            <a:avLst/>
-          </a:prstGeom>
-        </p:spPr>
-        <p:txBody>
-          <a:bodyPr vert="horz" lIns="91440" tIns="45720" rIns="91440" bIns="45720" rtlCol="0" anchor="ctr">
-            <a:noAutofit/>
-          </a:bodyPr>
-          <a:lstStyle>
-            <a:lvl1pPr>
-              <a:spcBef>
-                <a:spcPct val="0"/>
-              </a:spcBef>
-              <a:buNone/>
-              <a:defRPr sz="3200" b="0" cap="all">
-                <a:ln w="3175" cmpd="sng">
-                  <a:noFill/>
-                </a:ln>
-                <a:effectLst>
-                  <a:glow rad="38100">
-                    <a:schemeClr val="bg1">
-                      <a:lumMod val="65000"/>
-                      <a:lumOff val="35000"/>
-                      <a:alpha val="40000"/>
-                    </a:schemeClr>
-                  </a:glow>
-                  <a:outerShdw blurRad="28575" dist="38100" dir="14040000" algn="tl" rotWithShape="0">
-                    <a:srgbClr val="000000">
-                      <a:alpha val="25000"/>
-                    </a:srgbClr>
-                  </a:outerShdw>
-                </a:effectLst>
-              </a:defRPr>
-            </a:lvl1pPr>
-            <a:lvl2pPr>
-              <a:defRPr>
-                <a:solidFill>
-                  <a:schemeClr val="tx2"/>
-                </a:solidFill>
-              </a:defRPr>
-            </a:lvl2pPr>
-            <a:lvl3pPr>
-              <a:defRPr>
-                <a:solidFill>
-                  <a:schemeClr val="tx2"/>
-                </a:solidFill>
-              </a:defRPr>
-            </a:lvl3pPr>
-            <a:lvl4pPr>
-              <a:defRPr>
-                <a:solidFill>
-                  <a:schemeClr val="tx2"/>
-                </a:solidFill>
-              </a:defRPr>
-            </a:lvl4pPr>
-            <a:lvl5pPr>
-              <a:defRPr>
-                <a:solidFill>
-                  <a:schemeClr val="tx2"/>
-                </a:solidFill>
-              </a:defRPr>
-            </a:lvl5pPr>
-            <a:lvl6pPr>
-              <a:defRPr>
-                <a:solidFill>
-                  <a:schemeClr val="tx2"/>
-                </a:solidFill>
-              </a:defRPr>
-            </a:lvl6pPr>
-            <a:lvl7pPr>
-              <a:defRPr>
-                <a:solidFill>
-                  <a:schemeClr val="tx2"/>
-                </a:solidFill>
-              </a:defRPr>
-            </a:lvl7pPr>
-            <a:lvl8pPr>
-              <a:defRPr>
-                <a:solidFill>
-                  <a:schemeClr val="tx2"/>
-                </a:solidFill>
-              </a:defRPr>
-            </a:lvl8pPr>
-            <a:lvl9pPr>
-              <a:defRPr>
-                <a:solidFill>
-                  <a:schemeClr val="tx2"/>
-                </a:solidFill>
-              </a:defRPr>
-            </a:lvl9pPr>
-          </a:lstStyle>
-          <a:p>
-            <a:pPr lvl="0"/>
-            <a:r>
-              <a:rPr lang="en-US" sz="8000" dirty="0">
-                <a:solidFill>
-                  <a:schemeClr val="accent1"/>
-                </a:solidFill>
-              </a:rPr>
-              <a:t>“</a:t>
-            </a:r>
-          </a:p>
-        </p:txBody>
-      </p:sp>
-      <p:sp>
-        <p:nvSpPr>
-          <p:cNvPr id="15" name="TextBox 14"/>
-          <p:cNvSpPr txBox="1"/>
-          <p:nvPr/>
-        </p:nvSpPr>
-        <p:spPr>
-          <a:xfrm>
-            <a:off x="10437812" y="2743200"/>
-            <a:ext cx="609600" cy="584776"/>
-          </a:xfrm>
-          <a:prstGeom prst="rect">
-            <a:avLst/>
-          </a:prstGeom>
-        </p:spPr>
-        <p:txBody>
-          <a:bodyPr vert="horz" lIns="91440" tIns="45720" rIns="91440" bIns="45720" rtlCol="0" anchor="ctr">
-            <a:noAutofit/>
-          </a:bodyPr>
-          <a:lstStyle>
-            <a:lvl1pPr>
-              <a:spcBef>
-                <a:spcPct val="0"/>
-              </a:spcBef>
-              <a:buNone/>
-              <a:defRPr sz="3200" b="0" cap="all">
-                <a:ln w="3175" cmpd="sng">
-                  <a:noFill/>
-                </a:ln>
-                <a:effectLst>
-                  <a:glow rad="38100">
-                    <a:schemeClr val="bg1">
-                      <a:lumMod val="65000"/>
-                      <a:lumOff val="35000"/>
-                      <a:alpha val="40000"/>
-                    </a:schemeClr>
-                  </a:glow>
-                  <a:outerShdw blurRad="28575" dist="38100" dir="14040000" algn="tl" rotWithShape="0">
-                    <a:srgbClr val="000000">
-                      <a:alpha val="25000"/>
-                    </a:srgbClr>
-                  </a:outerShdw>
-                </a:effectLst>
-              </a:defRPr>
-            </a:lvl1pPr>
-            <a:lvl2pPr>
-              <a:defRPr>
-                <a:solidFill>
-                  <a:schemeClr val="tx2"/>
-                </a:solidFill>
-              </a:defRPr>
-            </a:lvl2pPr>
-            <a:lvl3pPr>
-              <a:defRPr>
-                <a:solidFill>
-                  <a:schemeClr val="tx2"/>
-                </a:solidFill>
-              </a:defRPr>
-            </a:lvl3pPr>
-            <a:lvl4pPr>
-              <a:defRPr>
-                <a:solidFill>
-                  <a:schemeClr val="tx2"/>
-                </a:solidFill>
-              </a:defRPr>
-            </a:lvl4pPr>
-            <a:lvl5pPr>
-              <a:defRPr>
-                <a:solidFill>
-                  <a:schemeClr val="tx2"/>
-                </a:solidFill>
-              </a:defRPr>
-            </a:lvl5pPr>
-            <a:lvl6pPr>
-              <a:defRPr>
-                <a:solidFill>
-                  <a:schemeClr val="tx2"/>
-                </a:solidFill>
-              </a:defRPr>
-            </a:lvl6pPr>
-            <a:lvl7pPr>
-              <a:defRPr>
-                <a:solidFill>
-                  <a:schemeClr val="tx2"/>
-                </a:solidFill>
-              </a:defRPr>
-            </a:lvl7pPr>
-            <a:lvl8pPr>
-              <a:defRPr>
-                <a:solidFill>
-                  <a:schemeClr val="tx2"/>
-                </a:solidFill>
-              </a:defRPr>
-            </a:lvl8pPr>
-            <a:lvl9pPr>
-              <a:defRPr>
-                <a:solidFill>
-                  <a:schemeClr val="tx2"/>
-                </a:solidFill>
-              </a:defRPr>
-            </a:lvl9pPr>
-          </a:lstStyle>
-          <a:p>
-            <a:pPr lvl="0" algn="r"/>
-            <a:r>
-              <a:rPr lang="en-US" sz="8000" dirty="0">
-                <a:solidFill>
-                  <a:schemeClr val="accent1"/>
-                </a:solidFill>
-              </a:rPr>
-              <a:t>”</a:t>
-            </a:r>
-          </a:p>
-        </p:txBody>
-      </p:sp>
-      <p:sp>
-        <p:nvSpPr>
-          <p:cNvPr id="2" name="Title 1"/>
-          <p:cNvSpPr>
-            <a:spLocks noGrp="1"/>
-          </p:cNvSpPr>
-          <p:nvPr>
-            <p:ph type="title"/>
-          </p:nvPr>
-        </p:nvSpPr>
-        <p:spPr>
-          <a:xfrm>
-            <a:off x="1446213" y="609601"/>
-            <a:ext cx="9296398" cy="2743199"/>
-          </a:xfrm>
-        </p:spPr>
-        <p:txBody>
-          <a:bodyPr anchor="ctr">
-            <a:normAutofit/>
-          </a:bodyPr>
-          <a:lstStyle>
-            <a:lvl1pPr algn="l">
-              <a:defRPr sz="3200" b="0" cap="all">
-                <a:gradFill flip="none" rotWithShape="1">
-                  <a:gsLst>
-                    <a:gs pos="0">
-                      <a:schemeClr val="tx1"/>
-                    </a:gs>
-                    <a:gs pos="100000">
-                      <a:schemeClr val="tx1">
-                        <a:lumMod val="75000"/>
-                      </a:schemeClr>
-                    </a:gs>
-                  </a:gsLst>
-                  <a:lin ang="5400000" scaled="0"/>
-                  <a:tileRect/>
-                </a:gradFill>
-              </a:defRPr>
-            </a:lvl1pPr>
-          </a:lstStyle>
-          <a:p>
-            <a:r>
-              <a:rPr lang="pl-PL"/>
-              <a:t>Kliknij, aby edytować styl</a:t>
-            </a:r>
-            <a:endParaRPr lang="en-US" dirty="0"/>
-          </a:p>
-        </p:txBody>
-      </p:sp>
-      <p:sp>
-        <p:nvSpPr>
-          <p:cNvPr id="10" name="Text Placeholder 9"/>
-          <p:cNvSpPr>
-            <a:spLocks noGrp="1"/>
-          </p:cNvSpPr>
-          <p:nvPr>
-            <p:ph type="body" sz="quarter" idx="13"/>
-          </p:nvPr>
-        </p:nvSpPr>
-        <p:spPr>
-          <a:xfrm>
-            <a:off x="1141412" y="3886200"/>
-            <a:ext cx="9906000" cy="889000"/>
-          </a:xfrm>
-        </p:spPr>
-        <p:txBody>
-          <a:bodyPr vert="horz" lIns="91440" tIns="45720" rIns="91440" bIns="45720" rtlCol="0" anchor="b">
-            <a:normAutofit/>
-          </a:bodyPr>
-          <a:lstStyle>
-            <a:lvl1pPr>
-              <a:buNone/>
-              <a:defRPr lang="en-US" sz="2400" b="0" cap="all" dirty="0">
-                <a:ln w="3175" cmpd="sng">
-                  <a:noFill/>
-                </a:ln>
-                <a:gradFill flip="none" rotWithShape="1">
-                  <a:gsLst>
-                    <a:gs pos="0">
-                      <a:schemeClr val="tx1"/>
-                    </a:gs>
-                    <a:gs pos="100000">
-                      <a:schemeClr val="tx1">
-                        <a:lumMod val="75000"/>
-                      </a:schemeClr>
-                    </a:gs>
-                  </a:gsLst>
-                  <a:lin ang="5400000" scaled="0"/>
-                  <a:tileRect/>
-                </a:gradFill>
-                <a:effectLst>
-                  <a:glow rad="38100">
-                    <a:schemeClr val="bg1">
-                      <a:lumMod val="65000"/>
-                      <a:lumOff val="35000"/>
-                      <a:alpha val="40000"/>
-                    </a:schemeClr>
-                  </a:glow>
-                  <a:outerShdw blurRad="28575" dist="38100" dir="14040000" algn="tl" rotWithShape="0">
-                    <a:srgbClr val="000000">
-                      <a:alpha val="25000"/>
-                    </a:srgbClr>
-                  </a:outerShdw>
-                </a:effectLst>
-              </a:defRPr>
-            </a:lvl1pPr>
-          </a:lstStyle>
-          <a:p>
-            <a:pPr marL="0" lvl="0">
-              <a:spcBef>
-                <a:spcPct val="0"/>
-              </a:spcBef>
-              <a:buNone/>
-            </a:pPr>
-            <a:r>
-              <a:rPr lang="pl-PL"/>
-              <a:t>Kliknij, aby edytować style wzorca tekstu</a:t>
-            </a:r>
-          </a:p>
-        </p:txBody>
-      </p:sp>
-      <p:sp>
-        <p:nvSpPr>
-          <p:cNvPr id="3" name="Text Placeholder 2"/>
-          <p:cNvSpPr>
-            <a:spLocks noGrp="1"/>
-          </p:cNvSpPr>
-          <p:nvPr>
-            <p:ph type="body" idx="1"/>
-          </p:nvPr>
-        </p:nvSpPr>
-        <p:spPr>
-          <a:xfrm>
-            <a:off x="1141411" y="4775200"/>
-            <a:ext cx="9906000" cy="1016000"/>
-          </a:xfrm>
-        </p:spPr>
-        <p:txBody>
-          <a:bodyPr anchor="t">
-            <a:normAutofit/>
-          </a:bodyPr>
-          <a:lstStyle>
-            <a:lvl1pPr marL="0" indent="0" algn="l">
-              <a:buNone/>
-              <a:defRPr sz="1800">
-                <a:gradFill flip="none" rotWithShape="1">
-                  <a:gsLst>
-                    <a:gs pos="0">
-                      <a:schemeClr val="tx1"/>
-                    </a:gs>
-                    <a:gs pos="100000">
-                      <a:schemeClr val="tx1">
-                        <a:lumMod val="75000"/>
-                      </a:schemeClr>
-                    </a:gs>
-                  </a:gsLst>
-                  <a:lin ang="5400000" scaled="0"/>
-                  <a:tileRect/>
-                </a:gradFill>
-              </a:defRPr>
-            </a:lvl1pPr>
-            <a:lvl2pPr marL="457200" indent="0">
-              <a:buNone/>
-              <a:defRPr sz="1800">
-                <a:solidFill>
-                  <a:schemeClr val="tx1">
-                    <a:tint val="75000"/>
-                  </a:schemeClr>
-                </a:solidFill>
-              </a:defRPr>
-            </a:lvl2pPr>
-            <a:lvl3pPr marL="914400" indent="0">
-              <a:buNone/>
-              <a:defRPr sz="1600">
-                <a:solidFill>
-                  <a:schemeClr val="tx1">
-                    <a:tint val="75000"/>
-                  </a:schemeClr>
-                </a:solidFill>
-              </a:defRPr>
-            </a:lvl3pPr>
-            <a:lvl4pPr marL="1371600" indent="0">
-              <a:buNone/>
-              <a:defRPr sz="1400">
-                <a:solidFill>
-                  <a:schemeClr val="tx1">
-                    <a:tint val="75000"/>
-                  </a:schemeClr>
-                </a:solidFill>
-              </a:defRPr>
-            </a:lvl4pPr>
-            <a:lvl5pPr marL="1828800" indent="0">
-              <a:buNone/>
-              <a:defRPr sz="1400">
-                <a:solidFill>
-                  <a:schemeClr val="tx1">
-                    <a:tint val="75000"/>
-                  </a:schemeClr>
-                </a:solidFill>
-              </a:defRPr>
-            </a:lvl5pPr>
-            <a:lvl6pPr marL="2286000" indent="0">
-              <a:buNone/>
-              <a:defRPr sz="1400">
-                <a:solidFill>
-                  <a:schemeClr val="tx1">
-                    <a:tint val="75000"/>
-                  </a:schemeClr>
-                </a:solidFill>
-              </a:defRPr>
-            </a:lvl6pPr>
-            <a:lvl7pPr marL="2743200" indent="0">
-              <a:buNone/>
-              <a:defRPr sz="1400">
-                <a:solidFill>
-                  <a:schemeClr val="tx1">
-                    <a:tint val="75000"/>
-                  </a:schemeClr>
-                </a:solidFill>
-              </a:defRPr>
-            </a:lvl7pPr>
-            <a:lvl8pPr marL="3200400" indent="0">
-              <a:buNone/>
-              <a:defRPr sz="1400">
-                <a:solidFill>
-                  <a:schemeClr val="tx1">
-                    <a:tint val="75000"/>
-                  </a:schemeClr>
-                </a:solidFill>
-              </a:defRPr>
-            </a:lvl8pPr>
-            <a:lvl9pPr marL="3657600" indent="0">
-              <a:buNone/>
-              <a:defRPr sz="1400">
-                <a:solidFill>
-                  <a:schemeClr val="tx1">
-                    <a:tint val="75000"/>
-                  </a:schemeClr>
-                </a:solidFill>
-              </a:defRPr>
-            </a:lvl9pPr>
-          </a:lstStyle>
-          <a:p>
-            <a:pPr lvl="0"/>
-            <a:r>
-              <a:rPr lang="pl-PL"/>
-              <a:t>Kliknij, aby edytować style wzorca tekstu</a:t>
-            </a:r>
-          </a:p>
-        </p:txBody>
-      </p:sp>
-      <p:sp>
-        <p:nvSpPr>
-          <p:cNvPr id="4" name="Date Placeholder 3"/>
-          <p:cNvSpPr>
-            <a:spLocks noGrp="1"/>
-          </p:cNvSpPr>
-          <p:nvPr>
-            <p:ph type="dt" sz="half" idx="10"/>
-          </p:nvPr>
-        </p:nvSpPr>
-        <p:spPr/>
-        <p:txBody>
-          <a:bodyPr/>
-          <a:lstStyle/>
-          <a:p>
-            <a:fld id="{CBBFB598-B412-4BAA-8D00-58612E105D61}" type="datetimeFigureOut">
-              <a:rPr lang="pl-PL" smtClean="0"/>
-              <a:t>26.11.2025</a:t>
-            </a:fld>
-            <a:endParaRPr lang="pl-PL"/>
-          </a:p>
-        </p:txBody>
-      </p:sp>
-      <p:sp>
-        <p:nvSpPr>
-          <p:cNvPr id="5" name="Footer Placeholder 4"/>
-          <p:cNvSpPr>
-            <a:spLocks noGrp="1"/>
-          </p:cNvSpPr>
-          <p:nvPr>
-            <p:ph type="ftr" sz="quarter" idx="11"/>
-          </p:nvPr>
-        </p:nvSpPr>
-        <p:spPr/>
-        <p:txBody>
-          <a:bodyPr/>
-          <a:lstStyle/>
-          <a:p>
-            <a:endParaRPr lang="pl-PL"/>
-          </a:p>
-        </p:txBody>
-      </p:sp>
-      <p:sp>
-        <p:nvSpPr>
-          <p:cNvPr id="6" name="Slide Number Placeholder 5"/>
-          <p:cNvSpPr>
-            <a:spLocks noGrp="1"/>
-          </p:cNvSpPr>
-          <p:nvPr>
-            <p:ph type="sldNum" sz="quarter" idx="12"/>
-          </p:nvPr>
-        </p:nvSpPr>
-        <p:spPr/>
-        <p:txBody>
-          <a:bodyPr/>
-          <a:lstStyle/>
-          <a:p>
-            <a:fld id="{5533C443-48B8-4D1F-B151-33629DF77D65}" type="slidenum">
-              <a:rPr lang="pl-PL" smtClean="0"/>
-              <a:t>‹#›</a:t>
-            </a:fld>
-            <a:endParaRPr lang="pl-PL"/>
-          </a:p>
-        </p:txBody>
-      </p:sp>
-    </p:spTree>
-    <p:extLst>
-      <p:ext uri="{BB962C8B-B14F-4D97-AF65-F5344CB8AC3E}">
-        <p14:creationId xmlns:p14="http://schemas.microsoft.com/office/powerpoint/2010/main" val="2997863432"/>
-      </p:ext>
-    </p:extLst>
-  </p:cSld>
-  <p:clrMapOvr>
-    <a:masterClrMapping/>
-  </p:clrMapOvr>
-</p:sldLayout>
-</file>
-
-<file path=ppt/slideLayouts/slideLayout15.xml><?xml version="1.0" encoding="utf-8"?>
-<p:sldLayout xmlns:a="http://schemas.openxmlformats.org/drawingml/2006/main" xmlns:r="http://schemas.openxmlformats.org/officeDocument/2006/relationships" xmlns:p="http://schemas.openxmlformats.org/presentationml/2006/main" preserve="1">
-  <p:cSld name="Prawda lub fałsz">
-    <p:spTree>
-      <p:nvGrpSpPr>
-        <p:cNvPr id="1" name=""/>
-        <p:cNvGrpSpPr/>
-        <p:nvPr/>
-      </p:nvGrpSpPr>
-      <p:grpSpPr>
-        <a:xfrm>
-          <a:off x="0" y="0"/>
-          <a:ext cx="0" cy="0"/>
-          <a:chOff x="0" y="0"/>
-          <a:chExt cx="0" cy="0"/>
-        </a:xfrm>
-      </p:grpSpPr>
-      <p:sp>
-        <p:nvSpPr>
-          <p:cNvPr id="2" name="Title 1"/>
-          <p:cNvSpPr>
-            <a:spLocks noGrp="1"/>
-          </p:cNvSpPr>
-          <p:nvPr>
-            <p:ph type="title"/>
-          </p:nvPr>
-        </p:nvSpPr>
-        <p:spPr>
-          <a:xfrm>
-            <a:off x="1141412" y="609601"/>
-            <a:ext cx="9905999" cy="2743199"/>
-          </a:xfrm>
-        </p:spPr>
-        <p:txBody>
-          <a:bodyPr vert="horz" lIns="91440" tIns="45720" rIns="91440" bIns="45720" rtlCol="0" anchor="ctr">
-            <a:normAutofit/>
-          </a:bodyPr>
-          <a:lstStyle>
-            <a:lvl1pPr>
-              <a:defRPr lang="en-US" b="0" dirty="0"/>
-            </a:lvl1pPr>
-          </a:lstStyle>
-          <a:p>
-            <a:pPr marL="0" lvl="0"/>
-            <a:r>
-              <a:rPr lang="pl-PL"/>
-              <a:t>Kliknij, aby edytować styl</a:t>
-            </a:r>
-            <a:endParaRPr lang="en-US" dirty="0"/>
-          </a:p>
-        </p:txBody>
-      </p:sp>
-      <p:sp>
-        <p:nvSpPr>
-          <p:cNvPr id="10" name="Text Placeholder 9"/>
-          <p:cNvSpPr>
-            <a:spLocks noGrp="1"/>
-          </p:cNvSpPr>
-          <p:nvPr>
-            <p:ph type="body" sz="quarter" idx="13"/>
-          </p:nvPr>
-        </p:nvSpPr>
-        <p:spPr>
-          <a:xfrm>
-            <a:off x="1141412" y="3505200"/>
-            <a:ext cx="9906000" cy="838200"/>
-          </a:xfrm>
-        </p:spPr>
-        <p:txBody>
-          <a:bodyPr vert="horz" lIns="91440" tIns="45720" rIns="91440" bIns="45720" rtlCol="0" anchor="b">
-            <a:normAutofit/>
-          </a:bodyPr>
-          <a:lstStyle>
-            <a:lvl1pPr>
-              <a:buNone/>
-              <a:defRPr lang="en-US" sz="2800" b="0" cap="all" dirty="0">
-                <a:ln w="3175" cmpd="sng">
-                  <a:noFill/>
-                </a:ln>
-                <a:gradFill flip="none" rotWithShape="1">
-                  <a:gsLst>
-                    <a:gs pos="0">
-                      <a:schemeClr val="tx1"/>
-                    </a:gs>
-                    <a:gs pos="100000">
-                      <a:schemeClr val="tx1">
-                        <a:lumMod val="75000"/>
-                      </a:schemeClr>
-                    </a:gs>
-                  </a:gsLst>
-                  <a:lin ang="5400000" scaled="0"/>
-                  <a:tileRect/>
-                </a:gradFill>
-                <a:effectLst>
-                  <a:glow rad="38100">
-                    <a:schemeClr val="bg1">
-                      <a:lumMod val="65000"/>
-                      <a:lumOff val="35000"/>
-                      <a:alpha val="40000"/>
-                    </a:schemeClr>
-                  </a:glow>
-                  <a:outerShdw blurRad="28575" dist="38100" dir="14040000" algn="tl" rotWithShape="0">
-                    <a:srgbClr val="000000">
-                      <a:alpha val="25000"/>
-                    </a:srgbClr>
-                  </a:outerShdw>
-                </a:effectLst>
-              </a:defRPr>
-            </a:lvl1pPr>
-          </a:lstStyle>
-          <a:p>
-            <a:pPr marL="0" lvl="0">
-              <a:spcBef>
-                <a:spcPct val="0"/>
-              </a:spcBef>
-              <a:buNone/>
-            </a:pPr>
-            <a:r>
-              <a:rPr lang="pl-PL"/>
-              <a:t>Kliknij, aby edytować style wzorca tekstu</a:t>
-            </a:r>
-          </a:p>
-        </p:txBody>
-      </p:sp>
-      <p:sp>
-        <p:nvSpPr>
-          <p:cNvPr id="3" name="Text Placeholder 2"/>
-          <p:cNvSpPr>
-            <a:spLocks noGrp="1"/>
-          </p:cNvSpPr>
-          <p:nvPr>
-            <p:ph type="body" idx="1"/>
-          </p:nvPr>
-        </p:nvSpPr>
-        <p:spPr>
-          <a:xfrm>
-            <a:off x="1141411" y="4343400"/>
-            <a:ext cx="9906000" cy="1447800"/>
-          </a:xfrm>
-        </p:spPr>
-        <p:txBody>
-          <a:bodyPr anchor="t">
-            <a:normAutofit/>
-          </a:bodyPr>
-          <a:lstStyle>
-            <a:lvl1pPr marL="0" indent="0" algn="l">
-              <a:buNone/>
-              <a:defRPr sz="1800">
-                <a:gradFill flip="none" rotWithShape="1">
-                  <a:gsLst>
-                    <a:gs pos="0">
-                      <a:schemeClr val="tx1"/>
-                    </a:gs>
-                    <a:gs pos="100000">
-                      <a:schemeClr val="tx1">
-                        <a:lumMod val="75000"/>
-                      </a:schemeClr>
-                    </a:gs>
-                  </a:gsLst>
-                  <a:lin ang="5400000" scaled="0"/>
-                  <a:tileRect/>
-                </a:gradFill>
-              </a:defRPr>
-            </a:lvl1pPr>
-            <a:lvl2pPr marL="457200" indent="0">
-              <a:buNone/>
-              <a:defRPr sz="1800">
-                <a:solidFill>
-                  <a:schemeClr val="tx1">
-                    <a:tint val="75000"/>
-                  </a:schemeClr>
-                </a:solidFill>
-              </a:defRPr>
-            </a:lvl2pPr>
-            <a:lvl3pPr marL="914400" indent="0">
-              <a:buNone/>
-              <a:defRPr sz="1600">
-                <a:solidFill>
-                  <a:schemeClr val="tx1">
-                    <a:tint val="75000"/>
-                  </a:schemeClr>
-                </a:solidFill>
-              </a:defRPr>
-            </a:lvl3pPr>
-            <a:lvl4pPr marL="1371600" indent="0">
-              <a:buNone/>
-              <a:defRPr sz="1400">
-                <a:solidFill>
-                  <a:schemeClr val="tx1">
-                    <a:tint val="75000"/>
-                  </a:schemeClr>
-                </a:solidFill>
-              </a:defRPr>
-            </a:lvl4pPr>
-            <a:lvl5pPr marL="1828800" indent="0">
-              <a:buNone/>
-              <a:defRPr sz="1400">
-                <a:solidFill>
-                  <a:schemeClr val="tx1">
-                    <a:tint val="75000"/>
-                  </a:schemeClr>
-                </a:solidFill>
-              </a:defRPr>
-            </a:lvl5pPr>
-            <a:lvl6pPr marL="2286000" indent="0">
-              <a:buNone/>
-              <a:defRPr sz="1400">
-                <a:solidFill>
-                  <a:schemeClr val="tx1">
-                    <a:tint val="75000"/>
-                  </a:schemeClr>
-                </a:solidFill>
-              </a:defRPr>
-            </a:lvl6pPr>
-            <a:lvl7pPr marL="2743200" indent="0">
-              <a:buNone/>
-              <a:defRPr sz="1400">
-                <a:solidFill>
-                  <a:schemeClr val="tx1">
-                    <a:tint val="75000"/>
-                  </a:schemeClr>
-                </a:solidFill>
-              </a:defRPr>
-            </a:lvl7pPr>
-            <a:lvl8pPr marL="3200400" indent="0">
-              <a:buNone/>
-              <a:defRPr sz="1400">
-                <a:solidFill>
-                  <a:schemeClr val="tx1">
-                    <a:tint val="75000"/>
-                  </a:schemeClr>
-                </a:solidFill>
-              </a:defRPr>
-            </a:lvl8pPr>
-            <a:lvl9pPr marL="3657600" indent="0">
-              <a:buNone/>
-              <a:defRPr sz="1400">
-                <a:solidFill>
-                  <a:schemeClr val="tx1">
-                    <a:tint val="75000"/>
-                  </a:schemeClr>
-                </a:solidFill>
-              </a:defRPr>
-            </a:lvl9pPr>
-          </a:lstStyle>
-          <a:p>
-            <a:pPr lvl="0"/>
-            <a:r>
-              <a:rPr lang="pl-PL"/>
-              <a:t>Kliknij, aby edytować style wzorca tekstu</a:t>
-            </a:r>
-          </a:p>
-        </p:txBody>
-      </p:sp>
-      <p:sp>
-        <p:nvSpPr>
-          <p:cNvPr id="4" name="Date Placeholder 3"/>
-          <p:cNvSpPr>
-            <a:spLocks noGrp="1"/>
-          </p:cNvSpPr>
-          <p:nvPr>
-            <p:ph type="dt" sz="half" idx="10"/>
-          </p:nvPr>
-        </p:nvSpPr>
-        <p:spPr/>
-        <p:txBody>
-          <a:bodyPr/>
-          <a:lstStyle/>
-          <a:p>
-            <a:fld id="{CBBFB598-B412-4BAA-8D00-58612E105D61}" type="datetimeFigureOut">
-              <a:rPr lang="pl-PL" smtClean="0"/>
-              <a:t>26.11.2025</a:t>
-            </a:fld>
-            <a:endParaRPr lang="pl-PL"/>
-          </a:p>
-        </p:txBody>
-      </p:sp>
-      <p:sp>
-        <p:nvSpPr>
-          <p:cNvPr id="5" name="Footer Placeholder 4"/>
-          <p:cNvSpPr>
-            <a:spLocks noGrp="1"/>
-          </p:cNvSpPr>
-          <p:nvPr>
-            <p:ph type="ftr" sz="quarter" idx="11"/>
-          </p:nvPr>
-        </p:nvSpPr>
-        <p:spPr/>
-        <p:txBody>
-          <a:bodyPr/>
-          <a:lstStyle/>
-          <a:p>
-            <a:endParaRPr lang="pl-PL"/>
-          </a:p>
-        </p:txBody>
-      </p:sp>
-      <p:sp>
-        <p:nvSpPr>
-          <p:cNvPr id="6" name="Slide Number Placeholder 5"/>
-          <p:cNvSpPr>
-            <a:spLocks noGrp="1"/>
-          </p:cNvSpPr>
-          <p:nvPr>
-            <p:ph type="sldNum" sz="quarter" idx="12"/>
-          </p:nvPr>
-        </p:nvSpPr>
-        <p:spPr/>
-        <p:txBody>
-          <a:bodyPr/>
-          <a:lstStyle/>
-          <a:p>
-            <a:fld id="{5533C443-48B8-4D1F-B151-33629DF77D65}" type="slidenum">
-              <a:rPr lang="pl-PL" smtClean="0"/>
-              <a:t>‹#›</a:t>
-            </a:fld>
-            <a:endParaRPr lang="pl-PL"/>
-          </a:p>
-        </p:txBody>
-      </p:sp>
-    </p:spTree>
-    <p:extLst>
-      <p:ext uri="{BB962C8B-B14F-4D97-AF65-F5344CB8AC3E}">
-        <p14:creationId xmlns:p14="http://schemas.microsoft.com/office/powerpoint/2010/main" val="2806839127"/>
-      </p:ext>
-    </p:extLst>
-  </p:cSld>
-  <p:clrMapOvr>
-    <a:masterClrMapping/>
-  </p:clrMapOvr>
-</p:sldLayout>
-</file>
-
-<file path=ppt/slideLayouts/slideLayout16.xml><?xml version="1.0" encoding="utf-8"?>
+<file path=ppt/slideLayouts/slideLayout10.xml><?xml version="1.0" encoding="utf-8"?>
 <p:sldLayout xmlns:a="http://schemas.openxmlformats.org/drawingml/2006/main" xmlns:r="http://schemas.openxmlformats.org/officeDocument/2006/relationships" xmlns:p="http://schemas.openxmlformats.org/presentationml/2006/main" type="vertTx" preserve="1">
   <p:cSld name="Tytuł i tekst pionowy">
     <p:spTree>
@@ -2524,7 +430,7 @@
       </p:grpSpPr>
       <p:sp>
         <p:nvSpPr>
-          <p:cNvPr id="7" name="Title 1"/>
+          <p:cNvPr id="2" name="Title 1"/>
           <p:cNvSpPr>
             <a:spLocks noGrp="1"/>
           </p:cNvSpPr>
@@ -2532,12 +438,7 @@
             <p:ph type="title"/>
           </p:nvPr>
         </p:nvSpPr>
-        <p:spPr>
-          <a:xfrm>
-            <a:off x="1141413" y="609600"/>
-            <a:ext cx="9905998" cy="1905000"/>
-          </a:xfrm>
-        </p:spPr>
+        <p:spPr/>
         <p:txBody>
           <a:bodyPr/>
           <a:lstStyle/>
@@ -2562,7 +463,7 @@
         </p:nvSpPr>
         <p:spPr/>
         <p:txBody>
-          <a:bodyPr vert="eaVert" anchor="t"/>
+          <a:bodyPr vert="eaVert"/>
           <a:lstStyle/>
           <a:p>
             <a:pPr lvl="0"/>
@@ -2619,7 +520,7 @@
           <a:p>
             <a:fld id="{CBBFB598-B412-4BAA-8D00-58612E105D61}" type="datetimeFigureOut">
               <a:rPr lang="pl-PL" smtClean="0"/>
-              <a:t>26.11.2025</a:t>
+              <a:t>29.11.2025</a:t>
             </a:fld>
             <a:endParaRPr lang="pl-PL"/>
           </a:p>
@@ -2670,7 +571,7 @@
     </p:spTree>
     <p:extLst>
       <p:ext uri="{BB962C8B-B14F-4D97-AF65-F5344CB8AC3E}">
-        <p14:creationId xmlns:p14="http://schemas.microsoft.com/office/powerpoint/2010/main" val="2118784267"/>
+        <p14:creationId xmlns:p14="http://schemas.microsoft.com/office/powerpoint/2010/main" val="33729421"/>
       </p:ext>
     </p:extLst>
   </p:cSld>
@@ -2680,7 +581,7 @@
 </p:sldLayout>
 </file>
 
-<file path=ppt/slideLayouts/slideLayout17.xml><?xml version="1.0" encoding="utf-8"?>
+<file path=ppt/slideLayouts/slideLayout11.xml><?xml version="1.0" encoding="utf-8"?>
 <p:sldLayout xmlns:a="http://schemas.openxmlformats.org/drawingml/2006/main" xmlns:r="http://schemas.openxmlformats.org/officeDocument/2006/relationships" xmlns:p="http://schemas.openxmlformats.org/presentationml/2006/main" type="vertTitleAndTx" preserve="1">
   <p:cSld name="Tytuł pionowy i tekst">
     <p:spTree>
@@ -2709,8 +610,8 @@
         </p:nvSpPr>
         <p:spPr>
           <a:xfrm>
-            <a:off x="8836898" y="609599"/>
-            <a:ext cx="2210514" cy="5181601"/>
+            <a:off x="8648700" y="381000"/>
+            <a:ext cx="2476500" cy="5897562"/>
           </a:xfrm>
         </p:spPr>
         <p:txBody>
@@ -2737,12 +638,12 @@
         </p:nvSpPr>
         <p:spPr>
           <a:xfrm>
-            <a:off x="1141412" y="609600"/>
-            <a:ext cx="7543800" cy="5181600"/>
+            <a:off x="762000" y="381000"/>
+            <a:ext cx="7734300" cy="5897562"/>
           </a:xfrm>
         </p:spPr>
         <p:txBody>
-          <a:bodyPr vert="eaVert" anchor="t"/>
+          <a:bodyPr vert="eaVert"/>
           <a:lstStyle/>
           <a:p>
             <a:pPr lvl="0"/>
@@ -2799,7 +700,7 @@
           <a:p>
             <a:fld id="{CBBFB598-B412-4BAA-8D00-58612E105D61}" type="datetimeFigureOut">
               <a:rPr lang="pl-PL" smtClean="0"/>
-              <a:t>26.11.2025</a:t>
+              <a:t>29.11.2025</a:t>
             </a:fld>
             <a:endParaRPr lang="pl-PL"/>
           </a:p>
@@ -2850,7 +751,7 @@
     </p:spTree>
     <p:extLst>
       <p:ext uri="{BB962C8B-B14F-4D97-AF65-F5344CB8AC3E}">
-        <p14:creationId xmlns:p14="http://schemas.microsoft.com/office/powerpoint/2010/main" val="3610828403"/>
+        <p14:creationId xmlns:p14="http://schemas.microsoft.com/office/powerpoint/2010/main" val="4027542226"/>
       </p:ext>
     </p:extLst>
   </p:cSld>
@@ -2912,7 +813,7 @@
         </p:nvSpPr>
         <p:spPr/>
         <p:txBody>
-          <a:bodyPr anchor="ctr"/>
+          <a:bodyPr/>
           <a:lstStyle/>
           <a:p>
             <a:pPr lvl="0"/>
@@ -2969,7 +870,7 @@
           <a:p>
             <a:fld id="{CBBFB598-B412-4BAA-8D00-58612E105D61}" type="datetimeFigureOut">
               <a:rPr lang="pl-PL" smtClean="0"/>
-              <a:t>26.11.2025</a:t>
+              <a:t>29.11.2025</a:t>
             </a:fld>
             <a:endParaRPr lang="pl-PL"/>
           </a:p>
@@ -3020,7 +921,7 @@
     </p:spTree>
     <p:extLst>
       <p:ext uri="{BB962C8B-B14F-4D97-AF65-F5344CB8AC3E}">
-        <p14:creationId xmlns:p14="http://schemas.microsoft.com/office/powerpoint/2010/main" val="2398449021"/>
+        <p14:creationId xmlns:p14="http://schemas.microsoft.com/office/powerpoint/2010/main" val="3879483256"/>
       </p:ext>
     </p:extLst>
   </p:cSld>
@@ -3059,15 +960,20 @@
         </p:nvSpPr>
         <p:spPr>
           <a:xfrm>
-            <a:off x="1751013" y="3308581"/>
-            <a:ext cx="8686800" cy="1468800"/>
+            <a:off x="1261872" y="758952"/>
+            <a:ext cx="9418320" cy="4041648"/>
           </a:xfrm>
         </p:spPr>
         <p:txBody>
-          <a:bodyPr anchor="b"/>
+          <a:bodyPr anchor="b">
+            <a:normAutofit/>
+          </a:bodyPr>
           <a:lstStyle>
-            <a:lvl1pPr algn="r">
-              <a:defRPr sz="4000" b="0" cap="all"/>
+            <a:lvl1pPr>
+              <a:lnSpc>
+                <a:spcPct val="85000"/>
+              </a:lnSpc>
+              <a:defRPr sz="7200" b="0"/>
             </a:lvl1pPr>
           </a:lstStyle>
           <a:p>
@@ -3091,8 +997,8 @@
         </p:nvSpPr>
         <p:spPr>
           <a:xfrm>
-            <a:off x="1751011" y="4777381"/>
-            <a:ext cx="8686801" cy="860400"/>
+            <a:off x="1261872" y="4800600"/>
+            <a:ext cx="9418320" cy="1691640"/>
           </a:xfrm>
         </p:spPr>
         <p:txBody>
@@ -3100,23 +1006,15 @@
             <a:normAutofit/>
           </a:bodyPr>
           <a:lstStyle>
-            <a:lvl1pPr marL="0" indent="0" algn="r">
-              <a:buNone/>
-              <a:defRPr sz="2000">
-                <a:gradFill flip="none" rotWithShape="1">
-                  <a:gsLst>
-                    <a:gs pos="0">
-                      <a:schemeClr val="tx1"/>
-                    </a:gs>
-                    <a:gs pos="100000">
-                      <a:schemeClr val="tx1">
-                        <a:lumMod val="75000"/>
-                      </a:schemeClr>
-                    </a:gs>
-                  </a:gsLst>
-                  <a:lin ang="5400000" scaled="0"/>
-                  <a:tileRect/>
-                </a:gradFill>
+            <a:lvl1pPr marL="0" indent="0">
+              <a:buNone/>
+              <a:defRPr sz="2200">
+                <a:solidFill>
+                  <a:schemeClr val="tx1">
+                    <a:lumMod val="65000"/>
+                    <a:lumOff val="35000"/>
+                  </a:schemeClr>
+                </a:solidFill>
               </a:defRPr>
             </a:lvl1pPr>
             <a:lvl2pPr marL="457200" indent="0">
@@ -3226,7 +1124,7 @@
           <a:p>
             <a:fld id="{CBBFB598-B412-4BAA-8D00-58612E105D61}" type="datetimeFigureOut">
               <a:rPr lang="pl-PL" smtClean="0"/>
-              <a:t>26.11.2025</a:t>
+              <a:t>29.11.2025</a:t>
             </a:fld>
             <a:endParaRPr lang="pl-PL"/>
           </a:p>
@@ -3274,10 +1172,48 @@
           </a:p>
         </p:txBody>
       </p:sp>
+      <p:sp>
+        <p:nvSpPr>
+          <p:cNvPr id="7" name="Rectangle 6"/>
+          <p:cNvSpPr/>
+          <p:nvPr/>
+        </p:nvSpPr>
+        <p:spPr>
+          <a:xfrm>
+            <a:off x="0" y="0"/>
+            <a:ext cx="457200" cy="6858000"/>
+          </a:xfrm>
+          <a:prstGeom prst="rect">
+            <a:avLst/>
+          </a:prstGeom>
+          <a:solidFill>
+            <a:schemeClr val="accent1"/>
+          </a:solidFill>
+          <a:ln>
+            <a:noFill/>
+          </a:ln>
+        </p:spPr>
+        <p:style>
+          <a:lnRef idx="2">
+            <a:schemeClr val="accent1">
+              <a:shade val="50000"/>
+            </a:schemeClr>
+          </a:lnRef>
+          <a:fillRef idx="1">
+            <a:schemeClr val="accent1"/>
+          </a:fillRef>
+          <a:effectRef idx="0">
+            <a:schemeClr val="accent1"/>
+          </a:effectRef>
+          <a:fontRef idx="minor">
+            <a:schemeClr val="lt1"/>
+          </a:fontRef>
+        </p:style>
+      </p:sp>
     </p:spTree>
     <p:extLst>
       <p:ext uri="{BB962C8B-B14F-4D97-AF65-F5344CB8AC3E}">
-        <p14:creationId xmlns:p14="http://schemas.microsoft.com/office/powerpoint/2010/main" val="1390055782"/>
+        <p14:creationId xmlns:p14="http://schemas.microsoft.com/office/powerpoint/2010/main" val="3619826822"/>
       </p:ext>
     </p:extLst>
   </p:cSld>
@@ -3339,14 +1275,12 @@
         </p:nvSpPr>
         <p:spPr>
           <a:xfrm>
-            <a:off x="1141412" y="2666999"/>
-            <a:ext cx="4876800" cy="3124201"/>
+            <a:off x="1261872" y="1828800"/>
+            <a:ext cx="4480560" cy="4351337"/>
           </a:xfrm>
         </p:spPr>
         <p:txBody>
-          <a:bodyPr>
-            <a:normAutofit/>
-          </a:bodyPr>
+          <a:bodyPr/>
           <a:lstStyle>
             <a:lvl1pPr>
               <a:defRPr sz="1800"/>
@@ -3358,22 +1292,22 @@
               <a:defRPr sz="1400"/>
             </a:lvl3pPr>
             <a:lvl4pPr>
-              <a:defRPr sz="1200"/>
+              <a:defRPr sz="1400"/>
             </a:lvl4pPr>
             <a:lvl5pPr>
-              <a:defRPr sz="1200"/>
+              <a:defRPr sz="1400"/>
             </a:lvl5pPr>
             <a:lvl6pPr>
-              <a:defRPr sz="1200"/>
+              <a:defRPr sz="1400"/>
             </a:lvl6pPr>
             <a:lvl7pPr>
-              <a:defRPr sz="1200"/>
+              <a:defRPr sz="1400"/>
             </a:lvl7pPr>
             <a:lvl8pPr>
-              <a:defRPr sz="1200"/>
+              <a:defRPr sz="1400"/>
             </a:lvl8pPr>
             <a:lvl9pPr>
-              <a:defRPr sz="1200"/>
+              <a:defRPr sz="1400"/>
             </a:lvl9pPr>
           </a:lstStyle>
           <a:p>
@@ -3426,14 +1360,12 @@
         </p:nvSpPr>
         <p:spPr>
           <a:xfrm>
-            <a:off x="6170612" y="2667000"/>
-            <a:ext cx="4876800" cy="3124200"/>
+            <a:off x="6126480" y="1828800"/>
+            <a:ext cx="4480560" cy="4351337"/>
           </a:xfrm>
         </p:spPr>
         <p:txBody>
-          <a:bodyPr>
-            <a:normAutofit/>
-          </a:bodyPr>
+          <a:bodyPr/>
           <a:lstStyle>
             <a:lvl1pPr>
               <a:defRPr sz="1800"/>
@@ -3445,22 +1377,22 @@
               <a:defRPr sz="1400"/>
             </a:lvl3pPr>
             <a:lvl4pPr>
-              <a:defRPr sz="1200"/>
+              <a:defRPr sz="1400"/>
             </a:lvl4pPr>
             <a:lvl5pPr>
-              <a:defRPr sz="1200"/>
+              <a:defRPr sz="1400"/>
             </a:lvl5pPr>
             <a:lvl6pPr>
-              <a:defRPr sz="1200"/>
+              <a:defRPr sz="1400"/>
             </a:lvl6pPr>
             <a:lvl7pPr>
-              <a:defRPr sz="1200"/>
+              <a:defRPr sz="1400"/>
             </a:lvl7pPr>
             <a:lvl8pPr>
-              <a:defRPr sz="1200"/>
+              <a:defRPr sz="1400"/>
             </a:lvl8pPr>
             <a:lvl9pPr>
-              <a:defRPr sz="1200"/>
+              <a:defRPr sz="1400"/>
             </a:lvl9pPr>
           </a:lstStyle>
           <a:p>
@@ -3518,7 +1450,7 @@
           <a:p>
             <a:fld id="{CBBFB598-B412-4BAA-8D00-58612E105D61}" type="datetimeFigureOut">
               <a:rPr lang="pl-PL" smtClean="0"/>
-              <a:t>26.11.2025</a:t>
+              <a:t>29.11.2025</a:t>
             </a:fld>
             <a:endParaRPr lang="pl-PL"/>
           </a:p>
@@ -3569,7 +1501,7 @@
     </p:spTree>
     <p:extLst>
       <p:ext uri="{BB962C8B-B14F-4D97-AF65-F5344CB8AC3E}">
-        <p14:creationId xmlns:p14="http://schemas.microsoft.com/office/powerpoint/2010/main" val="3672449819"/>
+        <p14:creationId xmlns:p14="http://schemas.microsoft.com/office/powerpoint/2010/main" val="3908520646"/>
       </p:ext>
     </p:extLst>
   </p:cSld>
@@ -3598,7 +1530,7 @@
       </p:grpSpPr>
       <p:sp>
         <p:nvSpPr>
-          <p:cNvPr id="2" name="Title 1"/>
+          <p:cNvPr id="10" name="Title 9"/>
           <p:cNvSpPr>
             <a:spLocks noGrp="1"/>
           </p:cNvSpPr>
@@ -3609,11 +1541,7 @@
         <p:spPr/>
         <p:txBody>
           <a:bodyPr/>
-          <a:lstStyle>
-            <a:lvl1pPr>
-              <a:defRPr/>
-            </a:lvl1pPr>
-          </a:lstStyle>
+          <a:lstStyle/>
           <a:p>
             <a:r>
               <a:rPr lang="pl-PL"/>
@@ -3635,18 +1563,25 @@
         </p:nvSpPr>
         <p:spPr>
           <a:xfrm>
-            <a:off x="1429280" y="2658533"/>
-            <a:ext cx="4588931" cy="576262"/>
+            <a:off x="1261872" y="1713655"/>
+            <a:ext cx="4480560" cy="731520"/>
           </a:xfrm>
         </p:spPr>
         <p:txBody>
           <a:bodyPr anchor="b">
-            <a:noAutofit/>
+            <a:normAutofit/>
           </a:bodyPr>
           <a:lstStyle>
             <a:lvl1pPr marL="0" indent="0">
-              <a:buNone/>
-              <a:defRPr sz="2800" b="0"/>
+              <a:spcBef>
+                <a:spcPts val="0"/>
+              </a:spcBef>
+              <a:buNone/>
+              <a:defRPr sz="2000" b="0">
+                <a:solidFill>
+                  <a:schemeClr val="tx2"/>
+                </a:solidFill>
+              </a:defRPr>
             </a:lvl1pPr>
             <a:lvl2pPr marL="457200" indent="0">
               <a:buNone/>
@@ -3702,14 +1637,12 @@
         </p:nvSpPr>
         <p:spPr>
           <a:xfrm>
-            <a:off x="1141412" y="3243262"/>
-            <a:ext cx="4876800" cy="2547937"/>
+            <a:off x="1261872" y="2507550"/>
+            <a:ext cx="4480560" cy="3664650"/>
           </a:xfrm>
         </p:spPr>
         <p:txBody>
-          <a:bodyPr anchor="t">
-            <a:normAutofit/>
-          </a:bodyPr>
+          <a:bodyPr/>
           <a:lstStyle>
             <a:lvl1pPr>
               <a:defRPr sz="1800"/>
@@ -3721,22 +1654,22 @@
               <a:defRPr sz="1400"/>
             </a:lvl3pPr>
             <a:lvl4pPr>
-              <a:defRPr sz="1200"/>
+              <a:defRPr sz="1400"/>
             </a:lvl4pPr>
             <a:lvl5pPr>
-              <a:defRPr sz="1200"/>
+              <a:defRPr sz="1400"/>
             </a:lvl5pPr>
             <a:lvl6pPr>
-              <a:defRPr sz="1200"/>
+              <a:defRPr sz="1400"/>
             </a:lvl6pPr>
             <a:lvl7pPr>
-              <a:defRPr sz="1200"/>
+              <a:defRPr sz="1400"/>
             </a:lvl7pPr>
             <a:lvl8pPr>
-              <a:defRPr sz="1200"/>
+              <a:defRPr sz="1400"/>
             </a:lvl8pPr>
             <a:lvl9pPr>
-              <a:defRPr sz="1200"/>
+              <a:defRPr sz="1400"/>
             </a:lvl9pPr>
           </a:lstStyle>
           <a:p>
@@ -3789,18 +1722,31 @@
         </p:nvSpPr>
         <p:spPr>
           <a:xfrm>
-            <a:off x="6443133" y="2667000"/>
-            <a:ext cx="4604280" cy="576262"/>
+            <a:off x="6126480" y="1713655"/>
+            <a:ext cx="4480560" cy="731520"/>
           </a:xfrm>
         </p:spPr>
         <p:txBody>
           <a:bodyPr anchor="b">
-            <a:noAutofit/>
+            <a:normAutofit/>
           </a:bodyPr>
           <a:lstStyle>
             <a:lvl1pPr marL="0" indent="0">
-              <a:buNone/>
-              <a:defRPr sz="2800" b="0"/>
+              <a:lnSpc>
+                <a:spcPct val="95000"/>
+              </a:lnSpc>
+              <a:spcBef>
+                <a:spcPts val="0"/>
+              </a:spcBef>
+              <a:buNone/>
+              <a:defRPr lang="en-US" sz="2000" b="0" kern="1200" dirty="0">
+                <a:solidFill>
+                  <a:schemeClr val="tx2"/>
+                </a:solidFill>
+                <a:latin typeface="+mn-lt"/>
+                <a:ea typeface="+mn-ea"/>
+                <a:cs typeface="+mn-cs"/>
+              </a:defRPr>
             </a:lvl1pPr>
             <a:lvl2pPr marL="457200" indent="0">
               <a:buNone/>
@@ -3836,7 +1782,16 @@
             </a:lvl9pPr>
           </a:lstStyle>
           <a:p>
-            <a:pPr lvl="0"/>
+            <a:pPr marL="0" lvl="0" indent="0" algn="l" defTabSz="914400" rtl="0" eaLnBrk="1" latinLnBrk="0" hangingPunct="1">
+              <a:lnSpc>
+                <a:spcPct val="90000"/>
+              </a:lnSpc>
+              <a:spcBef>
+                <a:spcPts val="2000"/>
+              </a:spcBef>
+              <a:buFontTx/>
+              <a:buNone/>
+            </a:pPr>
             <a:r>
               <a:rPr lang="pl-PL"/>
               <a:t>Kliknij, aby edytować style wzorca tekstu</a:t>
@@ -3856,14 +1811,12 @@
         </p:nvSpPr>
         <p:spPr>
           <a:xfrm>
-            <a:off x="6170612" y="3243262"/>
-            <a:ext cx="4876801" cy="2547937"/>
+            <a:off x="6126480" y="2507550"/>
+            <a:ext cx="4480560" cy="3664650"/>
           </a:xfrm>
         </p:spPr>
         <p:txBody>
-          <a:bodyPr anchor="t">
-            <a:normAutofit/>
-          </a:bodyPr>
+          <a:bodyPr/>
           <a:lstStyle>
             <a:lvl1pPr>
               <a:defRPr sz="1800"/>
@@ -3875,22 +1828,22 @@
               <a:defRPr sz="1400"/>
             </a:lvl3pPr>
             <a:lvl4pPr>
-              <a:defRPr sz="1200"/>
+              <a:defRPr sz="1400"/>
             </a:lvl4pPr>
             <a:lvl5pPr>
-              <a:defRPr sz="1200"/>
+              <a:defRPr sz="1400"/>
             </a:lvl5pPr>
             <a:lvl6pPr>
-              <a:defRPr sz="1200"/>
+              <a:defRPr sz="1400"/>
             </a:lvl6pPr>
             <a:lvl7pPr>
-              <a:defRPr sz="1200"/>
+              <a:defRPr sz="1400"/>
             </a:lvl7pPr>
             <a:lvl8pPr>
-              <a:defRPr sz="1200"/>
+              <a:defRPr sz="1400"/>
             </a:lvl8pPr>
             <a:lvl9pPr>
-              <a:defRPr sz="1200"/>
+              <a:defRPr sz="1400"/>
             </a:lvl9pPr>
           </a:lstStyle>
           <a:p>
@@ -3948,7 +1901,7 @@
           <a:p>
             <a:fld id="{CBBFB598-B412-4BAA-8D00-58612E105D61}" type="datetimeFigureOut">
               <a:rPr lang="pl-PL" smtClean="0"/>
-              <a:t>26.11.2025</a:t>
+              <a:t>29.11.2025</a:t>
             </a:fld>
             <a:endParaRPr lang="pl-PL"/>
           </a:p>
@@ -3999,7 +1952,7 @@
     </p:spTree>
     <p:extLst>
       <p:ext uri="{BB962C8B-B14F-4D97-AF65-F5344CB8AC3E}">
-        <p14:creationId xmlns:p14="http://schemas.microsoft.com/office/powerpoint/2010/main" val="2485771136"/>
+        <p14:creationId xmlns:p14="http://schemas.microsoft.com/office/powerpoint/2010/main" val="320634544"/>
       </p:ext>
     </p:extLst>
   </p:cSld>
@@ -4028,7 +1981,7 @@
       </p:grpSpPr>
       <p:sp>
         <p:nvSpPr>
-          <p:cNvPr id="2" name="Title 1"/>
+          <p:cNvPr id="6" name="Title 5"/>
           <p:cNvSpPr>
             <a:spLocks noGrp="1"/>
           </p:cNvSpPr>
@@ -4066,7 +2019,7 @@
           <a:p>
             <a:fld id="{CBBFB598-B412-4BAA-8D00-58612E105D61}" type="datetimeFigureOut">
               <a:rPr lang="pl-PL" smtClean="0"/>
-              <a:t>26.11.2025</a:t>
+              <a:t>29.11.2025</a:t>
             </a:fld>
             <a:endParaRPr lang="pl-PL"/>
           </a:p>
@@ -4117,7 +2070,7 @@
     </p:spTree>
     <p:extLst>
       <p:ext uri="{BB962C8B-B14F-4D97-AF65-F5344CB8AC3E}">
-        <p14:creationId xmlns:p14="http://schemas.microsoft.com/office/powerpoint/2010/main" val="748448473"/>
+        <p14:creationId xmlns:p14="http://schemas.microsoft.com/office/powerpoint/2010/main" val="4199091151"/>
       </p:ext>
     </p:extLst>
   </p:cSld>
@@ -4161,7 +2114,7 @@
           <a:p>
             <a:fld id="{CBBFB598-B412-4BAA-8D00-58612E105D61}" type="datetimeFigureOut">
               <a:rPr lang="pl-PL" smtClean="0"/>
-              <a:t>26.11.2025</a:t>
+              <a:t>29.11.2025</a:t>
             </a:fld>
             <a:endParaRPr lang="pl-PL"/>
           </a:p>
@@ -4212,7 +2165,7 @@
     </p:spTree>
     <p:extLst>
       <p:ext uri="{BB962C8B-B14F-4D97-AF65-F5344CB8AC3E}">
-        <p14:creationId xmlns:p14="http://schemas.microsoft.com/office/powerpoint/2010/main" val="1062493662"/>
+        <p14:creationId xmlns:p14="http://schemas.microsoft.com/office/powerpoint/2010/main" val="3501899365"/>
       </p:ext>
     </p:extLst>
   </p:cSld>
@@ -4251,8 +2204,8 @@
         </p:nvSpPr>
         <p:spPr>
           <a:xfrm>
-            <a:off x="1141411" y="1600200"/>
-            <a:ext cx="3549121" cy="1371600"/>
+            <a:off x="841248" y="457200"/>
+            <a:ext cx="3200400" cy="1600197"/>
           </a:xfrm>
         </p:spPr>
         <p:txBody>
@@ -4260,8 +2213,8 @@
             <a:normAutofit/>
           </a:bodyPr>
           <a:lstStyle>
-            <a:lvl1pPr algn="l">
-              <a:defRPr sz="2400" b="0"/>
+            <a:lvl1pPr>
+              <a:defRPr sz="3200" b="0" baseline="0"/>
             </a:lvl1pPr>
           </a:lstStyle>
           <a:p>
@@ -4285,14 +2238,12 @@
         </p:nvSpPr>
         <p:spPr>
           <a:xfrm>
-            <a:off x="5103812" y="609601"/>
-            <a:ext cx="5943601" cy="5181600"/>
+            <a:off x="4504267" y="685800"/>
+            <a:ext cx="6079066" cy="5486400"/>
           </a:xfrm>
         </p:spPr>
         <p:txBody>
-          <a:bodyPr anchor="ctr">
-            <a:normAutofit/>
-          </a:bodyPr>
+          <a:bodyPr/>
           <a:lstStyle>
             <a:lvl1pPr>
               <a:defRPr sz="2000"/>
@@ -4372,8 +2323,8 @@
         </p:nvSpPr>
         <p:spPr>
           <a:xfrm>
-            <a:off x="1141411" y="2971800"/>
-            <a:ext cx="3549121" cy="1828800"/>
+            <a:off x="841248" y="2099734"/>
+            <a:ext cx="3200400" cy="3810001"/>
           </a:xfrm>
         </p:spPr>
         <p:txBody>
@@ -4382,8 +2333,14 @@
           </a:bodyPr>
           <a:lstStyle>
             <a:lvl1pPr marL="0" indent="0">
-              <a:buNone/>
-              <a:defRPr sz="1600"/>
+              <a:lnSpc>
+                <a:spcPct val="114000"/>
+              </a:lnSpc>
+              <a:spcBef>
+                <a:spcPts val="800"/>
+              </a:spcBef>
+              <a:buNone/>
+              <a:defRPr sz="1300"/>
             </a:lvl1pPr>
             <a:lvl2pPr marL="457200" indent="0">
               <a:buNone/>
@@ -4444,7 +2401,7 @@
           <a:p>
             <a:fld id="{CBBFB598-B412-4BAA-8D00-58612E105D61}" type="datetimeFigureOut">
               <a:rPr lang="pl-PL" smtClean="0"/>
-              <a:t>26.11.2025</a:t>
+              <a:t>29.11.2025</a:t>
             </a:fld>
             <a:endParaRPr lang="pl-PL"/>
           </a:p>
@@ -4495,7 +2452,7 @@
     </p:spTree>
     <p:extLst>
       <p:ext uri="{BB962C8B-B14F-4D97-AF65-F5344CB8AC3E}">
-        <p14:creationId xmlns:p14="http://schemas.microsoft.com/office/powerpoint/2010/main" val="3651761325"/>
+        <p14:creationId xmlns:p14="http://schemas.microsoft.com/office/powerpoint/2010/main" val="2060871495"/>
       </p:ext>
     </p:extLst>
   </p:cSld>
@@ -4524,18 +2481,56 @@
       </p:grpSpPr>
       <p:sp>
         <p:nvSpPr>
-          <p:cNvPr id="2" name="Title 1"/>
-          <p:cNvSpPr>
-            <a:spLocks noGrp="1"/>
-          </p:cNvSpPr>
-          <p:nvPr>
-            <p:ph type="title"/>
-          </p:nvPr>
+          <p:cNvPr id="8" name="Rectangle 7"/>
+          <p:cNvSpPr/>
+          <p:nvPr/>
         </p:nvSpPr>
         <p:spPr>
           <a:xfrm>
-            <a:off x="1141411" y="1600200"/>
-            <a:ext cx="5334001" cy="1371600"/>
+            <a:off x="0" y="5105400"/>
+            <a:ext cx="11292840" cy="1752600"/>
+          </a:xfrm>
+          <a:prstGeom prst="rect">
+            <a:avLst/>
+          </a:prstGeom>
+          <a:solidFill>
+            <a:srgbClr val="000000"/>
+          </a:solidFill>
+          <a:ln>
+            <a:noFill/>
+          </a:ln>
+        </p:spPr>
+        <p:style>
+          <a:lnRef idx="2">
+            <a:schemeClr val="accent1">
+              <a:shade val="50000"/>
+            </a:schemeClr>
+          </a:lnRef>
+          <a:fillRef idx="1">
+            <a:schemeClr val="accent1"/>
+          </a:fillRef>
+          <a:effectRef idx="0">
+            <a:schemeClr val="accent1"/>
+          </a:effectRef>
+          <a:fontRef idx="minor">
+            <a:schemeClr val="lt1"/>
+          </a:fontRef>
+        </p:style>
+      </p:sp>
+      <p:sp>
+        <p:nvSpPr>
+          <p:cNvPr id="2" name="Title 1"/>
+          <p:cNvSpPr>
+            <a:spLocks noGrp="1"/>
+          </p:cNvSpPr>
+          <p:nvPr>
+            <p:ph type="title"/>
+          </p:nvPr>
+        </p:nvSpPr>
+        <p:spPr>
+          <a:xfrm>
+            <a:off x="914400" y="5257800"/>
+            <a:ext cx="9982200" cy="914400"/>
           </a:xfrm>
         </p:spPr>
         <p:txBody>
@@ -4543,8 +2538,12 @@
             <a:normAutofit/>
           </a:bodyPr>
           <a:lstStyle>
-            <a:lvl1pPr algn="l">
-              <a:defRPr sz="2800" b="0"/>
+            <a:lvl1pPr>
+              <a:defRPr sz="2800" b="0">
+                <a:solidFill>
+                  <a:schemeClr val="bg1"/>
+                </a:solidFill>
+              </a:defRPr>
             </a:lvl1pPr>
           </a:lstStyle>
           <a:p>
@@ -4558,7 +2557,7 @@
       </p:sp>
       <p:sp>
         <p:nvSpPr>
-          <p:cNvPr id="14" name="Picture Placeholder 2"/>
+          <p:cNvPr id="3" name="Picture Placeholder 2"/>
           <p:cNvSpPr>
             <a:spLocks noGrp="1" noChangeAspect="1"/>
           </p:cNvSpPr>
@@ -4568,73 +2567,55 @@
         </p:nvSpPr>
         <p:spPr>
           <a:xfrm>
-            <a:off x="7433733" y="-18288"/>
-            <a:ext cx="3276599" cy="6903720"/>
+            <a:off x="0" y="0"/>
+            <a:ext cx="11292840" cy="5128923"/>
           </a:xfrm>
-          <a:ln w="38100">
-            <a:gradFill flip="none" rotWithShape="1">
-              <a:gsLst>
-                <a:gs pos="0">
-                  <a:schemeClr val="bg2"/>
-                </a:gs>
-                <a:gs pos="100000">
-                  <a:schemeClr val="bg2">
-                    <a:lumMod val="75000"/>
-                  </a:schemeClr>
-                </a:gs>
-              </a:gsLst>
-              <a:lin ang="5400000" scaled="0"/>
-              <a:tileRect/>
-            </a:gradFill>
-          </a:ln>
-          <a:effectLst>
-            <a:innerShdw blurRad="57150" dist="38100" dir="10800000">
-              <a:srgbClr val="000000">
-                <a:alpha val="70000"/>
-              </a:srgbClr>
-            </a:innerShdw>
-          </a:effectLst>
+          <a:solidFill>
+            <a:schemeClr val="accent1"/>
+          </a:solidFill>
         </p:spPr>
         <p:txBody>
-          <a:bodyPr anchor="t">
-            <a:normAutofit/>
-          </a:bodyPr>
+          <a:bodyPr anchor="t"/>
           <a:lstStyle>
-            <a:lvl1pPr marL="0" indent="0" algn="ctr">
-              <a:buNone/>
-              <a:defRPr sz="1600"/>
+            <a:lvl1pPr marL="0" indent="0">
+              <a:buNone/>
+              <a:defRPr sz="3200">
+                <a:solidFill>
+                  <a:schemeClr val="bg1"/>
+                </a:solidFill>
+              </a:defRPr>
             </a:lvl1pPr>
             <a:lvl2pPr marL="457200" indent="0">
               <a:buNone/>
-              <a:defRPr sz="1600"/>
+              <a:defRPr sz="2800"/>
             </a:lvl2pPr>
             <a:lvl3pPr marL="914400" indent="0">
               <a:buNone/>
-              <a:defRPr sz="1600"/>
+              <a:defRPr sz="2400"/>
             </a:lvl3pPr>
             <a:lvl4pPr marL="1371600" indent="0">
               <a:buNone/>
-              <a:defRPr sz="1600"/>
+              <a:defRPr sz="2000"/>
             </a:lvl4pPr>
             <a:lvl5pPr marL="1828800" indent="0">
               <a:buNone/>
-              <a:defRPr sz="1600"/>
+              <a:defRPr sz="2000"/>
             </a:lvl5pPr>
             <a:lvl6pPr marL="2286000" indent="0">
               <a:buNone/>
-              <a:defRPr sz="1600"/>
+              <a:defRPr sz="2000"/>
             </a:lvl6pPr>
             <a:lvl7pPr marL="2743200" indent="0">
               <a:buNone/>
-              <a:defRPr sz="1600"/>
+              <a:defRPr sz="2000"/>
             </a:lvl7pPr>
             <a:lvl8pPr marL="3200400" indent="0">
               <a:buNone/>
-              <a:defRPr sz="1600"/>
+              <a:defRPr sz="2000"/>
             </a:lvl8pPr>
             <a:lvl9pPr marL="3657600" indent="0">
               <a:buNone/>
-              <a:defRPr sz="1600"/>
+              <a:defRPr sz="2000"/>
             </a:lvl9pPr>
           </a:lstStyle>
           <a:p>
@@ -4658,8 +2639,8 @@
         </p:nvSpPr>
         <p:spPr>
           <a:xfrm>
-            <a:off x="1141411" y="2971800"/>
-            <a:ext cx="5334001" cy="1828800"/>
+            <a:off x="914400" y="6108589"/>
+            <a:ext cx="9982200" cy="597011"/>
           </a:xfrm>
         </p:spPr>
         <p:txBody>
@@ -4668,8 +2649,20 @@
           </a:bodyPr>
           <a:lstStyle>
             <a:lvl1pPr marL="0" indent="0">
-              <a:buNone/>
-              <a:defRPr sz="1800"/>
+              <a:lnSpc>
+                <a:spcPct val="100000"/>
+              </a:lnSpc>
+              <a:spcBef>
+                <a:spcPts val="800"/>
+              </a:spcBef>
+              <a:buNone/>
+              <a:defRPr sz="1300">
+                <a:solidFill>
+                  <a:schemeClr val="bg1">
+                    <a:lumMod val="85000"/>
+                  </a:schemeClr>
+                </a:solidFill>
+              </a:defRPr>
             </a:lvl1pPr>
             <a:lvl2pPr marL="457200" indent="0">
               <a:buNone/>
@@ -4723,19 +2716,14 @@
             <p:ph type="dt" sz="half" idx="10"/>
           </p:nvPr>
         </p:nvSpPr>
-        <p:spPr>
-          <a:xfrm>
-            <a:off x="6399212" y="5883275"/>
-            <a:ext cx="914400" cy="365125"/>
-          </a:xfrm>
-        </p:spPr>
+        <p:spPr/>
         <p:txBody>
           <a:bodyPr/>
           <a:lstStyle/>
           <a:p>
             <a:fld id="{CBBFB598-B412-4BAA-8D00-58612E105D61}" type="datetimeFigureOut">
               <a:rPr lang="pl-PL" smtClean="0"/>
-              <a:t>26.11.2025</a:t>
+              <a:t>29.11.2025</a:t>
             </a:fld>
             <a:endParaRPr lang="pl-PL"/>
           </a:p>
@@ -4751,12 +2739,7 @@
             <p:ph type="ftr" sz="quarter" idx="11"/>
           </p:nvPr>
         </p:nvSpPr>
-        <p:spPr>
-          <a:xfrm>
-            <a:off x="1141412" y="5883275"/>
-            <a:ext cx="5105400" cy="365125"/>
-          </a:xfrm>
-        </p:spPr>
+        <p:spPr/>
         <p:txBody>
           <a:bodyPr/>
           <a:lstStyle/>
@@ -4775,12 +2758,7 @@
             <p:ph type="sldNum" sz="quarter" idx="12"/>
           </p:nvPr>
         </p:nvSpPr>
-        <p:spPr>
-          <a:xfrm>
-            <a:off x="10742612" y="5883275"/>
-            <a:ext cx="322567" cy="365125"/>
-          </a:xfrm>
-        </p:spPr>
+        <p:spPr/>
         <p:txBody>
           <a:bodyPr/>
           <a:lstStyle/>
@@ -4796,7 +2774,7 @@
     </p:spTree>
     <p:extLst>
       <p:ext uri="{BB962C8B-B14F-4D97-AF65-F5344CB8AC3E}">
-        <p14:creationId xmlns:p14="http://schemas.microsoft.com/office/powerpoint/2010/main" val="3519003348"/>
+        <p14:creationId xmlns:p14="http://schemas.microsoft.com/office/powerpoint/2010/main" val="998290722"/>
       </p:ext>
     </p:extLst>
   </p:cSld>
@@ -4810,8 +2788,8 @@
 <p:sldMaster xmlns:a="http://schemas.openxmlformats.org/drawingml/2006/main" xmlns:r="http://schemas.openxmlformats.org/officeDocument/2006/relationships" xmlns:p="http://schemas.openxmlformats.org/presentationml/2006/main">
   <p:cSld>
     <p:bg>
-      <p:bgRef idx="1003">
-        <a:schemeClr val="bg2"/>
+      <p:bgRef idx="1001">
+        <a:schemeClr val="bg1"/>
       </p:bgRef>
     </p:bg>
     <p:spTree>
@@ -4830,25 +2808,65 @@
       </p:grpSpPr>
       <p:sp>
         <p:nvSpPr>
-          <p:cNvPr id="2" name="Title Placeholder 1"/>
-          <p:cNvSpPr>
-            <a:spLocks noGrp="1"/>
-          </p:cNvSpPr>
-          <p:nvPr>
-            <p:ph type="title"/>
-          </p:nvPr>
+          <p:cNvPr id="7" name="Rectangle 6"/>
+          <p:cNvSpPr/>
+          <p:nvPr/>
         </p:nvSpPr>
         <p:spPr>
           <a:xfrm>
-            <a:off x="1141413" y="609600"/>
-            <a:ext cx="9905998" cy="1905000"/>
+            <a:off x="11292840" y="0"/>
+            <a:ext cx="914400" cy="6858000"/>
+          </a:xfrm>
+          <a:prstGeom prst="rect">
+            <a:avLst/>
+          </a:prstGeom>
+          <a:solidFill>
+            <a:schemeClr val="tx2">
+              <a:lumMod val="75000"/>
+            </a:schemeClr>
+          </a:solidFill>
+          <a:ln>
+            <a:noFill/>
+          </a:ln>
+        </p:spPr>
+        <p:style>
+          <a:lnRef idx="2">
+            <a:schemeClr val="accent1">
+              <a:shade val="50000"/>
+            </a:schemeClr>
+          </a:lnRef>
+          <a:fillRef idx="1">
+            <a:schemeClr val="accent1"/>
+          </a:fillRef>
+          <a:effectRef idx="0">
+            <a:schemeClr val="accent1"/>
+          </a:effectRef>
+          <a:fontRef idx="minor">
+            <a:schemeClr val="lt1"/>
+          </a:fontRef>
+        </p:style>
+      </p:sp>
+      <p:sp>
+        <p:nvSpPr>
+          <p:cNvPr id="2" name="Title Placeholder 1"/>
+          <p:cNvSpPr>
+            <a:spLocks noGrp="1"/>
+          </p:cNvSpPr>
+          <p:nvPr>
+            <p:ph type="title"/>
+          </p:nvPr>
+        </p:nvSpPr>
+        <p:spPr>
+          <a:xfrm>
+            <a:off x="1261872" y="365760"/>
+            <a:ext cx="9692640" cy="1325562"/>
           </a:xfrm>
           <a:prstGeom prst="rect">
             <a:avLst/>
           </a:prstGeom>
         </p:spPr>
         <p:txBody>
-          <a:bodyPr vert="horz" lIns="91440" tIns="45720" rIns="91440" bIns="45720" rtlCol="0" anchor="ctr">
+          <a:bodyPr vert="horz" lIns="91440" tIns="45720" rIns="91440" bIns="45720" rtlCol="0" anchor="b">
             <a:normAutofit/>
           </a:bodyPr>
           <a:lstStyle/>
@@ -4873,15 +2891,15 @@
         </p:nvSpPr>
         <p:spPr>
           <a:xfrm>
-            <a:off x="1141413" y="2666999"/>
-            <a:ext cx="9905998" cy="3124201"/>
+            <a:off x="1261872" y="1828800"/>
+            <a:ext cx="8595360" cy="4351337"/>
           </a:xfrm>
           <a:prstGeom prst="rect">
             <a:avLst/>
           </a:prstGeom>
         </p:spPr>
         <p:txBody>
-          <a:bodyPr vert="horz" lIns="91440" tIns="45720" rIns="91440" bIns="45720" rtlCol="0" anchor="ctr">
+          <a:bodyPr vert="horz" lIns="91440" tIns="45720" rIns="91440" bIns="45720" rtlCol="0">
             <a:normAutofit/>
           </a:bodyPr>
           <a:lstStyle/>
@@ -4934,9 +2952,9 @@
           </p:nvPr>
         </p:nvSpPr>
         <p:spPr>
-          <a:xfrm>
-            <a:off x="8837612" y="5883275"/>
-            <a:ext cx="1600200" cy="365125"/>
+          <a:xfrm rot="16200000">
+            <a:off x="10797542" y="998537"/>
+            <a:ext cx="1904999" cy="365125"/>
           </a:xfrm>
           <a:prstGeom prst="rect">
             <a:avLst/>
@@ -4946,27 +2964,20 @@
           <a:bodyPr vert="horz" lIns="91440" tIns="45720" rIns="91440" bIns="45720" rtlCol="0" anchor="ctr"/>
           <a:lstStyle>
             <a:lvl1pPr algn="r">
-              <a:defRPr sz="900" b="1" i="0">
+              <a:defRPr sz="1050" b="0">
                 <a:solidFill>
-                  <a:schemeClr val="tx1">
-                    <a:lumMod val="75000"/>
+                  <a:schemeClr val="tx2">
+                    <a:lumMod val="20000"/>
+                    <a:lumOff val="80000"/>
                   </a:schemeClr>
                 </a:solidFill>
-                <a:effectLst>
-                  <a:outerShdw blurRad="50800" dist="38100" dir="2700000" algn="tl" rotWithShape="0">
-                    <a:srgbClr val="000000">
-                      <a:alpha val="43000"/>
-                    </a:srgbClr>
-                  </a:outerShdw>
-                </a:effectLst>
-                <a:latin typeface="+mn-lt"/>
               </a:defRPr>
             </a:lvl1pPr>
           </a:lstStyle>
           <a:p>
             <a:fld id="{CBBFB598-B412-4BAA-8D00-58612E105D61}" type="datetimeFigureOut">
               <a:rPr lang="pl-PL" smtClean="0"/>
-              <a:t>26.11.2025</a:t>
+              <a:t>29.11.2025</a:t>
             </a:fld>
             <a:endParaRPr lang="pl-PL"/>
           </a:p>
@@ -4983,9 +2994,9 @@
           </p:nvPr>
         </p:nvSpPr>
         <p:spPr>
-          <a:xfrm>
-            <a:off x="1141412" y="5883275"/>
-            <a:ext cx="7543800" cy="365125"/>
+          <a:xfrm rot="16200000">
+            <a:off x="9959341" y="4046537"/>
+            <a:ext cx="3581400" cy="365125"/>
           </a:xfrm>
           <a:prstGeom prst="rect">
             <a:avLst/>
@@ -4995,20 +3006,13 @@
           <a:bodyPr vert="horz" lIns="91440" tIns="45720" rIns="91440" bIns="45720" rtlCol="0" anchor="ctr"/>
           <a:lstStyle>
             <a:lvl1pPr algn="l">
-              <a:defRPr sz="900" b="1" i="0">
+              <a:defRPr sz="1050">
                 <a:solidFill>
-                  <a:schemeClr val="tx1">
-                    <a:lumMod val="75000"/>
+                  <a:schemeClr val="tx2">
+                    <a:lumMod val="20000"/>
+                    <a:lumOff val="80000"/>
                   </a:schemeClr>
                 </a:solidFill>
-                <a:effectLst>
-                  <a:outerShdw blurRad="50800" dist="38100" dir="2700000" algn="tl" rotWithShape="0">
-                    <a:srgbClr val="000000">
-                      <a:alpha val="43000"/>
-                    </a:srgbClr>
-                  </a:outerShdw>
-                </a:effectLst>
-                <a:latin typeface="+mn-lt"/>
               </a:defRPr>
             </a:lvl1pPr>
           </a:lstStyle>
@@ -5029,31 +3033,26 @@
         </p:nvSpPr>
         <p:spPr>
           <a:xfrm>
-            <a:off x="10514012" y="5883275"/>
-            <a:ext cx="551167" cy="365125"/>
+            <a:off x="11292840" y="6172200"/>
+            <a:ext cx="914400" cy="593725"/>
           </a:xfrm>
           <a:prstGeom prst="rect">
             <a:avLst/>
           </a:prstGeom>
         </p:spPr>
         <p:txBody>
-          <a:bodyPr vert="horz" lIns="91440" tIns="45720" rIns="91440" bIns="45720" rtlCol="0" anchor="ctr"/>
+          <a:bodyPr vert="horz" lIns="45720" tIns="45720" rIns="45720" bIns="45720" rtlCol="0" anchor="ctr">
+            <a:normAutofit/>
+          </a:bodyPr>
           <a:lstStyle>
-            <a:lvl1pPr algn="r">
-              <a:defRPr sz="900" b="1" i="0">
+            <a:lvl1pPr algn="ctr">
+              <a:defRPr sz="3600">
                 <a:solidFill>
-                  <a:schemeClr val="tx1">
-                    <a:lumMod val="75000"/>
+                  <a:schemeClr val="tx2">
+                    <a:lumMod val="60000"/>
+                    <a:lumOff val="40000"/>
                   </a:schemeClr>
                 </a:solidFill>
-                <a:effectLst>
-                  <a:outerShdw blurRad="50800" dist="38100" dir="2700000" algn="tl" rotWithShape="0">
-                    <a:srgbClr val="000000">
-                      <a:alpha val="43000"/>
-                    </a:srgbClr>
-                  </a:outerShdw>
-                </a:effectLst>
-                <a:latin typeface="+mn-lt"/>
               </a:defRPr>
             </a:lvl1pPr>
           </a:lstStyle>
@@ -5069,550 +3068,281 @@
     </p:spTree>
     <p:extLst>
       <p:ext uri="{BB962C8B-B14F-4D97-AF65-F5344CB8AC3E}">
-        <p14:creationId xmlns:p14="http://schemas.microsoft.com/office/powerpoint/2010/main" val="4063442135"/>
+        <p14:creationId xmlns:p14="http://schemas.microsoft.com/office/powerpoint/2010/main" val="3315688535"/>
       </p:ext>
     </p:extLst>
   </p:cSld>
-  <p:clrMap bg1="dk1" tx1="lt1" bg2="dk2" tx2="lt2" accent1="accent1" accent2="accent2" accent3="accent3" accent4="accent4" accent5="accent5" accent6="accent6" hlink="hlink" folHlink="folHlink"/>
+  <p:clrMap bg1="lt1" tx1="dk1" bg2="lt2" tx2="dk2" accent1="accent1" accent2="accent2" accent3="accent3" accent4="accent4" accent5="accent5" accent6="accent6" hlink="hlink" folHlink="folHlink"/>
   <p:sldLayoutIdLst>
-    <p:sldLayoutId id="2147483661" r:id="rId1"/>
-    <p:sldLayoutId id="2147483662" r:id="rId2"/>
-    <p:sldLayoutId id="2147483663" r:id="rId3"/>
-    <p:sldLayoutId id="2147483664" r:id="rId4"/>
-    <p:sldLayoutId id="2147483665" r:id="rId5"/>
-    <p:sldLayoutId id="2147483666" r:id="rId6"/>
-    <p:sldLayoutId id="2147483667" r:id="rId7"/>
-    <p:sldLayoutId id="2147483668" r:id="rId8"/>
-    <p:sldLayoutId id="2147483669" r:id="rId9"/>
-    <p:sldLayoutId id="2147483670" r:id="rId10"/>
-    <p:sldLayoutId id="2147483671" r:id="rId11"/>
-    <p:sldLayoutId id="2147483672" r:id="rId12"/>
-    <p:sldLayoutId id="2147483673" r:id="rId13"/>
-    <p:sldLayoutId id="2147483674" r:id="rId14"/>
-    <p:sldLayoutId id="2147483675" r:id="rId15"/>
-    <p:sldLayoutId id="2147483676" r:id="rId16"/>
-    <p:sldLayoutId id="2147483677" r:id="rId17"/>
+    <p:sldLayoutId id="2147483798" r:id="rId1"/>
+    <p:sldLayoutId id="2147483799" r:id="rId2"/>
+    <p:sldLayoutId id="2147483800" r:id="rId3"/>
+    <p:sldLayoutId id="2147483801" r:id="rId4"/>
+    <p:sldLayoutId id="2147483802" r:id="rId5"/>
+    <p:sldLayoutId id="2147483803" r:id="rId6"/>
+    <p:sldLayoutId id="2147483804" r:id="rId7"/>
+    <p:sldLayoutId id="2147483805" r:id="rId8"/>
+    <p:sldLayoutId id="2147483806" r:id="rId9"/>
+    <p:sldLayoutId id="2147483807" r:id="rId10"/>
+    <p:sldLayoutId id="2147483808" r:id="rId11"/>
   </p:sldLayoutIdLst>
   <p:txStyles>
     <p:titleStyle>
-      <a:lvl1pPr algn="l" defTabSz="457200" rtl="0" eaLnBrk="1" latinLnBrk="0" hangingPunct="1">
+      <a:lvl1pPr algn="l" defTabSz="914400" rtl="0" eaLnBrk="1" latinLnBrk="0" hangingPunct="1">
+        <a:lnSpc>
+          <a:spcPct val="90000"/>
+        </a:lnSpc>
         <a:spcBef>
           <a:spcPct val="0"/>
         </a:spcBef>
         <a:buNone/>
-        <a:defRPr sz="3200" kern="1200" cap="all">
-          <a:ln w="3175" cmpd="sng">
-            <a:noFill/>
-          </a:ln>
-          <a:gradFill flip="none" rotWithShape="1">
-            <a:gsLst>
-              <a:gs pos="0">
-                <a:schemeClr val="tx1"/>
-              </a:gs>
-              <a:gs pos="100000">
-                <a:schemeClr val="tx1">
-                  <a:lumMod val="65000"/>
-                </a:schemeClr>
-              </a:gs>
-            </a:gsLst>
-            <a:lin ang="5580000" scaled="0"/>
-            <a:tileRect/>
-          </a:gradFill>
-          <a:effectLst>
-            <a:glow rad="38100">
-              <a:schemeClr val="bg1">
-                <a:lumMod val="65000"/>
-                <a:lumOff val="35000"/>
-                <a:alpha val="40000"/>
-              </a:schemeClr>
-            </a:glow>
-            <a:outerShdw blurRad="28575" dist="38100" dir="14040000" algn="tl" rotWithShape="0">
-              <a:srgbClr val="000000">
-                <a:alpha val="25000"/>
-              </a:srgbClr>
-            </a:outerShdw>
-          </a:effectLst>
+        <a:defRPr sz="4400" kern="1200" spc="-50" baseline="0">
+          <a:solidFill>
+            <a:schemeClr val="tx1"/>
+          </a:solidFill>
           <a:latin typeface="+mj-lt"/>
           <a:ea typeface="+mj-ea"/>
           <a:cs typeface="+mj-cs"/>
         </a:defRPr>
       </a:lvl1pPr>
-      <a:lvl2pPr eaLnBrk="1" hangingPunct="1">
-        <a:defRPr>
-          <a:solidFill>
-            <a:schemeClr val="tx2"/>
-          </a:solidFill>
-        </a:defRPr>
-      </a:lvl2pPr>
-      <a:lvl3pPr eaLnBrk="1" hangingPunct="1">
-        <a:defRPr>
-          <a:solidFill>
-            <a:schemeClr val="tx2"/>
-          </a:solidFill>
-        </a:defRPr>
-      </a:lvl3pPr>
-      <a:lvl4pPr eaLnBrk="1" hangingPunct="1">
-        <a:defRPr>
-          <a:solidFill>
-            <a:schemeClr val="tx2"/>
-          </a:solidFill>
-        </a:defRPr>
-      </a:lvl4pPr>
-      <a:lvl5pPr eaLnBrk="1" hangingPunct="1">
-        <a:defRPr>
-          <a:solidFill>
-            <a:schemeClr val="tx2"/>
-          </a:solidFill>
-        </a:defRPr>
-      </a:lvl5pPr>
-      <a:lvl6pPr eaLnBrk="1" hangingPunct="1">
-        <a:defRPr>
-          <a:solidFill>
-            <a:schemeClr val="tx2"/>
-          </a:solidFill>
-        </a:defRPr>
-      </a:lvl6pPr>
-      <a:lvl7pPr eaLnBrk="1" hangingPunct="1">
-        <a:defRPr>
-          <a:solidFill>
-            <a:schemeClr val="tx2"/>
-          </a:solidFill>
-        </a:defRPr>
-      </a:lvl7pPr>
-      <a:lvl8pPr eaLnBrk="1" hangingPunct="1">
-        <a:defRPr>
-          <a:solidFill>
-            <a:schemeClr val="tx2"/>
-          </a:solidFill>
-        </a:defRPr>
-      </a:lvl8pPr>
-      <a:lvl9pPr eaLnBrk="1" hangingPunct="1">
-        <a:defRPr>
-          <a:solidFill>
-            <a:schemeClr val="tx2"/>
-          </a:solidFill>
-        </a:defRPr>
-      </a:lvl9pPr>
     </p:titleStyle>
     <p:bodyStyle>
-      <a:lvl1pPr marL="285750" indent="-285750" algn="l" defTabSz="457200" rtl="0" eaLnBrk="1" latinLnBrk="0" hangingPunct="1">
+      <a:lvl1pPr marL="182880" indent="-182880" algn="l" defTabSz="914400" rtl="0" eaLnBrk="1" latinLnBrk="0" hangingPunct="1">
+        <a:lnSpc>
+          <a:spcPct val="95000"/>
+        </a:lnSpc>
         <a:spcBef>
-          <a:spcPct val="20000"/>
+          <a:spcPts val="1400"/>
         </a:spcBef>
         <a:spcAft>
-          <a:spcPts val="600"/>
+          <a:spcPts val="200"/>
         </a:spcAft>
         <a:buClr>
-          <a:schemeClr val="tx1"/>
+          <a:schemeClr val="accent1"/>
         </a:buClr>
-        <a:buSzPct val="100000"/>
-        <a:buFont typeface="Arial"/>
+        <a:buSzPct val="80000"/>
+        <a:buFont typeface="Arial" pitchFamily="34" charset="0"/>
         <a:buChar char="•"/>
-        <a:defRPr sz="2000" kern="1200" cap="small">
-          <a:gradFill flip="none" rotWithShape="1">
-            <a:gsLst>
-              <a:gs pos="0">
-                <a:schemeClr val="tx1"/>
-              </a:gs>
-              <a:gs pos="100000">
-                <a:schemeClr val="tx1">
-                  <a:lumMod val="75000"/>
-                </a:schemeClr>
-              </a:gs>
-            </a:gsLst>
-            <a:lin ang="5580000" scaled="0"/>
-            <a:tileRect/>
-          </a:gradFill>
-          <a:effectLst>
-            <a:glow rad="38100">
-              <a:schemeClr val="bg1">
-                <a:lumMod val="50000"/>
-                <a:lumOff val="50000"/>
-                <a:alpha val="20000"/>
-              </a:schemeClr>
-            </a:glow>
-            <a:outerShdw blurRad="44450" dist="12700" dir="13860000" algn="tl" rotWithShape="0">
-              <a:srgbClr val="000000">
-                <a:alpha val="20000"/>
-              </a:srgbClr>
-            </a:outerShdw>
-          </a:effectLst>
+        <a:defRPr sz="1800" kern="1200" spc="10" baseline="0">
+          <a:solidFill>
+            <a:schemeClr val="tx1"/>
+          </a:solidFill>
           <a:latin typeface="+mn-lt"/>
           <a:ea typeface="+mn-ea"/>
           <a:cs typeface="+mn-cs"/>
         </a:defRPr>
       </a:lvl1pPr>
-      <a:lvl2pPr marL="742950" indent="-285750" algn="l" defTabSz="457200" rtl="0" eaLnBrk="1" latinLnBrk="0" hangingPunct="1">
+      <a:lvl2pPr marL="457200" indent="-182880" algn="l" defTabSz="914400" rtl="0" eaLnBrk="1" latinLnBrk="0" hangingPunct="1">
+        <a:lnSpc>
+          <a:spcPct val="90000"/>
+        </a:lnSpc>
         <a:spcBef>
-          <a:spcPct val="20000"/>
+          <a:spcPts val="300"/>
         </a:spcBef>
         <a:spcAft>
-          <a:spcPts val="600"/>
+          <a:spcPts val="300"/>
         </a:spcAft>
         <a:buClr>
-          <a:schemeClr val="tx1"/>
+          <a:schemeClr val="accent1"/>
         </a:buClr>
-        <a:buSzPct val="100000"/>
-        <a:buFont typeface="Arial"/>
-        <a:buChar char="•"/>
-        <a:defRPr sz="1800" kern="1200" cap="small">
-          <a:gradFill flip="none" rotWithShape="1">
-            <a:gsLst>
-              <a:gs pos="0">
-                <a:schemeClr val="tx1"/>
-              </a:gs>
-              <a:gs pos="100000">
-                <a:schemeClr val="tx1">
-                  <a:lumMod val="75000"/>
-                </a:schemeClr>
-              </a:gs>
-            </a:gsLst>
-            <a:lin ang="5580000" scaled="0"/>
-            <a:tileRect/>
-          </a:gradFill>
-          <a:effectLst>
-            <a:glow rad="38100">
-              <a:schemeClr val="bg1">
-                <a:lumMod val="50000"/>
-                <a:lumOff val="50000"/>
-                <a:alpha val="20000"/>
-              </a:schemeClr>
-            </a:glow>
-            <a:outerShdw blurRad="44450" dist="12700" dir="13860000" algn="tl" rotWithShape="0">
-              <a:srgbClr val="000000">
-                <a:alpha val="20000"/>
-              </a:srgbClr>
-            </a:outerShdw>
-          </a:effectLst>
+        <a:buFont typeface="Wingdings 2" pitchFamily="18" charset="2"/>
+        <a:buChar char=""/>
+        <a:defRPr sz="1600" kern="1200">
+          <a:solidFill>
+            <a:schemeClr val="tx1">
+              <a:lumMod val="85000"/>
+              <a:lumOff val="15000"/>
+            </a:schemeClr>
+          </a:solidFill>
           <a:latin typeface="+mn-lt"/>
           <a:ea typeface="+mn-ea"/>
           <a:cs typeface="+mn-cs"/>
         </a:defRPr>
       </a:lvl2pPr>
-      <a:lvl3pPr marL="1200150" indent="-285750" algn="l" defTabSz="457200" rtl="0" eaLnBrk="1" latinLnBrk="0" hangingPunct="1">
+      <a:lvl3pPr marL="731520" indent="-182880" algn="l" defTabSz="914400" rtl="0" eaLnBrk="1" latinLnBrk="0" hangingPunct="1">
+        <a:lnSpc>
+          <a:spcPct val="90000"/>
+        </a:lnSpc>
         <a:spcBef>
-          <a:spcPct val="20000"/>
+          <a:spcPts val="300"/>
         </a:spcBef>
         <a:spcAft>
-          <a:spcPts val="600"/>
+          <a:spcPts val="300"/>
         </a:spcAft>
         <a:buClr>
-          <a:schemeClr val="tx1"/>
+          <a:schemeClr val="accent1"/>
         </a:buClr>
-        <a:buSzPct val="100000"/>
-        <a:buFont typeface="Arial"/>
-        <a:buChar char="•"/>
-        <a:defRPr sz="1600" kern="1200" cap="small">
-          <a:gradFill flip="none" rotWithShape="1">
-            <a:gsLst>
-              <a:gs pos="0">
-                <a:schemeClr val="tx1"/>
-              </a:gs>
-              <a:gs pos="100000">
-                <a:schemeClr val="tx1">
-                  <a:lumMod val="75000"/>
-                </a:schemeClr>
-              </a:gs>
-            </a:gsLst>
-            <a:lin ang="5580000" scaled="0"/>
-            <a:tileRect/>
-          </a:gradFill>
-          <a:effectLst>
-            <a:glow rad="38100">
-              <a:schemeClr val="bg1">
-                <a:lumMod val="50000"/>
-                <a:lumOff val="50000"/>
-                <a:alpha val="20000"/>
-              </a:schemeClr>
-            </a:glow>
-            <a:outerShdw blurRad="44450" dist="12700" dir="13860000" algn="tl" rotWithShape="0">
-              <a:srgbClr val="000000">
-                <a:alpha val="20000"/>
-              </a:srgbClr>
-            </a:outerShdw>
-          </a:effectLst>
+        <a:buFont typeface="Wingdings 2" pitchFamily="18" charset="2"/>
+        <a:buChar char=""/>
+        <a:defRPr sz="1400" kern="1200">
+          <a:solidFill>
+            <a:schemeClr val="tx1">
+              <a:lumMod val="85000"/>
+              <a:lumOff val="15000"/>
+            </a:schemeClr>
+          </a:solidFill>
           <a:latin typeface="+mn-lt"/>
           <a:ea typeface="+mn-ea"/>
           <a:cs typeface="+mn-cs"/>
         </a:defRPr>
       </a:lvl3pPr>
-      <a:lvl4pPr marL="1543050" indent="-171450" algn="l" defTabSz="457200" rtl="0" eaLnBrk="1" latinLnBrk="0" hangingPunct="1">
+      <a:lvl4pPr marL="1005840" indent="-182880" algn="l" defTabSz="914400" rtl="0" eaLnBrk="1" latinLnBrk="0" hangingPunct="1">
+        <a:lnSpc>
+          <a:spcPct val="90000"/>
+        </a:lnSpc>
         <a:spcBef>
-          <a:spcPct val="20000"/>
+          <a:spcPts val="300"/>
         </a:spcBef>
         <a:spcAft>
-          <a:spcPts val="600"/>
+          <a:spcPts val="300"/>
         </a:spcAft>
         <a:buClr>
-          <a:schemeClr val="tx1"/>
+          <a:schemeClr val="accent1"/>
         </a:buClr>
-        <a:buSzPct val="100000"/>
-        <a:buFont typeface="Arial"/>
-        <a:buChar char="•"/>
-        <a:defRPr sz="1400" kern="1200" cap="small">
-          <a:gradFill flip="none" rotWithShape="1">
-            <a:gsLst>
-              <a:gs pos="0">
-                <a:schemeClr val="tx1"/>
-              </a:gs>
-              <a:gs pos="100000">
-                <a:schemeClr val="tx1">
-                  <a:lumMod val="75000"/>
-                </a:schemeClr>
-              </a:gs>
-            </a:gsLst>
-            <a:lin ang="5580000" scaled="0"/>
-            <a:tileRect/>
-          </a:gradFill>
-          <a:effectLst>
-            <a:glow rad="38100">
-              <a:schemeClr val="bg1">
-                <a:lumMod val="50000"/>
-                <a:lumOff val="50000"/>
-                <a:alpha val="20000"/>
-              </a:schemeClr>
-            </a:glow>
-            <a:outerShdw blurRad="44450" dist="12700" dir="13860000" algn="tl" rotWithShape="0">
-              <a:srgbClr val="000000">
-                <a:alpha val="20000"/>
-              </a:srgbClr>
-            </a:outerShdw>
-          </a:effectLst>
+        <a:buFont typeface="Wingdings 2" pitchFamily="18" charset="2"/>
+        <a:buChar char=""/>
+        <a:defRPr sz="1400" kern="1200">
+          <a:solidFill>
+            <a:schemeClr val="tx1">
+              <a:lumMod val="85000"/>
+              <a:lumOff val="15000"/>
+            </a:schemeClr>
+          </a:solidFill>
           <a:latin typeface="+mn-lt"/>
           <a:ea typeface="+mn-ea"/>
           <a:cs typeface="+mn-cs"/>
         </a:defRPr>
       </a:lvl4pPr>
-      <a:lvl5pPr marL="2000250" indent="-171450" algn="l" defTabSz="457200" rtl="0" eaLnBrk="1" latinLnBrk="0" hangingPunct="1">
+      <a:lvl5pPr marL="1280160" indent="-182880" algn="l" defTabSz="914400" rtl="0" eaLnBrk="1" latinLnBrk="0" hangingPunct="1">
+        <a:lnSpc>
+          <a:spcPct val="90000"/>
+        </a:lnSpc>
         <a:spcBef>
-          <a:spcPct val="20000"/>
+          <a:spcPts val="300"/>
         </a:spcBef>
         <a:spcAft>
-          <a:spcPts val="600"/>
+          <a:spcPts val="300"/>
         </a:spcAft>
         <a:buClr>
-          <a:schemeClr val="tx1"/>
+          <a:schemeClr val="accent1"/>
         </a:buClr>
-        <a:buSzPct val="100000"/>
-        <a:buFont typeface="Arial"/>
-        <a:buChar char="•"/>
-        <a:defRPr sz="1400" kern="1200" cap="small">
-          <a:gradFill flip="none" rotWithShape="1">
-            <a:gsLst>
-              <a:gs pos="0">
-                <a:schemeClr val="tx1"/>
-              </a:gs>
-              <a:gs pos="100000">
-                <a:schemeClr val="tx1">
-                  <a:lumMod val="75000"/>
-                </a:schemeClr>
-              </a:gs>
-            </a:gsLst>
-            <a:lin ang="5580000" scaled="0"/>
-            <a:tileRect/>
-          </a:gradFill>
-          <a:effectLst>
-            <a:glow rad="38100">
-              <a:schemeClr val="bg1">
-                <a:lumMod val="50000"/>
-                <a:lumOff val="50000"/>
-                <a:alpha val="20000"/>
-              </a:schemeClr>
-            </a:glow>
-            <a:outerShdw blurRad="44450" dist="12700" dir="13860000" algn="tl" rotWithShape="0">
-              <a:srgbClr val="000000">
-                <a:alpha val="20000"/>
-              </a:srgbClr>
-            </a:outerShdw>
-          </a:effectLst>
+        <a:buFont typeface="Wingdings 2" pitchFamily="18" charset="2"/>
+        <a:buChar char=""/>
+        <a:defRPr sz="1400" kern="1200">
+          <a:solidFill>
+            <a:schemeClr val="tx1">
+              <a:lumMod val="85000"/>
+              <a:lumOff val="15000"/>
+            </a:schemeClr>
+          </a:solidFill>
           <a:latin typeface="+mn-lt"/>
           <a:ea typeface="+mn-ea"/>
           <a:cs typeface="+mn-cs"/>
         </a:defRPr>
       </a:lvl5pPr>
-      <a:lvl6pPr marL="2514600" indent="-228600" algn="l" defTabSz="457200" rtl="0" eaLnBrk="1" latinLnBrk="0" hangingPunct="1">
+      <a:lvl6pPr marL="1600000" indent="-228600" algn="l" defTabSz="914400" rtl="0" eaLnBrk="1" latinLnBrk="0" hangingPunct="1">
+        <a:lnSpc>
+          <a:spcPct val="90000"/>
+        </a:lnSpc>
         <a:spcBef>
-          <a:spcPct val="20000"/>
+          <a:spcPts val="300"/>
         </a:spcBef>
         <a:spcAft>
-          <a:spcPts val="600"/>
+          <a:spcPts val="300"/>
         </a:spcAft>
         <a:buClr>
-          <a:schemeClr val="tx1"/>
+          <a:schemeClr val="accent1"/>
         </a:buClr>
-        <a:buSzPct val="100000"/>
-        <a:buFont typeface="Arial"/>
-        <a:buChar char="•"/>
-        <a:defRPr sz="1200" kern="1200" cap="small">
-          <a:gradFill flip="none" rotWithShape="1">
-            <a:gsLst>
-              <a:gs pos="0">
-                <a:schemeClr val="tx1"/>
-              </a:gs>
-              <a:gs pos="100000">
-                <a:schemeClr val="tx1">
-                  <a:lumMod val="75000"/>
-                </a:schemeClr>
-              </a:gs>
-            </a:gsLst>
-            <a:lin ang="5580000" scaled="0"/>
-            <a:tileRect/>
-          </a:gradFill>
-          <a:effectLst>
-            <a:glow rad="38100">
-              <a:schemeClr val="bg1">
-                <a:lumMod val="50000"/>
-                <a:lumOff val="50000"/>
-                <a:alpha val="20000"/>
-              </a:schemeClr>
-            </a:glow>
-            <a:outerShdw blurRad="44450" dist="12700" dir="13860000" algn="tl" rotWithShape="0">
-              <a:srgbClr val="000000">
-                <a:alpha val="20000"/>
-              </a:srgbClr>
-            </a:outerShdw>
-          </a:effectLst>
+        <a:buFont typeface="Wingdings 2" pitchFamily="18" charset="2"/>
+        <a:buChar char=""/>
+        <a:defRPr sz="1400" kern="1200">
+          <a:solidFill>
+            <a:schemeClr val="tx1">
+              <a:lumMod val="85000"/>
+              <a:lumOff val="15000"/>
+            </a:schemeClr>
+          </a:solidFill>
           <a:latin typeface="+mn-lt"/>
           <a:ea typeface="+mn-ea"/>
           <a:cs typeface="+mn-cs"/>
         </a:defRPr>
       </a:lvl6pPr>
-      <a:lvl7pPr marL="2971800" indent="-228600" algn="l" defTabSz="457200" rtl="0" eaLnBrk="1" latinLnBrk="0" hangingPunct="1">
+      <a:lvl7pPr marL="1900000" indent="-228600" algn="l" defTabSz="914400" rtl="0" eaLnBrk="1" latinLnBrk="0" hangingPunct="1">
+        <a:lnSpc>
+          <a:spcPct val="90000"/>
+        </a:lnSpc>
         <a:spcBef>
-          <a:spcPct val="20000"/>
+          <a:spcPts val="300"/>
         </a:spcBef>
         <a:spcAft>
-          <a:spcPts val="600"/>
+          <a:spcPts val="300"/>
         </a:spcAft>
         <a:buClr>
-          <a:schemeClr val="tx1"/>
+          <a:schemeClr val="accent1"/>
         </a:buClr>
-        <a:buSzPct val="100000"/>
-        <a:buFont typeface="Arial"/>
-        <a:buChar char="•"/>
-        <a:defRPr sz="1200" kern="1200" cap="small">
-          <a:gradFill flip="none" rotWithShape="1">
-            <a:gsLst>
-              <a:gs pos="0">
-                <a:schemeClr val="tx1"/>
-              </a:gs>
-              <a:gs pos="100000">
-                <a:schemeClr val="tx1">
-                  <a:lumMod val="75000"/>
-                </a:schemeClr>
-              </a:gs>
-            </a:gsLst>
-            <a:lin ang="5580000" scaled="0"/>
-            <a:tileRect/>
-          </a:gradFill>
-          <a:effectLst>
-            <a:glow rad="38100">
-              <a:schemeClr val="bg1">
-                <a:lumMod val="50000"/>
-                <a:lumOff val="50000"/>
-                <a:alpha val="20000"/>
-              </a:schemeClr>
-            </a:glow>
-            <a:outerShdw blurRad="44450" dist="12700" dir="13860000" algn="tl" rotWithShape="0">
-              <a:srgbClr val="000000">
-                <a:alpha val="20000"/>
-              </a:srgbClr>
-            </a:outerShdw>
-          </a:effectLst>
+        <a:buFont typeface="Wingdings 2" pitchFamily="18" charset="2"/>
+        <a:buChar char=""/>
+        <a:defRPr sz="1400" kern="1200">
+          <a:solidFill>
+            <a:schemeClr val="tx1">
+              <a:lumMod val="85000"/>
+              <a:lumOff val="15000"/>
+            </a:schemeClr>
+          </a:solidFill>
           <a:latin typeface="+mn-lt"/>
           <a:ea typeface="+mn-ea"/>
           <a:cs typeface="+mn-cs"/>
         </a:defRPr>
       </a:lvl7pPr>
-      <a:lvl8pPr marL="3429000" indent="-228600" algn="l" defTabSz="457200" rtl="0" eaLnBrk="1" latinLnBrk="0" hangingPunct="1">
+      <a:lvl8pPr marL="2200000" indent="-228600" algn="l" defTabSz="914400" rtl="0" eaLnBrk="1" latinLnBrk="0" hangingPunct="1">
+        <a:lnSpc>
+          <a:spcPct val="90000"/>
+        </a:lnSpc>
         <a:spcBef>
-          <a:spcPct val="20000"/>
+          <a:spcPts val="300"/>
         </a:spcBef>
         <a:spcAft>
-          <a:spcPts val="600"/>
+          <a:spcPts val="300"/>
         </a:spcAft>
         <a:buClr>
-          <a:schemeClr val="tx1"/>
+          <a:schemeClr val="accent1"/>
         </a:buClr>
-        <a:buSzPct val="100000"/>
-        <a:buFont typeface="Arial"/>
-        <a:buChar char="•"/>
-        <a:defRPr sz="1200" kern="1200" cap="small">
-          <a:gradFill flip="none" rotWithShape="1">
-            <a:gsLst>
-              <a:gs pos="0">
-                <a:schemeClr val="tx1"/>
-              </a:gs>
-              <a:gs pos="100000">
-                <a:schemeClr val="tx1">
-                  <a:lumMod val="75000"/>
-                </a:schemeClr>
-              </a:gs>
-            </a:gsLst>
-            <a:lin ang="5580000" scaled="0"/>
-            <a:tileRect/>
-          </a:gradFill>
-          <a:effectLst>
-            <a:glow rad="38100">
-              <a:schemeClr val="bg1">
-                <a:lumMod val="50000"/>
-                <a:lumOff val="50000"/>
-                <a:alpha val="20000"/>
-              </a:schemeClr>
-            </a:glow>
-            <a:outerShdw blurRad="44450" dist="12700" dir="13860000" algn="tl" rotWithShape="0">
-              <a:srgbClr val="000000">
-                <a:alpha val="20000"/>
-              </a:srgbClr>
-            </a:outerShdw>
-          </a:effectLst>
+        <a:buFont typeface="Wingdings 2" pitchFamily="18" charset="2"/>
+        <a:buChar char=""/>
+        <a:defRPr sz="1400" kern="1200">
+          <a:solidFill>
+            <a:schemeClr val="tx1">
+              <a:lumMod val="85000"/>
+              <a:lumOff val="15000"/>
+            </a:schemeClr>
+          </a:solidFill>
           <a:latin typeface="+mn-lt"/>
           <a:ea typeface="+mn-ea"/>
           <a:cs typeface="+mn-cs"/>
         </a:defRPr>
       </a:lvl8pPr>
-      <a:lvl9pPr marL="3886200" indent="-228600" algn="l" defTabSz="457200" rtl="0" eaLnBrk="1" latinLnBrk="0" hangingPunct="1">
+      <a:lvl9pPr marL="2500000" indent="-228600" algn="l" defTabSz="914400" rtl="0" eaLnBrk="1" latinLnBrk="0" hangingPunct="1">
+        <a:lnSpc>
+          <a:spcPct val="90000"/>
+        </a:lnSpc>
         <a:spcBef>
-          <a:spcPct val="20000"/>
+          <a:spcPts val="300"/>
         </a:spcBef>
         <a:spcAft>
-          <a:spcPts val="600"/>
+          <a:spcPts val="300"/>
         </a:spcAft>
         <a:buClr>
-          <a:schemeClr val="tx1"/>
+          <a:schemeClr val="accent1"/>
         </a:buClr>
-        <a:buSzPct val="100000"/>
-        <a:buFont typeface="Arial"/>
-        <a:buChar char="•"/>
-        <a:defRPr sz="1200" kern="1200" cap="small">
-          <a:gradFill flip="none" rotWithShape="1">
-            <a:gsLst>
-              <a:gs pos="0">
-                <a:schemeClr val="tx1"/>
-              </a:gs>
-              <a:gs pos="100000">
-                <a:schemeClr val="tx1">
-                  <a:lumMod val="75000"/>
-                </a:schemeClr>
-              </a:gs>
-            </a:gsLst>
-            <a:lin ang="5580000" scaled="0"/>
-            <a:tileRect/>
-          </a:gradFill>
-          <a:effectLst>
-            <a:glow rad="38100">
-              <a:schemeClr val="bg1">
-                <a:lumMod val="50000"/>
-                <a:lumOff val="50000"/>
-                <a:alpha val="20000"/>
-              </a:schemeClr>
-            </a:glow>
-            <a:outerShdw blurRad="44450" dist="12700" dir="13860000" algn="tl" rotWithShape="0">
-              <a:srgbClr val="000000">
-                <a:alpha val="20000"/>
-              </a:srgbClr>
-            </a:outerShdw>
-          </a:effectLst>
+        <a:buFont typeface="Wingdings 2" pitchFamily="18" charset="2"/>
+        <a:buChar char=""/>
+        <a:defRPr sz="1400" kern="1200">
+          <a:solidFill>
+            <a:schemeClr val="tx1">
+              <a:lumMod val="85000"/>
+              <a:lumOff val="15000"/>
+            </a:schemeClr>
+          </a:solidFill>
           <a:latin typeface="+mn-lt"/>
           <a:ea typeface="+mn-ea"/>
           <a:cs typeface="+mn-cs"/>
@@ -5623,7 +3353,7 @@
       <a:defPPr>
         <a:defRPr lang="en-US"/>
       </a:defPPr>
-      <a:lvl1pPr marL="0" algn="l" defTabSz="457200" rtl="0" eaLnBrk="1" latinLnBrk="0" hangingPunct="1">
+      <a:lvl1pPr marL="0" algn="l" defTabSz="914400" rtl="0" eaLnBrk="1" latinLnBrk="0" hangingPunct="1">
         <a:defRPr sz="1800" kern="1200">
           <a:solidFill>
             <a:schemeClr val="tx1"/>
@@ -5633,7 +3363,7 @@
           <a:cs typeface="+mn-cs"/>
         </a:defRPr>
       </a:lvl1pPr>
-      <a:lvl2pPr marL="457200" algn="l" defTabSz="457200" rtl="0" eaLnBrk="1" latinLnBrk="0" hangingPunct="1">
+      <a:lvl2pPr marL="457200" algn="l" defTabSz="914400" rtl="0" eaLnBrk="1" latinLnBrk="0" hangingPunct="1">
         <a:defRPr sz="1800" kern="1200">
           <a:solidFill>
             <a:schemeClr val="tx1"/>
@@ -5643,7 +3373,7 @@
           <a:cs typeface="+mn-cs"/>
         </a:defRPr>
       </a:lvl2pPr>
-      <a:lvl3pPr marL="914400" algn="l" defTabSz="457200" rtl="0" eaLnBrk="1" latinLnBrk="0" hangingPunct="1">
+      <a:lvl3pPr marL="914400" algn="l" defTabSz="914400" rtl="0" eaLnBrk="1" latinLnBrk="0" hangingPunct="1">
         <a:defRPr sz="1800" kern="1200">
           <a:solidFill>
             <a:schemeClr val="tx1"/>
@@ -5653,7 +3383,7 @@
           <a:cs typeface="+mn-cs"/>
         </a:defRPr>
       </a:lvl3pPr>
-      <a:lvl4pPr marL="1371600" algn="l" defTabSz="457200" rtl="0" eaLnBrk="1" latinLnBrk="0" hangingPunct="1">
+      <a:lvl4pPr marL="1371600" algn="l" defTabSz="914400" rtl="0" eaLnBrk="1" latinLnBrk="0" hangingPunct="1">
         <a:defRPr sz="1800" kern="1200">
           <a:solidFill>
             <a:schemeClr val="tx1"/>
@@ -5663,7 +3393,7 @@
           <a:cs typeface="+mn-cs"/>
         </a:defRPr>
       </a:lvl4pPr>
-      <a:lvl5pPr marL="1828800" algn="l" defTabSz="457200" rtl="0" eaLnBrk="1" latinLnBrk="0" hangingPunct="1">
+      <a:lvl5pPr marL="1828800" algn="l" defTabSz="914400" rtl="0" eaLnBrk="1" latinLnBrk="0" hangingPunct="1">
         <a:defRPr sz="1800" kern="1200">
           <a:solidFill>
             <a:schemeClr val="tx1"/>
@@ -5673,7 +3403,7 @@
           <a:cs typeface="+mn-cs"/>
         </a:defRPr>
       </a:lvl5pPr>
-      <a:lvl6pPr marL="2286000" algn="l" defTabSz="457200" rtl="0" eaLnBrk="1" latinLnBrk="0" hangingPunct="1">
+      <a:lvl6pPr marL="2286000" algn="l" defTabSz="914400" rtl="0" eaLnBrk="1" latinLnBrk="0" hangingPunct="1">
         <a:defRPr sz="1800" kern="1200">
           <a:solidFill>
             <a:schemeClr val="tx1"/>
@@ -5683,7 +3413,7 @@
           <a:cs typeface="+mn-cs"/>
         </a:defRPr>
       </a:lvl6pPr>
-      <a:lvl7pPr marL="2743200" algn="l" defTabSz="457200" rtl="0" eaLnBrk="1" latinLnBrk="0" hangingPunct="1">
+      <a:lvl7pPr marL="2743200" algn="l" defTabSz="914400" rtl="0" eaLnBrk="1" latinLnBrk="0" hangingPunct="1">
         <a:defRPr sz="1800" kern="1200">
           <a:solidFill>
             <a:schemeClr val="tx1"/>
@@ -5693,7 +3423,7 @@
           <a:cs typeface="+mn-cs"/>
         </a:defRPr>
       </a:lvl7pPr>
-      <a:lvl8pPr marL="3200400" algn="l" defTabSz="457200" rtl="0" eaLnBrk="1" latinLnBrk="0" hangingPunct="1">
+      <a:lvl8pPr marL="3200400" algn="l" defTabSz="914400" rtl="0" eaLnBrk="1" latinLnBrk="0" hangingPunct="1">
         <a:defRPr sz="1800" kern="1200">
           <a:solidFill>
             <a:schemeClr val="tx1"/>
@@ -5703,7 +3433,7 @@
           <a:cs typeface="+mn-cs"/>
         </a:defRPr>
       </a:lvl8pPr>
-      <a:lvl9pPr marL="3657600" algn="l" defTabSz="457200" rtl="0" eaLnBrk="1" latinLnBrk="0" hangingPunct="1">
+      <a:lvl9pPr marL="3657600" algn="l" defTabSz="914400" rtl="0" eaLnBrk="1" latinLnBrk="0" hangingPunct="1">
         <a:defRPr sz="1800" kern="1200">
           <a:solidFill>
             <a:schemeClr val="tx1"/>
@@ -5753,8 +3483,8 @@
         </p:nvSpPr>
         <p:spPr>
           <a:xfrm>
-            <a:off x="313764" y="609601"/>
-            <a:ext cx="11645153" cy="2250140"/>
+            <a:off x="484094" y="609601"/>
+            <a:ext cx="11474823" cy="2250140"/>
           </a:xfrm>
         </p:spPr>
         <p:txBody>
@@ -5789,12 +3519,14 @@
         </p:nvSpPr>
         <p:spPr>
           <a:xfrm>
-            <a:off x="1751011" y="3886200"/>
-            <a:ext cx="10207905" cy="1905000"/>
+            <a:off x="1751011" y="4401670"/>
+            <a:ext cx="10207905" cy="1389529"/>
           </a:xfrm>
         </p:spPr>
         <p:txBody>
-          <a:bodyPr/>
+          <a:bodyPr>
+            <a:normAutofit lnSpcReduction="10000"/>
+          </a:bodyPr>
           <a:lstStyle/>
           <a:p>
             <a:pPr algn="r"/>
@@ -5835,11 +3567,7 @@
             </a:r>
             <a:r>
               <a:rPr lang="de-DE" dirty="0"/>
-              <a:t>. prof. </a:t>
-            </a:r>
-            <a:r>
-              <a:rPr lang="de-DE" dirty="0" err="1"/>
-              <a:t>PCz</a:t>
+              <a:t>.</a:t>
             </a:r>
             <a:r>
               <a:rPr lang="pl-PL" dirty="0"/>
@@ -6537,8 +4265,8 @@
         </p:nvSpPr>
         <p:spPr>
           <a:xfrm>
-            <a:off x="143434" y="1362637"/>
-            <a:ext cx="11905129" cy="5307104"/>
+            <a:off x="143435" y="1362637"/>
+            <a:ext cx="11134166" cy="5307104"/>
           </a:xfrm>
         </p:spPr>
         <p:txBody>
@@ -6559,7 +4287,7 @@
             </a:pPr>
             <a:r>
               <a:rPr lang="pl-PL" sz="1400" dirty="0"/>
-              <a:t>Porównania podobnych rozwiązań:</a:t>
+              <a:t>Porównanie programów do projektowania wnętrz:</a:t>
             </a:r>
           </a:p>
           <a:p>
@@ -6633,14 +4361,14 @@
           <p:nvPr>
             <p:extLst>
               <p:ext uri="{D42A27DB-BD31-4B8C-83A1-F6EECF244321}">
-                <p14:modId xmlns:p14="http://schemas.microsoft.com/office/powerpoint/2010/main" val="3490620787"/>
+                <p14:modId xmlns:p14="http://schemas.microsoft.com/office/powerpoint/2010/main" val="1548145093"/>
               </p:ext>
             </p:extLst>
           </p:nvPr>
         </p:nvGraphicFramePr>
         <p:xfrm>
-          <a:off x="143432" y="2680447"/>
-          <a:ext cx="11905127" cy="3999095"/>
+          <a:off x="143432" y="2897285"/>
+          <a:ext cx="11134168" cy="3835210"/>
         </p:xfrm>
         <a:graphic>
           <a:graphicData uri="http://schemas.openxmlformats.org/drawingml/2006/table">
@@ -6649,35 +4377,35 @@
                 <a:tableStyleId>{5C22544A-7EE6-4342-B048-85BDC9FD1C3A}</a:tableStyleId>
               </a:tblPr>
               <a:tblGrid>
-                <a:gridCol w="2379963">
+                <a:gridCol w="2225840">
                   <a:extLst>
                     <a:ext uri="{9D8B030D-6E8A-4147-A177-3AD203B41FA5}">
                       <a16:colId xmlns:a16="http://schemas.microsoft.com/office/drawing/2014/main" val="121564756"/>
                     </a:ext>
                   </a:extLst>
                 </a:gridCol>
-                <a:gridCol w="2381291">
+                <a:gridCol w="2227082">
                   <a:extLst>
                     <a:ext uri="{9D8B030D-6E8A-4147-A177-3AD203B41FA5}">
                       <a16:colId xmlns:a16="http://schemas.microsoft.com/office/drawing/2014/main" val="1898770979"/>
                     </a:ext>
                   </a:extLst>
                 </a:gridCol>
-                <a:gridCol w="2381291">
+                <a:gridCol w="2227082">
                   <a:extLst>
                     <a:ext uri="{9D8B030D-6E8A-4147-A177-3AD203B41FA5}">
                       <a16:colId xmlns:a16="http://schemas.microsoft.com/office/drawing/2014/main" val="467455197"/>
                     </a:ext>
                   </a:extLst>
                 </a:gridCol>
-                <a:gridCol w="2381291">
+                <a:gridCol w="2227082">
                   <a:extLst>
                     <a:ext uri="{9D8B030D-6E8A-4147-A177-3AD203B41FA5}">
                       <a16:colId xmlns:a16="http://schemas.microsoft.com/office/drawing/2014/main" val="2165750682"/>
                     </a:ext>
                   </a:extLst>
                 </a:gridCol>
-                <a:gridCol w="2381291">
+                <a:gridCol w="2227082">
                   <a:extLst>
                     <a:ext uri="{9D8B030D-6E8A-4147-A177-3AD203B41FA5}">
                       <a16:colId xmlns:a16="http://schemas.microsoft.com/office/drawing/2014/main" val="4036706159"/>
@@ -6685,7 +4413,7 @@
                   </a:extLst>
                 </a:gridCol>
               </a:tblGrid>
-              <a:tr h="229505">
+              <a:tr h="217678">
                 <a:tc>
                   <a:txBody>
                     <a:bodyPr/>
@@ -6827,7 +4555,7 @@
                   </a:ext>
                 </a:extLst>
               </a:tr>
-              <a:tr h="753918">
+              <a:tr h="714879">
                 <a:tc>
                   <a:txBody>
                     <a:bodyPr/>
@@ -6969,7 +4697,7 @@
                   </a:ext>
                 </a:extLst>
               </a:tr>
-              <a:tr h="753918">
+              <a:tr h="714879">
                 <a:tc>
                   <a:txBody>
                     <a:bodyPr/>
@@ -7117,7 +4845,7 @@
                   </a:ext>
                 </a:extLst>
               </a:tr>
-              <a:tr h="1016058">
+              <a:tr h="963510">
                 <a:tc>
                   <a:txBody>
                     <a:bodyPr/>
@@ -7259,7 +4987,7 @@
                   </a:ext>
                 </a:extLst>
               </a:tr>
-              <a:tr h="753918">
+              <a:tr h="714879">
                 <a:tc>
                   <a:txBody>
                     <a:bodyPr/>
@@ -7398,7 +5126,7 @@
                   </a:ext>
                 </a:extLst>
               </a:tr>
-              <a:tr h="491778">
+              <a:tr h="466247">
                 <a:tc>
                   <a:txBody>
                     <a:bodyPr/>
@@ -7465,12 +5193,18 @@
                         <a:buNone/>
                       </a:pPr>
                       <a:r>
-                        <a:rPr lang="pl-PL" sz="1100">
-                          <a:effectLst/>
-                        </a:rPr>
-                        <a:t>Darmowy/19 999 zl</a:t>
-                      </a:r>
-                      <a:endParaRPr lang="pl-PL" sz="1100">
+                        <a:rPr lang="pl-PL" sz="1100" dirty="0">
+                          <a:effectLst/>
+                        </a:rPr>
+                        <a:t>Darmowy/19 999 </a:t>
+                      </a:r>
+                      <a:r>
+                        <a:rPr lang="pl-PL" sz="1100" dirty="0" err="1">
+                          <a:effectLst/>
+                        </a:rPr>
+                        <a:t>zl</a:t>
+                      </a:r>
+                      <a:endParaRPr lang="pl-PL" sz="1100" dirty="0">
                         <a:effectLst/>
                         <a:latin typeface="Arial" panose="020B0604020202020204" pitchFamily="34" charset="0"/>
                         <a:ea typeface="Calibri" panose="020F0502020204030204" pitchFamily="34" charset="0"/>
@@ -7608,7 +5342,7 @@
           <a:p>
             <a:r>
               <a:rPr lang="pl-PL" dirty="0"/>
-              <a:t>Wstęp – Wirtualna rzeczywistość</a:t>
+              <a:t>Wstęp – Wirtualna Rzeczywistość</a:t>
             </a:r>
           </a:p>
         </p:txBody>
@@ -7631,8 +5365,8 @@
         </p:nvSpPr>
         <p:spPr>
           <a:xfrm>
-            <a:off x="143434" y="1362637"/>
-            <a:ext cx="11905129" cy="5307104"/>
+            <a:off x="143435" y="1362637"/>
+            <a:ext cx="11080378" cy="5307104"/>
           </a:xfrm>
         </p:spPr>
         <p:txBody>
@@ -7644,13 +5378,8 @@
             </a:pPr>
             <a:r>
               <a:rPr lang="pl-PL" sz="1400" dirty="0"/>
-              <a:t>Rzeczywistość wirtualna to obraz sztucznej rzeczywistości stworzony przy wykorzystaniu technologii informatycznej. Polega na multimedialnym kreowaniu komputerowej wizji przedmiotów, przestrzeni i zdarzeń. Może on reprezentować zarówno elementy świata realnego, jak i zupełnie fikcyjnego. Najważniejszym elementem tej technologii jest interakcja z wirtualnym środowiskiem oparta o ruch użytkownika. Jest ona używana do wizualizacji, gdzie użytkownik w pierwszej osobie może </a:t>
-            </a:r>
-            <a:r>
-              <a:rPr lang="pl-PL" sz="1400"/>
-              <a:t>obejrzeć projekt. </a:t>
-            </a:r>
-            <a:endParaRPr lang="pl-PL" sz="1400" dirty="0"/>
+              <a:t>Rzeczywistość wirtualna to obraz sztucznej rzeczywistości stworzony przy wykorzystaniu technologii informatycznej. Polega na multimedialnym kreowaniu komputerowej wizji przedmiotów, przestrzeni i zdarzeń. Może on reprezentować zarówno elementy świata realnego, jak i zupełnie fikcyjnego. Najważniejszym elementem tej technologii jest interakcja z wirtualnym środowiskiem oparta o ruch użytkownika. Jest ona używana do wizualizacji, gdzie użytkownik w pierwszej osobie może obejrzeć projekt. </a:t>
+            </a:r>
           </a:p>
           <a:p>
             <a:pPr marL="0" indent="0">
@@ -7732,14 +5461,14 @@
           <p:nvPr>
             <p:extLst>
               <p:ext uri="{D42A27DB-BD31-4B8C-83A1-F6EECF244321}">
-                <p14:modId xmlns:p14="http://schemas.microsoft.com/office/powerpoint/2010/main" val="262764257"/>
+                <p14:modId xmlns:p14="http://schemas.microsoft.com/office/powerpoint/2010/main" val="225164815"/>
               </p:ext>
             </p:extLst>
           </p:nvPr>
         </p:nvGraphicFramePr>
         <p:xfrm>
-          <a:off x="143431" y="2698376"/>
-          <a:ext cx="11905129" cy="3971365"/>
+          <a:off x="143434" y="2698376"/>
+          <a:ext cx="11080380" cy="3971869"/>
         </p:xfrm>
         <a:graphic>
           <a:graphicData uri="http://schemas.openxmlformats.org/drawingml/2006/table">
@@ -7748,56 +5477,56 @@
                 <a:tableStyleId>{5C22544A-7EE6-4342-B048-85BDC9FD1C3A}</a:tableStyleId>
               </a:tblPr>
               <a:tblGrid>
-                <a:gridCol w="1297412">
+                <a:gridCol w="1207532">
                   <a:extLst>
                     <a:ext uri="{9D8B030D-6E8A-4147-A177-3AD203B41FA5}">
                       <a16:colId xmlns:a16="http://schemas.microsoft.com/office/drawing/2014/main" val="3667982810"/>
                     </a:ext>
                   </a:extLst>
                 </a:gridCol>
-                <a:gridCol w="1804692">
+                <a:gridCol w="1679669">
                   <a:extLst>
                     <a:ext uri="{9D8B030D-6E8A-4147-A177-3AD203B41FA5}">
                       <a16:colId xmlns:a16="http://schemas.microsoft.com/office/drawing/2014/main" val="8836512"/>
                     </a:ext>
                   </a:extLst>
                 </a:gridCol>
-                <a:gridCol w="953474">
+                <a:gridCol w="887420">
                   <a:extLst>
                     <a:ext uri="{9D8B030D-6E8A-4147-A177-3AD203B41FA5}">
                       <a16:colId xmlns:a16="http://schemas.microsoft.com/office/drawing/2014/main" val="2925828577"/>
                     </a:ext>
                   </a:extLst>
                 </a:gridCol>
-                <a:gridCol w="1815315">
+                <a:gridCol w="1689556">
                   <a:extLst>
                     <a:ext uri="{9D8B030D-6E8A-4147-A177-3AD203B41FA5}">
                       <a16:colId xmlns:a16="http://schemas.microsoft.com/office/drawing/2014/main" val="3971175562"/>
                     </a:ext>
                   </a:extLst>
                 </a:gridCol>
-                <a:gridCol w="1735637">
+                <a:gridCol w="1615398">
                   <a:extLst>
                     <a:ext uri="{9D8B030D-6E8A-4147-A177-3AD203B41FA5}">
                       <a16:colId xmlns:a16="http://schemas.microsoft.com/office/drawing/2014/main" val="3421818127"/>
                     </a:ext>
                   </a:extLst>
                 </a:gridCol>
-                <a:gridCol w="1331942">
+                <a:gridCol w="1239669">
                   <a:extLst>
                     <a:ext uri="{9D8B030D-6E8A-4147-A177-3AD203B41FA5}">
                       <a16:colId xmlns:a16="http://schemas.microsoft.com/office/drawing/2014/main" val="1681559505"/>
                     </a:ext>
                   </a:extLst>
                 </a:gridCol>
-                <a:gridCol w="2072940">
+                <a:gridCol w="1929333">
                   <a:extLst>
                     <a:ext uri="{9D8B030D-6E8A-4147-A177-3AD203B41FA5}">
                       <a16:colId xmlns:a16="http://schemas.microsoft.com/office/drawing/2014/main" val="239348676"/>
                     </a:ext>
                   </a:extLst>
                 </a:gridCol>
-                <a:gridCol w="893717">
+                <a:gridCol w="831803">
                   <a:extLst>
                     <a:ext uri="{9D8B030D-6E8A-4147-A177-3AD203B41FA5}">
                       <a16:colId xmlns:a16="http://schemas.microsoft.com/office/drawing/2014/main" val="4161427337"/>
@@ -7805,7 +5534,7 @@
                   </a:extLst>
                 </a:gridCol>
               </a:tblGrid>
-              <a:tr h="308983">
+              <a:tr h="274807">
                 <a:tc>
                   <a:txBody>
                     <a:bodyPr/>
@@ -8028,7 +5757,7 @@
                   </a:ext>
                 </a:extLst>
               </a:tr>
-              <a:tr h="1367594">
+              <a:tr h="1216325">
                 <a:tc>
                   <a:txBody>
                     <a:bodyPr/>
@@ -8251,7 +5980,7 @@
                   </a:ext>
                 </a:extLst>
               </a:tr>
-              <a:tr h="661908">
+              <a:tr h="588695">
                 <a:tc>
                   <a:txBody>
                     <a:bodyPr/>
@@ -8474,7 +6203,7 @@
                   </a:ext>
                 </a:extLst>
               </a:tr>
-              <a:tr h="309064">
+              <a:tr h="274879">
                 <a:tc>
                   <a:txBody>
                     <a:bodyPr/>
@@ -8697,7 +6426,7 @@
                   </a:ext>
                 </a:extLst>
               </a:tr>
-              <a:tr h="661908">
+              <a:tr h="588695">
                 <a:tc>
                   <a:txBody>
                     <a:bodyPr/>
@@ -8926,7 +6655,7 @@
                   </a:ext>
                 </a:extLst>
               </a:tr>
-              <a:tr h="661908">
+              <a:tr h="588695">
                 <a:tc>
                   <a:txBody>
                     <a:bodyPr/>
@@ -9271,113 +7000,71 @@
         <p:spPr>
           <a:xfrm>
             <a:off x="143434" y="1362637"/>
-            <a:ext cx="11905129" cy="5307104"/>
+            <a:ext cx="11071413" cy="5307104"/>
           </a:xfrm>
         </p:spPr>
         <p:txBody>
           <a:bodyPr>
-            <a:normAutofit fontScale="40000" lnSpcReduction="20000"/>
+            <a:noAutofit/>
           </a:bodyPr>
           <a:lstStyle/>
           <a:p>
             <a:pPr marL="0" indent="0" algn="just">
               <a:buNone/>
             </a:pPr>
-            <a:endParaRPr lang="pl-PL" dirty="0"/>
+            <a:r>
+              <a:rPr lang="pl-PL" sz="1400" dirty="0"/>
+              <a:t>Celem pracy jest opracowanie systemu do projektowania wnętrz, który wykorzysta technologię wirtualnej rzeczywistości. Obsługa całego programu ma być oparta o fizyczną interakcje za pośrednictwem kontrolerów śledzących ruch dłoni. Proces projektowania wnętrza będzie całkowicie wewnątrz wirtualnej rzeczywistości.</a:t>
+            </a:r>
           </a:p>
           <a:p>
             <a:pPr marL="0" indent="0" algn="just">
               <a:buNone/>
             </a:pPr>
-            <a:endParaRPr lang="pl-PL" dirty="0"/>
-          </a:p>
-          <a:p>
-            <a:pPr marL="0" indent="0" algn="just">
-              <a:buNone/>
-            </a:pPr>
-            <a:endParaRPr lang="pl-PL" dirty="0"/>
-          </a:p>
-          <a:p>
-            <a:pPr marL="0" indent="0" algn="just">
-              <a:buNone/>
-            </a:pPr>
-            <a:endParaRPr lang="pl-PL" dirty="0"/>
-          </a:p>
-          <a:p>
-            <a:pPr marL="0" indent="0" algn="just">
-              <a:buNone/>
-            </a:pPr>
-            <a:r>
-              <a:rPr lang="pl-PL" sz="4400" dirty="0"/>
-              <a:t>Celem pracy jest opracowanie systemu do projektowania wnętrz, który wykorzysta technologię wirtualnej rzeczywistości. Obsługa całego programu ma być oparta o fizyczną interakcje za pośrednictwem kontrolerów śledzących ruch dłoni. Proces projektowania wnętrza będzie całkowicie wewnątrz wirtualnej rzeczywistości.</a:t>
-            </a:r>
-          </a:p>
-          <a:p>
-            <a:pPr marL="0" indent="0" algn="just">
-              <a:buNone/>
-            </a:pPr>
-            <a:endParaRPr lang="pl-PL" sz="4400" dirty="0"/>
-          </a:p>
-          <a:p>
-            <a:pPr marL="0" indent="0" algn="just">
-              <a:buNone/>
-            </a:pPr>
-            <a:endParaRPr lang="pl-PL" sz="4400" dirty="0"/>
-          </a:p>
-          <a:p>
-            <a:pPr marL="0" indent="0" algn="just">
-              <a:buNone/>
-            </a:pPr>
-            <a:endParaRPr lang="pl-PL" sz="4400" dirty="0"/>
-          </a:p>
-          <a:p>
-            <a:pPr marL="0" indent="0" algn="just">
-              <a:buNone/>
-            </a:pPr>
-            <a:r>
-              <a:rPr lang="pl-PL" sz="4400" dirty="0"/>
+            <a:r>
+              <a:rPr lang="pl-PL" sz="1400" dirty="0"/>
               <a:t>Podstawowe funkcjonalności</a:t>
             </a:r>
           </a:p>
           <a:p>
             <a:pPr algn="just"/>
             <a:r>
-              <a:rPr lang="pl-PL" sz="4400" dirty="0"/>
+              <a:rPr lang="pl-PL" sz="1400" dirty="0"/>
               <a:t>Generacja pomieszczeń na podstawie wymagań użytkownika</a:t>
             </a:r>
           </a:p>
           <a:p>
             <a:pPr algn="just"/>
             <a:r>
-              <a:rPr lang="pl-PL" sz="4400" dirty="0"/>
+              <a:rPr lang="pl-PL" sz="1400" dirty="0"/>
               <a:t>Tworzenie i interakcja z przedmiotami</a:t>
             </a:r>
           </a:p>
           <a:p>
             <a:pPr algn="just"/>
             <a:r>
-              <a:rPr lang="pl-PL" sz="4400" dirty="0"/>
+              <a:rPr lang="pl-PL" sz="1400" dirty="0"/>
               <a:t>Zmiana wyglądu i koloru ścian</a:t>
             </a:r>
           </a:p>
           <a:p>
             <a:pPr algn="just"/>
             <a:r>
-              <a:rPr lang="pl-PL" sz="4400" dirty="0"/>
+              <a:rPr lang="pl-PL" sz="1400" dirty="0"/>
               <a:t>Tworzenie dodatkowych ścian</a:t>
             </a:r>
           </a:p>
           <a:p>
             <a:pPr algn="just"/>
             <a:r>
-              <a:rPr lang="pl-PL" sz="4400" dirty="0"/>
+              <a:rPr lang="pl-PL" sz="1400" dirty="0"/>
               <a:t>Tworzenie stałych obiektów</a:t>
             </a:r>
           </a:p>
           <a:p>
             <a:pPr algn="just"/>
             <a:r>
-              <a:rPr lang="pl-PL" sz="4400" dirty="0"/>
+              <a:rPr lang="pl-PL" sz="1400" dirty="0"/>
               <a:t>Podgląd z lotu ptaka</a:t>
             </a:r>
           </a:p>
@@ -10205,49 +7892,49 @@
 </file>
 
 <file path=ppt/theme/theme1.xml><?xml version="1.0" encoding="utf-8"?>
-<a:theme xmlns:a="http://schemas.openxmlformats.org/drawingml/2006/main" name="Siatka">
+<a:theme xmlns:a="http://schemas.openxmlformats.org/drawingml/2006/main" name="Widok">
   <a:themeElements>
-    <a:clrScheme name="Siatka">
+    <a:clrScheme name="Widok">
       <a:dk1>
-        <a:sysClr val="windowText" lastClr="000000"/>
+        <a:srgbClr val="000000"/>
       </a:dk1>
       <a:lt1>
-        <a:sysClr val="window" lastClr="FFFFFF"/>
+        <a:srgbClr val="FFFFFF"/>
       </a:lt1>
       <a:dk2>
-        <a:srgbClr val="363D46"/>
+        <a:srgbClr val="46464A"/>
       </a:dk2>
       <a:lt2>
-        <a:srgbClr val="EBEBEB"/>
+        <a:srgbClr val="D6D3CC"/>
       </a:lt2>
       <a:accent1>
-        <a:srgbClr val="6F6F6F"/>
+        <a:srgbClr val="6F6F74"/>
       </a:accent1>
       <a:accent2>
-        <a:srgbClr val="BFBFA5"/>
+        <a:srgbClr val="92A9B9"/>
       </a:accent2>
       <a:accent3>
-        <a:srgbClr val="DCD084"/>
+        <a:srgbClr val="A7B789"/>
       </a:accent3>
       <a:accent4>
-        <a:srgbClr val="E7BF5F"/>
+        <a:srgbClr val="B9A489"/>
       </a:accent4>
       <a:accent5>
-        <a:srgbClr val="E9A039"/>
+        <a:srgbClr val="8D6374"/>
       </a:accent5>
       <a:accent6>
-        <a:srgbClr val="CF7133"/>
+        <a:srgbClr val="9B7362"/>
       </a:accent6>
       <a:hlink>
-        <a:srgbClr val="F28943"/>
+        <a:srgbClr val="67AABF"/>
       </a:hlink>
       <a:folHlink>
-        <a:srgbClr val="F1B76C"/>
+        <a:srgbClr val="ABAFA5"/>
       </a:folHlink>
     </a:clrScheme>
-    <a:fontScheme name="Siatka">
+    <a:fontScheme name="Widok">
       <a:majorFont>
-        <a:latin typeface="Century Gothic" panose="020B0502020202020204"/>
+        <a:latin typeface="Century Schoolbook" panose="02040604050505020304"/>
         <a:ea typeface=""/>
         <a:cs typeface=""/>
         <a:font script="Jpan" typeface="ＭＳ ゴシック"/>
@@ -10282,7 +7969,7 @@
         <a:font script="Geor" typeface="Sylfaen"/>
       </a:majorFont>
       <a:minorFont>
-        <a:latin typeface="Century Gothic" panose="020B0502020202020204"/>
+        <a:latin typeface="Century Schoolbook" panose="02040604050505020304"/>
         <a:ea typeface=""/>
         <a:cs typeface=""/>
         <a:font script="Jpan" typeface="ＭＳ ゴシック"/>
@@ -10317,61 +8004,44 @@
         <a:font script="Geor" typeface="Sylfaen"/>
       </a:minorFont>
     </a:fontScheme>
-    <a:fmtScheme name="Siatka">
+    <a:fmtScheme name="Widok">
       <a:fillStyleLst>
         <a:solidFill>
           <a:schemeClr val="phClr"/>
         </a:solidFill>
-        <a:gradFill rotWithShape="1">
-          <a:gsLst>
-            <a:gs pos="0">
-              <a:schemeClr val="phClr">
-                <a:tint val="60000"/>
-                <a:lumMod val="110000"/>
-              </a:schemeClr>
-            </a:gs>
-            <a:gs pos="100000">
-              <a:schemeClr val="phClr">
-                <a:tint val="82000"/>
-              </a:schemeClr>
-            </a:gs>
-          </a:gsLst>
-          <a:lin ang="5400000" scaled="0"/>
-        </a:gradFill>
-        <a:gradFill rotWithShape="1">
-          <a:gsLst>
-            <a:gs pos="0">
-              <a:schemeClr val="phClr">
-                <a:tint val="96000"/>
-                <a:lumMod val="104000"/>
-              </a:schemeClr>
-            </a:gs>
-            <a:gs pos="100000">
-              <a:schemeClr val="phClr">
-                <a:shade val="84000"/>
-                <a:lumMod val="84000"/>
-              </a:schemeClr>
-            </a:gs>
-          </a:gsLst>
-          <a:lin ang="5400000" scaled="0"/>
-        </a:gradFill>
+        <a:solidFill>
+          <a:schemeClr val="phClr">
+            <a:tint val="60000"/>
+            <a:satMod val="120000"/>
+          </a:schemeClr>
+        </a:solidFill>
+        <a:solidFill>
+          <a:schemeClr val="phClr">
+            <a:shade val="75000"/>
+            <a:satMod val="160000"/>
+          </a:schemeClr>
+        </a:solidFill>
       </a:fillStyleLst>
       <a:lnStyleLst>
-        <a:ln w="9525" cap="rnd" cmpd="sng" algn="ctr">
+        <a:ln w="9525" cap="flat" cmpd="sng" algn="ctr">
           <a:solidFill>
             <a:schemeClr val="phClr"/>
           </a:solidFill>
           <a:prstDash val="solid"/>
         </a:ln>
-        <a:ln w="19050" cap="rnd" cmpd="sng" algn="ctr">
+        <a:ln w="13970" cap="flat" cmpd="sng" algn="ctr">
           <a:solidFill>
             <a:schemeClr val="phClr"/>
           </a:solidFill>
           <a:prstDash val="solid"/>
         </a:ln>
-        <a:ln w="25400" cap="rnd" cmpd="sng" algn="ctr">
+        <a:ln w="17145" cap="flat" cmpd="sng" algn="ctr">
           <a:solidFill>
-            <a:schemeClr val="phClr"/>
+            <a:schemeClr val="phClr">
+              <a:shade val="95000"/>
+              <a:alpha val="95000"/>
+              <a:satMod val="150000"/>
+            </a:schemeClr>
           </a:solidFill>
           <a:prstDash val="solid"/>
         </a:ln>
@@ -10382,18 +8052,9 @@
         </a:effectStyle>
         <a:effectStyle>
           <a:effectLst>
-            <a:innerShdw blurRad="50800" dist="25400" dir="13500000">
+            <a:outerShdw blurRad="50800" dist="15240" dir="5400000" algn="tl" rotWithShape="0">
               <a:srgbClr val="000000">
-                <a:alpha val="55000"/>
-              </a:srgbClr>
-            </a:innerShdw>
-          </a:effectLst>
-        </a:effectStyle>
-        <a:effectStyle>
-          <a:effectLst>
-            <a:outerShdw blurRad="50800" dist="38100" dir="5400000" rotWithShape="0">
-              <a:srgbClr val="000000">
-                <a:alpha val="60000"/>
+                <a:alpha val="75000"/>
               </a:srgbClr>
             </a:outerShdw>
           </a:effectLst>
@@ -10401,10 +8062,40 @@
             <a:camera prst="orthographicFront">
               <a:rot lat="0" lon="0" rev="0"/>
             </a:camera>
-            <a:lightRig rig="threePt" dir="tl"/>
+            <a:lightRig rig="brightRoom" dir="tl"/>
           </a:scene3d>
-          <a:sp3d>
-            <a:bevelT w="25400" h="25400" prst="slope"/>
+          <a:sp3d contourW="9525" prstMaterial="flat">
+            <a:bevelT w="0" h="0" prst="coolSlant"/>
+            <a:contourClr>
+              <a:schemeClr val="phClr">
+                <a:shade val="35000"/>
+                <a:satMod val="130000"/>
+              </a:schemeClr>
+            </a:contourClr>
+          </a:sp3d>
+        </a:effectStyle>
+        <a:effectStyle>
+          <a:effectLst>
+            <a:outerShdw blurRad="76200" dist="25400" dir="5400000" algn="tl" rotWithShape="0">
+              <a:srgbClr val="000000">
+                <a:alpha val="55000"/>
+              </a:srgbClr>
+            </a:outerShdw>
+          </a:effectLst>
+          <a:scene3d>
+            <a:camera prst="orthographicFront">
+              <a:rot lat="0" lon="0" rev="0"/>
+            </a:camera>
+            <a:lightRig rig="brightRoom" dir="tl"/>
+          </a:scene3d>
+          <a:sp3d contourW="19050" prstMaterial="flat">
+            <a:bevelT w="0" h="0" prst="coolSlant"/>
+            <a:contourClr>
+              <a:schemeClr val="phClr">
+                <a:shade val="25000"/>
+                <a:satMod val="140000"/>
+              </a:schemeClr>
+            </a:contourClr>
           </a:sp3d>
         </a:effectStyle>
       </a:effectStyleLst>
@@ -10412,41 +8103,34 @@
         <a:solidFill>
           <a:schemeClr val="phClr"/>
         </a:solidFill>
+        <a:solidFill>
+          <a:schemeClr val="phClr">
+            <a:tint val="95000"/>
+            <a:satMod val="170000"/>
+          </a:schemeClr>
+        </a:solidFill>
         <a:gradFill rotWithShape="1">
           <a:gsLst>
             <a:gs pos="0">
               <a:schemeClr val="phClr">
-                <a:tint val="90000"/>
-                <a:lumMod val="110000"/>
+                <a:tint val="94000"/>
+                <a:shade val="98000"/>
+                <a:satMod val="130000"/>
+                <a:lumMod val="102000"/>
               </a:schemeClr>
             </a:gs>
             <a:gs pos="100000">
               <a:schemeClr val="phClr">
-                <a:shade val="64000"/>
-                <a:lumMod val="98000"/>
+                <a:tint val="98000"/>
+                <a:shade val="78000"/>
+                <a:satMod val="140000"/>
               </a:schemeClr>
             </a:gs>
           </a:gsLst>
-          <a:lin ang="5400000" scaled="0"/>
+          <a:path path="circle">
+            <a:fillToRect l="100000" t="100000" r="100000" b="100000"/>
+          </a:path>
         </a:gradFill>
-        <a:blipFill rotWithShape="1">
-          <a:blip xmlns:r="http://schemas.openxmlformats.org/officeDocument/2006/relationships" r:embed="rId1">
-            <a:duotone>
-              <a:schemeClr val="phClr">
-                <a:shade val="28000"/>
-                <a:satMod val="94000"/>
-                <a:lumMod val="20000"/>
-              </a:schemeClr>
-              <a:schemeClr val="phClr">
-                <a:tint val="94000"/>
-                <a:shade val="84000"/>
-                <a:satMod val="148000"/>
-                <a:lumMod val="114000"/>
-              </a:schemeClr>
-            </a:duotone>
-          </a:blip>
-          <a:stretch/>
-        </a:blipFill>
       </a:bgFillStyleLst>
     </a:fmtScheme>
   </a:themeElements>
@@ -10454,7 +8138,7 @@
   <a:extraClrSchemeLst/>
   <a:extLst>
     <a:ext uri="{05A4C25C-085E-4340-85A3-A5531E510DB2}">
-      <thm15:themeFamily xmlns:thm15="http://schemas.microsoft.com/office/thememl/2012/main" name="Mesh" id="{789EC3FE-34FD-429C-9918-760025E6C145}" vid="{B8BE45C0-8141-4D58-8C71-A009BC26FBBB}"/>
+      <thm15:themeFamily xmlns:thm15="http://schemas.microsoft.com/office/thememl/2012/main" name="View" id="{BA0EB5A6-F2D4-4F82-977B-64ADEE4A2A69}" vid="{3969A8A2-35DB-4E3B-8885-16FD20568674}"/>
     </a:ext>
   </a:extLst>
 </a:theme>

--- a/PrezentacjaAndrzejParuch.pptx
+++ b/PrezentacjaAndrzejParuch.pptx
@@ -10,14 +10,15 @@
     <p:sldId id="258" r:id="rId4"/>
     <p:sldId id="259" r:id="rId5"/>
     <p:sldId id="260" r:id="rId6"/>
-    <p:sldId id="263" r:id="rId7"/>
-    <p:sldId id="261" r:id="rId8"/>
-    <p:sldId id="262" r:id="rId9"/>
-    <p:sldId id="264" r:id="rId10"/>
-    <p:sldId id="265" r:id="rId11"/>
-    <p:sldId id="266" r:id="rId12"/>
-    <p:sldId id="267" r:id="rId13"/>
-    <p:sldId id="268" r:id="rId14"/>
+    <p:sldId id="269" r:id="rId7"/>
+    <p:sldId id="263" r:id="rId8"/>
+    <p:sldId id="261" r:id="rId9"/>
+    <p:sldId id="262" r:id="rId10"/>
+    <p:sldId id="264" r:id="rId11"/>
+    <p:sldId id="265" r:id="rId12"/>
+    <p:sldId id="266" r:id="rId13"/>
+    <p:sldId id="267" r:id="rId14"/>
+    <p:sldId id="268" r:id="rId15"/>
   </p:sldIdLst>
   <p:sldSz cx="12192000" cy="6858000"/>
   <p:notesSz cx="6858000" cy="9144000"/>
@@ -292,7 +293,7 @@
           <a:p>
             <a:fld id="{CBBFB598-B412-4BAA-8D00-58612E105D61}" type="datetimeFigureOut">
               <a:rPr lang="pl-PL" smtClean="0"/>
-              <a:t>29.11.2025</a:t>
+              <a:t>30.11.2025</a:t>
             </a:fld>
             <a:endParaRPr lang="pl-PL"/>
           </a:p>
@@ -520,7 +521,7 @@
           <a:p>
             <a:fld id="{CBBFB598-B412-4BAA-8D00-58612E105D61}" type="datetimeFigureOut">
               <a:rPr lang="pl-PL" smtClean="0"/>
-              <a:t>29.11.2025</a:t>
+              <a:t>30.11.2025</a:t>
             </a:fld>
             <a:endParaRPr lang="pl-PL"/>
           </a:p>
@@ -700,7 +701,7 @@
           <a:p>
             <a:fld id="{CBBFB598-B412-4BAA-8D00-58612E105D61}" type="datetimeFigureOut">
               <a:rPr lang="pl-PL" smtClean="0"/>
-              <a:t>29.11.2025</a:t>
+              <a:t>30.11.2025</a:t>
             </a:fld>
             <a:endParaRPr lang="pl-PL"/>
           </a:p>
@@ -870,7 +871,7 @@
           <a:p>
             <a:fld id="{CBBFB598-B412-4BAA-8D00-58612E105D61}" type="datetimeFigureOut">
               <a:rPr lang="pl-PL" smtClean="0"/>
-              <a:t>29.11.2025</a:t>
+              <a:t>30.11.2025</a:t>
             </a:fld>
             <a:endParaRPr lang="pl-PL"/>
           </a:p>
@@ -1124,7 +1125,7 @@
           <a:p>
             <a:fld id="{CBBFB598-B412-4BAA-8D00-58612E105D61}" type="datetimeFigureOut">
               <a:rPr lang="pl-PL" smtClean="0"/>
-              <a:t>29.11.2025</a:t>
+              <a:t>30.11.2025</a:t>
             </a:fld>
             <a:endParaRPr lang="pl-PL"/>
           </a:p>
@@ -1450,7 +1451,7 @@
           <a:p>
             <a:fld id="{CBBFB598-B412-4BAA-8D00-58612E105D61}" type="datetimeFigureOut">
               <a:rPr lang="pl-PL" smtClean="0"/>
-              <a:t>29.11.2025</a:t>
+              <a:t>30.11.2025</a:t>
             </a:fld>
             <a:endParaRPr lang="pl-PL"/>
           </a:p>
@@ -1901,7 +1902,7 @@
           <a:p>
             <a:fld id="{CBBFB598-B412-4BAA-8D00-58612E105D61}" type="datetimeFigureOut">
               <a:rPr lang="pl-PL" smtClean="0"/>
-              <a:t>29.11.2025</a:t>
+              <a:t>30.11.2025</a:t>
             </a:fld>
             <a:endParaRPr lang="pl-PL"/>
           </a:p>
@@ -2019,7 +2020,7 @@
           <a:p>
             <a:fld id="{CBBFB598-B412-4BAA-8D00-58612E105D61}" type="datetimeFigureOut">
               <a:rPr lang="pl-PL" smtClean="0"/>
-              <a:t>29.11.2025</a:t>
+              <a:t>30.11.2025</a:t>
             </a:fld>
             <a:endParaRPr lang="pl-PL"/>
           </a:p>
@@ -2114,7 +2115,7 @@
           <a:p>
             <a:fld id="{CBBFB598-B412-4BAA-8D00-58612E105D61}" type="datetimeFigureOut">
               <a:rPr lang="pl-PL" smtClean="0"/>
-              <a:t>29.11.2025</a:t>
+              <a:t>30.11.2025</a:t>
             </a:fld>
             <a:endParaRPr lang="pl-PL"/>
           </a:p>
@@ -2401,7 +2402,7 @@
           <a:p>
             <a:fld id="{CBBFB598-B412-4BAA-8D00-58612E105D61}" type="datetimeFigureOut">
               <a:rPr lang="pl-PL" smtClean="0"/>
-              <a:t>29.11.2025</a:t>
+              <a:t>30.11.2025</a:t>
             </a:fld>
             <a:endParaRPr lang="pl-PL"/>
           </a:p>
@@ -2723,7 +2724,7 @@
           <a:p>
             <a:fld id="{CBBFB598-B412-4BAA-8D00-58612E105D61}" type="datetimeFigureOut">
               <a:rPr lang="pl-PL" smtClean="0"/>
-              <a:t>29.11.2025</a:t>
+              <a:t>30.11.2025</a:t>
             </a:fld>
             <a:endParaRPr lang="pl-PL"/>
           </a:p>
@@ -2977,7 +2978,7 @@
           <a:p>
             <a:fld id="{CBBFB598-B412-4BAA-8D00-58612E105D61}" type="datetimeFigureOut">
               <a:rPr lang="pl-PL" smtClean="0"/>
-              <a:t>29.11.2025</a:t>
+              <a:t>30.11.2025</a:t>
             </a:fld>
             <a:endParaRPr lang="pl-PL"/>
           </a:p>
@@ -3597,6 +3598,158 @@
         <p:cNvPr id="1" name="">
           <a:extLst>
             <a:ext uri="{FF2B5EF4-FFF2-40B4-BE49-F238E27FC236}">
+              <a16:creationId xmlns:a16="http://schemas.microsoft.com/office/drawing/2014/main" id="{D334B670-7A59-F936-F5D4-75ACA00BF4A7}"/>
+            </a:ext>
+          </a:extLst>
+        </p:cNvPr>
+        <p:cNvGrpSpPr/>
+        <p:nvPr/>
+      </p:nvGrpSpPr>
+      <p:grpSpPr>
+        <a:xfrm>
+          <a:off x="0" y="0"/>
+          <a:ext cx="0" cy="0"/>
+          <a:chOff x="0" y="0"/>
+          <a:chExt cx="0" cy="0"/>
+        </a:xfrm>
+      </p:grpSpPr>
+      <p:sp>
+        <p:nvSpPr>
+          <p:cNvPr id="2" name="Tytuł 1">
+            <a:extLst>
+              <a:ext uri="{FF2B5EF4-FFF2-40B4-BE49-F238E27FC236}">
+                <a16:creationId xmlns:a16="http://schemas.microsoft.com/office/drawing/2014/main" id="{A4E040E7-EA21-DC9F-064F-AE717ABEA25E}"/>
+              </a:ext>
+            </a:extLst>
+          </p:cNvPr>
+          <p:cNvSpPr>
+            <a:spLocks noGrp="1"/>
+          </p:cNvSpPr>
+          <p:nvPr>
+            <p:ph type="title"/>
+          </p:nvPr>
+        </p:nvSpPr>
+        <p:spPr>
+          <a:xfrm>
+            <a:off x="143435" y="367554"/>
+            <a:ext cx="11905130" cy="995082"/>
+          </a:xfrm>
+        </p:spPr>
+        <p:txBody>
+          <a:bodyPr>
+            <a:normAutofit/>
+          </a:bodyPr>
+          <a:lstStyle/>
+          <a:p>
+            <a:r>
+              <a:rPr lang="pl-PL" dirty="0"/>
+              <a:t>Zmiana wyglądu i koloru ścian</a:t>
+            </a:r>
+          </a:p>
+        </p:txBody>
+      </p:sp>
+      <p:sp>
+        <p:nvSpPr>
+          <p:cNvPr id="3" name="Symbol zastępczy zawartości 2">
+            <a:extLst>
+              <a:ext uri="{FF2B5EF4-FFF2-40B4-BE49-F238E27FC236}">
+                <a16:creationId xmlns:a16="http://schemas.microsoft.com/office/drawing/2014/main" id="{866EB9B4-4311-AB1E-3C3B-0A125625876C}"/>
+              </a:ext>
+            </a:extLst>
+          </p:cNvPr>
+          <p:cNvSpPr>
+            <a:spLocks noGrp="1"/>
+          </p:cNvSpPr>
+          <p:nvPr>
+            <p:ph idx="1"/>
+          </p:nvPr>
+        </p:nvSpPr>
+        <p:spPr>
+          <a:xfrm>
+            <a:off x="143434" y="1362637"/>
+            <a:ext cx="11905129" cy="5307104"/>
+          </a:xfrm>
+        </p:spPr>
+        <p:txBody>
+          <a:bodyPr/>
+          <a:lstStyle/>
+          <a:p>
+            <a:pPr marL="0" indent="0">
+              <a:buNone/>
+            </a:pPr>
+            <a:endParaRPr lang="pl-PL" dirty="0"/>
+          </a:p>
+          <a:p>
+            <a:pPr marL="0" indent="0">
+              <a:buNone/>
+            </a:pPr>
+            <a:endParaRPr lang="pl-PL" dirty="0"/>
+          </a:p>
+          <a:p>
+            <a:pPr marL="0" indent="0">
+              <a:buNone/>
+            </a:pPr>
+            <a:endParaRPr lang="pl-PL" dirty="0"/>
+          </a:p>
+          <a:p>
+            <a:pPr marL="0" indent="0">
+              <a:buNone/>
+            </a:pPr>
+            <a:endParaRPr lang="pl-PL" dirty="0"/>
+          </a:p>
+          <a:p>
+            <a:pPr marL="0" indent="0">
+              <a:buNone/>
+            </a:pPr>
+            <a:endParaRPr lang="pl-PL" dirty="0"/>
+          </a:p>
+          <a:p>
+            <a:pPr marL="0" indent="0">
+              <a:buNone/>
+            </a:pPr>
+            <a:endParaRPr lang="pl-PL" dirty="0"/>
+          </a:p>
+          <a:p>
+            <a:pPr marL="0" indent="0">
+              <a:buNone/>
+            </a:pPr>
+            <a:endParaRPr lang="pl-PL" dirty="0"/>
+          </a:p>
+          <a:p>
+            <a:pPr marL="0" indent="0">
+              <a:buNone/>
+            </a:pPr>
+            <a:endParaRPr lang="pl-PL" dirty="0"/>
+          </a:p>
+          <a:p>
+            <a:pPr marL="0" indent="0">
+              <a:buNone/>
+            </a:pPr>
+            <a:endParaRPr lang="pl-PL" dirty="0"/>
+          </a:p>
+        </p:txBody>
+      </p:sp>
+    </p:spTree>
+    <p:extLst>
+      <p:ext uri="{BB962C8B-B14F-4D97-AF65-F5344CB8AC3E}">
+        <p14:creationId xmlns:p14="http://schemas.microsoft.com/office/powerpoint/2010/main" val="1400430010"/>
+      </p:ext>
+    </p:extLst>
+  </p:cSld>
+  <p:clrMapOvr>
+    <a:masterClrMapping/>
+  </p:clrMapOvr>
+</p:sld>
+</file>
+
+<file path=ppt/slides/slide11.xml><?xml version="1.0" encoding="utf-8"?>
+<p:sld xmlns:a="http://schemas.openxmlformats.org/drawingml/2006/main" xmlns:r="http://schemas.openxmlformats.org/officeDocument/2006/relationships" xmlns:p="http://schemas.openxmlformats.org/presentationml/2006/main">
+  <p:cSld>
+    <p:spTree>
+      <p:nvGrpSpPr>
+        <p:cNvPr id="1" name="">
+          <a:extLst>
+            <a:ext uri="{FF2B5EF4-FFF2-40B4-BE49-F238E27FC236}">
               <a16:creationId xmlns:a16="http://schemas.microsoft.com/office/drawing/2014/main" id="{4766F590-C65D-C1CF-1DD6-56EF3BE64AC5}"/>
             </a:ext>
           </a:extLst>
@@ -3741,7 +3894,7 @@
 </p:sld>
 </file>
 
-<file path=ppt/slides/slide11.xml><?xml version="1.0" encoding="utf-8"?>
+<file path=ppt/slides/slide12.xml><?xml version="1.0" encoding="utf-8"?>
 <p:sld xmlns:a="http://schemas.openxmlformats.org/drawingml/2006/main" xmlns:r="http://schemas.openxmlformats.org/officeDocument/2006/relationships" xmlns:p="http://schemas.openxmlformats.org/presentationml/2006/main">
   <p:cSld>
     <p:spTree>
@@ -3893,7 +4046,7 @@
 </p:sld>
 </file>
 
-<file path=ppt/slides/slide12.xml><?xml version="1.0" encoding="utf-8"?>
+<file path=ppt/slides/slide13.xml><?xml version="1.0" encoding="utf-8"?>
 <p:sld xmlns:a="http://schemas.openxmlformats.org/drawingml/2006/main" xmlns:r="http://schemas.openxmlformats.org/officeDocument/2006/relationships" xmlns:p="http://schemas.openxmlformats.org/presentationml/2006/main">
   <p:cSld>
     <p:spTree>
@@ -4045,7 +4198,7 @@
 </p:sld>
 </file>
 
-<file path=ppt/slides/slide13.xml><?xml version="1.0" encoding="utf-8"?>
+<file path=ppt/slides/slide14.xml><?xml version="1.0" encoding="utf-8"?>
 <p:sld xmlns:a="http://schemas.openxmlformats.org/drawingml/2006/main" xmlns:r="http://schemas.openxmlformats.org/officeDocument/2006/relationships" xmlns:p="http://schemas.openxmlformats.org/presentationml/2006/main">
   <p:cSld>
     <p:spTree>
@@ -5461,7 +5614,7 @@
           <p:nvPr>
             <p:extLst>
               <p:ext uri="{D42A27DB-BD31-4B8C-83A1-F6EECF244321}">
-                <p14:modId xmlns:p14="http://schemas.microsoft.com/office/powerpoint/2010/main" val="225164815"/>
+                <p14:modId xmlns:p14="http://schemas.microsoft.com/office/powerpoint/2010/main" val="2996903066"/>
               </p:ext>
             </p:extLst>
           </p:nvPr>
@@ -6243,12 +6396,12 @@
                         <a:buNone/>
                       </a:pPr>
                       <a:r>
-                        <a:rPr lang="pl-PL" sz="1200">
-                          <a:effectLst/>
-                        </a:rPr>
-                        <a:t>Wymagają PC</a:t>
-                      </a:r>
-                      <a:endParaRPr lang="pl-PL" sz="1200">
+                        <a:rPr lang="pl-PL" sz="1200" dirty="0">
+                          <a:effectLst/>
+                        </a:rPr>
+                        <a:t>Wymagany PC</a:t>
+                      </a:r>
+                      <a:endParaRPr lang="pl-PL" sz="1200" dirty="0">
                         <a:effectLst/>
                         <a:latin typeface="Arial" panose="020B0604020202020204" pitchFamily="34" charset="0"/>
                         <a:ea typeface="Calibri" panose="020F0502020204030204" pitchFamily="34" charset="0"/>
@@ -7014,7 +7167,7 @@
             </a:pPr>
             <a:r>
               <a:rPr lang="pl-PL" sz="1400" dirty="0"/>
-              <a:t>Celem pracy jest opracowanie systemu do projektowania wnętrz, który wykorzysta technologię wirtualnej rzeczywistości. Obsługa całego programu ma być oparta o fizyczną interakcje za pośrednictwem kontrolerów śledzących ruch dłoni. Proces projektowania wnętrza będzie całkowicie wewnątrz wirtualnej rzeczywistości.</a:t>
+              <a:t>Celem pracy jest opracowanie systemu do projektowania wnętrz, który wykorzysta technologię wirtualnej rzeczywistości. Obsługa całego programu ma być oparta o fizyczną interakcje za pośrednictwem kontrolerów śledzących ruch dłoni. To co będzie wyróżniać ten program od reszty podobnych rozwiązań to oparcie całego procesu projektowania wnętrza na wirtualnej rzeczywistości. Użytkownik za pomocą technologii wirtualnej rzeczywistości będzie w stanie zaprojektować jedno pomieszczenie. Ten projekt będzie mógł znaleźć zastosowanie w sklepach meblarskich jako oprogramowanie pomocnicze dla klientów. Pozwalające na szybką wizualizację przy pomocy modeli mebli dostarczonym przez sklep. </a:t>
             </a:r>
           </a:p>
           <a:p>
@@ -7023,14 +7176,21 @@
             </a:pPr>
             <a:r>
               <a:rPr lang="pl-PL" sz="1400" dirty="0"/>
-              <a:t>Podstawowe funkcjonalności</a:t>
+              <a:t>Podstawowe funkcjonalności:</a:t>
             </a:r>
           </a:p>
           <a:p>
             <a:pPr algn="just"/>
             <a:r>
               <a:rPr lang="pl-PL" sz="1400" dirty="0"/>
-              <a:t>Generacja pomieszczeń na podstawie wymagań użytkownika</a:t>
+              <a:t>Generacja pomieszczeń na podstawie wymiarów podanych użytkownika</a:t>
+            </a:r>
+          </a:p>
+          <a:p>
+            <a:pPr algn="just"/>
+            <a:r>
+              <a:rPr lang="pl-PL" sz="1400" dirty="0"/>
+              <a:t>Interakcja z otoczeniem oparta o ruch użytkownika</a:t>
             </a:r>
           </a:p>
           <a:p>
@@ -7184,7 +7344,7 @@
           <a:p>
             <a:r>
               <a:rPr lang="pl-PL" dirty="0"/>
-              <a:t>Generacja Pomieszczenia</a:t>
+              <a:t>Implementacja Wirtualnej Rzeczywistości</a:t>
             </a:r>
           </a:p>
         </p:txBody>
@@ -7207,65 +7367,82 @@
         </p:nvSpPr>
         <p:spPr>
           <a:xfrm>
-            <a:off x="143434" y="1362637"/>
-            <a:ext cx="11905129" cy="5307104"/>
+            <a:off x="143435" y="1362637"/>
+            <a:ext cx="11080378" cy="5307104"/>
           </a:xfrm>
         </p:spPr>
         <p:txBody>
-          <a:bodyPr/>
+          <a:bodyPr>
+            <a:noAutofit/>
+          </a:bodyPr>
           <a:lstStyle/>
           <a:p>
             <a:pPr marL="0" indent="0">
               <a:buNone/>
             </a:pPr>
-            <a:endParaRPr lang="pl-PL" dirty="0"/>
-          </a:p>
-          <a:p>
-            <a:pPr marL="0" indent="0">
-              <a:buNone/>
-            </a:pPr>
-            <a:endParaRPr lang="pl-PL" dirty="0"/>
-          </a:p>
-          <a:p>
-            <a:pPr marL="0" indent="0">
-              <a:buNone/>
-            </a:pPr>
-            <a:endParaRPr lang="pl-PL" dirty="0"/>
-          </a:p>
-          <a:p>
-            <a:pPr marL="0" indent="0">
-              <a:buNone/>
-            </a:pPr>
-            <a:endParaRPr lang="pl-PL" dirty="0"/>
-          </a:p>
-          <a:p>
-            <a:pPr marL="0" indent="0">
-              <a:buNone/>
-            </a:pPr>
-            <a:endParaRPr lang="pl-PL" dirty="0"/>
-          </a:p>
-          <a:p>
-            <a:pPr marL="0" indent="0">
-              <a:buNone/>
-            </a:pPr>
-            <a:endParaRPr lang="pl-PL" dirty="0"/>
-          </a:p>
-          <a:p>
-            <a:pPr marL="0" indent="0">
-              <a:buNone/>
-            </a:pPr>
-            <a:endParaRPr lang="pl-PL" dirty="0"/>
-          </a:p>
-          <a:p>
-            <a:pPr marL="0" indent="0">
-              <a:buNone/>
-            </a:pPr>
-            <a:endParaRPr lang="pl-PL" dirty="0"/>
-          </a:p>
-          <a:p>
-            <a:pPr marL="0" indent="0">
-              <a:buNone/>
-            </a:pPr>
+            <a:r>
+              <a:rPr lang="pl-PL" dirty="0"/>
+              <a:t>Najważniejszym punktem w projekcie jest implementacja wirtualnej rzeczywistości do projektu. Jest ona fundamentem całego projektu i w oparciu o nią reszta funkcjonalności będzie opracowywana. Głównym zadaniem wirtualnej rzeczywistości jest zapewnienie intuicyjności w obsłudze systemu i danie użytkownikowi wolności w projektowaniu wnętrza.</a:t>
+            </a:r>
+          </a:p>
+          <a:p>
+            <a:pPr marL="0" indent="0">
+              <a:buNone/>
+            </a:pPr>
+            <a:endParaRPr lang="pl-PL"/>
+          </a:p>
+          <a:p>
+            <a:pPr marL="0" indent="0">
+              <a:buNone/>
+            </a:pPr>
+            <a:endParaRPr lang="pl-PL" dirty="0"/>
+          </a:p>
+          <a:p>
+            <a:pPr marL="0" indent="0">
+              <a:buNone/>
+            </a:pPr>
+            <a:r>
+              <a:rPr lang="pl-PL" dirty="0"/>
+              <a:t>Podstawowymi zagadnieniami dotyczącego tego punktu jest:</a:t>
+            </a:r>
+          </a:p>
+          <a:p>
+            <a:r>
+              <a:rPr lang="pl-PL" dirty="0"/>
+              <a:t>Sposób poruszania się użytkownika po przestrzeni trójwymiarowej</a:t>
+            </a:r>
+          </a:p>
+          <a:p>
+            <a:r>
+              <a:rPr lang="pl-PL" dirty="0"/>
+              <a:t>Sposób sztucznego obrotu użytkownika</a:t>
+            </a:r>
+          </a:p>
+          <a:p>
+            <a:r>
+              <a:rPr lang="pl-PL" dirty="0"/>
+              <a:t>Interakcja z przedmiotami w przestrzeni trójwymiarowej</a:t>
+            </a:r>
+          </a:p>
+          <a:p>
+            <a:r>
+              <a:rPr lang="pl-PL" dirty="0"/>
+              <a:t>Uruchamianie oprogramowania natywnie na zestawie VR</a:t>
+            </a:r>
+          </a:p>
+          <a:p>
+            <a:endParaRPr lang="pl-PL" dirty="0"/>
+          </a:p>
+          <a:p>
+            <a:pPr marL="0" indent="0">
+              <a:buNone/>
+            </a:pPr>
+            <a:endParaRPr lang="pl-PL" dirty="0"/>
+          </a:p>
+          <a:p>
+            <a:endParaRPr lang="pl-PL" dirty="0"/>
+          </a:p>
+          <a:p>
             <a:endParaRPr lang="pl-PL" dirty="0"/>
           </a:p>
         </p:txBody>
@@ -7284,6 +7461,158 @@
 </file>
 
 <file path=ppt/slides/slide6.xml><?xml version="1.0" encoding="utf-8"?>
+<p:sld xmlns:a="http://schemas.openxmlformats.org/drawingml/2006/main" xmlns:r="http://schemas.openxmlformats.org/officeDocument/2006/relationships" xmlns:p="http://schemas.openxmlformats.org/presentationml/2006/main">
+  <p:cSld>
+    <p:spTree>
+      <p:nvGrpSpPr>
+        <p:cNvPr id="1" name="">
+          <a:extLst>
+            <a:ext uri="{FF2B5EF4-FFF2-40B4-BE49-F238E27FC236}">
+              <a16:creationId xmlns:a16="http://schemas.microsoft.com/office/drawing/2014/main" id="{CFAA041F-3B68-7ACC-1D78-3BC02D87C535}"/>
+            </a:ext>
+          </a:extLst>
+        </p:cNvPr>
+        <p:cNvGrpSpPr/>
+        <p:nvPr/>
+      </p:nvGrpSpPr>
+      <p:grpSpPr>
+        <a:xfrm>
+          <a:off x="0" y="0"/>
+          <a:ext cx="0" cy="0"/>
+          <a:chOff x="0" y="0"/>
+          <a:chExt cx="0" cy="0"/>
+        </a:xfrm>
+      </p:grpSpPr>
+      <p:sp>
+        <p:nvSpPr>
+          <p:cNvPr id="2" name="Tytuł 1">
+            <a:extLst>
+              <a:ext uri="{FF2B5EF4-FFF2-40B4-BE49-F238E27FC236}">
+                <a16:creationId xmlns:a16="http://schemas.microsoft.com/office/drawing/2014/main" id="{C536B95D-24E0-A22F-D3E6-93D0BE4A2C3A}"/>
+              </a:ext>
+            </a:extLst>
+          </p:cNvPr>
+          <p:cNvSpPr>
+            <a:spLocks noGrp="1"/>
+          </p:cNvSpPr>
+          <p:nvPr>
+            <p:ph type="title"/>
+          </p:nvPr>
+        </p:nvSpPr>
+        <p:spPr>
+          <a:xfrm>
+            <a:off x="143435" y="367554"/>
+            <a:ext cx="11905130" cy="995082"/>
+          </a:xfrm>
+        </p:spPr>
+        <p:txBody>
+          <a:bodyPr>
+            <a:normAutofit/>
+          </a:bodyPr>
+          <a:lstStyle/>
+          <a:p>
+            <a:r>
+              <a:rPr lang="pl-PL" dirty="0"/>
+              <a:t>Generacja Pomieszczenia</a:t>
+            </a:r>
+          </a:p>
+        </p:txBody>
+      </p:sp>
+      <p:sp>
+        <p:nvSpPr>
+          <p:cNvPr id="3" name="Symbol zastępczy zawartości 2">
+            <a:extLst>
+              <a:ext uri="{FF2B5EF4-FFF2-40B4-BE49-F238E27FC236}">
+                <a16:creationId xmlns:a16="http://schemas.microsoft.com/office/drawing/2014/main" id="{E3DC18FE-869F-007F-A041-AA1CE3A9ED9D}"/>
+              </a:ext>
+            </a:extLst>
+          </p:cNvPr>
+          <p:cNvSpPr>
+            <a:spLocks noGrp="1"/>
+          </p:cNvSpPr>
+          <p:nvPr>
+            <p:ph idx="1"/>
+          </p:nvPr>
+        </p:nvSpPr>
+        <p:spPr>
+          <a:xfrm>
+            <a:off x="143434" y="1362637"/>
+            <a:ext cx="11905129" cy="5307104"/>
+          </a:xfrm>
+        </p:spPr>
+        <p:txBody>
+          <a:bodyPr/>
+          <a:lstStyle/>
+          <a:p>
+            <a:pPr marL="0" indent="0">
+              <a:buNone/>
+            </a:pPr>
+            <a:endParaRPr lang="pl-PL" dirty="0"/>
+          </a:p>
+          <a:p>
+            <a:pPr marL="0" indent="0">
+              <a:buNone/>
+            </a:pPr>
+            <a:endParaRPr lang="pl-PL" dirty="0"/>
+          </a:p>
+          <a:p>
+            <a:pPr marL="0" indent="0">
+              <a:buNone/>
+            </a:pPr>
+            <a:endParaRPr lang="pl-PL" dirty="0"/>
+          </a:p>
+          <a:p>
+            <a:pPr marL="0" indent="0">
+              <a:buNone/>
+            </a:pPr>
+            <a:endParaRPr lang="pl-PL" dirty="0"/>
+          </a:p>
+          <a:p>
+            <a:pPr marL="0" indent="0">
+              <a:buNone/>
+            </a:pPr>
+            <a:endParaRPr lang="pl-PL" dirty="0"/>
+          </a:p>
+          <a:p>
+            <a:pPr marL="0" indent="0">
+              <a:buNone/>
+            </a:pPr>
+            <a:endParaRPr lang="pl-PL" dirty="0"/>
+          </a:p>
+          <a:p>
+            <a:pPr marL="0" indent="0">
+              <a:buNone/>
+            </a:pPr>
+            <a:endParaRPr lang="pl-PL" dirty="0"/>
+          </a:p>
+          <a:p>
+            <a:pPr marL="0" indent="0">
+              <a:buNone/>
+            </a:pPr>
+            <a:endParaRPr lang="pl-PL" dirty="0"/>
+          </a:p>
+          <a:p>
+            <a:pPr marL="0" indent="0">
+              <a:buNone/>
+            </a:pPr>
+            <a:endParaRPr lang="pl-PL" dirty="0"/>
+          </a:p>
+        </p:txBody>
+      </p:sp>
+    </p:spTree>
+    <p:extLst>
+      <p:ext uri="{BB962C8B-B14F-4D97-AF65-F5344CB8AC3E}">
+        <p14:creationId xmlns:p14="http://schemas.microsoft.com/office/powerpoint/2010/main" val="1222462874"/>
+      </p:ext>
+    </p:extLst>
+  </p:cSld>
+  <p:clrMapOvr>
+    <a:masterClrMapping/>
+  </p:clrMapOvr>
+</p:sld>
+</file>
+
+<file path=ppt/slides/slide7.xml><?xml version="1.0" encoding="utf-8"?>
 <p:sld xmlns:a="http://schemas.openxmlformats.org/drawingml/2006/main" xmlns:r="http://schemas.openxmlformats.org/officeDocument/2006/relationships" xmlns:p="http://schemas.openxmlformats.org/presentationml/2006/main">
   <p:cSld>
     <p:spTree>
@@ -7435,7 +7764,7 @@
 </p:sld>
 </file>
 
-<file path=ppt/slides/slide7.xml><?xml version="1.0" encoding="utf-8"?>
+<file path=ppt/slides/slide8.xml><?xml version="1.0" encoding="utf-8"?>
 <p:sld xmlns:a="http://schemas.openxmlformats.org/drawingml/2006/main" xmlns:r="http://schemas.openxmlformats.org/officeDocument/2006/relationships" xmlns:p="http://schemas.openxmlformats.org/presentationml/2006/main">
   <p:cSld>
     <p:spTree>
@@ -7587,7 +7916,7 @@
 </p:sld>
 </file>
 
-<file path=ppt/slides/slide8.xml><?xml version="1.0" encoding="utf-8"?>
+<file path=ppt/slides/slide9.xml><?xml version="1.0" encoding="utf-8"?>
 <p:sld xmlns:a="http://schemas.openxmlformats.org/drawingml/2006/main" xmlns:r="http://schemas.openxmlformats.org/officeDocument/2006/relationships" xmlns:p="http://schemas.openxmlformats.org/presentationml/2006/main">
   <p:cSld>
     <p:spTree>
@@ -7730,158 +8059,6 @@
     <p:extLst>
       <p:ext uri="{BB962C8B-B14F-4D97-AF65-F5344CB8AC3E}">
         <p14:creationId xmlns:p14="http://schemas.microsoft.com/office/powerpoint/2010/main" val="4140615616"/>
-      </p:ext>
-    </p:extLst>
-  </p:cSld>
-  <p:clrMapOvr>
-    <a:masterClrMapping/>
-  </p:clrMapOvr>
-</p:sld>
-</file>
-
-<file path=ppt/slides/slide9.xml><?xml version="1.0" encoding="utf-8"?>
-<p:sld xmlns:a="http://schemas.openxmlformats.org/drawingml/2006/main" xmlns:r="http://schemas.openxmlformats.org/officeDocument/2006/relationships" xmlns:p="http://schemas.openxmlformats.org/presentationml/2006/main">
-  <p:cSld>
-    <p:spTree>
-      <p:nvGrpSpPr>
-        <p:cNvPr id="1" name="">
-          <a:extLst>
-            <a:ext uri="{FF2B5EF4-FFF2-40B4-BE49-F238E27FC236}">
-              <a16:creationId xmlns:a16="http://schemas.microsoft.com/office/drawing/2014/main" id="{D334B670-7A59-F936-F5D4-75ACA00BF4A7}"/>
-            </a:ext>
-          </a:extLst>
-        </p:cNvPr>
-        <p:cNvGrpSpPr/>
-        <p:nvPr/>
-      </p:nvGrpSpPr>
-      <p:grpSpPr>
-        <a:xfrm>
-          <a:off x="0" y="0"/>
-          <a:ext cx="0" cy="0"/>
-          <a:chOff x="0" y="0"/>
-          <a:chExt cx="0" cy="0"/>
-        </a:xfrm>
-      </p:grpSpPr>
-      <p:sp>
-        <p:nvSpPr>
-          <p:cNvPr id="2" name="Tytuł 1">
-            <a:extLst>
-              <a:ext uri="{FF2B5EF4-FFF2-40B4-BE49-F238E27FC236}">
-                <a16:creationId xmlns:a16="http://schemas.microsoft.com/office/drawing/2014/main" id="{A4E040E7-EA21-DC9F-064F-AE717ABEA25E}"/>
-              </a:ext>
-            </a:extLst>
-          </p:cNvPr>
-          <p:cNvSpPr>
-            <a:spLocks noGrp="1"/>
-          </p:cNvSpPr>
-          <p:nvPr>
-            <p:ph type="title"/>
-          </p:nvPr>
-        </p:nvSpPr>
-        <p:spPr>
-          <a:xfrm>
-            <a:off x="143435" y="367554"/>
-            <a:ext cx="11905130" cy="995082"/>
-          </a:xfrm>
-        </p:spPr>
-        <p:txBody>
-          <a:bodyPr>
-            <a:normAutofit/>
-          </a:bodyPr>
-          <a:lstStyle/>
-          <a:p>
-            <a:r>
-              <a:rPr lang="pl-PL" dirty="0"/>
-              <a:t>Zmiana wyglądu i koloru ścian</a:t>
-            </a:r>
-          </a:p>
-        </p:txBody>
-      </p:sp>
-      <p:sp>
-        <p:nvSpPr>
-          <p:cNvPr id="3" name="Symbol zastępczy zawartości 2">
-            <a:extLst>
-              <a:ext uri="{FF2B5EF4-FFF2-40B4-BE49-F238E27FC236}">
-                <a16:creationId xmlns:a16="http://schemas.microsoft.com/office/drawing/2014/main" id="{866EB9B4-4311-AB1E-3C3B-0A125625876C}"/>
-              </a:ext>
-            </a:extLst>
-          </p:cNvPr>
-          <p:cNvSpPr>
-            <a:spLocks noGrp="1"/>
-          </p:cNvSpPr>
-          <p:nvPr>
-            <p:ph idx="1"/>
-          </p:nvPr>
-        </p:nvSpPr>
-        <p:spPr>
-          <a:xfrm>
-            <a:off x="143434" y="1362637"/>
-            <a:ext cx="11905129" cy="5307104"/>
-          </a:xfrm>
-        </p:spPr>
-        <p:txBody>
-          <a:bodyPr/>
-          <a:lstStyle/>
-          <a:p>
-            <a:pPr marL="0" indent="0">
-              <a:buNone/>
-            </a:pPr>
-            <a:endParaRPr lang="pl-PL" dirty="0"/>
-          </a:p>
-          <a:p>
-            <a:pPr marL="0" indent="0">
-              <a:buNone/>
-            </a:pPr>
-            <a:endParaRPr lang="pl-PL" dirty="0"/>
-          </a:p>
-          <a:p>
-            <a:pPr marL="0" indent="0">
-              <a:buNone/>
-            </a:pPr>
-            <a:endParaRPr lang="pl-PL" dirty="0"/>
-          </a:p>
-          <a:p>
-            <a:pPr marL="0" indent="0">
-              <a:buNone/>
-            </a:pPr>
-            <a:endParaRPr lang="pl-PL" dirty="0"/>
-          </a:p>
-          <a:p>
-            <a:pPr marL="0" indent="0">
-              <a:buNone/>
-            </a:pPr>
-            <a:endParaRPr lang="pl-PL" dirty="0"/>
-          </a:p>
-          <a:p>
-            <a:pPr marL="0" indent="0">
-              <a:buNone/>
-            </a:pPr>
-            <a:endParaRPr lang="pl-PL" dirty="0"/>
-          </a:p>
-          <a:p>
-            <a:pPr marL="0" indent="0">
-              <a:buNone/>
-            </a:pPr>
-            <a:endParaRPr lang="pl-PL" dirty="0"/>
-          </a:p>
-          <a:p>
-            <a:pPr marL="0" indent="0">
-              <a:buNone/>
-            </a:pPr>
-            <a:endParaRPr lang="pl-PL" dirty="0"/>
-          </a:p>
-          <a:p>
-            <a:pPr marL="0" indent="0">
-              <a:buNone/>
-            </a:pPr>
-            <a:endParaRPr lang="pl-PL" dirty="0"/>
-          </a:p>
-        </p:txBody>
-      </p:sp>
-    </p:spTree>
-    <p:extLst>
-      <p:ext uri="{BB962C8B-B14F-4D97-AF65-F5344CB8AC3E}">
-        <p14:creationId xmlns:p14="http://schemas.microsoft.com/office/powerpoint/2010/main" val="1400430010"/>
       </p:ext>
     </p:extLst>
   </p:cSld>

--- a/PrezentacjaAndrzejParuch.pptx
+++ b/PrezentacjaAndrzejParuch.pptx
@@ -10,15 +10,18 @@
     <p:sldId id="258" r:id="rId4"/>
     <p:sldId id="259" r:id="rId5"/>
     <p:sldId id="260" r:id="rId6"/>
-    <p:sldId id="269" r:id="rId7"/>
-    <p:sldId id="263" r:id="rId8"/>
-    <p:sldId id="261" r:id="rId9"/>
-    <p:sldId id="262" r:id="rId10"/>
-    <p:sldId id="264" r:id="rId11"/>
-    <p:sldId id="265" r:id="rId12"/>
-    <p:sldId id="266" r:id="rId13"/>
-    <p:sldId id="267" r:id="rId14"/>
-    <p:sldId id="268" r:id="rId15"/>
+    <p:sldId id="270" r:id="rId7"/>
+    <p:sldId id="272" r:id="rId8"/>
+    <p:sldId id="273" r:id="rId9"/>
+    <p:sldId id="269" r:id="rId10"/>
+    <p:sldId id="263" r:id="rId11"/>
+    <p:sldId id="261" r:id="rId12"/>
+    <p:sldId id="262" r:id="rId13"/>
+    <p:sldId id="264" r:id="rId14"/>
+    <p:sldId id="265" r:id="rId15"/>
+    <p:sldId id="266" r:id="rId16"/>
+    <p:sldId id="267" r:id="rId17"/>
+    <p:sldId id="268" r:id="rId18"/>
   </p:sldIdLst>
   <p:sldSz cx="12192000" cy="6858000"/>
   <p:notesSz cx="6858000" cy="9144000"/>
@@ -293,7 +296,7 @@
           <a:p>
             <a:fld id="{CBBFB598-B412-4BAA-8D00-58612E105D61}" type="datetimeFigureOut">
               <a:rPr lang="pl-PL" smtClean="0"/>
-              <a:t>30.11.2025</a:t>
+              <a:t>7.12.2025</a:t>
             </a:fld>
             <a:endParaRPr lang="pl-PL"/>
           </a:p>
@@ -521,7 +524,7 @@
           <a:p>
             <a:fld id="{CBBFB598-B412-4BAA-8D00-58612E105D61}" type="datetimeFigureOut">
               <a:rPr lang="pl-PL" smtClean="0"/>
-              <a:t>30.11.2025</a:t>
+              <a:t>7.12.2025</a:t>
             </a:fld>
             <a:endParaRPr lang="pl-PL"/>
           </a:p>
@@ -701,7 +704,7 @@
           <a:p>
             <a:fld id="{CBBFB598-B412-4BAA-8D00-58612E105D61}" type="datetimeFigureOut">
               <a:rPr lang="pl-PL" smtClean="0"/>
-              <a:t>30.11.2025</a:t>
+              <a:t>7.12.2025</a:t>
             </a:fld>
             <a:endParaRPr lang="pl-PL"/>
           </a:p>
@@ -871,7 +874,7 @@
           <a:p>
             <a:fld id="{CBBFB598-B412-4BAA-8D00-58612E105D61}" type="datetimeFigureOut">
               <a:rPr lang="pl-PL" smtClean="0"/>
-              <a:t>30.11.2025</a:t>
+              <a:t>7.12.2025</a:t>
             </a:fld>
             <a:endParaRPr lang="pl-PL"/>
           </a:p>
@@ -1125,7 +1128,7 @@
           <a:p>
             <a:fld id="{CBBFB598-B412-4BAA-8D00-58612E105D61}" type="datetimeFigureOut">
               <a:rPr lang="pl-PL" smtClean="0"/>
-              <a:t>30.11.2025</a:t>
+              <a:t>7.12.2025</a:t>
             </a:fld>
             <a:endParaRPr lang="pl-PL"/>
           </a:p>
@@ -1451,7 +1454,7 @@
           <a:p>
             <a:fld id="{CBBFB598-B412-4BAA-8D00-58612E105D61}" type="datetimeFigureOut">
               <a:rPr lang="pl-PL" smtClean="0"/>
-              <a:t>30.11.2025</a:t>
+              <a:t>7.12.2025</a:t>
             </a:fld>
             <a:endParaRPr lang="pl-PL"/>
           </a:p>
@@ -1902,7 +1905,7 @@
           <a:p>
             <a:fld id="{CBBFB598-B412-4BAA-8D00-58612E105D61}" type="datetimeFigureOut">
               <a:rPr lang="pl-PL" smtClean="0"/>
-              <a:t>30.11.2025</a:t>
+              <a:t>7.12.2025</a:t>
             </a:fld>
             <a:endParaRPr lang="pl-PL"/>
           </a:p>
@@ -2020,7 +2023,7 @@
           <a:p>
             <a:fld id="{CBBFB598-B412-4BAA-8D00-58612E105D61}" type="datetimeFigureOut">
               <a:rPr lang="pl-PL" smtClean="0"/>
-              <a:t>30.11.2025</a:t>
+              <a:t>7.12.2025</a:t>
             </a:fld>
             <a:endParaRPr lang="pl-PL"/>
           </a:p>
@@ -2115,7 +2118,7 @@
           <a:p>
             <a:fld id="{CBBFB598-B412-4BAA-8D00-58612E105D61}" type="datetimeFigureOut">
               <a:rPr lang="pl-PL" smtClean="0"/>
-              <a:t>30.11.2025</a:t>
+              <a:t>7.12.2025</a:t>
             </a:fld>
             <a:endParaRPr lang="pl-PL"/>
           </a:p>
@@ -2402,7 +2405,7 @@
           <a:p>
             <a:fld id="{CBBFB598-B412-4BAA-8D00-58612E105D61}" type="datetimeFigureOut">
               <a:rPr lang="pl-PL" smtClean="0"/>
-              <a:t>30.11.2025</a:t>
+              <a:t>7.12.2025</a:t>
             </a:fld>
             <a:endParaRPr lang="pl-PL"/>
           </a:p>
@@ -2724,7 +2727,7 @@
           <a:p>
             <a:fld id="{CBBFB598-B412-4BAA-8D00-58612E105D61}" type="datetimeFigureOut">
               <a:rPr lang="pl-PL" smtClean="0"/>
-              <a:t>30.11.2025</a:t>
+              <a:t>7.12.2025</a:t>
             </a:fld>
             <a:endParaRPr lang="pl-PL"/>
           </a:p>
@@ -2978,7 +2981,7 @@
           <a:p>
             <a:fld id="{CBBFB598-B412-4BAA-8D00-58612E105D61}" type="datetimeFigureOut">
               <a:rPr lang="pl-PL" smtClean="0"/>
-              <a:t>30.11.2025</a:t>
+              <a:t>7.12.2025</a:t>
             </a:fld>
             <a:endParaRPr lang="pl-PL"/>
           </a:p>
@@ -3598,6 +3601,462 @@
         <p:cNvPr id="1" name="">
           <a:extLst>
             <a:ext uri="{FF2B5EF4-FFF2-40B4-BE49-F238E27FC236}">
+              <a16:creationId xmlns:a16="http://schemas.microsoft.com/office/drawing/2014/main" id="{9950911E-E0E7-EF43-E309-ACDF7D7FD92D}"/>
+            </a:ext>
+          </a:extLst>
+        </p:cNvPr>
+        <p:cNvGrpSpPr/>
+        <p:nvPr/>
+      </p:nvGrpSpPr>
+      <p:grpSpPr>
+        <a:xfrm>
+          <a:off x="0" y="0"/>
+          <a:ext cx="0" cy="0"/>
+          <a:chOff x="0" y="0"/>
+          <a:chExt cx="0" cy="0"/>
+        </a:xfrm>
+      </p:grpSpPr>
+      <p:sp>
+        <p:nvSpPr>
+          <p:cNvPr id="2" name="Tytuł 1">
+            <a:extLst>
+              <a:ext uri="{FF2B5EF4-FFF2-40B4-BE49-F238E27FC236}">
+                <a16:creationId xmlns:a16="http://schemas.microsoft.com/office/drawing/2014/main" id="{E8ED127B-AD6D-C9C6-F7F0-4A76E95155A0}"/>
+              </a:ext>
+            </a:extLst>
+          </p:cNvPr>
+          <p:cNvSpPr>
+            <a:spLocks noGrp="1"/>
+          </p:cNvSpPr>
+          <p:nvPr>
+            <p:ph type="title"/>
+          </p:nvPr>
+        </p:nvSpPr>
+        <p:spPr>
+          <a:xfrm>
+            <a:off x="143435" y="367554"/>
+            <a:ext cx="11905130" cy="995082"/>
+          </a:xfrm>
+        </p:spPr>
+        <p:txBody>
+          <a:bodyPr>
+            <a:normAutofit/>
+          </a:bodyPr>
+          <a:lstStyle/>
+          <a:p>
+            <a:r>
+              <a:rPr lang="pl-PL" dirty="0"/>
+              <a:t>Tablet</a:t>
+            </a:r>
+          </a:p>
+        </p:txBody>
+      </p:sp>
+      <p:sp>
+        <p:nvSpPr>
+          <p:cNvPr id="3" name="Symbol zastępczy zawartości 2">
+            <a:extLst>
+              <a:ext uri="{FF2B5EF4-FFF2-40B4-BE49-F238E27FC236}">
+                <a16:creationId xmlns:a16="http://schemas.microsoft.com/office/drawing/2014/main" id="{C5BB6030-4126-2214-1019-37021E5A65AF}"/>
+              </a:ext>
+            </a:extLst>
+          </p:cNvPr>
+          <p:cNvSpPr>
+            <a:spLocks noGrp="1"/>
+          </p:cNvSpPr>
+          <p:nvPr>
+            <p:ph idx="1"/>
+          </p:nvPr>
+        </p:nvSpPr>
+        <p:spPr>
+          <a:xfrm>
+            <a:off x="143434" y="1362637"/>
+            <a:ext cx="11905129" cy="5307104"/>
+          </a:xfrm>
+        </p:spPr>
+        <p:txBody>
+          <a:bodyPr/>
+          <a:lstStyle/>
+          <a:p>
+            <a:pPr marL="0" indent="0">
+              <a:buNone/>
+            </a:pPr>
+            <a:endParaRPr lang="pl-PL" dirty="0"/>
+          </a:p>
+          <a:p>
+            <a:pPr marL="0" indent="0">
+              <a:buNone/>
+            </a:pPr>
+            <a:endParaRPr lang="pl-PL" dirty="0"/>
+          </a:p>
+          <a:p>
+            <a:pPr marL="0" indent="0">
+              <a:buNone/>
+            </a:pPr>
+            <a:endParaRPr lang="pl-PL" dirty="0"/>
+          </a:p>
+          <a:p>
+            <a:pPr marL="0" indent="0">
+              <a:buNone/>
+            </a:pPr>
+            <a:endParaRPr lang="pl-PL" dirty="0"/>
+          </a:p>
+          <a:p>
+            <a:pPr marL="0" indent="0">
+              <a:buNone/>
+            </a:pPr>
+            <a:endParaRPr lang="pl-PL" dirty="0"/>
+          </a:p>
+          <a:p>
+            <a:pPr marL="0" indent="0">
+              <a:buNone/>
+            </a:pPr>
+            <a:endParaRPr lang="pl-PL" dirty="0"/>
+          </a:p>
+          <a:p>
+            <a:pPr marL="0" indent="0">
+              <a:buNone/>
+            </a:pPr>
+            <a:endParaRPr lang="pl-PL" dirty="0"/>
+          </a:p>
+          <a:p>
+            <a:pPr marL="0" indent="0">
+              <a:buNone/>
+            </a:pPr>
+            <a:endParaRPr lang="pl-PL" dirty="0"/>
+          </a:p>
+          <a:p>
+            <a:pPr marL="0" indent="0">
+              <a:buNone/>
+            </a:pPr>
+            <a:endParaRPr lang="pl-PL" dirty="0"/>
+          </a:p>
+        </p:txBody>
+      </p:sp>
+    </p:spTree>
+    <p:extLst>
+      <p:ext uri="{BB962C8B-B14F-4D97-AF65-F5344CB8AC3E}">
+        <p14:creationId xmlns:p14="http://schemas.microsoft.com/office/powerpoint/2010/main" val="3751241253"/>
+      </p:ext>
+    </p:extLst>
+  </p:cSld>
+  <p:clrMapOvr>
+    <a:masterClrMapping/>
+  </p:clrMapOvr>
+</p:sld>
+</file>
+
+<file path=ppt/slides/slide11.xml><?xml version="1.0" encoding="utf-8"?>
+<p:sld xmlns:a="http://schemas.openxmlformats.org/drawingml/2006/main" xmlns:r="http://schemas.openxmlformats.org/officeDocument/2006/relationships" xmlns:p="http://schemas.openxmlformats.org/presentationml/2006/main">
+  <p:cSld>
+    <p:spTree>
+      <p:nvGrpSpPr>
+        <p:cNvPr id="1" name="">
+          <a:extLst>
+            <a:ext uri="{FF2B5EF4-FFF2-40B4-BE49-F238E27FC236}">
+              <a16:creationId xmlns:a16="http://schemas.microsoft.com/office/drawing/2014/main" id="{90DFB05C-8B88-A0E8-5A83-083B979E1EB7}"/>
+            </a:ext>
+          </a:extLst>
+        </p:cNvPr>
+        <p:cNvGrpSpPr/>
+        <p:nvPr/>
+      </p:nvGrpSpPr>
+      <p:grpSpPr>
+        <a:xfrm>
+          <a:off x="0" y="0"/>
+          <a:ext cx="0" cy="0"/>
+          <a:chOff x="0" y="0"/>
+          <a:chExt cx="0" cy="0"/>
+        </a:xfrm>
+      </p:grpSpPr>
+      <p:sp>
+        <p:nvSpPr>
+          <p:cNvPr id="2" name="Tytuł 1">
+            <a:extLst>
+              <a:ext uri="{FF2B5EF4-FFF2-40B4-BE49-F238E27FC236}">
+                <a16:creationId xmlns:a16="http://schemas.microsoft.com/office/drawing/2014/main" id="{81960820-2062-6601-9318-8725A7015756}"/>
+              </a:ext>
+            </a:extLst>
+          </p:cNvPr>
+          <p:cNvSpPr>
+            <a:spLocks noGrp="1"/>
+          </p:cNvSpPr>
+          <p:nvPr>
+            <p:ph type="title"/>
+          </p:nvPr>
+        </p:nvSpPr>
+        <p:spPr>
+          <a:xfrm>
+            <a:off x="143435" y="367554"/>
+            <a:ext cx="11905130" cy="995082"/>
+          </a:xfrm>
+        </p:spPr>
+        <p:txBody>
+          <a:bodyPr>
+            <a:normAutofit/>
+          </a:bodyPr>
+          <a:lstStyle/>
+          <a:p>
+            <a:r>
+              <a:rPr lang="pl-PL" dirty="0"/>
+              <a:t>Tworzenie przedmiotów</a:t>
+            </a:r>
+          </a:p>
+        </p:txBody>
+      </p:sp>
+      <p:sp>
+        <p:nvSpPr>
+          <p:cNvPr id="3" name="Symbol zastępczy zawartości 2">
+            <a:extLst>
+              <a:ext uri="{FF2B5EF4-FFF2-40B4-BE49-F238E27FC236}">
+                <a16:creationId xmlns:a16="http://schemas.microsoft.com/office/drawing/2014/main" id="{456EBFDA-A13A-B307-3AA6-DD00420FFE77}"/>
+              </a:ext>
+            </a:extLst>
+          </p:cNvPr>
+          <p:cNvSpPr>
+            <a:spLocks noGrp="1"/>
+          </p:cNvSpPr>
+          <p:nvPr>
+            <p:ph idx="1"/>
+          </p:nvPr>
+        </p:nvSpPr>
+        <p:spPr>
+          <a:xfrm>
+            <a:off x="143434" y="1362637"/>
+            <a:ext cx="11905129" cy="5307104"/>
+          </a:xfrm>
+        </p:spPr>
+        <p:txBody>
+          <a:bodyPr/>
+          <a:lstStyle/>
+          <a:p>
+            <a:pPr marL="0" indent="0">
+              <a:buNone/>
+            </a:pPr>
+            <a:endParaRPr lang="pl-PL" dirty="0"/>
+          </a:p>
+          <a:p>
+            <a:pPr marL="0" indent="0">
+              <a:buNone/>
+            </a:pPr>
+            <a:endParaRPr lang="pl-PL" dirty="0"/>
+          </a:p>
+          <a:p>
+            <a:pPr marL="0" indent="0">
+              <a:buNone/>
+            </a:pPr>
+            <a:endParaRPr lang="pl-PL" dirty="0"/>
+          </a:p>
+          <a:p>
+            <a:pPr marL="0" indent="0">
+              <a:buNone/>
+            </a:pPr>
+            <a:endParaRPr lang="pl-PL" dirty="0"/>
+          </a:p>
+          <a:p>
+            <a:pPr marL="0" indent="0">
+              <a:buNone/>
+            </a:pPr>
+            <a:endParaRPr lang="pl-PL" dirty="0"/>
+          </a:p>
+          <a:p>
+            <a:pPr marL="0" indent="0">
+              <a:buNone/>
+            </a:pPr>
+            <a:endParaRPr lang="pl-PL" dirty="0"/>
+          </a:p>
+          <a:p>
+            <a:pPr marL="0" indent="0">
+              <a:buNone/>
+            </a:pPr>
+            <a:endParaRPr lang="pl-PL" dirty="0"/>
+          </a:p>
+          <a:p>
+            <a:pPr marL="0" indent="0">
+              <a:buNone/>
+            </a:pPr>
+            <a:endParaRPr lang="pl-PL" dirty="0"/>
+          </a:p>
+          <a:p>
+            <a:pPr marL="0" indent="0">
+              <a:buNone/>
+            </a:pPr>
+            <a:endParaRPr lang="pl-PL" dirty="0"/>
+          </a:p>
+        </p:txBody>
+      </p:sp>
+    </p:spTree>
+    <p:extLst>
+      <p:ext uri="{BB962C8B-B14F-4D97-AF65-F5344CB8AC3E}">
+        <p14:creationId xmlns:p14="http://schemas.microsoft.com/office/powerpoint/2010/main" val="3865485290"/>
+      </p:ext>
+    </p:extLst>
+  </p:cSld>
+  <p:clrMapOvr>
+    <a:masterClrMapping/>
+  </p:clrMapOvr>
+</p:sld>
+</file>
+
+<file path=ppt/slides/slide12.xml><?xml version="1.0" encoding="utf-8"?>
+<p:sld xmlns:a="http://schemas.openxmlformats.org/drawingml/2006/main" xmlns:r="http://schemas.openxmlformats.org/officeDocument/2006/relationships" xmlns:p="http://schemas.openxmlformats.org/presentationml/2006/main">
+  <p:cSld>
+    <p:spTree>
+      <p:nvGrpSpPr>
+        <p:cNvPr id="1" name="">
+          <a:extLst>
+            <a:ext uri="{FF2B5EF4-FFF2-40B4-BE49-F238E27FC236}">
+              <a16:creationId xmlns:a16="http://schemas.microsoft.com/office/drawing/2014/main" id="{22432F2A-4009-B66D-7FB5-31559E0AE0F7}"/>
+            </a:ext>
+          </a:extLst>
+        </p:cNvPr>
+        <p:cNvGrpSpPr/>
+        <p:nvPr/>
+      </p:nvGrpSpPr>
+      <p:grpSpPr>
+        <a:xfrm>
+          <a:off x="0" y="0"/>
+          <a:ext cx="0" cy="0"/>
+          <a:chOff x="0" y="0"/>
+          <a:chExt cx="0" cy="0"/>
+        </a:xfrm>
+      </p:grpSpPr>
+      <p:sp>
+        <p:nvSpPr>
+          <p:cNvPr id="2" name="Tytuł 1">
+            <a:extLst>
+              <a:ext uri="{FF2B5EF4-FFF2-40B4-BE49-F238E27FC236}">
+                <a16:creationId xmlns:a16="http://schemas.microsoft.com/office/drawing/2014/main" id="{A8E4E4B9-5E68-8EE5-1DF8-9E82B8527AEF}"/>
+              </a:ext>
+            </a:extLst>
+          </p:cNvPr>
+          <p:cNvSpPr>
+            <a:spLocks noGrp="1"/>
+          </p:cNvSpPr>
+          <p:nvPr>
+            <p:ph type="title"/>
+          </p:nvPr>
+        </p:nvSpPr>
+        <p:spPr>
+          <a:xfrm>
+            <a:off x="143435" y="367554"/>
+            <a:ext cx="11905130" cy="995082"/>
+          </a:xfrm>
+        </p:spPr>
+        <p:txBody>
+          <a:bodyPr>
+            <a:normAutofit/>
+          </a:bodyPr>
+          <a:lstStyle/>
+          <a:p>
+            <a:r>
+              <a:rPr lang="pl-PL" dirty="0"/>
+              <a:t>Interakcja z przedmiotami</a:t>
+            </a:r>
+          </a:p>
+        </p:txBody>
+      </p:sp>
+      <p:sp>
+        <p:nvSpPr>
+          <p:cNvPr id="3" name="Symbol zastępczy zawartości 2">
+            <a:extLst>
+              <a:ext uri="{FF2B5EF4-FFF2-40B4-BE49-F238E27FC236}">
+                <a16:creationId xmlns:a16="http://schemas.microsoft.com/office/drawing/2014/main" id="{0C81E2E9-A1E2-3787-B88D-4E0A6192A2C7}"/>
+              </a:ext>
+            </a:extLst>
+          </p:cNvPr>
+          <p:cNvSpPr>
+            <a:spLocks noGrp="1"/>
+          </p:cNvSpPr>
+          <p:nvPr>
+            <p:ph idx="1"/>
+          </p:nvPr>
+        </p:nvSpPr>
+        <p:spPr>
+          <a:xfrm>
+            <a:off x="143434" y="1362637"/>
+            <a:ext cx="11905129" cy="5307104"/>
+          </a:xfrm>
+        </p:spPr>
+        <p:txBody>
+          <a:bodyPr/>
+          <a:lstStyle/>
+          <a:p>
+            <a:pPr marL="0" indent="0">
+              <a:buNone/>
+            </a:pPr>
+            <a:endParaRPr lang="pl-PL" dirty="0"/>
+          </a:p>
+          <a:p>
+            <a:pPr marL="0" indent="0">
+              <a:buNone/>
+            </a:pPr>
+            <a:endParaRPr lang="pl-PL" dirty="0"/>
+          </a:p>
+          <a:p>
+            <a:pPr marL="0" indent="0">
+              <a:buNone/>
+            </a:pPr>
+            <a:endParaRPr lang="pl-PL" dirty="0"/>
+          </a:p>
+          <a:p>
+            <a:pPr marL="0" indent="0">
+              <a:buNone/>
+            </a:pPr>
+            <a:endParaRPr lang="pl-PL" dirty="0"/>
+          </a:p>
+          <a:p>
+            <a:pPr marL="0" indent="0">
+              <a:buNone/>
+            </a:pPr>
+            <a:endParaRPr lang="pl-PL" dirty="0"/>
+          </a:p>
+          <a:p>
+            <a:pPr marL="0" indent="0">
+              <a:buNone/>
+            </a:pPr>
+            <a:endParaRPr lang="pl-PL" dirty="0"/>
+          </a:p>
+          <a:p>
+            <a:pPr marL="0" indent="0">
+              <a:buNone/>
+            </a:pPr>
+            <a:endParaRPr lang="pl-PL" dirty="0"/>
+          </a:p>
+          <a:p>
+            <a:pPr marL="0" indent="0">
+              <a:buNone/>
+            </a:pPr>
+            <a:endParaRPr lang="pl-PL" dirty="0"/>
+          </a:p>
+          <a:p>
+            <a:pPr marL="0" indent="0">
+              <a:buNone/>
+            </a:pPr>
+            <a:endParaRPr lang="pl-PL" dirty="0"/>
+          </a:p>
+        </p:txBody>
+      </p:sp>
+    </p:spTree>
+    <p:extLst>
+      <p:ext uri="{BB962C8B-B14F-4D97-AF65-F5344CB8AC3E}">
+        <p14:creationId xmlns:p14="http://schemas.microsoft.com/office/powerpoint/2010/main" val="4140615616"/>
+      </p:ext>
+    </p:extLst>
+  </p:cSld>
+  <p:clrMapOvr>
+    <a:masterClrMapping/>
+  </p:clrMapOvr>
+</p:sld>
+</file>
+
+<file path=ppt/slides/slide13.xml><?xml version="1.0" encoding="utf-8"?>
+<p:sld xmlns:a="http://schemas.openxmlformats.org/drawingml/2006/main" xmlns:r="http://schemas.openxmlformats.org/officeDocument/2006/relationships" xmlns:p="http://schemas.openxmlformats.org/presentationml/2006/main">
+  <p:cSld>
+    <p:spTree>
+      <p:nvGrpSpPr>
+        <p:cNvPr id="1" name="">
+          <a:extLst>
+            <a:ext uri="{FF2B5EF4-FFF2-40B4-BE49-F238E27FC236}">
               <a16:creationId xmlns:a16="http://schemas.microsoft.com/office/drawing/2014/main" id="{D334B670-7A59-F936-F5D4-75ACA00BF4A7}"/>
             </a:ext>
           </a:extLst>
@@ -3742,7 +4201,7 @@
 </p:sld>
 </file>
 
-<file path=ppt/slides/slide11.xml><?xml version="1.0" encoding="utf-8"?>
+<file path=ppt/slides/slide14.xml><?xml version="1.0" encoding="utf-8"?>
 <p:sld xmlns:a="http://schemas.openxmlformats.org/drawingml/2006/main" xmlns:r="http://schemas.openxmlformats.org/officeDocument/2006/relationships" xmlns:p="http://schemas.openxmlformats.org/presentationml/2006/main">
   <p:cSld>
     <p:spTree>
@@ -3894,7 +4353,7 @@
 </p:sld>
 </file>
 
-<file path=ppt/slides/slide12.xml><?xml version="1.0" encoding="utf-8"?>
+<file path=ppt/slides/slide15.xml><?xml version="1.0" encoding="utf-8"?>
 <p:sld xmlns:a="http://schemas.openxmlformats.org/drawingml/2006/main" xmlns:r="http://schemas.openxmlformats.org/officeDocument/2006/relationships" xmlns:p="http://schemas.openxmlformats.org/presentationml/2006/main">
   <p:cSld>
     <p:spTree>
@@ -4046,7 +4505,7 @@
 </p:sld>
 </file>
 
-<file path=ppt/slides/slide13.xml><?xml version="1.0" encoding="utf-8"?>
+<file path=ppt/slides/slide16.xml><?xml version="1.0" encoding="utf-8"?>
 <p:sld xmlns:a="http://schemas.openxmlformats.org/drawingml/2006/main" xmlns:r="http://schemas.openxmlformats.org/officeDocument/2006/relationships" xmlns:p="http://schemas.openxmlformats.org/presentationml/2006/main">
   <p:cSld>
     <p:spTree>
@@ -4198,7 +4657,7 @@
 </p:sld>
 </file>
 
-<file path=ppt/slides/slide14.xml><?xml version="1.0" encoding="utf-8"?>
+<file path=ppt/slides/slide17.xml><?xml version="1.0" encoding="utf-8"?>
 <p:sld xmlns:a="http://schemas.openxmlformats.org/drawingml/2006/main" xmlns:r="http://schemas.openxmlformats.org/officeDocument/2006/relationships" xmlns:p="http://schemas.openxmlformats.org/presentationml/2006/main">
   <p:cSld>
     <p:spTree>
@@ -4426,22 +4885,28 @@
           <a:bodyPr/>
           <a:lstStyle/>
           <a:p>
-            <a:pPr marL="0" indent="0">
+            <a:pPr marL="0" indent="0" algn="just">
               <a:buNone/>
             </a:pPr>
             <a:r>
               <a:rPr lang="pl-PL" sz="1400" dirty="0"/>
-              <a:t>Program do projektowania wnętrz to narzędzie do wizualizacji i aranżacji pomieszczeń w 3D i 2D. Za pomocą takich aplikacji można zaplanować układ pomieszczenia, mebli, czy ścian. Są bardzo pomocne przy planowaniu remontów, czy budowy domu. Ich wielką zaletą jest dokładność i precyzja wizualizacji, która pozwala na dokładne odwzorowanie rzeczywistości. Oferują dużą funkcjonalność i sporą bazę gotowych rozwiązań, aczkolwiek przez to ich obsługa jest skomplikowana i wymagająca wielogodzinnej nauki.</a:t>
-            </a:r>
-          </a:p>
-          <a:p>
-            <a:pPr marL="0" indent="0">
+              <a:t>Program do projektowania wnętrz to narzędzie do wizualizacji i aranżacji pomieszczeń w 3D i 2D. Za pomocą takich aplikacji można zaplanować układ pomieszczenia, mebli, czy ścian. Są bardzo pomocne przy planowaniu remontów, czy budowy domu. Ich wielką zaletą jest dokładność i precyzja wizualizacji, która pozwala na dokładne odwzorowanie rzeczywistości. Oferują dużą funkcjonalność i sporą bazę gotowych rozwiązań, aczkolwiek przez to ich obsługa jest skomplikowana i wymagająca wielogodzinnej nauki. </a:t>
+            </a:r>
+          </a:p>
+          <a:p>
+            <a:pPr marL="0" indent="0" algn="just">
               <a:buNone/>
             </a:pPr>
             <a:r>
               <a:rPr lang="pl-PL" sz="1400" dirty="0"/>
               <a:t>Porównanie programów do projektowania wnętrz:</a:t>
             </a:r>
+          </a:p>
+          <a:p>
+            <a:pPr marL="0" indent="0" algn="just">
+              <a:buNone/>
+            </a:pPr>
+            <a:endParaRPr lang="pl-PL" sz="1400" dirty="0"/>
           </a:p>
           <a:p>
             <a:pPr marL="0" indent="0">
@@ -4514,13 +4979,13 @@
           <p:nvPr>
             <p:extLst>
               <p:ext uri="{D42A27DB-BD31-4B8C-83A1-F6EECF244321}">
-                <p14:modId xmlns:p14="http://schemas.microsoft.com/office/powerpoint/2010/main" val="1548145093"/>
+                <p14:modId xmlns:p14="http://schemas.microsoft.com/office/powerpoint/2010/main" val="494299078"/>
               </p:ext>
             </p:extLst>
           </p:nvPr>
         </p:nvGraphicFramePr>
         <p:xfrm>
-          <a:off x="143432" y="2897285"/>
+          <a:off x="143433" y="2902751"/>
           <a:ext cx="11134168" cy="3835210"/>
         </p:xfrm>
         <a:graphic>
@@ -4566,7 +5031,7 @@
                   </a:extLst>
                 </a:gridCol>
               </a:tblGrid>
-              <a:tr h="217678">
+              <a:tr h="150641">
                 <a:tc>
                   <a:txBody>
                     <a:bodyPr/>
@@ -4708,7 +5173,7 @@
                   </a:ext>
                 </a:extLst>
               </a:tr>
-              <a:tr h="714879">
+              <a:tr h="494721">
                 <a:tc>
                   <a:txBody>
                     <a:bodyPr/>
@@ -4775,12 +5240,12 @@
                         <a:buNone/>
                       </a:pPr>
                       <a:r>
-                        <a:rPr lang="pl-PL" sz="1100">
+                        <a:rPr lang="pl-PL" sz="1100" dirty="0">
                           <a:effectLst/>
                         </a:rPr>
                         <a:t>Darmowy/$19.6</a:t>
                       </a:r>
-                      <a:endParaRPr lang="pl-PL" sz="1100">
+                      <a:endParaRPr lang="pl-PL" sz="1100" dirty="0">
                         <a:effectLst/>
                         <a:latin typeface="Arial" panose="020B0604020202020204" pitchFamily="34" charset="0"/>
                         <a:ea typeface="Calibri" panose="020F0502020204030204" pitchFamily="34" charset="0"/>
@@ -4850,7 +5315,7 @@
                   </a:ext>
                 </a:extLst>
               </a:tr>
-              <a:tr h="714879">
+              <a:tr h="494721">
                 <a:tc>
                   <a:txBody>
                     <a:bodyPr/>
@@ -4998,7 +5463,7 @@
                   </a:ext>
                 </a:extLst>
               </a:tr>
-              <a:tr h="963510">
+              <a:tr h="666783">
                 <a:tc>
                   <a:txBody>
                     <a:bodyPr/>
@@ -5140,7 +5605,7 @@
                   </a:ext>
                 </a:extLst>
               </a:tr>
-              <a:tr h="714879">
+              <a:tr h="541402">
                 <a:tc>
                   <a:txBody>
                     <a:bodyPr/>
@@ -5279,7 +5744,7 @@
                   </a:ext>
                 </a:extLst>
               </a:tr>
-              <a:tr h="466247">
+              <a:tr h="322659">
                 <a:tc>
                   <a:txBody>
                     <a:bodyPr/>
@@ -5526,7 +5991,7 @@
           <a:bodyPr/>
           <a:lstStyle/>
           <a:p>
-            <a:pPr marL="0" indent="0">
+            <a:pPr marL="0" indent="0" algn="just">
               <a:buNone/>
             </a:pPr>
             <a:r>
@@ -5540,7 +6005,11 @@
             </a:pPr>
             <a:r>
               <a:rPr lang="pl-PL" sz="1400" dirty="0"/>
-              <a:t>Spis zestawów VR:</a:t>
+              <a:t>Spis zestawów VR</a:t>
+            </a:r>
+            <a:r>
+              <a:rPr lang="pl-PL" sz="1600" dirty="0"/>
+              <a:t>:</a:t>
             </a:r>
           </a:p>
           <a:p>
@@ -5614,14 +6083,14 @@
           <p:nvPr>
             <p:extLst>
               <p:ext uri="{D42A27DB-BD31-4B8C-83A1-F6EECF244321}">
-                <p14:modId xmlns:p14="http://schemas.microsoft.com/office/powerpoint/2010/main" val="2996903066"/>
+                <p14:modId xmlns:p14="http://schemas.microsoft.com/office/powerpoint/2010/main" val="1633436955"/>
               </p:ext>
             </p:extLst>
           </p:nvPr>
         </p:nvGraphicFramePr>
         <p:xfrm>
-          <a:off x="143434" y="2698376"/>
-          <a:ext cx="11080380" cy="3971869"/>
+          <a:off x="143434" y="2702258"/>
+          <a:ext cx="11080380" cy="3968923"/>
         </p:xfrm>
         <a:graphic>
           <a:graphicData uri="http://schemas.openxmlformats.org/drawingml/2006/table">
@@ -5687,7 +6156,7 @@
                   </a:extLst>
                 </a:gridCol>
               </a:tblGrid>
-              <a:tr h="274807">
+              <a:tr h="513973">
                 <a:tc>
                   <a:txBody>
                     <a:bodyPr/>
@@ -5910,7 +6379,7 @@
                   </a:ext>
                 </a:extLst>
               </a:tr>
-              <a:tr h="1216325">
+              <a:tr h="1214983">
                 <a:tc>
                   <a:txBody>
                     <a:bodyPr/>
@@ -6133,7 +6602,7 @@
                   </a:ext>
                 </a:extLst>
               </a:tr>
-              <a:tr h="588695">
+              <a:tr h="588045">
                 <a:tc>
                   <a:txBody>
                     <a:bodyPr/>
@@ -6356,7 +6825,7 @@
                   </a:ext>
                 </a:extLst>
               </a:tr>
-              <a:tr h="274879">
+              <a:tr h="274575">
                 <a:tc>
                   <a:txBody>
                     <a:bodyPr/>
@@ -6579,7 +7048,7 @@
                   </a:ext>
                 </a:extLst>
               </a:tr>
-              <a:tr h="588695">
+              <a:tr h="787863">
                 <a:tc>
                   <a:txBody>
                     <a:bodyPr/>
@@ -6808,7 +7277,7 @@
                   </a:ext>
                 </a:extLst>
               </a:tr>
-              <a:tr h="588695">
+              <a:tr h="588045">
                 <a:tc>
                   <a:txBody>
                     <a:bodyPr/>
@@ -6848,12 +7317,12 @@
                         <a:buNone/>
                       </a:pPr>
                       <a:r>
-                        <a:rPr lang="pl-PL" sz="1200">
+                        <a:rPr lang="pl-PL" sz="1200" dirty="0">
                           <a:effectLst/>
                         </a:rPr>
                         <a:t>Wymagany PC</a:t>
                       </a:r>
-                      <a:endParaRPr lang="pl-PL" sz="1200">
+                      <a:endParaRPr lang="pl-PL" sz="1200" dirty="0">
                         <a:effectLst/>
                         <a:latin typeface="Arial" panose="020B0604020202020204" pitchFamily="34" charset="0"/>
                         <a:ea typeface="Calibri" panose="020F0502020204030204" pitchFamily="34" charset="0"/>
@@ -6929,12 +7398,18 @@
                         <a:buNone/>
                       </a:pPr>
                       <a:r>
-                        <a:rPr lang="pl-PL" sz="1200">
+                        <a:rPr lang="pl-PL" sz="1200" dirty="0">
                           <a:effectLst/>
                         </a:rPr>
-                        <a:t>120 Hz</a:t>
+                        <a:t>120 </a:t>
                       </a:r>
-                      <a:endParaRPr lang="pl-PL" sz="1200">
+                      <a:r>
+                        <a:rPr lang="pl-PL" sz="1200" dirty="0" err="1">
+                          <a:effectLst/>
+                        </a:rPr>
+                        <a:t>Hz</a:t>
+                      </a:r>
+                      <a:endParaRPr lang="pl-PL" sz="1200" dirty="0">
                         <a:effectLst/>
                         <a:latin typeface="Arial" panose="020B0604020202020204" pitchFamily="34" charset="0"/>
                         <a:ea typeface="Calibri" panose="020F0502020204030204" pitchFamily="34" charset="0"/>
@@ -7166,7 +7641,7 @@
               <a:buNone/>
             </a:pPr>
             <a:r>
-              <a:rPr lang="pl-PL" sz="1400" dirty="0"/>
+              <a:rPr lang="pl-PL" sz="1600" dirty="0"/>
               <a:t>Celem pracy jest opracowanie systemu do projektowania wnętrz, który wykorzysta technologię wirtualnej rzeczywistości. Obsługa całego programu ma być oparta o fizyczną interakcje za pośrednictwem kontrolerów śledzących ruch dłoni. To co będzie wyróżniać ten program od reszty podobnych rozwiązań to oparcie całego procesu projektowania wnętrza na wirtualnej rzeczywistości. Użytkownik za pomocą technologii wirtualnej rzeczywistości będzie w stanie zaprojektować jedno pomieszczenie. Ten projekt będzie mógł znaleźć zastosowanie w sklepach meblarskich jako oprogramowanie pomocnicze dla klientów. Pozwalające na szybką wizualizację przy pomocy modeli mebli dostarczonym przez sklep. </a:t>
             </a:r>
           </a:p>
@@ -7175,56 +7650,56 @@
               <a:buNone/>
             </a:pPr>
             <a:r>
-              <a:rPr lang="pl-PL" sz="1400" dirty="0"/>
+              <a:rPr lang="pl-PL" sz="1600" dirty="0"/>
               <a:t>Podstawowe funkcjonalności:</a:t>
             </a:r>
           </a:p>
           <a:p>
             <a:pPr algn="just"/>
             <a:r>
-              <a:rPr lang="pl-PL" sz="1400" dirty="0"/>
+              <a:rPr lang="pl-PL" sz="1600" dirty="0"/>
               <a:t>Generacja pomieszczeń na podstawie wymiarów podanych użytkownika</a:t>
             </a:r>
           </a:p>
           <a:p>
             <a:pPr algn="just"/>
             <a:r>
-              <a:rPr lang="pl-PL" sz="1400" dirty="0"/>
+              <a:rPr lang="pl-PL" sz="1600" dirty="0"/>
               <a:t>Interakcja z otoczeniem oparta o ruch użytkownika</a:t>
             </a:r>
           </a:p>
           <a:p>
             <a:pPr algn="just"/>
             <a:r>
-              <a:rPr lang="pl-PL" sz="1400" dirty="0"/>
+              <a:rPr lang="pl-PL" sz="1600" dirty="0"/>
               <a:t>Tworzenie i interakcja z przedmiotami</a:t>
             </a:r>
           </a:p>
           <a:p>
             <a:pPr algn="just"/>
             <a:r>
-              <a:rPr lang="pl-PL" sz="1400" dirty="0"/>
+              <a:rPr lang="pl-PL" sz="1600" dirty="0"/>
               <a:t>Zmiana wyglądu i koloru ścian</a:t>
             </a:r>
           </a:p>
           <a:p>
             <a:pPr algn="just"/>
             <a:r>
-              <a:rPr lang="pl-PL" sz="1400" dirty="0"/>
+              <a:rPr lang="pl-PL" sz="1600" dirty="0"/>
               <a:t>Tworzenie dodatkowych ścian</a:t>
             </a:r>
           </a:p>
           <a:p>
             <a:pPr algn="just"/>
             <a:r>
-              <a:rPr lang="pl-PL" sz="1400" dirty="0"/>
+              <a:rPr lang="pl-PL" sz="1600" dirty="0"/>
               <a:t>Tworzenie stałych obiektów</a:t>
             </a:r>
           </a:p>
           <a:p>
             <a:pPr algn="just"/>
             <a:r>
-              <a:rPr lang="pl-PL" sz="1400" dirty="0"/>
+              <a:rPr lang="pl-PL" sz="1600" dirty="0"/>
               <a:t>Podgląd z lotu ptaka</a:t>
             </a:r>
           </a:p>
@@ -7377,56 +7852,56 @@
           </a:bodyPr>
           <a:lstStyle/>
           <a:p>
-            <a:pPr marL="0" indent="0">
-              <a:buNone/>
-            </a:pPr>
-            <a:r>
-              <a:rPr lang="pl-PL" dirty="0"/>
-              <a:t>Najważniejszym punktem w projekcie jest implementacja wirtualnej rzeczywistości do projektu. Jest ona fundamentem całego projektu i w oparciu o nią reszta funkcjonalności będzie opracowywana. Głównym zadaniem wirtualnej rzeczywistości jest zapewnienie intuicyjności w obsłudze systemu i danie użytkownikowi wolności w projektowaniu wnętrza.</a:t>
-            </a:r>
-          </a:p>
-          <a:p>
-            <a:pPr marL="0" indent="0">
-              <a:buNone/>
-            </a:pPr>
-            <a:endParaRPr lang="pl-PL"/>
-          </a:p>
-          <a:p>
-            <a:pPr marL="0" indent="0">
-              <a:buNone/>
-            </a:pPr>
-            <a:endParaRPr lang="pl-PL" dirty="0"/>
-          </a:p>
-          <a:p>
-            <a:pPr marL="0" indent="0">
-              <a:buNone/>
-            </a:pPr>
-            <a:r>
-              <a:rPr lang="pl-PL" dirty="0"/>
+            <a:pPr marL="0" indent="0" algn="just">
+              <a:buNone/>
+            </a:pPr>
+            <a:r>
+              <a:rPr lang="pl-PL" sz="1600" dirty="0"/>
+              <a:t>Najważniejszym punktem w projekcie jest implementacja wirtualnej rzeczywistości do projektu. Jest ona fundamentem całego projektu i w oparciu o nią reszta funkcjonalności będzie opracowywana. Głównym zadaniem wirtualnej rzeczywistości jest zapewnienie intuicyjności w obsłudze systemu i danie użytkownikowi wolności w projektowaniu wnętrza. Główną platformą, na którą będzie projektowany system jest zestaw VR Meta Quest 3. Pozwoli on nie tylko na wykorzystanie tej technologii, ale i również umożliwi uruchamianie projektu bezpośrednio na sprzęcie bez pośrednictwa komputera.</a:t>
+            </a:r>
+          </a:p>
+          <a:p>
+            <a:pPr marL="0" indent="0">
+              <a:buNone/>
+            </a:pPr>
+            <a:endParaRPr lang="pl-PL" sz="1600" dirty="0"/>
+          </a:p>
+          <a:p>
+            <a:pPr marL="0" indent="0">
+              <a:buNone/>
+            </a:pPr>
+            <a:endParaRPr lang="pl-PL" sz="1600" dirty="0"/>
+          </a:p>
+          <a:p>
+            <a:pPr marL="0" indent="0">
+              <a:buNone/>
+            </a:pPr>
+            <a:r>
+              <a:rPr lang="pl-PL" sz="1600" dirty="0"/>
               <a:t>Podstawowymi zagadnieniami dotyczącego tego punktu jest:</a:t>
             </a:r>
           </a:p>
           <a:p>
             <a:r>
-              <a:rPr lang="pl-PL" dirty="0"/>
+              <a:rPr lang="pl-PL" sz="1600" dirty="0"/>
               <a:t>Sposób poruszania się użytkownika po przestrzeni trójwymiarowej</a:t>
             </a:r>
           </a:p>
           <a:p>
             <a:r>
-              <a:rPr lang="pl-PL" dirty="0"/>
+              <a:rPr lang="pl-PL" sz="1600" dirty="0"/>
               <a:t>Sposób sztucznego obrotu użytkownika</a:t>
             </a:r>
           </a:p>
           <a:p>
             <a:r>
-              <a:rPr lang="pl-PL" dirty="0"/>
+              <a:rPr lang="pl-PL" sz="1600" dirty="0"/>
               <a:t>Interakcja z przedmiotami w przestrzeni trójwymiarowej</a:t>
             </a:r>
           </a:p>
           <a:p>
             <a:r>
-              <a:rPr lang="pl-PL" dirty="0"/>
+              <a:rPr lang="pl-PL" sz="1600" dirty="0"/>
               <a:t>Uruchamianie oprogramowania natywnie na zestawie VR</a:t>
             </a:r>
           </a:p>
@@ -7461,6 +7936,416 @@
 </file>
 
 <file path=ppt/slides/slide6.xml><?xml version="1.0" encoding="utf-8"?>
+<p:sld xmlns:a="http://schemas.openxmlformats.org/drawingml/2006/main" xmlns:r="http://schemas.openxmlformats.org/officeDocument/2006/relationships" xmlns:p="http://schemas.openxmlformats.org/presentationml/2006/main">
+  <p:cSld>
+    <p:spTree>
+      <p:nvGrpSpPr>
+        <p:cNvPr id="1" name="">
+          <a:extLst>
+            <a:ext uri="{FF2B5EF4-FFF2-40B4-BE49-F238E27FC236}">
+              <a16:creationId xmlns:a16="http://schemas.microsoft.com/office/drawing/2014/main" id="{FC6714B2-0388-C9F1-0931-77718BA60029}"/>
+            </a:ext>
+          </a:extLst>
+        </p:cNvPr>
+        <p:cNvGrpSpPr/>
+        <p:nvPr/>
+      </p:nvGrpSpPr>
+      <p:grpSpPr>
+        <a:xfrm>
+          <a:off x="0" y="0"/>
+          <a:ext cx="0" cy="0"/>
+          <a:chOff x="0" y="0"/>
+          <a:chExt cx="0" cy="0"/>
+        </a:xfrm>
+      </p:grpSpPr>
+      <p:sp>
+        <p:nvSpPr>
+          <p:cNvPr id="2" name="Tytuł 1">
+            <a:extLst>
+              <a:ext uri="{FF2B5EF4-FFF2-40B4-BE49-F238E27FC236}">
+                <a16:creationId xmlns:a16="http://schemas.microsoft.com/office/drawing/2014/main" id="{0359D83E-C459-0F8C-A7D7-6EDBC4C5CD16}"/>
+              </a:ext>
+            </a:extLst>
+          </p:cNvPr>
+          <p:cNvSpPr>
+            <a:spLocks noGrp="1"/>
+          </p:cNvSpPr>
+          <p:nvPr>
+            <p:ph type="title"/>
+          </p:nvPr>
+        </p:nvSpPr>
+        <p:spPr>
+          <a:xfrm>
+            <a:off x="143435" y="367554"/>
+            <a:ext cx="11080378" cy="995082"/>
+          </a:xfrm>
+        </p:spPr>
+        <p:txBody>
+          <a:bodyPr>
+            <a:normAutofit/>
+          </a:bodyPr>
+          <a:lstStyle/>
+          <a:p>
+            <a:r>
+              <a:rPr lang="pl-PL" dirty="0"/>
+              <a:t>Płynne Poruszanie oraz Skokowy Obrót</a:t>
+            </a:r>
+          </a:p>
+        </p:txBody>
+      </p:sp>
+      <p:sp>
+        <p:nvSpPr>
+          <p:cNvPr id="3" name="Symbol zastępczy zawartości 2">
+            <a:extLst>
+              <a:ext uri="{FF2B5EF4-FFF2-40B4-BE49-F238E27FC236}">
+                <a16:creationId xmlns:a16="http://schemas.microsoft.com/office/drawing/2014/main" id="{E7118AFC-F819-75C0-1E40-A81B0071DD81}"/>
+              </a:ext>
+            </a:extLst>
+          </p:cNvPr>
+          <p:cNvSpPr>
+            <a:spLocks noGrp="1"/>
+          </p:cNvSpPr>
+          <p:nvPr>
+            <p:ph idx="1"/>
+          </p:nvPr>
+        </p:nvSpPr>
+        <p:spPr>
+          <a:xfrm>
+            <a:off x="143435" y="1362637"/>
+            <a:ext cx="11080378" cy="5307104"/>
+          </a:xfrm>
+        </p:spPr>
+        <p:txBody>
+          <a:bodyPr>
+            <a:noAutofit/>
+          </a:bodyPr>
+          <a:lstStyle/>
+          <a:p>
+            <a:pPr marL="0" indent="0" algn="just">
+              <a:buNone/>
+            </a:pPr>
+            <a:r>
+              <a:rPr lang="pl-PL" sz="1600" dirty="0"/>
+              <a:t>Użytkownik za pomocą gałki analogowej prawego kontrolera ruchowego porusza się w przestrzeni trójwymiarowej. Może on się przemieszczać po dwóch osiach ze stałą prędkością. Naturalny powolny ruch zmniejsza ryzyko choroby symulacyjnej oraz nie dezorientuje użytkownika jak teleportacja. Dodatkowo implementacja tego rozwiązania wymaga mniejszego nakładu pracy i daje lepsze efekty w porównaniu do teleportacji.</a:t>
+            </a:r>
+          </a:p>
+          <a:p>
+            <a:pPr marL="0" indent="0" algn="just">
+              <a:buNone/>
+            </a:pPr>
+            <a:endParaRPr lang="pl-PL" sz="1600" dirty="0"/>
+          </a:p>
+          <a:p>
+            <a:pPr marL="0" indent="0" algn="just">
+              <a:buNone/>
+            </a:pPr>
+            <a:r>
+              <a:rPr lang="pl-PL" sz="1600" dirty="0"/>
+              <a:t>Użytkownik za pomocą gałki analogowej lewego kontrolera ruchowego obraca się w przestrzeni trójwymiarowej. Może on się obracać wokół jednej osi o kąt 45 stopni. Takie rozwiązanie jest potrzebne, by móc korygować orientacje w przestrzeni 3D oraz dać możliwość obrotu w sytuacji, gdzie fizyczny obrót nie jest możliwy. To jest bardzo kluczowa funkcjonalność bez której interakcja w wirtualnym świecie byłaby utrudniona i mniej wygodna dla użytkownika.</a:t>
+            </a:r>
+          </a:p>
+          <a:p>
+            <a:pPr marL="0" indent="0" algn="just">
+              <a:buNone/>
+            </a:pPr>
+            <a:endParaRPr lang="pl-PL" sz="1600" dirty="0"/>
+          </a:p>
+          <a:p>
+            <a:pPr marL="0" indent="0" algn="just">
+              <a:buNone/>
+            </a:pPr>
+            <a:r>
+              <a:rPr lang="pl-PL" sz="1600" dirty="0"/>
+              <a:t>Choroba symulatorowa - zespół dolegliwości, takich jak nudności, zawroty głowy, bóle głowy i dezorientacja, które pojawiają się u części osób podczas korzystania z technologii wirtualnej rzeczywistości (VR). Wynika ona z konfliktu sensorycznego: wzrok informuje mózg o ruchu w wirtualnym świecie, podczas gdy ciało pozostaje nieruchome. Podobna do choroby lokomocyjnej, choroba symulatorowa jest często związana z brakiem synchronizacji między ruchem głowy a obrazem na ekranie, sztuczną lokomocją w grze i innymi czynnikami, takimi jak niska częstotliwość odświeżania obrazu. </a:t>
+            </a:r>
+          </a:p>
+        </p:txBody>
+      </p:sp>
+    </p:spTree>
+    <p:extLst>
+      <p:ext uri="{BB962C8B-B14F-4D97-AF65-F5344CB8AC3E}">
+        <p14:creationId xmlns:p14="http://schemas.microsoft.com/office/powerpoint/2010/main" val="2672094846"/>
+      </p:ext>
+    </p:extLst>
+  </p:cSld>
+  <p:clrMapOvr>
+    <a:masterClrMapping/>
+  </p:clrMapOvr>
+</p:sld>
+</file>
+
+<file path=ppt/slides/slide7.xml><?xml version="1.0" encoding="utf-8"?>
+<p:sld xmlns:a="http://schemas.openxmlformats.org/drawingml/2006/main" xmlns:r="http://schemas.openxmlformats.org/officeDocument/2006/relationships" xmlns:p="http://schemas.openxmlformats.org/presentationml/2006/main">
+  <p:cSld>
+    <p:spTree>
+      <p:nvGrpSpPr>
+        <p:cNvPr id="1" name="">
+          <a:extLst>
+            <a:ext uri="{FF2B5EF4-FFF2-40B4-BE49-F238E27FC236}">
+              <a16:creationId xmlns:a16="http://schemas.microsoft.com/office/drawing/2014/main" id="{E17646D4-83C9-F107-5593-692B8828A6CC}"/>
+            </a:ext>
+          </a:extLst>
+        </p:cNvPr>
+        <p:cNvGrpSpPr/>
+        <p:nvPr/>
+      </p:nvGrpSpPr>
+      <p:grpSpPr>
+        <a:xfrm>
+          <a:off x="0" y="0"/>
+          <a:ext cx="0" cy="0"/>
+          <a:chOff x="0" y="0"/>
+          <a:chExt cx="0" cy="0"/>
+        </a:xfrm>
+      </p:grpSpPr>
+      <p:sp>
+        <p:nvSpPr>
+          <p:cNvPr id="2" name="Tytuł 1">
+            <a:extLst>
+              <a:ext uri="{FF2B5EF4-FFF2-40B4-BE49-F238E27FC236}">
+                <a16:creationId xmlns:a16="http://schemas.microsoft.com/office/drawing/2014/main" id="{DEC05EC7-73D0-B53B-8F7C-F4B68AB67CDC}"/>
+              </a:ext>
+            </a:extLst>
+          </p:cNvPr>
+          <p:cNvSpPr>
+            <a:spLocks noGrp="1"/>
+          </p:cNvSpPr>
+          <p:nvPr>
+            <p:ph type="title"/>
+          </p:nvPr>
+        </p:nvSpPr>
+        <p:spPr>
+          <a:xfrm>
+            <a:off x="143435" y="367554"/>
+            <a:ext cx="11080378" cy="995082"/>
+          </a:xfrm>
+        </p:spPr>
+        <p:txBody>
+          <a:bodyPr>
+            <a:normAutofit/>
+          </a:bodyPr>
+          <a:lstStyle/>
+          <a:p>
+            <a:r>
+              <a:rPr lang="pl-PL" dirty="0"/>
+              <a:t>Interakcja z obiektami</a:t>
+            </a:r>
+          </a:p>
+        </p:txBody>
+      </p:sp>
+      <p:sp>
+        <p:nvSpPr>
+          <p:cNvPr id="3" name="Symbol zastępczy zawartości 2">
+            <a:extLst>
+              <a:ext uri="{FF2B5EF4-FFF2-40B4-BE49-F238E27FC236}">
+                <a16:creationId xmlns:a16="http://schemas.microsoft.com/office/drawing/2014/main" id="{D6AA935A-1ECF-E643-B6F1-0F698AC214B9}"/>
+              </a:ext>
+            </a:extLst>
+          </p:cNvPr>
+          <p:cNvSpPr>
+            <a:spLocks noGrp="1"/>
+          </p:cNvSpPr>
+          <p:nvPr>
+            <p:ph idx="1"/>
+          </p:nvPr>
+        </p:nvSpPr>
+        <p:spPr>
+          <a:xfrm>
+            <a:off x="143435" y="1362637"/>
+            <a:ext cx="11080378" cy="5307104"/>
+          </a:xfrm>
+        </p:spPr>
+        <p:txBody>
+          <a:bodyPr>
+            <a:noAutofit/>
+          </a:bodyPr>
+          <a:lstStyle/>
+          <a:p>
+            <a:pPr marL="0" indent="0" algn="just">
+              <a:buNone/>
+            </a:pPr>
+            <a:r>
+              <a:rPr lang="pl-PL" sz="1600" dirty="0"/>
+              <a:t>Użytkownik za pomocą kontrolerów ruchowych jest ma możliwość wejścia w interakcje z obiektami fizycznymi w przestrzeni 3D. Może je podnosić i przestawiać. Ręce też są obiektami fizycznymi, czyli mogą wchodzić w kolizje z innymi obiektami. Dzięki temu rozwiązaniu przemieszczanie przedmiotów w przestrzeni trójwymiarowej jest bardziej naturalne i intuicyjne.</a:t>
+            </a:r>
+          </a:p>
+        </p:txBody>
+      </p:sp>
+    </p:spTree>
+    <p:extLst>
+      <p:ext uri="{BB962C8B-B14F-4D97-AF65-F5344CB8AC3E}">
+        <p14:creationId xmlns:p14="http://schemas.microsoft.com/office/powerpoint/2010/main" val="596153641"/>
+      </p:ext>
+    </p:extLst>
+  </p:cSld>
+  <p:clrMapOvr>
+    <a:masterClrMapping/>
+  </p:clrMapOvr>
+</p:sld>
+</file>
+
+<file path=ppt/slides/slide8.xml><?xml version="1.0" encoding="utf-8"?>
+<p:sld xmlns:a="http://schemas.openxmlformats.org/drawingml/2006/main" xmlns:r="http://schemas.openxmlformats.org/officeDocument/2006/relationships" xmlns:p="http://schemas.openxmlformats.org/presentationml/2006/main">
+  <p:cSld>
+    <p:spTree>
+      <p:nvGrpSpPr>
+        <p:cNvPr id="1" name="">
+          <a:extLst>
+            <a:ext uri="{FF2B5EF4-FFF2-40B4-BE49-F238E27FC236}">
+              <a16:creationId xmlns:a16="http://schemas.microsoft.com/office/drawing/2014/main" id="{ABB50947-C53B-33EC-E9CD-6771592EB5F1}"/>
+            </a:ext>
+          </a:extLst>
+        </p:cNvPr>
+        <p:cNvGrpSpPr/>
+        <p:nvPr/>
+      </p:nvGrpSpPr>
+      <p:grpSpPr>
+        <a:xfrm>
+          <a:off x="0" y="0"/>
+          <a:ext cx="0" cy="0"/>
+          <a:chOff x="0" y="0"/>
+          <a:chExt cx="0" cy="0"/>
+        </a:xfrm>
+      </p:grpSpPr>
+      <p:sp>
+        <p:nvSpPr>
+          <p:cNvPr id="2" name="Tytuł 1">
+            <a:extLst>
+              <a:ext uri="{FF2B5EF4-FFF2-40B4-BE49-F238E27FC236}">
+                <a16:creationId xmlns:a16="http://schemas.microsoft.com/office/drawing/2014/main" id="{BCFB08A8-51D7-126C-1CF6-C870A8CE4A71}"/>
+              </a:ext>
+            </a:extLst>
+          </p:cNvPr>
+          <p:cNvSpPr>
+            <a:spLocks noGrp="1"/>
+          </p:cNvSpPr>
+          <p:nvPr>
+            <p:ph type="title"/>
+          </p:nvPr>
+        </p:nvSpPr>
+        <p:spPr>
+          <a:xfrm>
+            <a:off x="143435" y="367554"/>
+            <a:ext cx="11080378" cy="995082"/>
+          </a:xfrm>
+        </p:spPr>
+        <p:txBody>
+          <a:bodyPr>
+            <a:normAutofit/>
+          </a:bodyPr>
+          <a:lstStyle/>
+          <a:p>
+            <a:r>
+              <a:rPr lang="pl-PL" dirty="0"/>
+              <a:t>Uruchamianie bezpośrednio z gogli VR</a:t>
+            </a:r>
+          </a:p>
+        </p:txBody>
+      </p:sp>
+      <p:sp>
+        <p:nvSpPr>
+          <p:cNvPr id="3" name="Symbol zastępczy zawartości 2">
+            <a:extLst>
+              <a:ext uri="{FF2B5EF4-FFF2-40B4-BE49-F238E27FC236}">
+                <a16:creationId xmlns:a16="http://schemas.microsoft.com/office/drawing/2014/main" id="{1345DC78-5587-91ED-5416-76871FDD16A7}"/>
+              </a:ext>
+            </a:extLst>
+          </p:cNvPr>
+          <p:cNvSpPr>
+            <a:spLocks noGrp="1"/>
+          </p:cNvSpPr>
+          <p:nvPr>
+            <p:ph idx="1"/>
+          </p:nvPr>
+        </p:nvSpPr>
+        <p:spPr>
+          <a:xfrm>
+            <a:off x="143435" y="1362637"/>
+            <a:ext cx="11080378" cy="5307104"/>
+          </a:xfrm>
+        </p:spPr>
+        <p:txBody>
+          <a:bodyPr>
+            <a:noAutofit/>
+          </a:bodyPr>
+          <a:lstStyle/>
+          <a:p>
+            <a:pPr marL="0" indent="0" algn="just">
+              <a:buNone/>
+            </a:pPr>
+            <a:r>
+              <a:rPr lang="pl-PL" sz="1600" dirty="0"/>
+              <a:t>Aplikacja uruchamia się bezpośrednio na zestawie VR, czyniąc program bardziej dostępnym i wygodniejszym dla użytkownika. Urządzeniem na którym będzie uruchamiany program będą gogle Meta Quest 3. Wybór tego konkretnego zestawu VR został oparty jego specyfikacje. Meta Quest 3 oferuje otwarte środowisko oparte o system Android, które jest wspierane przez silnik </a:t>
+            </a:r>
+            <a:r>
+              <a:rPr lang="pl-PL" sz="1600" dirty="0" err="1"/>
+              <a:t>Unreal</a:t>
+            </a:r>
+            <a:r>
+              <a:rPr lang="pl-PL" sz="1600" dirty="0"/>
+              <a:t> Engine 5. Dodatkowo moc obliczeniowa pozwala na uruchomienie zaawansowanych aplikacji wykorzystujących grafikę trójwymiarową. Ważnym aspektem podczas wyboru okazała się cena zestawu, która nie jest wygórowana przy oferowaniu pełnego doświadczenia wirtualnej rzeczywistości.</a:t>
+            </a:r>
+          </a:p>
+          <a:p>
+            <a:pPr marL="0" indent="0" algn="just">
+              <a:buNone/>
+            </a:pPr>
+            <a:r>
+              <a:rPr lang="pl-PL" sz="1600" dirty="0"/>
+              <a:t>							  Zestaw Meta Quest 3</a:t>
+            </a:r>
+          </a:p>
+        </p:txBody>
+      </p:sp>
+      <p:pic>
+        <p:nvPicPr>
+          <p:cNvPr id="5" name="Obraz 4">
+            <a:extLst>
+              <a:ext uri="{FF2B5EF4-FFF2-40B4-BE49-F238E27FC236}">
+                <a16:creationId xmlns:a16="http://schemas.microsoft.com/office/drawing/2014/main" id="{40DF6BF1-EB42-4868-4EDA-773CB7150A57}"/>
+              </a:ext>
+            </a:extLst>
+          </p:cNvPr>
+          <p:cNvPicPr>
+            <a:picLocks noChangeAspect="1"/>
+          </p:cNvPicPr>
+          <p:nvPr/>
+        </p:nvPicPr>
+        <p:blipFill>
+          <a:blip r:embed="rId2">
+            <a:extLst>
+              <a:ext uri="{28A0092B-C50C-407E-A947-70E740481C1C}">
+                <a14:useLocalDpi xmlns:a14="http://schemas.microsoft.com/office/drawing/2010/main" val="0"/>
+              </a:ext>
+            </a:extLst>
+          </a:blip>
+          <a:stretch>
+            <a:fillRect/>
+          </a:stretch>
+        </p:blipFill>
+        <p:spPr>
+          <a:xfrm>
+            <a:off x="591671" y="3224604"/>
+            <a:ext cx="6096000" cy="3185160"/>
+          </a:xfrm>
+          <a:prstGeom prst="rect">
+            <a:avLst/>
+          </a:prstGeom>
+        </p:spPr>
+      </p:pic>
+    </p:spTree>
+    <p:extLst>
+      <p:ext uri="{BB962C8B-B14F-4D97-AF65-F5344CB8AC3E}">
+        <p14:creationId xmlns:p14="http://schemas.microsoft.com/office/powerpoint/2010/main" val="3530918276"/>
+      </p:ext>
+    </p:extLst>
+  </p:cSld>
+  <p:clrMapOvr>
+    <a:masterClrMapping/>
+  </p:clrMapOvr>
+</p:sld>
+</file>
+
+<file path=ppt/slides/slide9.xml><?xml version="1.0" encoding="utf-8"?>
 <p:sld xmlns:a="http://schemas.openxmlformats.org/drawingml/2006/main" xmlns:r="http://schemas.openxmlformats.org/officeDocument/2006/relationships" xmlns:p="http://schemas.openxmlformats.org/presentationml/2006/main">
   <p:cSld>
     <p:spTree>
@@ -7603,462 +8488,6 @@
     <p:extLst>
       <p:ext uri="{BB962C8B-B14F-4D97-AF65-F5344CB8AC3E}">
         <p14:creationId xmlns:p14="http://schemas.microsoft.com/office/powerpoint/2010/main" val="1222462874"/>
-      </p:ext>
-    </p:extLst>
-  </p:cSld>
-  <p:clrMapOvr>
-    <a:masterClrMapping/>
-  </p:clrMapOvr>
-</p:sld>
-</file>
-
-<file path=ppt/slides/slide7.xml><?xml version="1.0" encoding="utf-8"?>
-<p:sld xmlns:a="http://schemas.openxmlformats.org/drawingml/2006/main" xmlns:r="http://schemas.openxmlformats.org/officeDocument/2006/relationships" xmlns:p="http://schemas.openxmlformats.org/presentationml/2006/main">
-  <p:cSld>
-    <p:spTree>
-      <p:nvGrpSpPr>
-        <p:cNvPr id="1" name="">
-          <a:extLst>
-            <a:ext uri="{FF2B5EF4-FFF2-40B4-BE49-F238E27FC236}">
-              <a16:creationId xmlns:a16="http://schemas.microsoft.com/office/drawing/2014/main" id="{9950911E-E0E7-EF43-E309-ACDF7D7FD92D}"/>
-            </a:ext>
-          </a:extLst>
-        </p:cNvPr>
-        <p:cNvGrpSpPr/>
-        <p:nvPr/>
-      </p:nvGrpSpPr>
-      <p:grpSpPr>
-        <a:xfrm>
-          <a:off x="0" y="0"/>
-          <a:ext cx="0" cy="0"/>
-          <a:chOff x="0" y="0"/>
-          <a:chExt cx="0" cy="0"/>
-        </a:xfrm>
-      </p:grpSpPr>
-      <p:sp>
-        <p:nvSpPr>
-          <p:cNvPr id="2" name="Tytuł 1">
-            <a:extLst>
-              <a:ext uri="{FF2B5EF4-FFF2-40B4-BE49-F238E27FC236}">
-                <a16:creationId xmlns:a16="http://schemas.microsoft.com/office/drawing/2014/main" id="{E8ED127B-AD6D-C9C6-F7F0-4A76E95155A0}"/>
-              </a:ext>
-            </a:extLst>
-          </p:cNvPr>
-          <p:cNvSpPr>
-            <a:spLocks noGrp="1"/>
-          </p:cNvSpPr>
-          <p:nvPr>
-            <p:ph type="title"/>
-          </p:nvPr>
-        </p:nvSpPr>
-        <p:spPr>
-          <a:xfrm>
-            <a:off x="143435" y="367554"/>
-            <a:ext cx="11905130" cy="995082"/>
-          </a:xfrm>
-        </p:spPr>
-        <p:txBody>
-          <a:bodyPr>
-            <a:normAutofit/>
-          </a:bodyPr>
-          <a:lstStyle/>
-          <a:p>
-            <a:r>
-              <a:rPr lang="pl-PL" dirty="0"/>
-              <a:t>Tablet</a:t>
-            </a:r>
-          </a:p>
-        </p:txBody>
-      </p:sp>
-      <p:sp>
-        <p:nvSpPr>
-          <p:cNvPr id="3" name="Symbol zastępczy zawartości 2">
-            <a:extLst>
-              <a:ext uri="{FF2B5EF4-FFF2-40B4-BE49-F238E27FC236}">
-                <a16:creationId xmlns:a16="http://schemas.microsoft.com/office/drawing/2014/main" id="{C5BB6030-4126-2214-1019-37021E5A65AF}"/>
-              </a:ext>
-            </a:extLst>
-          </p:cNvPr>
-          <p:cNvSpPr>
-            <a:spLocks noGrp="1"/>
-          </p:cNvSpPr>
-          <p:nvPr>
-            <p:ph idx="1"/>
-          </p:nvPr>
-        </p:nvSpPr>
-        <p:spPr>
-          <a:xfrm>
-            <a:off x="143434" y="1362637"/>
-            <a:ext cx="11905129" cy="5307104"/>
-          </a:xfrm>
-        </p:spPr>
-        <p:txBody>
-          <a:bodyPr/>
-          <a:lstStyle/>
-          <a:p>
-            <a:pPr marL="0" indent="0">
-              <a:buNone/>
-            </a:pPr>
-            <a:endParaRPr lang="pl-PL" dirty="0"/>
-          </a:p>
-          <a:p>
-            <a:pPr marL="0" indent="0">
-              <a:buNone/>
-            </a:pPr>
-            <a:endParaRPr lang="pl-PL" dirty="0"/>
-          </a:p>
-          <a:p>
-            <a:pPr marL="0" indent="0">
-              <a:buNone/>
-            </a:pPr>
-            <a:endParaRPr lang="pl-PL" dirty="0"/>
-          </a:p>
-          <a:p>
-            <a:pPr marL="0" indent="0">
-              <a:buNone/>
-            </a:pPr>
-            <a:endParaRPr lang="pl-PL" dirty="0"/>
-          </a:p>
-          <a:p>
-            <a:pPr marL="0" indent="0">
-              <a:buNone/>
-            </a:pPr>
-            <a:endParaRPr lang="pl-PL" dirty="0"/>
-          </a:p>
-          <a:p>
-            <a:pPr marL="0" indent="0">
-              <a:buNone/>
-            </a:pPr>
-            <a:endParaRPr lang="pl-PL" dirty="0"/>
-          </a:p>
-          <a:p>
-            <a:pPr marL="0" indent="0">
-              <a:buNone/>
-            </a:pPr>
-            <a:endParaRPr lang="pl-PL" dirty="0"/>
-          </a:p>
-          <a:p>
-            <a:pPr marL="0" indent="0">
-              <a:buNone/>
-            </a:pPr>
-            <a:endParaRPr lang="pl-PL" dirty="0"/>
-          </a:p>
-          <a:p>
-            <a:pPr marL="0" indent="0">
-              <a:buNone/>
-            </a:pPr>
-            <a:endParaRPr lang="pl-PL" dirty="0"/>
-          </a:p>
-        </p:txBody>
-      </p:sp>
-    </p:spTree>
-    <p:extLst>
-      <p:ext uri="{BB962C8B-B14F-4D97-AF65-F5344CB8AC3E}">
-        <p14:creationId xmlns:p14="http://schemas.microsoft.com/office/powerpoint/2010/main" val="3751241253"/>
-      </p:ext>
-    </p:extLst>
-  </p:cSld>
-  <p:clrMapOvr>
-    <a:masterClrMapping/>
-  </p:clrMapOvr>
-</p:sld>
-</file>
-
-<file path=ppt/slides/slide8.xml><?xml version="1.0" encoding="utf-8"?>
-<p:sld xmlns:a="http://schemas.openxmlformats.org/drawingml/2006/main" xmlns:r="http://schemas.openxmlformats.org/officeDocument/2006/relationships" xmlns:p="http://schemas.openxmlformats.org/presentationml/2006/main">
-  <p:cSld>
-    <p:spTree>
-      <p:nvGrpSpPr>
-        <p:cNvPr id="1" name="">
-          <a:extLst>
-            <a:ext uri="{FF2B5EF4-FFF2-40B4-BE49-F238E27FC236}">
-              <a16:creationId xmlns:a16="http://schemas.microsoft.com/office/drawing/2014/main" id="{90DFB05C-8B88-A0E8-5A83-083B979E1EB7}"/>
-            </a:ext>
-          </a:extLst>
-        </p:cNvPr>
-        <p:cNvGrpSpPr/>
-        <p:nvPr/>
-      </p:nvGrpSpPr>
-      <p:grpSpPr>
-        <a:xfrm>
-          <a:off x="0" y="0"/>
-          <a:ext cx="0" cy="0"/>
-          <a:chOff x="0" y="0"/>
-          <a:chExt cx="0" cy="0"/>
-        </a:xfrm>
-      </p:grpSpPr>
-      <p:sp>
-        <p:nvSpPr>
-          <p:cNvPr id="2" name="Tytuł 1">
-            <a:extLst>
-              <a:ext uri="{FF2B5EF4-FFF2-40B4-BE49-F238E27FC236}">
-                <a16:creationId xmlns:a16="http://schemas.microsoft.com/office/drawing/2014/main" id="{81960820-2062-6601-9318-8725A7015756}"/>
-              </a:ext>
-            </a:extLst>
-          </p:cNvPr>
-          <p:cNvSpPr>
-            <a:spLocks noGrp="1"/>
-          </p:cNvSpPr>
-          <p:nvPr>
-            <p:ph type="title"/>
-          </p:nvPr>
-        </p:nvSpPr>
-        <p:spPr>
-          <a:xfrm>
-            <a:off x="143435" y="367554"/>
-            <a:ext cx="11905130" cy="995082"/>
-          </a:xfrm>
-        </p:spPr>
-        <p:txBody>
-          <a:bodyPr>
-            <a:normAutofit/>
-          </a:bodyPr>
-          <a:lstStyle/>
-          <a:p>
-            <a:r>
-              <a:rPr lang="pl-PL" dirty="0"/>
-              <a:t>Tworzenie przedmiotów</a:t>
-            </a:r>
-          </a:p>
-        </p:txBody>
-      </p:sp>
-      <p:sp>
-        <p:nvSpPr>
-          <p:cNvPr id="3" name="Symbol zastępczy zawartości 2">
-            <a:extLst>
-              <a:ext uri="{FF2B5EF4-FFF2-40B4-BE49-F238E27FC236}">
-                <a16:creationId xmlns:a16="http://schemas.microsoft.com/office/drawing/2014/main" id="{456EBFDA-A13A-B307-3AA6-DD00420FFE77}"/>
-              </a:ext>
-            </a:extLst>
-          </p:cNvPr>
-          <p:cNvSpPr>
-            <a:spLocks noGrp="1"/>
-          </p:cNvSpPr>
-          <p:nvPr>
-            <p:ph idx="1"/>
-          </p:nvPr>
-        </p:nvSpPr>
-        <p:spPr>
-          <a:xfrm>
-            <a:off x="143434" y="1362637"/>
-            <a:ext cx="11905129" cy="5307104"/>
-          </a:xfrm>
-        </p:spPr>
-        <p:txBody>
-          <a:bodyPr/>
-          <a:lstStyle/>
-          <a:p>
-            <a:pPr marL="0" indent="0">
-              <a:buNone/>
-            </a:pPr>
-            <a:endParaRPr lang="pl-PL" dirty="0"/>
-          </a:p>
-          <a:p>
-            <a:pPr marL="0" indent="0">
-              <a:buNone/>
-            </a:pPr>
-            <a:endParaRPr lang="pl-PL" dirty="0"/>
-          </a:p>
-          <a:p>
-            <a:pPr marL="0" indent="0">
-              <a:buNone/>
-            </a:pPr>
-            <a:endParaRPr lang="pl-PL" dirty="0"/>
-          </a:p>
-          <a:p>
-            <a:pPr marL="0" indent="0">
-              <a:buNone/>
-            </a:pPr>
-            <a:endParaRPr lang="pl-PL" dirty="0"/>
-          </a:p>
-          <a:p>
-            <a:pPr marL="0" indent="0">
-              <a:buNone/>
-            </a:pPr>
-            <a:endParaRPr lang="pl-PL" dirty="0"/>
-          </a:p>
-          <a:p>
-            <a:pPr marL="0" indent="0">
-              <a:buNone/>
-            </a:pPr>
-            <a:endParaRPr lang="pl-PL" dirty="0"/>
-          </a:p>
-          <a:p>
-            <a:pPr marL="0" indent="0">
-              <a:buNone/>
-            </a:pPr>
-            <a:endParaRPr lang="pl-PL" dirty="0"/>
-          </a:p>
-          <a:p>
-            <a:pPr marL="0" indent="0">
-              <a:buNone/>
-            </a:pPr>
-            <a:endParaRPr lang="pl-PL" dirty="0"/>
-          </a:p>
-          <a:p>
-            <a:pPr marL="0" indent="0">
-              <a:buNone/>
-            </a:pPr>
-            <a:endParaRPr lang="pl-PL" dirty="0"/>
-          </a:p>
-        </p:txBody>
-      </p:sp>
-    </p:spTree>
-    <p:extLst>
-      <p:ext uri="{BB962C8B-B14F-4D97-AF65-F5344CB8AC3E}">
-        <p14:creationId xmlns:p14="http://schemas.microsoft.com/office/powerpoint/2010/main" val="3865485290"/>
-      </p:ext>
-    </p:extLst>
-  </p:cSld>
-  <p:clrMapOvr>
-    <a:masterClrMapping/>
-  </p:clrMapOvr>
-</p:sld>
-</file>
-
-<file path=ppt/slides/slide9.xml><?xml version="1.0" encoding="utf-8"?>
-<p:sld xmlns:a="http://schemas.openxmlformats.org/drawingml/2006/main" xmlns:r="http://schemas.openxmlformats.org/officeDocument/2006/relationships" xmlns:p="http://schemas.openxmlformats.org/presentationml/2006/main">
-  <p:cSld>
-    <p:spTree>
-      <p:nvGrpSpPr>
-        <p:cNvPr id="1" name="">
-          <a:extLst>
-            <a:ext uri="{FF2B5EF4-FFF2-40B4-BE49-F238E27FC236}">
-              <a16:creationId xmlns:a16="http://schemas.microsoft.com/office/drawing/2014/main" id="{22432F2A-4009-B66D-7FB5-31559E0AE0F7}"/>
-            </a:ext>
-          </a:extLst>
-        </p:cNvPr>
-        <p:cNvGrpSpPr/>
-        <p:nvPr/>
-      </p:nvGrpSpPr>
-      <p:grpSpPr>
-        <a:xfrm>
-          <a:off x="0" y="0"/>
-          <a:ext cx="0" cy="0"/>
-          <a:chOff x="0" y="0"/>
-          <a:chExt cx="0" cy="0"/>
-        </a:xfrm>
-      </p:grpSpPr>
-      <p:sp>
-        <p:nvSpPr>
-          <p:cNvPr id="2" name="Tytuł 1">
-            <a:extLst>
-              <a:ext uri="{FF2B5EF4-FFF2-40B4-BE49-F238E27FC236}">
-                <a16:creationId xmlns:a16="http://schemas.microsoft.com/office/drawing/2014/main" id="{A8E4E4B9-5E68-8EE5-1DF8-9E82B8527AEF}"/>
-              </a:ext>
-            </a:extLst>
-          </p:cNvPr>
-          <p:cNvSpPr>
-            <a:spLocks noGrp="1"/>
-          </p:cNvSpPr>
-          <p:nvPr>
-            <p:ph type="title"/>
-          </p:nvPr>
-        </p:nvSpPr>
-        <p:spPr>
-          <a:xfrm>
-            <a:off x="143435" y="367554"/>
-            <a:ext cx="11905130" cy="995082"/>
-          </a:xfrm>
-        </p:spPr>
-        <p:txBody>
-          <a:bodyPr>
-            <a:normAutofit/>
-          </a:bodyPr>
-          <a:lstStyle/>
-          <a:p>
-            <a:r>
-              <a:rPr lang="pl-PL" dirty="0"/>
-              <a:t>Interakcja z przedmiotami</a:t>
-            </a:r>
-          </a:p>
-        </p:txBody>
-      </p:sp>
-      <p:sp>
-        <p:nvSpPr>
-          <p:cNvPr id="3" name="Symbol zastępczy zawartości 2">
-            <a:extLst>
-              <a:ext uri="{FF2B5EF4-FFF2-40B4-BE49-F238E27FC236}">
-                <a16:creationId xmlns:a16="http://schemas.microsoft.com/office/drawing/2014/main" id="{0C81E2E9-A1E2-3787-B88D-4E0A6192A2C7}"/>
-              </a:ext>
-            </a:extLst>
-          </p:cNvPr>
-          <p:cNvSpPr>
-            <a:spLocks noGrp="1"/>
-          </p:cNvSpPr>
-          <p:nvPr>
-            <p:ph idx="1"/>
-          </p:nvPr>
-        </p:nvSpPr>
-        <p:spPr>
-          <a:xfrm>
-            <a:off x="143434" y="1362637"/>
-            <a:ext cx="11905129" cy="5307104"/>
-          </a:xfrm>
-        </p:spPr>
-        <p:txBody>
-          <a:bodyPr/>
-          <a:lstStyle/>
-          <a:p>
-            <a:pPr marL="0" indent="0">
-              <a:buNone/>
-            </a:pPr>
-            <a:endParaRPr lang="pl-PL" dirty="0"/>
-          </a:p>
-          <a:p>
-            <a:pPr marL="0" indent="0">
-              <a:buNone/>
-            </a:pPr>
-            <a:endParaRPr lang="pl-PL" dirty="0"/>
-          </a:p>
-          <a:p>
-            <a:pPr marL="0" indent="0">
-              <a:buNone/>
-            </a:pPr>
-            <a:endParaRPr lang="pl-PL" dirty="0"/>
-          </a:p>
-          <a:p>
-            <a:pPr marL="0" indent="0">
-              <a:buNone/>
-            </a:pPr>
-            <a:endParaRPr lang="pl-PL" dirty="0"/>
-          </a:p>
-          <a:p>
-            <a:pPr marL="0" indent="0">
-              <a:buNone/>
-            </a:pPr>
-            <a:endParaRPr lang="pl-PL" dirty="0"/>
-          </a:p>
-          <a:p>
-            <a:pPr marL="0" indent="0">
-              <a:buNone/>
-            </a:pPr>
-            <a:endParaRPr lang="pl-PL" dirty="0"/>
-          </a:p>
-          <a:p>
-            <a:pPr marL="0" indent="0">
-              <a:buNone/>
-            </a:pPr>
-            <a:endParaRPr lang="pl-PL" dirty="0"/>
-          </a:p>
-          <a:p>
-            <a:pPr marL="0" indent="0">
-              <a:buNone/>
-            </a:pPr>
-            <a:endParaRPr lang="pl-PL" dirty="0"/>
-          </a:p>
-          <a:p>
-            <a:pPr marL="0" indent="0">
-              <a:buNone/>
-            </a:pPr>
-            <a:endParaRPr lang="pl-PL" dirty="0"/>
-          </a:p>
-        </p:txBody>
-      </p:sp>
-    </p:spTree>
-    <p:extLst>
-      <p:ext uri="{BB962C8B-B14F-4D97-AF65-F5344CB8AC3E}">
-        <p14:creationId xmlns:p14="http://schemas.microsoft.com/office/powerpoint/2010/main" val="4140615616"/>
       </p:ext>
     </p:extLst>
   </p:cSld>

--- a/PrezentacjaAndrzejParuch.pptx
+++ b/PrezentacjaAndrzejParuch.pptx
@@ -18,10 +18,9 @@
     <p:sldId id="261" r:id="rId12"/>
     <p:sldId id="262" r:id="rId13"/>
     <p:sldId id="264" r:id="rId14"/>
-    <p:sldId id="265" r:id="rId15"/>
-    <p:sldId id="266" r:id="rId16"/>
-    <p:sldId id="267" r:id="rId17"/>
-    <p:sldId id="268" r:id="rId18"/>
+    <p:sldId id="266" r:id="rId15"/>
+    <p:sldId id="267" r:id="rId16"/>
+    <p:sldId id="268" r:id="rId17"/>
   </p:sldIdLst>
   <p:sldSz cx="12192000" cy="6858000"/>
   <p:notesSz cx="6858000" cy="9144000"/>
@@ -296,7 +295,7 @@
           <a:p>
             <a:fld id="{CBBFB598-B412-4BAA-8D00-58612E105D61}" type="datetimeFigureOut">
               <a:rPr lang="pl-PL" smtClean="0"/>
-              <a:t>7.12.2025</a:t>
+              <a:t>8.12.2025</a:t>
             </a:fld>
             <a:endParaRPr lang="pl-PL"/>
           </a:p>
@@ -524,7 +523,7 @@
           <a:p>
             <a:fld id="{CBBFB598-B412-4BAA-8D00-58612E105D61}" type="datetimeFigureOut">
               <a:rPr lang="pl-PL" smtClean="0"/>
-              <a:t>7.12.2025</a:t>
+              <a:t>8.12.2025</a:t>
             </a:fld>
             <a:endParaRPr lang="pl-PL"/>
           </a:p>
@@ -704,7 +703,7 @@
           <a:p>
             <a:fld id="{CBBFB598-B412-4BAA-8D00-58612E105D61}" type="datetimeFigureOut">
               <a:rPr lang="pl-PL" smtClean="0"/>
-              <a:t>7.12.2025</a:t>
+              <a:t>8.12.2025</a:t>
             </a:fld>
             <a:endParaRPr lang="pl-PL"/>
           </a:p>
@@ -874,7 +873,7 @@
           <a:p>
             <a:fld id="{CBBFB598-B412-4BAA-8D00-58612E105D61}" type="datetimeFigureOut">
               <a:rPr lang="pl-PL" smtClean="0"/>
-              <a:t>7.12.2025</a:t>
+              <a:t>8.12.2025</a:t>
             </a:fld>
             <a:endParaRPr lang="pl-PL"/>
           </a:p>
@@ -1128,7 +1127,7 @@
           <a:p>
             <a:fld id="{CBBFB598-B412-4BAA-8D00-58612E105D61}" type="datetimeFigureOut">
               <a:rPr lang="pl-PL" smtClean="0"/>
-              <a:t>7.12.2025</a:t>
+              <a:t>8.12.2025</a:t>
             </a:fld>
             <a:endParaRPr lang="pl-PL"/>
           </a:p>
@@ -1454,7 +1453,7 @@
           <a:p>
             <a:fld id="{CBBFB598-B412-4BAA-8D00-58612E105D61}" type="datetimeFigureOut">
               <a:rPr lang="pl-PL" smtClean="0"/>
-              <a:t>7.12.2025</a:t>
+              <a:t>8.12.2025</a:t>
             </a:fld>
             <a:endParaRPr lang="pl-PL"/>
           </a:p>
@@ -1905,7 +1904,7 @@
           <a:p>
             <a:fld id="{CBBFB598-B412-4BAA-8D00-58612E105D61}" type="datetimeFigureOut">
               <a:rPr lang="pl-PL" smtClean="0"/>
-              <a:t>7.12.2025</a:t>
+              <a:t>8.12.2025</a:t>
             </a:fld>
             <a:endParaRPr lang="pl-PL"/>
           </a:p>
@@ -2023,7 +2022,7 @@
           <a:p>
             <a:fld id="{CBBFB598-B412-4BAA-8D00-58612E105D61}" type="datetimeFigureOut">
               <a:rPr lang="pl-PL" smtClean="0"/>
-              <a:t>7.12.2025</a:t>
+              <a:t>8.12.2025</a:t>
             </a:fld>
             <a:endParaRPr lang="pl-PL"/>
           </a:p>
@@ -2118,7 +2117,7 @@
           <a:p>
             <a:fld id="{CBBFB598-B412-4BAA-8D00-58612E105D61}" type="datetimeFigureOut">
               <a:rPr lang="pl-PL" smtClean="0"/>
-              <a:t>7.12.2025</a:t>
+              <a:t>8.12.2025</a:t>
             </a:fld>
             <a:endParaRPr lang="pl-PL"/>
           </a:p>
@@ -2405,7 +2404,7 @@
           <a:p>
             <a:fld id="{CBBFB598-B412-4BAA-8D00-58612E105D61}" type="datetimeFigureOut">
               <a:rPr lang="pl-PL" smtClean="0"/>
-              <a:t>7.12.2025</a:t>
+              <a:t>8.12.2025</a:t>
             </a:fld>
             <a:endParaRPr lang="pl-PL"/>
           </a:p>
@@ -2727,7 +2726,7 @@
           <a:p>
             <a:fld id="{CBBFB598-B412-4BAA-8D00-58612E105D61}" type="datetimeFigureOut">
               <a:rPr lang="pl-PL" smtClean="0"/>
-              <a:t>7.12.2025</a:t>
+              <a:t>8.12.2025</a:t>
             </a:fld>
             <a:endParaRPr lang="pl-PL"/>
           </a:p>
@@ -2981,7 +2980,7 @@
           <a:p>
             <a:fld id="{CBBFB598-B412-4BAA-8D00-58612E105D61}" type="datetimeFigureOut">
               <a:rPr lang="pl-PL" smtClean="0"/>
-              <a:t>7.12.2025</a:t>
+              <a:t>8.12.2025</a:t>
             </a:fld>
             <a:endParaRPr lang="pl-PL"/>
           </a:p>
@@ -3669,66 +3668,23 @@
         </p:nvSpPr>
         <p:spPr>
           <a:xfrm>
-            <a:off x="143434" y="1362637"/>
-            <a:ext cx="11905129" cy="5307104"/>
+            <a:off x="143435" y="1362637"/>
+            <a:ext cx="11080378" cy="5307104"/>
           </a:xfrm>
         </p:spPr>
         <p:txBody>
-          <a:bodyPr/>
+          <a:bodyPr>
+            <a:noAutofit/>
+          </a:bodyPr>
           <a:lstStyle/>
           <a:p>
-            <a:pPr marL="0" indent="0">
-              <a:buNone/>
-            </a:pPr>
-            <a:endParaRPr lang="pl-PL" dirty="0"/>
-          </a:p>
-          <a:p>
-            <a:pPr marL="0" indent="0">
-              <a:buNone/>
-            </a:pPr>
-            <a:endParaRPr lang="pl-PL" dirty="0"/>
-          </a:p>
-          <a:p>
-            <a:pPr marL="0" indent="0">
-              <a:buNone/>
-            </a:pPr>
-            <a:endParaRPr lang="pl-PL" dirty="0"/>
-          </a:p>
-          <a:p>
-            <a:pPr marL="0" indent="0">
-              <a:buNone/>
-            </a:pPr>
-            <a:endParaRPr lang="pl-PL" dirty="0"/>
-          </a:p>
-          <a:p>
-            <a:pPr marL="0" indent="0">
-              <a:buNone/>
-            </a:pPr>
-            <a:endParaRPr lang="pl-PL" dirty="0"/>
-          </a:p>
-          <a:p>
-            <a:pPr marL="0" indent="0">
-              <a:buNone/>
-            </a:pPr>
-            <a:endParaRPr lang="pl-PL" dirty="0"/>
-          </a:p>
-          <a:p>
-            <a:pPr marL="0" indent="0">
-              <a:buNone/>
-            </a:pPr>
-            <a:endParaRPr lang="pl-PL" dirty="0"/>
-          </a:p>
-          <a:p>
-            <a:pPr marL="0" indent="0">
-              <a:buNone/>
-            </a:pPr>
-            <a:endParaRPr lang="pl-PL" dirty="0"/>
-          </a:p>
-          <a:p>
-            <a:pPr marL="0" indent="0">
-              <a:buNone/>
-            </a:pPr>
-            <a:endParaRPr lang="pl-PL" dirty="0"/>
+            <a:pPr marL="0" indent="0" algn="just">
+              <a:buNone/>
+            </a:pPr>
+            <a:r>
+              <a:rPr lang="pl-PL" sz="1600" dirty="0"/>
+              <a:t>Tablet służy za interfejs do obsługi aplikacji. Użytkownik z nim wchodzi w interakcje, by stworzyć przedmioty, ustawić tekstury ścian, postawić stałe obiekty czy nawet zmienić ustawienia. Jest to najważniejsze narzędzie w programie, które umożliwia łatwą i intuicyjną obsługę programu. Interakcja jest oparta o wirtualny dotyk. Ma to symulować interakcję z prawdziwym tabletem, co czyni cały proces projektowania wnętrza bardziej naturalnym oraz łatwiejszym.</a:t>
+            </a:r>
           </a:p>
         </p:txBody>
       </p:sp>
@@ -3821,66 +3777,23 @@
         </p:nvSpPr>
         <p:spPr>
           <a:xfrm>
-            <a:off x="143434" y="1362637"/>
-            <a:ext cx="11905129" cy="5307104"/>
+            <a:off x="143435" y="1362637"/>
+            <a:ext cx="11080378" cy="5307104"/>
           </a:xfrm>
         </p:spPr>
         <p:txBody>
-          <a:bodyPr/>
+          <a:bodyPr>
+            <a:noAutofit/>
+          </a:bodyPr>
           <a:lstStyle/>
           <a:p>
-            <a:pPr marL="0" indent="0">
-              <a:buNone/>
-            </a:pPr>
-            <a:endParaRPr lang="pl-PL" dirty="0"/>
-          </a:p>
-          <a:p>
-            <a:pPr marL="0" indent="0">
-              <a:buNone/>
-            </a:pPr>
-            <a:endParaRPr lang="pl-PL" dirty="0"/>
-          </a:p>
-          <a:p>
-            <a:pPr marL="0" indent="0">
-              <a:buNone/>
-            </a:pPr>
-            <a:endParaRPr lang="pl-PL" dirty="0"/>
-          </a:p>
-          <a:p>
-            <a:pPr marL="0" indent="0">
-              <a:buNone/>
-            </a:pPr>
-            <a:endParaRPr lang="pl-PL" dirty="0"/>
-          </a:p>
-          <a:p>
-            <a:pPr marL="0" indent="0">
-              <a:buNone/>
-            </a:pPr>
-            <a:endParaRPr lang="pl-PL" dirty="0"/>
-          </a:p>
-          <a:p>
-            <a:pPr marL="0" indent="0">
-              <a:buNone/>
-            </a:pPr>
-            <a:endParaRPr lang="pl-PL" dirty="0"/>
-          </a:p>
-          <a:p>
-            <a:pPr marL="0" indent="0">
-              <a:buNone/>
-            </a:pPr>
-            <a:endParaRPr lang="pl-PL" dirty="0"/>
-          </a:p>
-          <a:p>
-            <a:pPr marL="0" indent="0">
-              <a:buNone/>
-            </a:pPr>
-            <a:endParaRPr lang="pl-PL" dirty="0"/>
-          </a:p>
-          <a:p>
-            <a:pPr marL="0" indent="0">
-              <a:buNone/>
-            </a:pPr>
-            <a:endParaRPr lang="pl-PL" dirty="0"/>
+            <a:pPr marL="0" indent="0" algn="just">
+              <a:buNone/>
+            </a:pPr>
+            <a:r>
+              <a:rPr lang="pl-PL" sz="1600" dirty="0"/>
+              <a:t>Tworzenie przedmiotów pozwala na stworzenie w środowisku 3D instancji fizycznego obiektu reprezentujący meble czy akcesoria. Są to obiekty, które użytkownik może podnosić i przesuwać. Ich interakcja z otoczeniem jest oparta o fizykę, więc obiekty mogą ze sobą kolidować i użytkownik może je przesuwać swoim ciałem. Docelowym przeznaczeniem tworzenia przedmiotów jest możliwość utworzenia mebli, które użytkownik dowolnie może przenieść w przestrzeni 3D. Do takich mebli zalicza się krzesła, stoły czy wazony.</a:t>
+            </a:r>
           </a:p>
         </p:txBody>
       </p:sp>
@@ -3974,65 +3887,27 @@
         <p:spPr>
           <a:xfrm>
             <a:off x="143434" y="1362637"/>
-            <a:ext cx="11905129" cy="5307104"/>
+            <a:ext cx="11071413" cy="5307104"/>
           </a:xfrm>
         </p:spPr>
         <p:txBody>
-          <a:bodyPr/>
+          <a:bodyPr>
+            <a:normAutofit/>
+          </a:bodyPr>
           <a:lstStyle/>
           <a:p>
-            <a:pPr marL="0" indent="0">
-              <a:buNone/>
-            </a:pPr>
-            <a:endParaRPr lang="pl-PL" dirty="0"/>
-          </a:p>
-          <a:p>
-            <a:pPr marL="0" indent="0">
-              <a:buNone/>
-            </a:pPr>
-            <a:endParaRPr lang="pl-PL" dirty="0"/>
-          </a:p>
-          <a:p>
-            <a:pPr marL="0" indent="0">
-              <a:buNone/>
-            </a:pPr>
-            <a:endParaRPr lang="pl-PL" dirty="0"/>
-          </a:p>
-          <a:p>
-            <a:pPr marL="0" indent="0">
-              <a:buNone/>
-            </a:pPr>
-            <a:endParaRPr lang="pl-PL" dirty="0"/>
-          </a:p>
-          <a:p>
-            <a:pPr marL="0" indent="0">
-              <a:buNone/>
-            </a:pPr>
-            <a:endParaRPr lang="pl-PL" dirty="0"/>
-          </a:p>
-          <a:p>
-            <a:pPr marL="0" indent="0">
-              <a:buNone/>
-            </a:pPr>
-            <a:endParaRPr lang="pl-PL" dirty="0"/>
-          </a:p>
-          <a:p>
-            <a:pPr marL="0" indent="0">
-              <a:buNone/>
-            </a:pPr>
-            <a:endParaRPr lang="pl-PL" dirty="0"/>
-          </a:p>
-          <a:p>
-            <a:pPr marL="0" indent="0">
-              <a:buNone/>
-            </a:pPr>
-            <a:endParaRPr lang="pl-PL" dirty="0"/>
-          </a:p>
-          <a:p>
-            <a:pPr marL="0" indent="0">
-              <a:buNone/>
-            </a:pPr>
-            <a:endParaRPr lang="pl-PL" dirty="0"/>
+            <a:pPr marL="0" indent="0" algn="just">
+              <a:buNone/>
+            </a:pPr>
+            <a:r>
+              <a:rPr lang="pl-PL" sz="1600" dirty="0"/>
+              <a:t>Użytkownik może wejść w interakcje ze stworzonymi obiektami. Oczywistymi sposobami interakcji jest podnoszenie przedmiotów oraz przesuwanie ich przy pomocy rąk, czy całego ciała. Jednakże ważnym elementem interakcji jest możliwość zamrażania i usuwania przedmiotów. Wykonanie tych czynności odbywa się poprzez zrobienie odpowiedniego gestu rękoma i kliknięcia odpowiedniego przycisku na kontrolerze ruchowym. Lewa ręka służy do zamrażania przedmiotów, a prawa do usuwania. Dla ułatwienia korzystania z tej funkcjonalności to podczas zrobienia odpowiedniego gestu uruchamia się laser </a:t>
+            </a:r>
+            <a:r>
+              <a:rPr lang="pl-PL" sz="1600"/>
+              <a:t>ułatwiający celowanie.</a:t>
+            </a:r>
+            <a:endParaRPr lang="pl-PL" sz="1600" dirty="0"/>
           </a:p>
         </p:txBody>
       </p:sp>
@@ -4209,158 +4084,6 @@
         <p:cNvPr id="1" name="">
           <a:extLst>
             <a:ext uri="{FF2B5EF4-FFF2-40B4-BE49-F238E27FC236}">
-              <a16:creationId xmlns:a16="http://schemas.microsoft.com/office/drawing/2014/main" id="{4766F590-C65D-C1CF-1DD6-56EF3BE64AC5}"/>
-            </a:ext>
-          </a:extLst>
-        </p:cNvPr>
-        <p:cNvGrpSpPr/>
-        <p:nvPr/>
-      </p:nvGrpSpPr>
-      <p:grpSpPr>
-        <a:xfrm>
-          <a:off x="0" y="0"/>
-          <a:ext cx="0" cy="0"/>
-          <a:chOff x="0" y="0"/>
-          <a:chExt cx="0" cy="0"/>
-        </a:xfrm>
-      </p:grpSpPr>
-      <p:sp>
-        <p:nvSpPr>
-          <p:cNvPr id="2" name="Tytuł 1">
-            <a:extLst>
-              <a:ext uri="{FF2B5EF4-FFF2-40B4-BE49-F238E27FC236}">
-                <a16:creationId xmlns:a16="http://schemas.microsoft.com/office/drawing/2014/main" id="{5FBB3207-A47E-9EE6-D2AA-6A55D22BDE97}"/>
-              </a:ext>
-            </a:extLst>
-          </p:cNvPr>
-          <p:cNvSpPr>
-            <a:spLocks noGrp="1"/>
-          </p:cNvSpPr>
-          <p:nvPr>
-            <p:ph type="title"/>
-          </p:nvPr>
-        </p:nvSpPr>
-        <p:spPr>
-          <a:xfrm>
-            <a:off x="143435" y="367554"/>
-            <a:ext cx="11905130" cy="995082"/>
-          </a:xfrm>
-        </p:spPr>
-        <p:txBody>
-          <a:bodyPr>
-            <a:normAutofit/>
-          </a:bodyPr>
-          <a:lstStyle/>
-          <a:p>
-            <a:r>
-              <a:rPr lang="pl-PL" dirty="0"/>
-              <a:t>Zmiana wyglądu i koloru ścian</a:t>
-            </a:r>
-          </a:p>
-        </p:txBody>
-      </p:sp>
-      <p:sp>
-        <p:nvSpPr>
-          <p:cNvPr id="3" name="Symbol zastępczy zawartości 2">
-            <a:extLst>
-              <a:ext uri="{FF2B5EF4-FFF2-40B4-BE49-F238E27FC236}">
-                <a16:creationId xmlns:a16="http://schemas.microsoft.com/office/drawing/2014/main" id="{1BD73DA4-AF9A-9B28-B2A4-C3B900191593}"/>
-              </a:ext>
-            </a:extLst>
-          </p:cNvPr>
-          <p:cNvSpPr>
-            <a:spLocks noGrp="1"/>
-          </p:cNvSpPr>
-          <p:nvPr>
-            <p:ph idx="1"/>
-          </p:nvPr>
-        </p:nvSpPr>
-        <p:spPr>
-          <a:xfrm>
-            <a:off x="143434" y="1362637"/>
-            <a:ext cx="11905129" cy="5307104"/>
-          </a:xfrm>
-        </p:spPr>
-        <p:txBody>
-          <a:bodyPr/>
-          <a:lstStyle/>
-          <a:p>
-            <a:pPr marL="0" indent="0">
-              <a:buNone/>
-            </a:pPr>
-            <a:endParaRPr lang="pl-PL" dirty="0"/>
-          </a:p>
-          <a:p>
-            <a:pPr marL="0" indent="0">
-              <a:buNone/>
-            </a:pPr>
-            <a:endParaRPr lang="pl-PL" dirty="0"/>
-          </a:p>
-          <a:p>
-            <a:pPr marL="0" indent="0">
-              <a:buNone/>
-            </a:pPr>
-            <a:endParaRPr lang="pl-PL" dirty="0"/>
-          </a:p>
-          <a:p>
-            <a:pPr marL="0" indent="0">
-              <a:buNone/>
-            </a:pPr>
-            <a:endParaRPr lang="pl-PL" dirty="0"/>
-          </a:p>
-          <a:p>
-            <a:pPr marL="0" indent="0">
-              <a:buNone/>
-            </a:pPr>
-            <a:endParaRPr lang="pl-PL" dirty="0"/>
-          </a:p>
-          <a:p>
-            <a:pPr marL="0" indent="0">
-              <a:buNone/>
-            </a:pPr>
-            <a:endParaRPr lang="pl-PL" dirty="0"/>
-          </a:p>
-          <a:p>
-            <a:pPr marL="0" indent="0">
-              <a:buNone/>
-            </a:pPr>
-            <a:endParaRPr lang="pl-PL" dirty="0"/>
-          </a:p>
-          <a:p>
-            <a:pPr marL="0" indent="0">
-              <a:buNone/>
-            </a:pPr>
-            <a:endParaRPr lang="pl-PL" dirty="0"/>
-          </a:p>
-          <a:p>
-            <a:pPr marL="0" indent="0">
-              <a:buNone/>
-            </a:pPr>
-            <a:endParaRPr lang="pl-PL" dirty="0"/>
-          </a:p>
-        </p:txBody>
-      </p:sp>
-    </p:spTree>
-    <p:extLst>
-      <p:ext uri="{BB962C8B-B14F-4D97-AF65-F5344CB8AC3E}">
-        <p14:creationId xmlns:p14="http://schemas.microsoft.com/office/powerpoint/2010/main" val="842650080"/>
-      </p:ext>
-    </p:extLst>
-  </p:cSld>
-  <p:clrMapOvr>
-    <a:masterClrMapping/>
-  </p:clrMapOvr>
-</p:sld>
-</file>
-
-<file path=ppt/slides/slide15.xml><?xml version="1.0" encoding="utf-8"?>
-<p:sld xmlns:a="http://schemas.openxmlformats.org/drawingml/2006/main" xmlns:r="http://schemas.openxmlformats.org/officeDocument/2006/relationships" xmlns:p="http://schemas.openxmlformats.org/presentationml/2006/main">
-  <p:cSld>
-    <p:spTree>
-      <p:nvGrpSpPr>
-        <p:cNvPr id="1" name="">
-          <a:extLst>
-            <a:ext uri="{FF2B5EF4-FFF2-40B4-BE49-F238E27FC236}">
               <a16:creationId xmlns:a16="http://schemas.microsoft.com/office/drawing/2014/main" id="{04B51DDD-1597-6C38-166B-09205BA567F4}"/>
             </a:ext>
           </a:extLst>
@@ -4505,7 +4228,7 @@
 </p:sld>
 </file>
 
-<file path=ppt/slides/slide16.xml><?xml version="1.0" encoding="utf-8"?>
+<file path=ppt/slides/slide15.xml><?xml version="1.0" encoding="utf-8"?>
 <p:sld xmlns:a="http://schemas.openxmlformats.org/drawingml/2006/main" xmlns:r="http://schemas.openxmlformats.org/officeDocument/2006/relationships" xmlns:p="http://schemas.openxmlformats.org/presentationml/2006/main">
   <p:cSld>
     <p:spTree>
@@ -4657,7 +4380,7 @@
 </p:sld>
 </file>
 
-<file path=ppt/slides/slide17.xml><?xml version="1.0" encoding="utf-8"?>
+<file path=ppt/slides/slide16.xml><?xml version="1.0" encoding="utf-8"?>
 <p:sld xmlns:a="http://schemas.openxmlformats.org/drawingml/2006/main" xmlns:r="http://schemas.openxmlformats.org/officeDocument/2006/relationships" xmlns:p="http://schemas.openxmlformats.org/presentationml/2006/main">
   <p:cSld>
     <p:spTree>
@@ -8422,65 +8145,22 @@
         <p:spPr>
           <a:xfrm>
             <a:off x="143434" y="1362637"/>
-            <a:ext cx="11905129" cy="5307104"/>
+            <a:ext cx="11098307" cy="5307104"/>
           </a:xfrm>
         </p:spPr>
         <p:txBody>
-          <a:bodyPr/>
+          <a:bodyPr>
+            <a:noAutofit/>
+          </a:bodyPr>
           <a:lstStyle/>
           <a:p>
-            <a:pPr marL="0" indent="0">
-              <a:buNone/>
-            </a:pPr>
-            <a:endParaRPr lang="pl-PL" dirty="0"/>
-          </a:p>
-          <a:p>
-            <a:pPr marL="0" indent="0">
-              <a:buNone/>
-            </a:pPr>
-            <a:endParaRPr lang="pl-PL" dirty="0"/>
-          </a:p>
-          <a:p>
-            <a:pPr marL="0" indent="0">
-              <a:buNone/>
-            </a:pPr>
-            <a:endParaRPr lang="pl-PL" dirty="0"/>
-          </a:p>
-          <a:p>
-            <a:pPr marL="0" indent="0">
-              <a:buNone/>
-            </a:pPr>
-            <a:endParaRPr lang="pl-PL" dirty="0"/>
-          </a:p>
-          <a:p>
-            <a:pPr marL="0" indent="0">
-              <a:buNone/>
-            </a:pPr>
-            <a:endParaRPr lang="pl-PL" dirty="0"/>
-          </a:p>
-          <a:p>
-            <a:pPr marL="0" indent="0">
-              <a:buNone/>
-            </a:pPr>
-            <a:endParaRPr lang="pl-PL" dirty="0"/>
-          </a:p>
-          <a:p>
-            <a:pPr marL="0" indent="0">
-              <a:buNone/>
-            </a:pPr>
-            <a:endParaRPr lang="pl-PL" dirty="0"/>
-          </a:p>
-          <a:p>
-            <a:pPr marL="0" indent="0">
-              <a:buNone/>
-            </a:pPr>
-            <a:endParaRPr lang="pl-PL" dirty="0"/>
-          </a:p>
-          <a:p>
-            <a:pPr marL="0" indent="0">
-              <a:buNone/>
-            </a:pPr>
-            <a:endParaRPr lang="pl-PL" dirty="0"/>
+            <a:pPr marL="0" indent="0" algn="just">
+              <a:buNone/>
+            </a:pPr>
+            <a:r>
+              <a:rPr lang="pl-PL" sz="1600" dirty="0"/>
+              <a:t>Ta funkcjonalność pozwala na utworzenie pustego pomieszczenia o wymiarach podanych przez użytkownika. Dlatego od użytkownika jest wymagana znajomość wymiarów pomieszczenia jakie chce zaprojektować. Musi znać długość, szerokość oraz wysokość pokoju. Użytkownik podaje informacje poprzez ekran dotykowy. Po akceptacji wymiarów jest on przenoszony do gotowego pomieszczenia. Generacja jest oparta o dostosowanie skali oraz pozycji ścian już umieszczony na mapie.</a:t>
+            </a:r>
           </a:p>
         </p:txBody>
       </p:sp>

--- a/PrezentacjaAndrzejParuch.pptx
+++ b/PrezentacjaAndrzejParuch.pptx
@@ -295,7 +295,7 @@
           <a:p>
             <a:fld id="{CBBFB598-B412-4BAA-8D00-58612E105D61}" type="datetimeFigureOut">
               <a:rPr lang="pl-PL" smtClean="0"/>
-              <a:t>8.12.2025</a:t>
+              <a:t>9.12.2025</a:t>
             </a:fld>
             <a:endParaRPr lang="pl-PL"/>
           </a:p>
@@ -523,7 +523,7 @@
           <a:p>
             <a:fld id="{CBBFB598-B412-4BAA-8D00-58612E105D61}" type="datetimeFigureOut">
               <a:rPr lang="pl-PL" smtClean="0"/>
-              <a:t>8.12.2025</a:t>
+              <a:t>9.12.2025</a:t>
             </a:fld>
             <a:endParaRPr lang="pl-PL"/>
           </a:p>
@@ -703,7 +703,7 @@
           <a:p>
             <a:fld id="{CBBFB598-B412-4BAA-8D00-58612E105D61}" type="datetimeFigureOut">
               <a:rPr lang="pl-PL" smtClean="0"/>
-              <a:t>8.12.2025</a:t>
+              <a:t>9.12.2025</a:t>
             </a:fld>
             <a:endParaRPr lang="pl-PL"/>
           </a:p>
@@ -873,7 +873,7 @@
           <a:p>
             <a:fld id="{CBBFB598-B412-4BAA-8D00-58612E105D61}" type="datetimeFigureOut">
               <a:rPr lang="pl-PL" smtClean="0"/>
-              <a:t>8.12.2025</a:t>
+              <a:t>9.12.2025</a:t>
             </a:fld>
             <a:endParaRPr lang="pl-PL"/>
           </a:p>
@@ -1127,7 +1127,7 @@
           <a:p>
             <a:fld id="{CBBFB598-B412-4BAA-8D00-58612E105D61}" type="datetimeFigureOut">
               <a:rPr lang="pl-PL" smtClean="0"/>
-              <a:t>8.12.2025</a:t>
+              <a:t>9.12.2025</a:t>
             </a:fld>
             <a:endParaRPr lang="pl-PL"/>
           </a:p>
@@ -1453,7 +1453,7 @@
           <a:p>
             <a:fld id="{CBBFB598-B412-4BAA-8D00-58612E105D61}" type="datetimeFigureOut">
               <a:rPr lang="pl-PL" smtClean="0"/>
-              <a:t>8.12.2025</a:t>
+              <a:t>9.12.2025</a:t>
             </a:fld>
             <a:endParaRPr lang="pl-PL"/>
           </a:p>
@@ -1904,7 +1904,7 @@
           <a:p>
             <a:fld id="{CBBFB598-B412-4BAA-8D00-58612E105D61}" type="datetimeFigureOut">
               <a:rPr lang="pl-PL" smtClean="0"/>
-              <a:t>8.12.2025</a:t>
+              <a:t>9.12.2025</a:t>
             </a:fld>
             <a:endParaRPr lang="pl-PL"/>
           </a:p>
@@ -2022,7 +2022,7 @@
           <a:p>
             <a:fld id="{CBBFB598-B412-4BAA-8D00-58612E105D61}" type="datetimeFigureOut">
               <a:rPr lang="pl-PL" smtClean="0"/>
-              <a:t>8.12.2025</a:t>
+              <a:t>9.12.2025</a:t>
             </a:fld>
             <a:endParaRPr lang="pl-PL"/>
           </a:p>
@@ -2117,7 +2117,7 @@
           <a:p>
             <a:fld id="{CBBFB598-B412-4BAA-8D00-58612E105D61}" type="datetimeFigureOut">
               <a:rPr lang="pl-PL" smtClean="0"/>
-              <a:t>8.12.2025</a:t>
+              <a:t>9.12.2025</a:t>
             </a:fld>
             <a:endParaRPr lang="pl-PL"/>
           </a:p>
@@ -2404,7 +2404,7 @@
           <a:p>
             <a:fld id="{CBBFB598-B412-4BAA-8D00-58612E105D61}" type="datetimeFigureOut">
               <a:rPr lang="pl-PL" smtClean="0"/>
-              <a:t>8.12.2025</a:t>
+              <a:t>9.12.2025</a:t>
             </a:fld>
             <a:endParaRPr lang="pl-PL"/>
           </a:p>
@@ -2726,7 +2726,7 @@
           <a:p>
             <a:fld id="{CBBFB598-B412-4BAA-8D00-58612E105D61}" type="datetimeFigureOut">
               <a:rPr lang="pl-PL" smtClean="0"/>
-              <a:t>8.12.2025</a:t>
+              <a:t>9.12.2025</a:t>
             </a:fld>
             <a:endParaRPr lang="pl-PL"/>
           </a:p>
@@ -2980,7 +2980,7 @@
           <a:p>
             <a:fld id="{CBBFB598-B412-4BAA-8D00-58612E105D61}" type="datetimeFigureOut">
               <a:rPr lang="pl-PL" smtClean="0"/>
-              <a:t>8.12.2025</a:t>
+              <a:t>9.12.2025</a:t>
             </a:fld>
             <a:endParaRPr lang="pl-PL"/>
           </a:p>
@@ -4000,66 +4000,23 @@
         </p:nvSpPr>
         <p:spPr>
           <a:xfrm>
-            <a:off x="143434" y="1362637"/>
-            <a:ext cx="11905129" cy="5307104"/>
+            <a:off x="143435" y="1362637"/>
+            <a:ext cx="11026590" cy="5307104"/>
           </a:xfrm>
         </p:spPr>
         <p:txBody>
-          <a:bodyPr/>
+          <a:bodyPr>
+            <a:noAutofit/>
+          </a:bodyPr>
           <a:lstStyle/>
           <a:p>
-            <a:pPr marL="0" indent="0">
+            <a:pPr marL="0" indent="0" algn="just">
               <a:buNone/>
             </a:pPr>
-            <a:endParaRPr lang="pl-PL" dirty="0"/>
-          </a:p>
-          <a:p>
-            <a:pPr marL="0" indent="0">
-              <a:buNone/>
-            </a:pPr>
-            <a:endParaRPr lang="pl-PL" dirty="0"/>
-          </a:p>
-          <a:p>
-            <a:pPr marL="0" indent="0">
-              <a:buNone/>
-            </a:pPr>
-            <a:endParaRPr lang="pl-PL" dirty="0"/>
-          </a:p>
-          <a:p>
-            <a:pPr marL="0" indent="0">
-              <a:buNone/>
-            </a:pPr>
-            <a:endParaRPr lang="pl-PL" dirty="0"/>
-          </a:p>
-          <a:p>
-            <a:pPr marL="0" indent="0">
-              <a:buNone/>
-            </a:pPr>
-            <a:endParaRPr lang="pl-PL" dirty="0"/>
-          </a:p>
-          <a:p>
-            <a:pPr marL="0" indent="0">
-              <a:buNone/>
-            </a:pPr>
-            <a:endParaRPr lang="pl-PL" dirty="0"/>
-          </a:p>
-          <a:p>
-            <a:pPr marL="0" indent="0">
-              <a:buNone/>
-            </a:pPr>
-            <a:endParaRPr lang="pl-PL" dirty="0"/>
-          </a:p>
-          <a:p>
-            <a:pPr marL="0" indent="0">
-              <a:buNone/>
-            </a:pPr>
-            <a:endParaRPr lang="pl-PL" dirty="0"/>
-          </a:p>
-          <a:p>
-            <a:pPr marL="0" indent="0">
-              <a:buNone/>
-            </a:pPr>
-            <a:endParaRPr lang="pl-PL" dirty="0"/>
+            <a:r>
+              <a:rPr lang="pl-PL" sz="1600" dirty="0"/>
+              <a:t>Podczas projektowania wnętrza ważnym aspektem jest zmiana tekstur ścian oraz modyfikacja ich koloru. Zmiana koloru i wyglądu odbywa się za pośrednictwem tabletu. Użytkownik musi nakierować tablet na docelową ścianę i wybrać dowolną teksturę. Po wyborze można zmodyfikować kolor ściany modyfikując trzy wartości odpowiedzialne za barwę, saturację oraz jasność. Użytkownik może zmienić wygląd każdej ściany w dowolny sposób.</a:t>
+            </a:r>
           </a:p>
         </p:txBody>
       </p:sp>
@@ -4152,66 +4109,23 @@
         </p:nvSpPr>
         <p:spPr>
           <a:xfrm>
-            <a:off x="143434" y="1362637"/>
-            <a:ext cx="11905129" cy="5307104"/>
+            <a:off x="143435" y="1362637"/>
+            <a:ext cx="11035554" cy="5307104"/>
           </a:xfrm>
         </p:spPr>
         <p:txBody>
-          <a:bodyPr/>
+          <a:bodyPr>
+            <a:noAutofit/>
+          </a:bodyPr>
           <a:lstStyle/>
           <a:p>
-            <a:pPr marL="0" indent="0">
+            <a:pPr marL="0" indent="0" algn="just">
               <a:buNone/>
             </a:pPr>
-            <a:endParaRPr lang="pl-PL" dirty="0"/>
-          </a:p>
-          <a:p>
-            <a:pPr marL="0" indent="0">
-              <a:buNone/>
-            </a:pPr>
-            <a:endParaRPr lang="pl-PL" dirty="0"/>
-          </a:p>
-          <a:p>
-            <a:pPr marL="0" indent="0">
-              <a:buNone/>
-            </a:pPr>
-            <a:endParaRPr lang="pl-PL" dirty="0"/>
-          </a:p>
-          <a:p>
-            <a:pPr marL="0" indent="0">
-              <a:buNone/>
-            </a:pPr>
-            <a:endParaRPr lang="pl-PL" dirty="0"/>
-          </a:p>
-          <a:p>
-            <a:pPr marL="0" indent="0">
-              <a:buNone/>
-            </a:pPr>
-            <a:endParaRPr lang="pl-PL" dirty="0"/>
-          </a:p>
-          <a:p>
-            <a:pPr marL="0" indent="0">
-              <a:buNone/>
-            </a:pPr>
-            <a:endParaRPr lang="pl-PL" dirty="0"/>
-          </a:p>
-          <a:p>
-            <a:pPr marL="0" indent="0">
-              <a:buNone/>
-            </a:pPr>
-            <a:endParaRPr lang="pl-PL" dirty="0"/>
-          </a:p>
-          <a:p>
-            <a:pPr marL="0" indent="0">
-              <a:buNone/>
-            </a:pPr>
-            <a:endParaRPr lang="pl-PL" dirty="0"/>
-          </a:p>
-          <a:p>
-            <a:pPr marL="0" indent="0">
-              <a:buNone/>
-            </a:pPr>
-            <a:endParaRPr lang="pl-PL" dirty="0"/>
+            <a:r>
+              <a:rPr lang="pl-PL" sz="1600" dirty="0"/>
+              <a:t>Pojęcie obiektu stałego określa przedmioty, których pozycja w środowisku jest zależna od którejś ściany. Nie można ich swobodnie przesunąć po ich stworzeniu. Kreacja obiektu stałego polega na wycelowaniu w dowolną ścianę i utworzenie odpowiedniego obiektu stałego. Podczas procesu kreacji jest możliwa zmiana pozycji obiektu z dowolną precyzją wykorzystując siatkę. Pozycja obiektu stałego jest zależna od pozycji tabletu. To nim ustawiamy pozycję obiektu stałego.</a:t>
+            </a:r>
           </a:p>
         </p:txBody>
       </p:sp>
@@ -4304,66 +4218,23 @@
         </p:nvSpPr>
         <p:spPr>
           <a:xfrm>
-            <a:off x="143434" y="1362637"/>
-            <a:ext cx="11905129" cy="5307104"/>
+            <a:off x="143435" y="1362637"/>
+            <a:ext cx="11053484" cy="5307104"/>
           </a:xfrm>
         </p:spPr>
         <p:txBody>
-          <a:bodyPr/>
+          <a:bodyPr>
+            <a:noAutofit/>
+          </a:bodyPr>
           <a:lstStyle/>
           <a:p>
-            <a:pPr marL="0" indent="0">
+            <a:pPr marL="0" indent="0" algn="just">
               <a:buNone/>
             </a:pPr>
-            <a:endParaRPr lang="pl-PL" dirty="0"/>
-          </a:p>
-          <a:p>
-            <a:pPr marL="0" indent="0">
-              <a:buNone/>
-            </a:pPr>
-            <a:endParaRPr lang="pl-PL" dirty="0"/>
-          </a:p>
-          <a:p>
-            <a:pPr marL="0" indent="0">
-              <a:buNone/>
-            </a:pPr>
-            <a:endParaRPr lang="pl-PL" dirty="0"/>
-          </a:p>
-          <a:p>
-            <a:pPr marL="0" indent="0">
-              <a:buNone/>
-            </a:pPr>
-            <a:endParaRPr lang="pl-PL" dirty="0"/>
-          </a:p>
-          <a:p>
-            <a:pPr marL="0" indent="0">
-              <a:buNone/>
-            </a:pPr>
-            <a:endParaRPr lang="pl-PL" dirty="0"/>
-          </a:p>
-          <a:p>
-            <a:pPr marL="0" indent="0">
-              <a:buNone/>
-            </a:pPr>
-            <a:endParaRPr lang="pl-PL" dirty="0"/>
-          </a:p>
-          <a:p>
-            <a:pPr marL="0" indent="0">
-              <a:buNone/>
-            </a:pPr>
-            <a:endParaRPr lang="pl-PL" dirty="0"/>
-          </a:p>
-          <a:p>
-            <a:pPr marL="0" indent="0">
-              <a:buNone/>
-            </a:pPr>
-            <a:endParaRPr lang="pl-PL" dirty="0"/>
-          </a:p>
-          <a:p>
-            <a:pPr marL="0" indent="0">
-              <a:buNone/>
-            </a:pPr>
-            <a:endParaRPr lang="pl-PL" dirty="0"/>
+            <a:r>
+              <a:rPr lang="pl-PL" sz="1600" dirty="0"/>
+              <a:t>Dodatkowe ściany są rodzajem obiektów stałych, które umożliwiają postawienie nowej ściany w pomieszczeniu. Ta funkcjonalność nie tylko umożliwia postawienie ściany działkowej, ale również dostosować sam kształt pomieszczenia. Nie każdy pokój ma kształt idealnego prostopadłościanu, więc możliwość dodania nieregularności jest ważną funkcją. Kreacja dodatkowej ściany opiera się o ustawienie punktu startowego ściany i późniejsze dostosowanie wymiarów ściany. Po stworzeniu nowa ściana zachowuję się identycznie co wygenerowana. Można zmienić jej kolor oraz postawić na niej inne stałe obiekty. Różnica między dodatkowymi ścianami, a wygenerowanymi jest taka, że te stworzone przez użytkownika jest możliwa do usunięcia.</a:t>
+            </a:r>
           </a:p>
         </p:txBody>
       </p:sp>
@@ -4456,66 +4327,52 @@
         </p:nvSpPr>
         <p:spPr>
           <a:xfrm>
-            <a:off x="143434" y="1362637"/>
-            <a:ext cx="11905129" cy="5307104"/>
+            <a:off x="143435" y="1362637"/>
+            <a:ext cx="11035554" cy="5307104"/>
           </a:xfrm>
         </p:spPr>
         <p:txBody>
-          <a:bodyPr/>
+          <a:bodyPr>
+            <a:noAutofit/>
+          </a:bodyPr>
           <a:lstStyle/>
           <a:p>
-            <a:pPr marL="0" indent="0">
+            <a:pPr marL="0" indent="0" algn="just">
               <a:buNone/>
             </a:pPr>
-            <a:endParaRPr lang="pl-PL" dirty="0"/>
-          </a:p>
-          <a:p>
-            <a:pPr marL="0" indent="0">
-              <a:buNone/>
-            </a:pPr>
-            <a:endParaRPr lang="pl-PL" dirty="0"/>
-          </a:p>
-          <a:p>
-            <a:pPr marL="0" indent="0">
-              <a:buNone/>
-            </a:pPr>
-            <a:endParaRPr lang="pl-PL" dirty="0"/>
-          </a:p>
-          <a:p>
-            <a:pPr marL="0" indent="0">
-              <a:buNone/>
-            </a:pPr>
-            <a:endParaRPr lang="pl-PL" dirty="0"/>
-          </a:p>
-          <a:p>
-            <a:pPr marL="0" indent="0">
-              <a:buNone/>
-            </a:pPr>
-            <a:endParaRPr lang="pl-PL" dirty="0"/>
-          </a:p>
-          <a:p>
-            <a:pPr marL="0" indent="0">
-              <a:buNone/>
-            </a:pPr>
-            <a:endParaRPr lang="pl-PL" dirty="0"/>
-          </a:p>
-          <a:p>
-            <a:pPr marL="0" indent="0">
-              <a:buNone/>
-            </a:pPr>
-            <a:endParaRPr lang="pl-PL" dirty="0"/>
-          </a:p>
-          <a:p>
-            <a:pPr marL="0" indent="0">
-              <a:buNone/>
-            </a:pPr>
-            <a:endParaRPr lang="pl-PL" dirty="0"/>
-          </a:p>
-          <a:p>
-            <a:pPr marL="0" indent="0">
-              <a:buNone/>
-            </a:pPr>
-            <a:endParaRPr lang="pl-PL" dirty="0"/>
+            <a:r>
+              <a:rPr lang="pl-PL" sz="1600" dirty="0"/>
+              <a:t>W projekcie wykorzystałem silnik </a:t>
+            </a:r>
+            <a:r>
+              <a:rPr lang="pl-PL" sz="1600" dirty="0" err="1"/>
+              <a:t>Unreal</a:t>
+            </a:r>
+            <a:r>
+              <a:rPr lang="pl-PL" sz="1600" dirty="0"/>
+              <a:t> Engine 5 oraz podejście no </a:t>
+            </a:r>
+            <a:r>
+              <a:rPr lang="pl-PL" sz="1600" dirty="0" err="1"/>
+              <a:t>code</a:t>
+            </a:r>
+            <a:r>
+              <a:rPr lang="pl-PL" sz="1600" dirty="0"/>
+              <a:t>. Cały projekt został opracowany nie pisząc ani jednej linijki kodu. </a:t>
+            </a:r>
+            <a:r>
+              <a:rPr lang="pl-PL" sz="1600" dirty="0" err="1"/>
+              <a:t>Unreal</a:t>
+            </a:r>
+            <a:r>
+              <a:rPr lang="pl-PL" sz="1600" dirty="0"/>
+              <a:t> Engine 5 oferuje możliwość stworzenia aplikacji wykorzystując specjalne bloki, które umożliwiają zaprojektowanie całej logiki projektu</a:t>
+            </a:r>
+            <a:r>
+              <a:rPr lang="pl-PL" sz="1600"/>
+              <a:t>. </a:t>
+            </a:r>
+            <a:endParaRPr lang="pl-PL" sz="1600" dirty="0"/>
           </a:p>
         </p:txBody>
       </p:sp>

--- a/PrezentacjaAndrzejParuch.pptx
+++ b/PrezentacjaAndrzejParuch.pptx
@@ -21,6 +21,7 @@
     <p:sldId id="266" r:id="rId15"/>
     <p:sldId id="267" r:id="rId16"/>
     <p:sldId id="268" r:id="rId17"/>
+    <p:sldId id="274" r:id="rId18"/>
   </p:sldIdLst>
   <p:sldSz cx="12192000" cy="6858000"/>
   <p:notesSz cx="6858000" cy="9144000"/>
@@ -295,7 +296,7 @@
           <a:p>
             <a:fld id="{CBBFB598-B412-4BAA-8D00-58612E105D61}" type="datetimeFigureOut">
               <a:rPr lang="pl-PL" smtClean="0"/>
-              <a:t>9.12.2025</a:t>
+              <a:t>14.12.2025</a:t>
             </a:fld>
             <a:endParaRPr lang="pl-PL"/>
           </a:p>
@@ -523,7 +524,7 @@
           <a:p>
             <a:fld id="{CBBFB598-B412-4BAA-8D00-58612E105D61}" type="datetimeFigureOut">
               <a:rPr lang="pl-PL" smtClean="0"/>
-              <a:t>9.12.2025</a:t>
+              <a:t>14.12.2025</a:t>
             </a:fld>
             <a:endParaRPr lang="pl-PL"/>
           </a:p>
@@ -703,7 +704,7 @@
           <a:p>
             <a:fld id="{CBBFB598-B412-4BAA-8D00-58612E105D61}" type="datetimeFigureOut">
               <a:rPr lang="pl-PL" smtClean="0"/>
-              <a:t>9.12.2025</a:t>
+              <a:t>14.12.2025</a:t>
             </a:fld>
             <a:endParaRPr lang="pl-PL"/>
           </a:p>
@@ -873,7 +874,7 @@
           <a:p>
             <a:fld id="{CBBFB598-B412-4BAA-8D00-58612E105D61}" type="datetimeFigureOut">
               <a:rPr lang="pl-PL" smtClean="0"/>
-              <a:t>9.12.2025</a:t>
+              <a:t>14.12.2025</a:t>
             </a:fld>
             <a:endParaRPr lang="pl-PL"/>
           </a:p>
@@ -1127,7 +1128,7 @@
           <a:p>
             <a:fld id="{CBBFB598-B412-4BAA-8D00-58612E105D61}" type="datetimeFigureOut">
               <a:rPr lang="pl-PL" smtClean="0"/>
-              <a:t>9.12.2025</a:t>
+              <a:t>14.12.2025</a:t>
             </a:fld>
             <a:endParaRPr lang="pl-PL"/>
           </a:p>
@@ -1453,7 +1454,7 @@
           <a:p>
             <a:fld id="{CBBFB598-B412-4BAA-8D00-58612E105D61}" type="datetimeFigureOut">
               <a:rPr lang="pl-PL" smtClean="0"/>
-              <a:t>9.12.2025</a:t>
+              <a:t>14.12.2025</a:t>
             </a:fld>
             <a:endParaRPr lang="pl-PL"/>
           </a:p>
@@ -1904,7 +1905,7 @@
           <a:p>
             <a:fld id="{CBBFB598-B412-4BAA-8D00-58612E105D61}" type="datetimeFigureOut">
               <a:rPr lang="pl-PL" smtClean="0"/>
-              <a:t>9.12.2025</a:t>
+              <a:t>14.12.2025</a:t>
             </a:fld>
             <a:endParaRPr lang="pl-PL"/>
           </a:p>
@@ -2022,7 +2023,7 @@
           <a:p>
             <a:fld id="{CBBFB598-B412-4BAA-8D00-58612E105D61}" type="datetimeFigureOut">
               <a:rPr lang="pl-PL" smtClean="0"/>
-              <a:t>9.12.2025</a:t>
+              <a:t>14.12.2025</a:t>
             </a:fld>
             <a:endParaRPr lang="pl-PL"/>
           </a:p>
@@ -2117,7 +2118,7 @@
           <a:p>
             <a:fld id="{CBBFB598-B412-4BAA-8D00-58612E105D61}" type="datetimeFigureOut">
               <a:rPr lang="pl-PL" smtClean="0"/>
-              <a:t>9.12.2025</a:t>
+              <a:t>14.12.2025</a:t>
             </a:fld>
             <a:endParaRPr lang="pl-PL"/>
           </a:p>
@@ -2404,7 +2405,7 @@
           <a:p>
             <a:fld id="{CBBFB598-B412-4BAA-8D00-58612E105D61}" type="datetimeFigureOut">
               <a:rPr lang="pl-PL" smtClean="0"/>
-              <a:t>9.12.2025</a:t>
+              <a:t>14.12.2025</a:t>
             </a:fld>
             <a:endParaRPr lang="pl-PL"/>
           </a:p>
@@ -2726,7 +2727,7 @@
           <a:p>
             <a:fld id="{CBBFB598-B412-4BAA-8D00-58612E105D61}" type="datetimeFigureOut">
               <a:rPr lang="pl-PL" smtClean="0"/>
-              <a:t>9.12.2025</a:t>
+              <a:t>14.12.2025</a:t>
             </a:fld>
             <a:endParaRPr lang="pl-PL"/>
           </a:p>
@@ -2980,7 +2981,7 @@
           <a:p>
             <a:fld id="{CBBFB598-B412-4BAA-8D00-58612E105D61}" type="datetimeFigureOut">
               <a:rPr lang="pl-PL" smtClean="0"/>
-              <a:t>9.12.2025</a:t>
+              <a:t>14.12.2025</a:t>
             </a:fld>
             <a:endParaRPr lang="pl-PL"/>
           </a:p>
@@ -4358,28 +4359,232 @@
             </a:r>
             <a:r>
               <a:rPr lang="pl-PL" sz="1600" dirty="0"/>
-              <a:t>. Cały projekt został opracowany nie pisząc ani jednej linijki kodu. </a:t>
-            </a:r>
+              <a:t>. Cały projekt został opracowany nie pisząc ani jednej linijki kodu.</a:t>
+            </a:r>
+          </a:p>
+          <a:p>
+            <a:pPr marL="0" indent="0" algn="just">
+              <a:buNone/>
+            </a:pPr>
             <a:r>
               <a:rPr lang="pl-PL" sz="1600" dirty="0" err="1"/>
               <a:t>Unreal</a:t>
             </a:r>
             <a:r>
               <a:rPr lang="pl-PL" sz="1600" dirty="0"/>
-              <a:t> Engine 5 oferuje możliwość stworzenia aplikacji wykorzystując specjalne bloki, które umożliwiają zaprojektowanie całej logiki projektu</a:t>
-            </a:r>
-            <a:r>
-              <a:rPr lang="pl-PL" sz="1600"/>
-              <a:t>. </a:t>
-            </a:r>
-            <a:endParaRPr lang="pl-PL" sz="1600" dirty="0"/>
-          </a:p>
-        </p:txBody>
-      </p:sp>
+              <a:t> Engine 5 -  silnik gier komputerowych, wyprodukowany przez przedsiębiorstwo </a:t>
+            </a:r>
+            <a:r>
+              <a:rPr lang="pl-PL" sz="1600" dirty="0" err="1"/>
+              <a:t>Epic</a:t>
+            </a:r>
+            <a:r>
+              <a:rPr lang="pl-PL" sz="1600" dirty="0"/>
+              <a:t> Games. Pierwotnie wykorzystywany w strzelankach pierwszoosobowych, z czasem zaczął być wykorzystywany również w innych gatunkach gier komputerowych.</a:t>
+            </a:r>
+          </a:p>
+          <a:p>
+            <a:pPr marL="0" indent="0" algn="just">
+              <a:buNone/>
+            </a:pPr>
+            <a:r>
+              <a:rPr lang="pl-PL" sz="1600" dirty="0"/>
+              <a:t>Podejście No </a:t>
+            </a:r>
+            <a:r>
+              <a:rPr lang="pl-PL" sz="1600" dirty="0" err="1"/>
+              <a:t>Code</a:t>
+            </a:r>
+            <a:r>
+              <a:rPr lang="pl-PL" sz="1600" dirty="0"/>
+              <a:t> -  podejście do tworzenia aplikacji i stron internetowych za pomocą wizualnych narzędzi i gotowych komponentów, co pozwala osobom bez wiedzy programistycznej na budowanie funkcjonalnych rozwiązań, znacznie przyspieszając proces i obniżając koszty, w porównaniu do tradycyjnego kodowania.</a:t>
+            </a:r>
+          </a:p>
+          <a:p>
+            <a:pPr marL="0" indent="0" algn="just">
+              <a:buNone/>
+            </a:pPr>
+            <a:r>
+              <a:rPr lang="pl-PL" sz="1600" dirty="0"/>
+              <a:t>					</a:t>
+            </a:r>
+            <a:r>
+              <a:rPr lang="pl-PL" sz="1600" dirty="0" err="1"/>
+              <a:t>Unreal</a:t>
+            </a:r>
+            <a:r>
+              <a:rPr lang="pl-PL" sz="1600" dirty="0"/>
+              <a:t> Engine 5</a:t>
+            </a:r>
+          </a:p>
+          <a:p>
+            <a:pPr marL="0" indent="0" algn="just">
+              <a:buNone/>
+            </a:pPr>
+            <a:r>
+              <a:rPr lang="pl-PL" sz="1600" dirty="0"/>
+              <a:t>					</a:t>
+            </a:r>
+          </a:p>
+        </p:txBody>
+      </p:sp>
+      <p:pic>
+        <p:nvPicPr>
+          <p:cNvPr id="1026" name="Picture 2" descr="Unreal Engine 5.7 Documentation | Unreal Engine 5.7 Documentation | Epic  Developer Community">
+            <a:extLst>
+              <a:ext uri="{FF2B5EF4-FFF2-40B4-BE49-F238E27FC236}">
+                <a16:creationId xmlns:a16="http://schemas.microsoft.com/office/drawing/2014/main" id="{5BBCD101-1D25-58D3-2A06-2A2C60D9584C}"/>
+              </a:ext>
+            </a:extLst>
+          </p:cNvPr>
+          <p:cNvPicPr>
+            <a:picLocks noChangeAspect="1" noChangeArrowheads="1"/>
+          </p:cNvPicPr>
+          <p:nvPr/>
+        </p:nvPicPr>
+        <p:blipFill>
+          <a:blip r:embed="rId2">
+            <a:extLst>
+              <a:ext uri="{28A0092B-C50C-407E-A947-70E740481C1C}">
+                <a14:useLocalDpi xmlns:a14="http://schemas.microsoft.com/office/drawing/2010/main" val="0"/>
+              </a:ext>
+            </a:extLst>
+          </a:blip>
+          <a:srcRect/>
+          <a:stretch>
+            <a:fillRect/>
+          </a:stretch>
+        </p:blipFill>
+        <p:spPr bwMode="auto">
+          <a:xfrm>
+            <a:off x="242047" y="3895927"/>
+            <a:ext cx="4401671" cy="2477978"/>
+          </a:xfrm>
+          <a:prstGeom prst="rect">
+            <a:avLst/>
+          </a:prstGeom>
+          <a:noFill/>
+          <a:extLst>
+            <a:ext uri="{909E8E84-426E-40DD-AFC4-6F175D3DCCD1}">
+              <a14:hiddenFill xmlns:a14="http://schemas.microsoft.com/office/drawing/2010/main">
+                <a:solidFill>
+                  <a:srgbClr val="FFFFFF"/>
+                </a:solidFill>
+              </a14:hiddenFill>
+            </a:ext>
+          </a:extLst>
+        </p:spPr>
+      </p:pic>
     </p:spTree>
     <p:extLst>
       <p:ext uri="{BB962C8B-B14F-4D97-AF65-F5344CB8AC3E}">
         <p14:creationId xmlns:p14="http://schemas.microsoft.com/office/powerpoint/2010/main" val="1634903737"/>
+      </p:ext>
+    </p:extLst>
+  </p:cSld>
+  <p:clrMapOvr>
+    <a:masterClrMapping/>
+  </p:clrMapOvr>
+</p:sld>
+</file>
+
+<file path=ppt/slides/slide17.xml><?xml version="1.0" encoding="utf-8"?>
+<p:sld xmlns:a="http://schemas.openxmlformats.org/drawingml/2006/main" xmlns:r="http://schemas.openxmlformats.org/officeDocument/2006/relationships" xmlns:p="http://schemas.openxmlformats.org/presentationml/2006/main">
+  <p:cSld>
+    <p:spTree>
+      <p:nvGrpSpPr>
+        <p:cNvPr id="1" name="">
+          <a:extLst>
+            <a:ext uri="{FF2B5EF4-FFF2-40B4-BE49-F238E27FC236}">
+              <a16:creationId xmlns:a16="http://schemas.microsoft.com/office/drawing/2014/main" id="{5606CA9F-0519-77AF-E326-9118567BA895}"/>
+            </a:ext>
+          </a:extLst>
+        </p:cNvPr>
+        <p:cNvGrpSpPr/>
+        <p:nvPr/>
+      </p:nvGrpSpPr>
+      <p:grpSpPr>
+        <a:xfrm>
+          <a:off x="0" y="0"/>
+          <a:ext cx="0" cy="0"/>
+          <a:chOff x="0" y="0"/>
+          <a:chExt cx="0" cy="0"/>
+        </a:xfrm>
+      </p:grpSpPr>
+      <p:sp>
+        <p:nvSpPr>
+          <p:cNvPr id="2" name="Tytuł 1">
+            <a:extLst>
+              <a:ext uri="{FF2B5EF4-FFF2-40B4-BE49-F238E27FC236}">
+                <a16:creationId xmlns:a16="http://schemas.microsoft.com/office/drawing/2014/main" id="{0358A936-4B79-4ECA-F695-500C0D5ECFBE}"/>
+              </a:ext>
+            </a:extLst>
+          </p:cNvPr>
+          <p:cNvSpPr>
+            <a:spLocks noGrp="1"/>
+          </p:cNvSpPr>
+          <p:nvPr>
+            <p:ph type="title"/>
+          </p:nvPr>
+        </p:nvSpPr>
+        <p:spPr>
+          <a:xfrm>
+            <a:off x="143435" y="367553"/>
+            <a:ext cx="11143130" cy="3254187"/>
+          </a:xfrm>
+        </p:spPr>
+        <p:txBody>
+          <a:bodyPr>
+            <a:normAutofit/>
+          </a:bodyPr>
+          <a:lstStyle/>
+          <a:p>
+            <a:r>
+              <a:rPr lang="pl-PL" dirty="0"/>
+              <a:t>DZIĘKUJE ZA UWAGĘ</a:t>
+            </a:r>
+          </a:p>
+        </p:txBody>
+      </p:sp>
+      <p:sp>
+        <p:nvSpPr>
+          <p:cNvPr id="3" name="Symbol zastępczy zawartości 2">
+            <a:extLst>
+              <a:ext uri="{FF2B5EF4-FFF2-40B4-BE49-F238E27FC236}">
+                <a16:creationId xmlns:a16="http://schemas.microsoft.com/office/drawing/2014/main" id="{EF28B5D7-064A-EA1B-F646-938801FEE031}"/>
+              </a:ext>
+            </a:extLst>
+          </p:cNvPr>
+          <p:cNvSpPr>
+            <a:spLocks noGrp="1"/>
+          </p:cNvSpPr>
+          <p:nvPr>
+            <p:ph idx="1"/>
+          </p:nvPr>
+        </p:nvSpPr>
+        <p:spPr>
+          <a:xfrm>
+            <a:off x="143435" y="1362637"/>
+            <a:ext cx="11035554" cy="5307104"/>
+          </a:xfrm>
+        </p:spPr>
+        <p:txBody>
+          <a:bodyPr>
+            <a:noAutofit/>
+          </a:bodyPr>
+          <a:lstStyle/>
+          <a:p>
+            <a:pPr marL="0" indent="0" algn="just">
+              <a:buNone/>
+            </a:pPr>
+            <a:endParaRPr lang="pl-PL" sz="1600" dirty="0"/>
+          </a:p>
+        </p:txBody>
+      </p:sp>
+    </p:spTree>
+    <p:extLst>
+      <p:ext uri="{BB962C8B-B14F-4D97-AF65-F5344CB8AC3E}">
+        <p14:creationId xmlns:p14="http://schemas.microsoft.com/office/powerpoint/2010/main" val="1616643589"/>
       </p:ext>
     </p:extLst>
   </p:cSld>
